--- a/vi/files/slides/Session_1_VN.pptx
+++ b/vi/files/slides/Session_1_VN.pptx
@@ -3059,7 +3059,7 @@
           <a:p>
             <a:r>
               <a:rPr lang="en-US" sz="1400" b="0" dirty="0"/>
-              <a:t>Cuối tuần 1-2 là Cấp độ 1 (hiểu và thiết kế); Cuối tuần 3-4 là Cấp độ 2 (phân tích và công bố) - trong cùng một khóa học.</a:t>
+              <a:t>Toàn bộ khóa học này là Cấp độ 1, bao gồm mọi bước từ câu hỏi đến công bố: Cuối tuần 1-2 xây dựng hiểu biết và kỹ năng thiết kế; Cuối tuần 3-4 áp dụng vào dữ liệu, viết bài và công bố.</a:t>
             </a:r>
           </a:p>
           <a:p>
@@ -4220,13 +4220,13 @@
           <a:p>
             <a:r>
               <a:rPr lang="en-US" sz="1400" b="0" dirty="0"/>
-              <a:t>Khái niệm Cấp độ 1 đi trước: đọc bài báo có phản biện, đặt câu hỏi tốt, thiết kế nghiên cứu chặt chẽ.</a:t>
+              <a:t>Khóa học này (Cấp độ 1) đưa bạn từ câu hỏi lâm sàng đến bài báo được công bố. Cấp độ 2 là khóa thực hành R cho những ai muốn tự phân tích; Cấp độ 3 gồm các phương pháp nâng cao, chuyên sâu.</a:t>
             </a:r>
           </a:p>
           <a:p>
             <a:r>
               <a:rPr lang="en-US" sz="1400" b="0" dirty="0"/>
-              <a:t>Cấp độ 2 áp dụng các khái niệm đó trên một bộ dữ liệu thực tế gồm 600 bệnh nhân ICU: mô tả, phân tích và viết thành bài báo. Giảng viên chạy phần mềm; các bạn đọc và diễn giải kết quả.</a:t>
+              <a:t>Trong Cấp độ 1, chúng ta dùng một bộ dữ liệu thực tế gồm 620 bệnh nhân ICU: mô tả, phân tích và viết thành bài báo. Giảng viên chạy phần mềm; các bạn đọc và diễn giải kết quả.</a:t>
             </a:r>
           </a:p>
           <a:p>
@@ -9470,7 +9470,7 @@
                 <a:latin typeface="Segoe UI"/>
                 <a:cs typeface="Segoe UI"/>
               </a:rPr>
-              <a:t>Từ câu hỏi lâm sàng đến công bố</a:t>
+              <a:t>Cấp độ 1  -  Từ câu hỏi lâm sàng đến công bố</a:t>
             </a:r>
           </a:p>
           <a:p>
@@ -22603,7 +22603,7 @@
                 <a:latin typeface="Segoe UI"/>
                 <a:cs typeface="Segoe UI"/>
               </a:rPr>
-              <a:t>Trước hết hiểu và thiết kế nghiên cứu - sau đó phân tích một bộ dữ liệu và viết bài báo.</a:t>
+              <a:t>Cấp độ 1 là khóa học này; Cấp độ 2 là thực hành phân tích bằng R; Cấp độ 3 là phương pháp nâng cao.</a:t>
             </a:r>
           </a:p>
         </p:txBody>

--- a/vi/files/slides/Session_1_VN.pptx
+++ b/vi/files/slides/Session_1_VN.pptx
@@ -755,7 +755,7 @@
           <a:p>
             <a:r>
               <a:rPr lang="en-US" sz="1400" b="0" dirty="0"/>
-              <a:t>Thông điệp chính: trong bốn cuối tuần, chúng ta cùng đi hết con đường nghiên cứu - từ một câu hỏi tại giường bệnh đến một bài báo sẵn sàng để nộp.</a:t>
+              <a:t>Thông điệp chính: trong tám thứ Bảy, mỗi tuần một buổi, chúng ta cùng đi hết con đường nghiên cứu - từ một câu hỏi tại giường bệnh đến một bài báo sẵn sàng để nộp.</a:t>
             </a:r>
           </a:p>
           <a:p>
@@ -1040,7 +1040,7 @@
           <a:p>
             <a:r>
               <a:rPr lang="en-US" sz="1400" b="0" dirty="0"/>
-              <a:t>Ý chính: hôm nay chỉ có một việc - mỗi nhóm ra về với MỘT câu hỏi nghiên cứu rõ ràng, trả lời được, cùng mục đích và mục tiêu. Ngày mai (Buổi 2) ta tìm và đọc y văn cho câu hỏi đó.</a:t>
+              <a:t>Ý chính: hôm nay chỉ có một việc - mỗi nhóm ra về với MỘT câu hỏi nghiên cứu rõ ràng, trả lời được, cùng mục đích và mục tiêu. Thứ Bảy tuần sau (Buổi 2) ta tìm và đọc y văn cho câu hỏi đó.</a:t>
             </a:r>
           </a:p>
           <a:p>
@@ -1700,7 +1700,7 @@
           <a:p>
             <a:r>
               <a:rPr lang="en-US" sz="1400" b="0" dirty="0"/>
-              <a:t>Cuối tuần này = vấn đề lâm sàng và câu hỏi nghiên cứu (hôm nay), tìm y văn (ngày mai) - ba ô màu xanh mòng két phía trên bên phải.</a:t>
+              <a:t>Tuần 1-2 = vấn đề lâm sàng và câu hỏi nghiên cứu (hôm nay), tìm y văn (thứ Bảy tuần sau) - ba ô màu xanh mòng két phía trên bên phải.</a:t>
             </a:r>
           </a:p>
           <a:p>
@@ -2522,7 +2522,7 @@
           <a:p>
             <a:r>
               <a:rPr lang="en-US" sz="1400" b="0" dirty="0"/>
-              <a:t>Mười một trạm từ câu hỏi đến tác động. Màu sắc cho biết cuối tuần nào của khóa học dạy trạm đó.</a:t>
+              <a:t>Mười một trạm từ câu hỏi đến tác động. Màu sắc cho biết những tuần nào của khóa học dạy trạm đó.</a:t>
             </a:r>
           </a:p>
           <a:p>
@@ -2843,7 +2843,7 @@
           <a:p>
             <a:r>
               <a:rPr lang="en-US" sz="1400" b="0" dirty="0"/>
-              <a:t>Ý chính: 'cách biết' chính là tìm y văn - đó là nội dung Buổi 2 ngày mai.</a:t>
+              <a:t>Ý chính: 'cách biết' chính là tìm y văn - đó là nội dung Buổi 2 thứ Bảy tuần sau.</a:t>
             </a:r>
           </a:p>
           <a:p>
@@ -3053,13 +3053,13 @@
           <a:p>
             <a:r>
               <a:rPr lang="en-US" sz="1400" b="0" dirty="0"/>
-              <a:t>Đi dọc con đường: Cuối tuần 1 là câu hỏi và bằng chứng; Cuối tuần 2 thiết kế và sai lệch; Cuối tuần 3 dữ liệu và phân tích; Cuối tuần 4 đạo đức, viết và công bố.</a:t>
+              <a:t>Đi dọc con đường: Tuần 1-2 là câu hỏi và bằng chứng; Tuần 3-4 thiết kế và sai lệch; Tuần 5-6 dữ liệu và phân tích; Tuần 7-8 đạo đức, viết và công bố. Mỗi thứ Bảy một buổi, giữa hai buổi có trọn một tuần để làm bài về nhà.</a:t>
             </a:r>
           </a:p>
           <a:p>
             <a:r>
               <a:rPr lang="en-US" sz="1400" b="0" dirty="0"/>
-              <a:t>Toàn bộ khóa học này là Cấp độ 1, bao gồm mọi bước từ câu hỏi đến công bố: Cuối tuần 1-2 xây dựng hiểu biết và kỹ năng thiết kế; Cuối tuần 3-4 áp dụng vào dữ liệu, viết bài và công bố.</a:t>
+              <a:t>Toàn bộ khóa học này là Cấp độ 1, bao gồm mọi bước từ câu hỏi đến công bố: Tuần 1-4 xây dựng hiểu biết và kỹ năng thiết kế; Tuần 5-8 áp dụng vào dữ liệu, viết bài và công bố.</a:t>
             </a:r>
           </a:p>
           <a:p>
@@ -4745,7 +4745,7 @@
           <a:p>
             <a:r>
               <a:rPr lang="en-US" sz="1400" b="0" dirty="0"/>
-              <a:t>Tìm kiếm, 5 tài liệu, đặt vấn đề và tên đề tài là việc của ngày mai (Xây dựng đề cương 2).</a:t>
+              <a:t>Tìm kiếm, 5 tài liệu, đặt vấn đề và tên đề tài là việc của thứ Bảy tuần sau (Xây dựng đề cương 2).</a:t>
             </a:r>
           </a:p>
           <a:p>
@@ -5054,7 +5054,7 @@
           <a:p>
             <a:r>
               <a:rPr lang="en-US" sz="1400" b="0" dirty="0"/>
-              <a:t>Nối sang buổi sau: ngày mai (Buổi 2) ta tìm trên PubMed cho câu hỏi của từng nhóm, quản lý tài liệu tham khảo, và học cách đọc một bài báo trong 15 phút.</a:t>
+              <a:t>Nối sang buổi sau: thứ Bảy tuần sau (Buổi 2) ta tìm trên PubMed cho câu hỏi của từng nhóm, quản lý tài liệu tham khảo, và học cách đọc một bài báo trong 15 phút.</a:t>
             </a:r>
           </a:p>
           <a:p>
@@ -5147,7 +5147,7 @@
           <a:p>
             <a:r>
               <a:rPr lang="en-US" sz="1400" b="0" dirty="0"/>
-              <a:t>Đọc các tờ giấy tối nay. Nếu nhiều người vẫn dùng động từ mơ hồ, mở đầu Buổi 2 bằng thêm một phút về mục tiêu.</a:t>
+              <a:t>Đọc các tờ giấy trong tuần. Nếu nhiều người vẫn dùng động từ mơ hồ, mở đầu Buổi 2 bằng thêm một phút về mục tiêu.</a:t>
             </a:r>
           </a:p>
           <a:p>
@@ -5234,19 +5234,19 @@
           <a:p>
             <a:r>
               <a:rPr lang="en-US" sz="1400" b="0" dirty="0"/>
-              <a:t>Giữ nhẹ nhàng: khoảng 30 phút tối nay.</a:t>
+              <a:t>Giữ nhẹ nhàng: khoảng 30 phút trong tuần.</a:t>
             </a:r>
           </a:p>
           <a:p>
             <a:r>
               <a:rPr lang="en-US" sz="1400" b="0" dirty="0"/>
-              <a:t>Danh sách từ đồng nghĩa giúp tìm kiếm PubMed ngày mai nhanh hơn nhiều - PubMed tìm bằng tiếng Anh.</a:t>
+              <a:t>Danh sách từ đồng nghĩa giúp tìm kiếm PubMed thứ Bảy tuần sau nhanh hơn nhiều - PubMed tìm bằng tiếng Anh.</a:t>
             </a:r>
           </a:p>
           <a:p>
             <a:r>
               <a:rPr lang="en-US" sz="1400" b="0" dirty="0"/>
-              <a:t>'Con số tại khoa' sẽ thành đoạn 3 của phần đặt vấn đề ngày mai.</a:t>
+              <a:t>'Con số tại khoa' sẽ thành đoạn 3 của phần đặt vấn đề thứ Bảy tuần sau.</a:t>
             </a:r>
           </a:p>
           <a:p>
@@ -5339,13 +5339,13 @@
           <a:p>
             <a:r>
               <a:rPr lang="en-US" sz="1400" b="0" dirty="0"/>
-              <a:t>Sản phẩm 1: đề cương nghiên cứu cho câu hỏi của nhóm, xây dựng mỗi cuối tuần một phần và trình bày ở Buổi 8.</a:t>
+              <a:t>Sản phẩm 1: đề cương nghiên cứu cho câu hỏi của nhóm, xây dựng mỗi hai tuần một phần và trình bày ở Buổi 8.</a:t>
             </a:r>
           </a:p>
           <a:p>
             <a:r>
               <a:rPr lang="en-US" sz="1400" b="0" dirty="0"/>
-              <a:t>Sản phẩm 2: bản thảo bài báo viết từ bộ dữ liệu khóa học (FLUID-ICU). Mỗi nhóm trả lời một câu hỏi khác nhau trên cùng bộ dữ liệu. Phân tích ở Cuối tuần 3, viết ở Cuối tuần 4, và sau khóa học các nhóm phản biện chéo bản thảo của nhau và trả lời như tác giả thật.</a:t>
+              <a:t>Sản phẩm 2: bản thảo bài báo viết từ bộ dữ liệu khóa học (FLUID-ICU). Mỗi nhóm trả lời một câu hỏi khác nhau trên cùng bộ dữ liệu. Phân tích ở Tuần 5-6, viết ở Tuần 7-8, và sau khóa học các nhóm phản biện chéo bản thảo của nhau và trả lời như tác giả thật.</a:t>
             </a:r>
           </a:p>
           <a:p>
@@ -6026,7 +6026,7 @@
           <a:p>
             <a:r>
               <a:rPr lang="en-US" sz="1400" b="0" dirty="0"/>
-              <a:t>Đi qua bốn thẻ - mỗi thẻ một cuối tuần.</a:t>
+              <a:t>Đi qua bốn thẻ - mỗi thẻ ứng với hai tuần.</a:t>
             </a:r>
           </a:p>
           <a:p>
@@ -6218,7 +6218,7 @@
           <a:p>
             <a:r>
               <a:rPr lang="en-US" sz="1400" b="0" dirty="0"/>
-              <a:t>Phần 1 (Cuối tuần 1): câu hỏi và tổng quan. Phần 2 (Cuối tuần 2): thiết kế. Phần 3 (Cuối tuần 3): dữ liệu và kế hoạch phân tích. Phần 4 (Buổi 7): đạo đức, tính khả thi và kế hoạch công bố.</a:t>
+              <a:t>Phần 1 (Tuần 1-2): câu hỏi và tổng quan. Phần 2 (Tuần 3-4): thiết kế. Phần 3 (Tuần 5-6): dữ liệu và kế hoạch phân tích. Phần 4 (Buổi 7): đạo đức, tính khả thi và kế hoạch công bố.</a:t>
             </a:r>
           </a:p>
           <a:p>
@@ -9488,7 +9488,7 @@
                 <a:latin typeface="Segoe UI"/>
                 <a:cs typeface="Segoe UI"/>
               </a:rPr>
-              <a:t>8 buổi  -  4 cuối tuần  -  24 giờ học</a:t>
+              <a:t>8 thứ Bảy  -  mỗi tuần một buổi  -  24 giờ học</a:t>
             </a:r>
           </a:p>
           <a:p>
@@ -10923,7 +10923,7 @@
                 <a:latin typeface="Segoe UI"/>
                 <a:cs typeface="Segoe UI"/>
               </a:rPr>
-              <a:t>Cuối tuần 1 · Thứ Bảy</a:t>
+              <a:t>Tuần 1 · Thứ Bảy</a:t>
             </a:r>
           </a:p>
           <a:p>
@@ -11043,7 +11043,7 @@
                 <a:latin typeface="Segoe UI"/>
                 <a:cs typeface="Segoe UI"/>
               </a:rPr>
-              <a:t>Tổng kết: từ khóa, ôn tập, bài về nhà cho ngày mai</a:t>
+              <a:t>Tổng kết: từ khóa, ôn tập, bài về nhà cho thứ Bảy tuần sau</a:t>
             </a:r>
           </a:p>
         </p:txBody>
@@ -17774,7 +17774,7 @@
                 <a:latin typeface="Segoe UI"/>
                 <a:cs typeface="Segoe UI"/>
               </a:rPr>
-              <a:t>Bốn cuối tuần, tám buổi học</a:t>
+              <a:t>Tám thứ Bảy, tám buổi học</a:t>
             </a:r>
           </a:p>
         </p:txBody>
@@ -26599,7 +26599,7 @@
                 <a:latin typeface="Segoe UI"/>
                 <a:cs typeface="Segoe UI"/>
               </a:rPr>
-              <a:t>Ngày mai: tìm và đọc những gì đã biết về câu hỏi của bạn.</a:t>
+              <a:t>Thứ Bảy tuần sau: tìm và đọc những gì đã biết về câu hỏi của bạn.</a:t>
             </a:r>
           </a:p>
         </p:txBody>
@@ -27012,7 +27012,7 @@
                 <a:latin typeface="Segoe UI"/>
                 <a:cs typeface="Segoe UI"/>
               </a:rPr>
-              <a:t>Mỗi người một tờ giấy dán (giảng viên đọc trước ngày mai)</a:t>
+              <a:t>Mỗi người một tờ giấy dán (giảng viên đọc trước thứ Bảy tuần sau)</a:t>
             </a:r>
           </a:p>
         </p:txBody>
@@ -27180,7 +27180,7 @@
                 <a:latin typeface="Segoe UI"/>
                 <a:cs typeface="Segoe UI"/>
               </a:rPr>
-              <a:t>Bài về nhà cho ngày mai (Buổi 2)</a:t>
+              <a:t>Bài về nhà cho thứ Bảy tuần sau (Buổi 2)</a:t>
             </a:r>
           </a:p>
         </p:txBody>
@@ -27444,7 +27444,7 @@
                 <a:latin typeface="Segoe UI"/>
                 <a:cs typeface="Segoe UI"/>
               </a:rPr>
-              <a:t>Mang theo ngày mai</a:t>
+              <a:t>Mang theo thứ Bảy tuần sau</a:t>
             </a:r>
           </a:p>
           <a:p>
@@ -27567,7 +27567,7 @@
                 <a:latin typeface="Segoe UI"/>
                 <a:cs typeface="Segoe UI"/>
               </a:rPr>
-              <a:t>Câu hỏi PICO sẵn sàng cho buổi tìm kiếm ngày mai</a:t>
+              <a:t>Câu hỏi PICO sẵn sàng cho buổi tìm kiếm thứ Bảy tuần sau</a:t>
             </a:r>
           </a:p>
         </p:txBody>
@@ -31622,7 +31622,7 @@
                 <a:latin typeface="Segoe UI"/>
                 <a:cs typeface="Segoe UI"/>
               </a:rPr>
-              <a:t>Cùng nhóm, cùng mẫu, mỗi cuối tuần một phần, trình bày ở Buổi 8.</a:t>
+              <a:t>Cùng nhóm, cùng mẫu, mỗi hai tuần một phần, trình bày ở Buổi 8.</a:t>
             </a:r>
           </a:p>
         </p:txBody>
@@ -31978,7 +31978,7 @@
                 <a:latin typeface="Segoe UI"/>
                 <a:cs typeface="Segoe UI"/>
               </a:rPr>
-              <a:t>Thống nhất các vai trò bên cạnh - có thể luân phiên mỗi cuối tuần</a:t>
+              <a:t>Thống nhất các vai trò bên cạnh - có thể luân phiên mỗi tuần</a:t>
             </a:r>
           </a:p>
           <a:p>

--- a/vi/files/slides/Session_1_VN.pptx
+++ b/vi/files/slides/Session_1_VN.pptx
@@ -755,13 +755,13 @@
           <a:p>
             <a:r>
               <a:rPr lang="en-US" sz="1400" b="0" dirty="0"/>
-              <a:t>Thông điệp chính: trong tám thứ Bảy, mỗi tuần một buổi, chúng ta cùng đi hết con đường nghiên cứu - từ một câu hỏi tại giường bệnh đến một bài báo sẵn sàng để nộp.</a:t>
+              <a:t>Thông điệp chính: trong tám thứ Bảy, mỗi tuần một buổi, chúng ta cùng đi hết con đường nghiên cứu: từ một câu hỏi tại giường bệnh đến một bài báo sẵn sàng để nộp.</a:t>
             </a:r>
           </a:p>
           <a:p>
             <a:r>
               <a:rPr lang="en-US" sz="1400" b="0" dirty="0"/>
-              <a:t>Không dùng phần mềm thống kê, không học thuộc công thức: học bằng hình ảnh, ví dụ từ khoa phòng của các bạn và nhiều hoạt động nhóm. Chúng ta đi chậm - không ai cần biết trước điều gì.</a:t>
+              <a:t>Không dùng phần mềm thống kê, không học thuộc công thức: học bằng hình ảnh, ví dụ từ khoa phòng của các bạn và nhiều hoạt động nhóm. Chúng ta đi chậm. Không ai cần biết trước điều gì.</a:t>
             </a:r>
           </a:p>
           <a:p>
@@ -854,7 +854,7 @@
           <a:p>
             <a:r>
               <a:rPr lang="en-US" sz="1400" b="0" dirty="0"/>
-              <a:t>Ngôn ngữ: thảo luận bằng tiếng Việt hoặc tiếng Anh - miễn giúp nhóm suy nghĩ tốt nhất.</a:t>
+              <a:t>Ngôn ngữ: thảo luận bằng tiếng Việt hoặc tiếng Anh, miễn giúp nhóm suy nghĩ tốt nhất.</a:t>
             </a:r>
           </a:p>
           <a:p>
@@ -953,7 +953,7 @@
           <a:p>
             <a:r>
               <a:rPr lang="en-US" sz="1400" b="0" dirty="0"/>
-              <a:t>Thu bài sau 15 phút. Hôm nay không chữa đáp án - bài này được làm lại cuối Buổi 8.</a:t>
+              <a:t>Thu bài sau 15 phút. Hôm nay không chữa đáp án. Bài này được làm lại cuối Buổi 8.</a:t>
             </a:r>
           </a:p>
         </p:txBody>
@@ -1040,13 +1040,13 @@
           <a:p>
             <a:r>
               <a:rPr lang="en-US" sz="1400" b="0" dirty="0"/>
-              <a:t>Ý chính: hôm nay chỉ có một việc - mỗi nhóm ra về với MỘT câu hỏi nghiên cứu rõ ràng, trả lời được, cùng mục đích và mục tiêu. Thứ Bảy tuần sau (Buổi 2) ta tìm và đọc y văn cho câu hỏi đó.</a:t>
+              <a:t>Ý chính: hôm nay chỉ có một việc: mỗi nhóm ra về với MỘT câu hỏi nghiên cứu rõ ràng, trả lời được, cùng mục đích và mục tiêu. Thứ Bảy tuần sau (Buổi 2) ta tìm và đọc y văn cho câu hỏi đó.</a:t>
             </a:r>
           </a:p>
           <a:p>
             <a:r>
               <a:rPr lang="en-US" sz="1400" b="0" dirty="0"/>
-              <a:t>Nhịp độ: học viên hầu như chưa có nền tảng nghiên cứu. Đi chậm, dùng các ví dụ mẫu, và dừng lại ở mọi slide 'Kiểm tra hiểu bài' - chúng được thiết kế ngắn.</a:t>
+              <a:t>Nhịp độ: học viên hầu như chưa có nền tảng nghiên cứu. Đi chậm, dùng các ví dụ mẫu, và dừng lại ở mọi slide 'Kiểm tra hiểu bài'. Các slide này được thiết kế ngắn.</a:t>
             </a:r>
           </a:p>
           <a:p>
@@ -1058,7 +1058,7 @@
           <a:p>
             <a:r>
               <a:rPr lang="en-US" sz="1400" b="0" dirty="0"/>
-              <a:t>Hỏi cả lớp: 'Ai đã từng tham gia một nghiên cứu - với vai trò nghiên cứu viên, người thu thập số liệu hay người tham gia?' Đếm số tay giơ để biết nên giảng ở mức nào.</a:t>
+              <a:t>Hỏi cả lớp: 'Ai đã từng tham gia một nghiên cứu, với vai trò nghiên cứu viên, người thu thập số liệu hay người tham gia?' Đếm số tay giơ để biết nên giảng ở mức nào.</a:t>
             </a:r>
           </a:p>
           <a:p>
@@ -1274,13 +1274,13 @@
           <a:p>
             <a:r>
               <a:rPr lang="en-US" sz="1400" b="0" dirty="0"/>
-              <a:t>Hỏi cả lớp: 'Vì sao ta nhớ ba kết cục tốt?' Trả lời mong đợi: sai lệch nhớ lại (recall bias) - ca kịch tính và gần đây dễ nhớ; ta quên các ca thất bại.</a:t>
+              <a:t>Hỏi cả lớp: 'Vì sao ta nhớ ba kết cục tốt?' Trả lời mong đợi: sai lệch nhớ lại (recall bias). Ca kịch tính và gần đây dễ nhớ, còn ca thất bại thì ta quên.</a:t>
             </a:r>
           </a:p>
           <a:p>
             <a:r>
               <a:rPr lang="en-US" sz="1400" b="0" dirty="0"/>
-              <a:t>Thời gian: 4 phút. Đi chậm - cả khóa học dựa trên ý này.</a:t>
+              <a:t>Thời gian: 4 phút. Đi chậm: cả khóa học dựa trên ý này.</a:t>
             </a:r>
           </a:p>
         </p:txBody>
@@ -1373,13 +1373,13 @@
           <a:p>
             <a:r>
               <a:rPr lang="en-US" sz="1400" b="0" dirty="0"/>
-              <a:t>Hàng giữa: nhóm 50 người - gần sự thật hơn nhưng vẫn phân tán. Hàng dưới: nhóm 500 người tập trung sát quanh 40%.</a:t>
+              <a:t>Hàng giữa: nhóm 50 người, gần sự thật hơn nhưng vẫn phân tán. Hàng dưới: nhóm 500 người tập trung sát quanh 40%.</a:t>
             </a:r>
           </a:p>
           <a:p>
             <a:r>
               <a:rPr lang="en-US" sz="1400" b="0" dirty="0"/>
-              <a:t>Ý chính: chỉ riêng ngẫu nhiên đã tạo ra những khác biệt trông rất ấn tượng ở số nhỏ. Vì vậy nghiên cứu cần đủ bệnh nhân và có nhóm so sánh - và vì sao 'ba bệnh nhân gần nhất của tôi' có thể gây hiểu lầm.</a:t>
+              <a:t>Ý chính: chỉ riêng ngẫu nhiên đã tạo ra những khác biệt trông rất ấn tượng ở số nhỏ. Vì vậy nghiên cứu cần đủ bệnh nhân và có nhóm so sánh, và vì sao 'ba bệnh nhân gần nhất của tôi' có thể gây hiểu lầm.</a:t>
             </a:r>
           </a:p>
           <a:p>
@@ -1391,7 +1391,7 @@
           <a:p>
             <a:r>
               <a:rPr lang="en-US" sz="1400" b="0" dirty="0"/>
-              <a:t>Hỏi cả lớp: 'Một khoa có 0/5 bệnh nhân tử vong sau quy trình mới. Quy trình có hiệu quả không?' Trả lời mong đợi: chưa thể biết - 0/5 xảy ra thường xuyên do ngẫu nhiên ngay cả khi nguy cơ thật là 40%.</a:t>
+              <a:t>Hỏi cả lớp: 'Một khoa có 0/5 bệnh nhân tử vong sau quy trình mới. Quy trình có hiệu quả không?' Trả lời mong đợi: chưa thể biết, vì 0/5 xảy ra thường xuyên do ngẫu nhiên ngay cả khi nguy cơ thật là 40%.</a:t>
             </a:r>
           </a:p>
           <a:p>
@@ -1478,7 +1478,7 @@
           <a:p>
             <a:r>
               <a:rPr lang="en-US" sz="1400" b="0" dirty="0"/>
-              <a:t>Xây từ dưới lên: ý kiến chuyên gia và báo cáo ca, loạt ca và cắt ngang, bệnh - chứng, đoàn hệ, thử nghiệm ngẫu nhiên, và trên đỉnh là tổng quan hệ thống và phân tích gộp.</a:t>
+              <a:t>Xây từ dưới lên: ý kiến chuyên gia và báo cáo ca, loạt ca và cắt ngang, bệnh-chứng, đoàn hệ, thử nghiệm ngẫu nhiên, và trên đỉnh là tổng quan hệ thống và phân tích gộp.</a:t>
             </a:r>
           </a:p>
           <a:p>
@@ -1496,7 +1496,7 @@
           <a:p>
             <a:r>
               <a:rPr lang="en-US" sz="1400" b="0" dirty="0"/>
-              <a:t>Quan niệm sai 2: 'chỉ RCT mới có giá trị'. Với mức độ phổ biến, tác hại và tiên lượng, thiết kế quan sát thường là lựa chọn đúng (hoặc duy nhất hợp đạo đức). Nghiên cứu định tính nằm ngoài tháp này - nó trả lời câu hỏi khác.</a:t>
+              <a:t>Quan niệm sai 2: 'chỉ RCT mới có giá trị'. Với mức độ phổ biến, tác hại và tiên lượng, thiết kế quan sát thường là lựa chọn đúng (hoặc duy nhất hợp đạo đức). Nghiên cứu định tính nằm ngoài tháp này vì nó trả lời câu hỏi khác.</a:t>
             </a:r>
           </a:p>
           <a:p>
@@ -1508,7 +1508,7 @@
           <a:p>
             <a:r>
               <a:rPr lang="en-US" sz="1400" b="0" dirty="0"/>
-              <a:t>Thời gian: 4 phút. Buổi 3 học kỹ từng thiết kế - đừng dạy thiết kế ở đây.</a:t>
+              <a:t>Thời gian: 4 phút. Buổi 3 học kỹ từng thiết kế, nên đừng dạy thiết kế ở đây.</a:t>
             </a:r>
           </a:p>
         </p:txBody>
@@ -1595,13 +1595,13 @@
           <a:p>
             <a:r>
               <a:rPr lang="en-US" sz="1400" b="0" dirty="0"/>
-              <a:t>C chính là thử nghiệm CLASSIC (NEJM 2022) - không khác biệt tử vong 90 ngày. B giống Bài báo 2 (Hyun 2023): cân bằng dịch dương ở ngày 2-3 liên quan với tử vong 28 ngày cao hơn.</a:t>
+              <a:t>C chính là thử nghiệm CLASSIC (NEJM 2022), không thấy khác biệt tử vong 90 ngày. B giống Bài báo 2 (Hyun 2023): cân bằng dịch dương ở ngày 2-3 liên quan với tử vong 28 ngày cao hơn.</a:t>
             </a:r>
           </a:p>
           <a:p>
             <a:r>
               <a:rPr lang="en-US" sz="1400" b="0" dirty="0"/>
-              <a:t>Vì sao đoàn hệ thấy có hại mà thử nghiệm lại không? Trả lời mong đợi: trong đoàn hệ, bệnh nhân nặng hơn được truyền nhiều dịch hơn, nên dịch trông như có hại (nhiễu do chỉ định - confounding by indication) - xem trước Buổi 4.</a:t>
+              <a:t>Vì sao đoàn hệ thấy có hại mà thử nghiệm lại không? Trả lời mong đợi: trong đoàn hệ, bệnh nhân nặng hơn được truyền nhiều dịch hơn, nên dịch trông như có hại (nhiễu do chỉ định, confounding by indication). Đây là phần xem trước Buổi 4.</a:t>
             </a:r>
           </a:p>
           <a:p>
@@ -1700,7 +1700,7 @@
           <a:p>
             <a:r>
               <a:rPr lang="en-US" sz="1400" b="0" dirty="0"/>
-              <a:t>Tuần 1-2 = vấn đề lâm sàng và câu hỏi nghiên cứu (hôm nay), tìm y văn (thứ Bảy tuần sau) - ba ô màu xanh mòng két phía trên bên phải.</a:t>
+              <a:t>Tuần 1-2 = vấn đề lâm sàng và câu hỏi nghiên cứu (hôm nay), tìm y văn (thứ Bảy tuần sau). Đó là ba ô màu xanh mòng két phía trên bên phải.</a:t>
             </a:r>
           </a:p>
           <a:p>
@@ -1799,13 +1799,13 @@
           <a:p>
             <a:r>
               <a:rPr lang="en-US" sz="1400" b="0" dirty="0"/>
-              <a:t>Hàng trên: loại dữ liệu. Nghiên cứu định lượng (quantitative) đếm và đo (tử vong, cân bằng dịch). Nghiên cứu định tính (qualitative) thu thập lời nói - phỏng vấn, thảo luận nhóm, quan sát - để hiểu trải nghiệm, lý do và rào cản. Phương pháp hỗn hợp (mixed methods) kết hợp cả hai trong một nghiên cứu.</a:t>
+              <a:t>Hàng trên: loại dữ liệu. Nghiên cứu định lượng (quantitative) đếm và đo (tử vong, cân bằng dịch). Nghiên cứu định tính (qualitative) thu thập lời nói (phỏng vấn, thảo luận nhóm, quan sát) để hiểu trải nghiệm, lý do và rào cản. Phương pháp hỗn hợp (mixed methods) kết hợp cả hai trong một nghiên cứu.</a:t>
             </a:r>
           </a:p>
           <a:p>
             <a:r>
               <a:rPr lang="en-US" sz="1400" b="0" dirty="0"/>
-              <a:t>Hàng dưới: nguồn dữ liệu. Nghiên cứu sơ cấp (primary) thu thập dữ liệu mới (Bài báo 1, một thử nghiệm mới). Nghiên cứu thứ cấp (secondary) dùng lại dữ liệu có sẵn - hồ sơ bệnh án, sổ đăng ký (Bài báo 2 dùng sổ đăng ký nhiễm khuẩn huyết) hoặc các nghiên cứu đã công bố (tổng quan hệ thống).</a:t>
+              <a:t>Hàng dưới: nguồn dữ liệu. Nghiên cứu sơ cấp (primary) thu thập dữ liệu mới (Bài báo 1, một thử nghiệm mới). Nghiên cứu thứ cấp (secondary) dùng lại dữ liệu có sẵn: hồ sơ bệnh án, sổ đăng ký (Bài báo 2 dùng sổ đăng ký nhiễm khuẩn huyết) hoặc các nghiên cứu đã công bố (tổng quan hệ thống).</a:t>
             </a:r>
           </a:p>
           <a:p>
@@ -1928,7 +1928,7 @@
           <a:p>
             <a:r>
               <a:rPr lang="en-US" sz="1400" b="0" dirty="0"/>
-              <a:t>Ghi các ví dụ lên bảng lật - đó là những chủ đề tiềm năng cho đề cương của các nhóm.</a:t>
+              <a:t>Ghi các ví dụ lên bảng lật. Đó là những chủ đề tiềm năng cho đề cương của các nhóm.</a:t>
             </a:r>
           </a:p>
         </p:txBody>
@@ -2021,7 +2021,7 @@
           <a:p>
             <a:r>
               <a:rPr lang="en-US" sz="1400" b="0" dirty="0"/>
-              <a:t>Nếu lớp lưỡng lự ở câu C: dữ liệu được thu thập cho chăm sóc, không phải cho nghiên cứu này - dùng lại chúng là nghiên cứu thứ cấp. Vẫn cần xét duyệt đạo đức.</a:t>
+              <a:t>Nếu lớp lưỡng lự ở câu C: dữ liệu được thu thập cho chăm sóc, không phải cho nghiên cứu này, nên dùng lại chúng là nghiên cứu thứ cấp. Vẫn cần xét duyệt đạo đức.</a:t>
             </a:r>
           </a:p>
           <a:p>
@@ -2114,13 +2114,13 @@
           <a:p>
             <a:r>
               <a:rPr lang="en-US" sz="1400" b="0" dirty="0"/>
-              <a:t>Ý chính: hai câu hỏi đơn giản phân loại được gần như mọi nghiên cứu - loại dữ liệu (con số hay lời nói) và nguồn dữ liệu (mới hay có sẵn).</a:t>
+              <a:t>Ý chính: hai câu hỏi đơn giản phân loại được gần như mọi nghiên cứu: loại dữ liệu (con số hay lời nói) và nguồn dữ liệu (mới hay có sẵn).</a:t>
             </a:r>
           </a:p>
           <a:p>
             <a:r>
               <a:rPr lang="en-US" sz="1400" b="0" dirty="0"/>
-              <a:t>Nghiên cứu thứ cấp thường khả thi nhất với một khoa bận rộn - nhưng chất lượng phụ thuộc vào cách ghi chép hồ sơ (Buổi 5).</a:t>
+              <a:t>Nghiên cứu thứ cấp thường khả thi nhất với một khoa bận rộn, nhưng chất lượng phụ thuộc vào cách ghi chép hồ sơ (Buổi 5).</a:t>
             </a:r>
           </a:p>
           <a:p>
@@ -2207,19 +2207,19 @@
           <a:p>
             <a:r>
               <a:rPr lang="en-US" sz="1400" b="0" dirty="0"/>
-              <a:t>Nghiên cứu tạo ra kiến thức mới, có thể khái quát hóa - phương án nào tốt nhất? Kiểm tra lâm sàng (audit) so sánh thực hành của ta với một tiêu chuẩn đã thống nhất. Cải tiến chất lượng (QI) thay đổi một quy trình tại chỗ từng bước, thường theo chu trình Lập kế hoạch - Thực hiện - Nghiên cứu - Hành động (PDSA).</a:t>
+              <a:t>Nghiên cứu tạo ra kiến thức mới, có thể khái quát hóa: phương án nào tốt nhất? Kiểm tra lâm sàng (audit) so sánh thực hành của ta với một tiêu chuẩn đã thống nhất. Cải tiến chất lượng (QI) thay đổi một quy trình tại chỗ từng bước, thường theo chu trình Lập kế hoạch, Thực hiện, Nghiên cứu, Hành động (PDSA).</a:t>
             </a:r>
           </a:p>
           <a:p>
             <a:r>
               <a:rPr lang="en-US" sz="1400" b="0" dirty="0"/>
-              <a:t>Vì sao quan trọng: nghiên cứu luôn cần hội đồng đạo đức phê duyệt trước khi bắt đầu. Audit và QI thường chỉ cần phê duyệt nội bộ - nhưng nếu dự án phân nhóm ngẫu nhiên, thêm can thiệp hay rủi ro mới, hoặc thu thập dữ liệu ngoài chăm sóc thường quy, thì đó là nghiên cứu và cần xét duyệt đạo đức.</a:t>
+              <a:t>Vì sao quan trọng: nghiên cứu luôn cần hội đồng đạo đức phê duyệt trước khi bắt đầu. Audit và QI thường chỉ cần phê duyệt nội bộ. Nhưng nếu dự án phân nhóm ngẫu nhiên, thêm can thiệp hay rủi ro mới, hoặc thu thập dữ liệu ngoài chăm sóc thường quy, thì đó là nghiên cứu và cần xét duyệt đạo đức.</a:t>
             </a:r>
           </a:p>
           <a:p>
             <a:r>
               <a:rPr lang="en-US" sz="1400" b="0" dirty="0"/>
-              <a:t>Công bố không làm thay đổi bản chất dự án. Tạp chí sẽ hỏi phê duyệt đạo đức hoặc quyết định miễn trừ chính thức, vì vậy hãy xác định - và hỏi - ngay từ đầu, không phải sau khi đã thu thập dữ liệu.</a:t>
+              <a:t>Công bố không làm thay đổi bản chất dự án. Tạp chí sẽ hỏi phê duyệt đạo đức hoặc quyết định miễn trừ chính thức, vì vậy hãy xác định (và hỏi) ngay từ đầu, không phải sau khi đã thu thập dữ liệu.</a:t>
             </a:r>
           </a:p>
           <a:p>
@@ -2231,7 +2231,7 @@
           <a:p>
             <a:r>
               <a:rPr lang="en-US" sz="1400" b="0" dirty="0"/>
-              <a:t>Hỏi cả lớp: 'Kiểm tra xem cân bằng dịch có được ghi hằng ngày theo quy trình không - là nghiên cứu, audit hay QI?' Trả lời mong đợi: audit.</a:t>
+              <a:t>Hỏi cả lớp: 'Kiểm tra xem cân bằng dịch có được ghi hằng ngày theo quy trình không: là nghiên cứu, audit hay QI?' Trả lời mong đợi: audit.</a:t>
             </a:r>
           </a:p>
           <a:p>
@@ -2330,7 +2330,7 @@
           <a:p>
             <a:r>
               <a:rPr lang="en-US" sz="1400" b="0" dirty="0"/>
-              <a:t>Đáp án (slide sau): A audit; B nghiên cứu (hội đồng đạo đức + đăng ký); C cải tiến chất lượng; D nghiên cứu (định tính - hội đồng đạo đức).</a:t>
+              <a:t>Đáp án (slide sau): A audit; B nghiên cứu (hội đồng đạo đức + đăng ký); C cải tiến chất lượng; D nghiên cứu (định tính, hội đồng đạo đức).</a:t>
             </a:r>
           </a:p>
           <a:p>
@@ -2528,7 +2528,7 @@
           <a:p>
             <a:r>
               <a:rPr lang="en-US" sz="1400" b="0" dirty="0"/>
-              <a:t>Trạm 1-6 là lập kế hoạch và thực hiện: câu hỏi, thiết kế và đề cương, đăng ký (thử nghiệm phải đăng ký TRƯỚC bệnh nhân đầu tiên - Bài báo 1 đăng ký tháng 7/2021, bắt đầu tuyển tháng 9/2021), phê duyệt đạo đức, thu thập dữ liệu, phân tích.</a:t>
+              <a:t>Trạm 1-6 là lập kế hoạch và thực hiện: câu hỏi, thiết kế và đề cương, đăng ký (thử nghiệm phải đăng ký TRƯỚC bệnh nhân đầu tiên: Bài báo 1 đăng ký tháng 7/2021, bắt đầu tuyển tháng 9/2021), phê duyệt đạo đức, thu thập dữ liệu, phân tích.</a:t>
             </a:r>
           </a:p>
           <a:p>
@@ -2546,19 +2546,19 @@
           <a:p>
             <a:r>
               <a:rPr lang="en-US" sz="1400" b="0" dirty="0"/>
-              <a:t>Quan niệm sai: 'công bố là điểm kết thúc'. Mục đích là tác động - một hướng dẫn, quy trình hay thực hành được thay đổi.</a:t>
+              <a:t>Quan niệm sai: 'công bố là điểm kết thúc'. Mục đích là tác động: một hướng dẫn, quy trình hay thực hành được thay đổi.</a:t>
             </a:r>
           </a:p>
           <a:p>
             <a:r>
               <a:rPr lang="en-US" sz="1400" b="0" dirty="0"/>
-              <a:t>Hỏi cả lớp: 'Theo bạn, nghiên cứu ở bệnh viện hay mắc kẹt ở trạm nào?' Mong đợi: thủ tục đạo đức, thu thập dữ liệu, hoặc viết bài (trạm 7) - ta sẽ giải quyết từng trạm.</a:t>
+              <a:t>Hỏi cả lớp: 'Theo bạn, nghiên cứu ở bệnh viện hay mắc kẹt ở trạm nào?' Mong đợi: thủ tục đạo đức, thu thập dữ liệu, hoặc viết bài (trạm 7). Ta sẽ giải quyết từng trạm.</a:t>
             </a:r>
           </a:p>
           <a:p>
             <a:r>
               <a:rPr lang="en-US" sz="1400" b="0" dirty="0"/>
-              <a:t>Thời gian: 3 phút. Phần 1.1 kết thúc lúc 1:10 - giải lao.</a:t>
+              <a:t>Thời gian: 3 phút. Phần 1.1 kết thúc lúc 1:10, sau đó giải lao.</a:t>
             </a:r>
           </a:p>
         </p:txBody>
@@ -2651,7 +2651,7 @@
           <a:p>
             <a:r>
               <a:rPr lang="en-US" sz="1400" b="0" dirty="0"/>
-              <a:t>Bắt đầu lại đúng giờ - nói rõ giờ quay lại.</a:t>
+              <a:t>Bắt đầu lại đúng giờ và nói rõ giờ quay lại.</a:t>
             </a:r>
           </a:p>
         </p:txBody>
@@ -2744,7 +2744,7 @@
           <a:p>
             <a:r>
               <a:rPr lang="en-US" sz="1400" b="0" dirty="0"/>
-              <a:t>Ta sẽ xây PICO thật chậm qua nhiều ví dụ - ICU và khoa phòng - trước khi thực hành theo cặp.</a:t>
+              <a:t>Ta sẽ xây PICO thật chậm qua nhiều ví dụ (ICU và khoa phòng) trước khi thực hành theo cặp.</a:t>
             </a:r>
           </a:p>
           <a:p>
@@ -2837,19 +2837,19 @@
           <a:p>
             <a:r>
               <a:rPr lang="en-US" sz="1400" b="0" dirty="0"/>
-              <a:t>Ô màu cam là quyết định then chốt: trước khi gọi một việc là nghiên cứu, hãy kiểm tra câu trả lời đã có chưa. Nếu đã có, việc cần làm là triển khai - hướng dẫn, audit hay dự án QI (phần 1.1).</a:t>
+              <a:t>Ô màu cam là quyết định then chốt: trước khi gọi một việc là nghiên cứu, hãy kiểm tra câu trả lời đã có chưa. Nếu đã có, việc cần làm là triển khai: hướng dẫn, audit hay dự án QI (phần 1.1).</a:t>
             </a:r>
           </a:p>
           <a:p>
             <a:r>
               <a:rPr lang="en-US" sz="1400" b="0" dirty="0"/>
-              <a:t>Ý chính: 'cách biết' chính là tìm y văn - đó là nội dung Buổi 2 thứ Bảy tuần sau.</a:t>
+              <a:t>Ý chính: 'cách biết' chính là tìm y văn, nội dung của Buổi 2 thứ Bảy tuần sau.</a:t>
             </a:r>
           </a:p>
           <a:p>
             <a:r>
               <a:rPr lang="en-US" sz="1400" b="0" dirty="0"/>
-              <a:t>Hỏi cả lớp: 'Kể một việc trong khoa mà mỗi đồng nghiệp làm một kiểu.' Mong đợi: mục tiêu an thần, lượng dịch truyền, thay băng, thời điểm vận động sớm. Ghi lên bảng giấy - đó là chủ đề tiềm năng cho đề cương.</a:t>
+              <a:t>Hỏi cả lớp: 'Kể một việc trong khoa mà mỗi đồng nghiệp làm một kiểu.' Mong đợi: mục tiêu an thần, lượng dịch truyền, thay băng, thời điểm vận động sớm. Ghi lên bảng giấy. Đó là chủ đề tiềm năng cho đề cương.</a:t>
             </a:r>
           </a:p>
           <a:p>
@@ -2936,7 +2936,7 @@
           <a:p>
             <a:r>
               <a:rPr lang="en-US" sz="1400" b="0" dirty="0"/>
-              <a:t>PICO = Đối tượng (Population), Can thiệp (Intervention), So sánh (Comparison), Kết cục (Outcome). T (Time - thời gian) cho biết khi nào đo kết cục.</a:t>
+              <a:t>PICO = Đối tượng (Population), Can thiệp (Intervention), So sánh (Comparison), Kết cục (Outcome). T (Time, thời gian) cho biết khi nào đo kết cục.</a:t>
             </a:r>
           </a:p>
           <a:p>
@@ -2954,13 +2954,13 @@
           <a:p>
             <a:r>
               <a:rPr lang="en-US" sz="1400" b="0" dirty="0"/>
-              <a:t>Biến thể: với câu hỏi quan sát, I thành E (phơi nhiễm - exposure), ví dụ 'cân bằng dịch dương' - PECO. Câu hỏi mô tả có thể chỉ cần P và O.</a:t>
+              <a:t>Biến thể: với câu hỏi quan sát, I thành E (phơi nhiễm, exposure), ví dụ 'cân bằng dịch dương' (PECO). Câu hỏi mô tả có thể chỉ cần P và O.</a:t>
             </a:r>
           </a:p>
           <a:p>
             <a:r>
               <a:rPr lang="en-US" sz="1400" b="0" dirty="0"/>
-              <a:t>Quan niệm sai: 'nhóm so sánh thì hiển nhiên'. Chăm sóc thường quy khác nhau giữa các bệnh viện và theo thời gian - phải mô tả rõ.</a:t>
+              <a:t>Quan niệm sai: 'nhóm so sánh thì hiển nhiên'. Chăm sóc thường quy khác nhau giữa các bệnh viện và theo thời gian, nên phải mô tả rõ.</a:t>
             </a:r>
           </a:p>
           <a:p>
@@ -3059,7 +3059,7 @@
           <a:p>
             <a:r>
               <a:rPr lang="en-US" sz="1400" b="0" dirty="0"/>
-              <a:t>Toàn bộ khóa học này là Cấp độ 1, bao gồm mọi bước từ câu hỏi đến công bố: Tuần 1-4 xây dựng hiểu biết và kỹ năng thiết kế; Tuần 5-8 áp dụng vào dữ liệu, viết bài và công bố.</a:t>
+              <a:t>Toàn bộ khóa học này là Cấp độ 1, bao gồm mọi bước từ câu hỏi đến công bố: Tuần 1-4 xây dựng hiểu biết và kỹ năng thiết kế. Tuần 5-8 áp dụng vào dữ liệu, viết bài và công bố.</a:t>
             </a:r>
           </a:p>
           <a:p>
@@ -3152,25 +3152,25 @@
           <a:p>
             <a:r>
               <a:rPr lang="en-US" sz="1400" b="0" dirty="0"/>
-              <a:t>Dòng 1 - điều trị (PICO): người lớn thở máy; bảng kiểm đầu giường 2 lần/ngày so với chăm sóc thường quy; viêm phổi liên quan thở máy đến ngày 28 tại ICU.</a:t>
+              <a:t>Dòng 1, điều trị (PICO): người lớn thở máy; bảng kiểm đầu giường 2 lần/ngày so với chăm sóc thường quy; viêm phổi liên quan thở máy đến ngày 28 tại ICU.</a:t>
             </a:r>
           </a:p>
           <a:p>
             <a:r>
               <a:rPr lang="en-US" sz="1400" b="0" dirty="0"/>
-              <a:t>Dòng 2 - yếu tố nguy cơ (PECO): ta không thể 'phân' béo phì cho bệnh nhân, nên I thành E (phơi nhiễm). Người lớn tại khoa nội; béo phì so với không béo phì; tổn thương do tì đè mới trong thời gian nằm viện.</a:t>
+              <a:t>Dòng 2, yếu tố nguy cơ (PECO): ta không thể 'phân' béo phì cho bệnh nhân, nên I thành E (phơi nhiễm). Người lớn tại khoa nội; béo phì so với không béo phì; tổn thương do tì đè mới trong thời gian nằm viện.</a:t>
             </a:r>
           </a:p>
           <a:p>
             <a:r>
               <a:rPr lang="en-US" sz="1400" b="0" dirty="0"/>
-              <a:t>Dòng 3 - bao nhiêu? Chỉ P và O (và T): người ≥65 tuổi sau mổ gãy cổ xương đùi; mê sảng sàng lọc bằng 4AT trong 7 ngày đầu.</a:t>
+              <a:t>Dòng 3, bao nhiêu? Chỉ P và O (và T): người ≥65 tuổi sau mổ gãy cổ xương đùi; mê sảng sàng lọc bằng 4AT trong 7 ngày đầu.</a:t>
             </a:r>
           </a:p>
           <a:p>
             <a:r>
               <a:rPr lang="en-US" sz="1400" b="0" dirty="0"/>
-              <a:t>Ý chính: các ô bạn điền đã cho biết loại câu hỏi - và sau này là thiết kế.</a:t>
+              <a:t>Ý chính: các ô bạn điền đã cho biết loại câu hỏi, và sau này là thiết kế.</a:t>
             </a:r>
           </a:p>
           <a:p>
@@ -3275,7 +3275,7 @@
           <a:p>
             <a:r>
               <a:rPr lang="en-US" sz="1400" b="0" dirty="0"/>
-              <a:t>Chú ý học viên gắn 'gãy cổ xương đùi' là kết cục - thực ra đó là một phần của đối tượng.</a:t>
+              <a:t>Chú ý học viên gắn 'gãy cổ xương đùi' là kết cục. Thực ra đó là một phần của đối tượng.</a:t>
             </a:r>
           </a:p>
           <a:p>
@@ -3368,7 +3368,7 @@
           <a:p>
             <a:r>
               <a:rPr lang="en-US" sz="1400" b="0" dirty="0"/>
-              <a:t>Ý chính: kết cục phải là điều có thể xảy ra SAU khi can thiệp bắt đầu. Gãy cổ xương đùi đã xảy ra - nó xác định ai đủ tiêu chuẩn.</a:t>
+              <a:t>Ý chính: kết cục phải là điều có thể xảy ra SAU khi can thiệp bắt đầu. Gãy cổ xương đùi đã xảy ra: nó xác định ai đủ tiêu chuẩn.</a:t>
             </a:r>
           </a:p>
           <a:p>
@@ -3461,13 +3461,13 @@
           <a:p>
             <a:r>
               <a:rPr lang="en-US" sz="1400" b="0" dirty="0"/>
-              <a:t>Mô tả: cái gì, bao nhiêu, ai - không cần nhóm so sánh.</a:t>
+              <a:t>Mô tả: cái gì, bao nhiêu, ai. Không cần nhóm so sánh.</a:t>
             </a:r>
           </a:p>
           <a:p>
             <a:r>
               <a:rPr lang="en-US" sz="1400" b="0" dirty="0"/>
-              <a:t>Phân tích: X có liên quan tới Y (quan sát - ta theo dõi), hoặc X có gây ra Y (thực nghiệm - ta chủ động phân nhóm X).</a:t>
+              <a:t>Phân tích: X có liên quan tới Y (quan sát: ta theo dõi), hoặc X có gây ra Y (thực nghiệm: ta chủ động phân nhóm X).</a:t>
             </a:r>
           </a:p>
           <a:p>
@@ -3572,7 +3572,7 @@
           <a:p>
             <a:r>
               <a:rPr lang="en-US" sz="1400" b="0" dirty="0"/>
-              <a:t>Bên trái: câu hỏi ta hay hỏi ngoài hành lang - từ nào cũng chưa được định nghĩa. Bên phải: cùng băn khoăn đó viết theo PICO(T).</a:t>
+              <a:t>Bên trái: câu hỏi ta hay hỏi ngoài hành lang: từ nào cũng chưa được định nghĩa. Bên phải: cùng băn khoăn đó viết theo PICO(T).</a:t>
             </a:r>
           </a:p>
           <a:p>
@@ -3689,19 +3689,19 @@
           <a:p>
             <a:r>
               <a:rPr lang="en-US" sz="1400" b="0" dirty="0"/>
-              <a:t>Mới không có nghĩa là 'chưa ai nghiên cứu'. Lặp lại ở bối cảnh mới, hoặc với thiết kế tốt hơn, vẫn có thể là mới - vì vậy tìm y văn rất quan trọng.</a:t>
+              <a:t>Mới không có nghĩa là 'chưa ai nghiên cứu'. Lặp lại ở bối cảnh mới, hoặc với thiết kế tốt hơn, vẫn có thể là mới. Vì vậy tìm y văn rất quan trọng.</a:t>
             </a:r>
           </a:p>
           <a:p>
             <a:r>
               <a:rPr lang="en-US" sz="1400" b="0" dirty="0"/>
-              <a:t>Đạo đức: có thực sự chưa chắc chắn (cân bằng lâm sàng - equipoise) lựa chọn nào tốt hơn không?</a:t>
+              <a:t>Đạo đức: có thực sự chưa chắc chắn (cân bằng lâm sàng, equipoise) lựa chọn nào tốt hơn không?</a:t>
             </a:r>
           </a:p>
           <a:p>
             <a:r>
               <a:rPr lang="en-US" sz="1400" b="0" dirty="0"/>
-              <a:t>Hỏi cả lớp: 'Ví dụ xuyên suốt trượt tiêu chí nào?' Để lớp đoán - slide sau có đáp án.</a:t>
+              <a:t>Hỏi cả lớp: 'Ví dụ xuyên suốt trượt tiêu chí nào?' Để lớp đoán. Slide sau có đáp án.</a:t>
             </a:r>
           </a:p>
           <a:p>
@@ -3812,7 +3812,7 @@
           <a:p>
             <a:r>
               <a:rPr lang="en-US" sz="1400" b="0" dirty="0"/>
-              <a:t>Quan niệm sai: 'trượt FINER nghĩa là ý tưởng tồi'. Nghĩa là ý tưởng cần được định hình lại - bình thường và được mong đợi.</a:t>
+              <a:t>Quan niệm sai: 'trượt FINER nghĩa là ý tưởng tồi'. Nghĩa là ý tưởng cần được định hình lại, điều này bình thường và được mong đợi.</a:t>
             </a:r>
           </a:p>
           <a:p>
@@ -3923,7 +3923,7 @@
           <a:p>
             <a:r>
               <a:rPr lang="en-US" sz="1400" b="0" dirty="0"/>
-              <a:t>Cặp làm tổn thương do tì đè thường nhận ra câu hỏi đầu tiên nên là câu hỏi mô tả - hãy khen điều này.</a:t>
+              <a:t>Cặp làm tổn thương do tì đè thường nhận ra câu hỏi đầu tiên nên là câu hỏi mô tả. Hãy khen điều này.</a:t>
             </a:r>
           </a:p>
           <a:p>
@@ -4121,7 +4121,7 @@
           <a:p>
             <a:r>
               <a:rPr lang="en-US" sz="1400" b="0" dirty="0"/>
-              <a:t>Đánh dấu mục tiêu chính - nó quyết định cỡ mẫu (Buổi 6).</a:t>
+              <a:t>Đánh dấu mục tiêu chính: nó quyết định cỡ mẫu (Buổi 6).</a:t>
             </a:r>
           </a:p>
           <a:p>
@@ -4220,13 +4220,13 @@
           <a:p>
             <a:r>
               <a:rPr lang="en-US" sz="1400" b="0" dirty="0"/>
-              <a:t>Khóa học này (Cấp độ 1) đưa bạn từ câu hỏi lâm sàng đến bài báo được công bố. Cấp độ 2 là khóa thực hành R cho những ai muốn tự phân tích; Cấp độ 3 gồm các phương pháp nâng cao, chuyên sâu.</a:t>
+              <a:t>Khóa học này (Cấp độ 1) đưa bạn từ câu hỏi lâm sàng đến bài báo được công bố. Cấp độ 2 là khóa thực hành R cho những ai muốn tự phân tích. Cấp độ 3 gồm các phương pháp nâng cao, chuyên sâu.</a:t>
             </a:r>
           </a:p>
           <a:p>
             <a:r>
               <a:rPr lang="en-US" sz="1400" b="0" dirty="0"/>
-              <a:t>Trong Cấp độ 1, chúng ta dùng một bộ dữ liệu thực tế gồm 620 bệnh nhân ICU: mô tả, phân tích và viết thành bài báo. Giảng viên chạy phần mềm; các bạn đọc và diễn giải kết quả.</a:t>
+              <a:t>Trong Cấp độ 1, chúng ta dùng một bộ dữ liệu thực tế gồm 620 bệnh nhân ICU: mô tả, phân tích và viết thành bài báo. Giảng viên chạy phần mềm. Các bạn đọc và diễn giải kết quả.</a:t>
             </a:r>
           </a:p>
           <a:p>
@@ -4430,7 +4430,7 @@
           <a:p>
             <a:r>
               <a:rPr lang="en-US" sz="1400" b="0" dirty="0"/>
-              <a:t>So sánh: tòa án giả định 'không có tội' (H0) cho đến khi bằng chứng đủ mạnh. 'Không có tội' không giống 'vô tội' - và 'khác biệt không có ý nghĩa thống kê' không giống 'không có khác biệt'.</a:t>
+              <a:t>So sánh: tòa án giả định 'không có tội' (H0) cho đến khi bằng chứng đủ mạnh. 'Không có tội' không giống 'vô tội', và 'khác biệt không có ý nghĩa thống kê' không giống 'không có khác biệt'.</a:t>
             </a:r>
           </a:p>
           <a:p>
@@ -4634,7 +4634,7 @@
           <a:p>
             <a:r>
               <a:rPr lang="en-US" sz="1400" b="0" dirty="0"/>
-              <a:t>Kiểm tra chuỗi: O của câu hỏi (mê sảng trong 7 ngày) = mục tiêu chính = kết cục trong H0/H1. Nếu các phần này khác nhau, đề cương thiếu nhất quán - người phản biện nhận ra ngay.</a:t>
+              <a:t>Kiểm tra chuỗi: O của câu hỏi (mê sảng trong 7 ngày) = mục tiêu chính = kết cục trong H0/H1. Nếu các phần này khác nhau, đề cương thiếu nhất quán, và người phản biện nhận ra ngay.</a:t>
             </a:r>
           </a:p>
           <a:p>
@@ -4739,7 +4739,7 @@
           <a:p>
             <a:r>
               <a:rPr lang="en-US" sz="1400" b="0" dirty="0"/>
-              <a:t>Mỗi nhóm chọn MỘT vấn đề. Nếu sau 5 phút chưa thống nhất, giao ví dụ xuyên suốt hoặc một ví dụ phụ (viêm phổi thở máy, tổn thương do tì đè, vệ sinh tay, thời gian cửa - kim, mê sảng, sai sót dùng thuốc).</a:t>
+              <a:t>Mỗi nhóm chọn MỘT vấn đề. Nếu sau 5 phút chưa thống nhất, giao ví dụ xuyên suốt hoặc một ví dụ phụ (viêm phổi thở máy, tổn thương do tì đè, vệ sinh tay, thời gian cửa-kim, mê sảng, sai sót dùng thuốc).</a:t>
             </a:r>
           </a:p>
           <a:p>
@@ -4838,13 +4838,13 @@
           <a:p>
             <a:r>
               <a:rPr lang="en-US" sz="1400" b="0" dirty="0"/>
-              <a:t>Giảng viên đi vòng. Dành 7 phút đầu để chắc chắn mỗi nhóm có MỘT vấn đề tập trung - đây là chỗ các nhóm hay mắc kẹt.</a:t>
+              <a:t>Giảng viên đi vòng. Dành 7 phút đầu để chắc chắn mỗi nhóm có MỘT vấn đề tập trung. Đây là chỗ các nhóm hay mắc kẹt.</a:t>
             </a:r>
           </a:p>
           <a:p>
             <a:r>
               <a:rPr lang="en-US" sz="1400" b="0" dirty="0"/>
-              <a:t>Kiểm tra câu hỏi của mỗi nhóm với PICO và FINER trước khi viết mục tiêu. Chữ F đỏ là vấn đề hay gặp nhất - giúp nhóm thu hẹp kết cục, rút ngắn thời gian, hoặc chuyển thành câu hỏi mô tả hay pilot.</a:t>
+              <a:t>Kiểm tra câu hỏi của mỗi nhóm với PICO và FINER trước khi viết mục tiêu. Chữ F đỏ là vấn đề hay gặp nhất. Hãy giúp nhóm thu hẹp kết cục, rút ngắn thời gian, hoặc chuyển thành câu hỏi mô tả hay pilot.</a:t>
             </a:r>
           </a:p>
           <a:p>
@@ -5141,7 +5141,7 @@
           <a:p>
             <a:r>
               <a:rPr lang="en-US" sz="1400" b="0" dirty="0"/>
-              <a:t>Đáp án: 1 - Khả thi: kết cục tử vong cần hơn một nghìn bệnh nhân. 2 - ví dụ 'Ước tính tỷ lệ mới mắc tổn thương do tì đè độ 2 trở lên ở người lớn tại khoa trong 6 tháng'.</a:t>
+              <a:t>Đáp án: 1. Khả thi: kết cục tử vong cần hơn một nghìn bệnh nhân. 2. Ví dụ: 'Ước tính tỷ lệ mới mắc tổn thương do tì đè độ 2 trở lên ở người lớn tại khoa trong 6 tháng'.</a:t>
             </a:r>
           </a:p>
           <a:p>
@@ -5240,7 +5240,7 @@
           <a:p>
             <a:r>
               <a:rPr lang="en-US" sz="1400" b="0" dirty="0"/>
-              <a:t>Danh sách từ đồng nghĩa giúp tìm kiếm PubMed thứ Bảy tuần sau nhanh hơn nhiều - PubMed tìm bằng tiếng Anh.</a:t>
+              <a:t>Danh sách từ đồng nghĩa giúp tìm kiếm PubMed thứ Bảy tuần sau nhanh hơn nhiều, vì PubMed tìm bằng tiếng Anh.</a:t>
             </a:r>
           </a:p>
           <a:p>
@@ -5537,7 +5537,7 @@
           <a:p>
             <a:r>
               <a:rPr lang="en-US" sz="1400" b="0" dirty="0"/>
-              <a:t>Câu hỏi chẩn đoán: xét nghiệm cần đánh giá là I, tiêu chuẩn tham chiếu là C, kết cục là độ chính xác (độ nhạy, độ đặc hiệu - Buổi 4).</a:t>
+              <a:t>Câu hỏi chẩn đoán: xét nghiệm cần đánh giá là I, tiêu chuẩn tham chiếu là C, kết cục là độ chính xác (độ nhạy và độ đặc hiệu, Buổi 4).</a:t>
             </a:r>
           </a:p>
           <a:p>
@@ -5654,7 +5654,7 @@
           <a:p>
             <a:r>
               <a:rPr lang="en-US" sz="1400" b="0" dirty="0"/>
-              <a:t>Câu hỏi không kém hơn (non-inferiority - lựa chọn rẻ hơn hay đơn giản hơn có kém đáng kể không?) có thiết kế riêng - Buổi 3.</a:t>
+              <a:t>Câu hỏi không kém hơn (non-inferiority: lựa chọn rẻ hơn hay đơn giản hơn có kém đáng kể không?) có thiết kế riêng (Buổi 3).</a:t>
             </a:r>
           </a:p>
           <a:p>
@@ -5747,7 +5747,7 @@
           <a:p>
             <a:r>
               <a:rPr lang="en-US" sz="1400" b="0" dirty="0"/>
-              <a:t>Đáp án: 1 Khả thi (quá lớn, quá dài, quá tốn kém; cũng đã có thử nghiệm vitamin D lớn - Mới). 2 Đạo đức (hoãn kháng sinh trong sốc nhiễm khuẩn gây hại - không có cân bằng lâm sàng). 3 Mới (đã có số liệu: đây là câu hỏi audit). 4 Phù hợp (không có cơ chế hợp lý, không tác động tới thực hành).</a:t>
+              <a:t>Đáp án: 1 Khả thi (quá lớn, quá dài, quá tốn kém; cũng đã có thử nghiệm vitamin D lớn, nên cũng trượt tiêu chí Mới). 2 Đạo đức (hoãn kháng sinh trong sốc nhiễm khuẩn gây hại, nên không có cân bằng lâm sàng). 3 Mới (đã có số liệu: đây là câu hỏi audit). 4 Phù hợp (không có cơ chế hợp lý, không tác động tới thực hành).</a:t>
             </a:r>
           </a:p>
           <a:p>
@@ -5945,7 +5945,7 @@
           <a:p>
             <a:r>
               <a:rPr lang="en-US" sz="1400" b="0" dirty="0"/>
-              <a:t>Slide bản quyền - để trên màn hình khi học viên ra về.</a:t>
+              <a:t>Slide bản quyền. Để trên màn hình khi học viên ra về.</a:t>
             </a:r>
           </a:p>
         </p:txBody>
@@ -6026,13 +6026,13 @@
           <a:p>
             <a:r>
               <a:rPr lang="en-US" sz="1400" b="0" dirty="0"/>
-              <a:t>Đi qua bốn thẻ - mỗi thẻ ứng với hai tuần.</a:t>
+              <a:t>Đi qua bốn thẻ, mỗi thẻ ứng với hai tuần.</a:t>
             </a:r>
           </a:p>
           <a:p>
             <a:r>
               <a:rPr lang="en-US" sz="1400" b="0" dirty="0"/>
-              <a:t>Điểm then chốt: mục tiêu là hiểu và diễn giải, không phải tính toán. Giảng viên chạy phân tích; các bạn học cách đọc và viết thành bài báo.</a:t>
+              <a:t>Điểm then chốt: mục tiêu là hiểu và diễn giải, không phải tính toán. Giảng viên chạy phân tích. Các bạn học cách đọc và viết thành bài báo.</a:t>
             </a:r>
           </a:p>
           <a:p>
@@ -6131,13 +6131,13 @@
           <a:p>
             <a:r>
               <a:rPr lang="en-US" sz="1400" b="0" dirty="0"/>
-              <a:t>Cứ 20 phút chúng ta dừng lại để kiểm tra nhanh mức hiểu - nếu lớp chưa theo kịp, chúng ta đi chậm lại. Cuối mỗi buổi có 'slide bổ sung' chỉ dùng khi còn thời gian; các bạn có thể tự đọc ở nhà.</a:t>
+              <a:t>Cứ 20 phút chúng ta dừng lại để kiểm tra nhanh mức hiểu. Nếu lớp chưa theo kịp, chúng ta đi chậm lại. Cuối mỗi buổi có 'slide bổ sung' chỉ dùng khi còn thời gian. Các bạn có thể tự đọc ở nhà.</a:t>
             </a:r>
           </a:p>
           <a:p>
             <a:r>
               <a:rPr lang="en-US" sz="1400" b="0" dirty="0"/>
-              <a:t>Giữ giải lao đúng 15 phút - bắt đầu lại đúng giờ.</a:t>
+              <a:t>Giữ giải lao đúng 15 phút và bắt đầu lại đúng giờ.</a:t>
             </a:r>
           </a:p>
         </p:txBody>
@@ -6311,13 +6311,13 @@
           <a:p>
             <a:r>
               <a:rPr lang="en-US" sz="1400" b="0" dirty="0"/>
-              <a:t>Các nhóm nên trộn bác sĩ, điều dưỡng và dược sĩ - nhiều góc nhìn sẽ cho đề cương tốt hơn.</a:t>
+              <a:t>Các nhóm nên trộn bác sĩ, điều dưỡng và dược sĩ. Nhiều góc nhìn sẽ cho đề cương tốt hơn.</a:t>
             </a:r>
           </a:p>
           <a:p>
             <a:r>
               <a:rPr lang="en-US" sz="1400" b="0" dirty="0"/>
-              <a:t>Vai trò giúp những người ít nói cũng tham gia; nên luân phiên thư ký.</a:t>
+              <a:t>Vai trò giúp những người ít nói cũng tham gia. Nên luân phiên thư ký.</a:t>
             </a:r>
           </a:p>
           <a:p>
@@ -9470,7 +9470,7 @@
                 <a:latin typeface="Segoe UI"/>
                 <a:cs typeface="Segoe UI"/>
               </a:rPr>
-              <a:t>Cấp độ 1  -  Từ câu hỏi lâm sàng đến công bố</a:t>
+              <a:t>Cấp độ 1: Từ câu hỏi lâm sàng đến công bố</a:t>
             </a:r>
           </a:p>
           <a:p>
@@ -9488,7 +9488,7 @@
                 <a:latin typeface="Segoe UI"/>
                 <a:cs typeface="Segoe UI"/>
               </a:rPr>
-              <a:t>8 thứ Bảy  -  mỗi tuần một buổi  -  24 giờ học</a:t>
+              <a:t>8 thứ Bảy, mỗi tuần một buổi, 24 giờ học</a:t>
             </a:r>
           </a:p>
           <a:p>
@@ -10457,7 +10457,7 @@
                 <a:latin typeface="Segoe UI"/>
                 <a:cs typeface="Segoe UI"/>
               </a:rPr>
-              <a:t>24 câu trắc nghiệm - chọn một đáp án cho mỗi câu</a:t>
+              <a:t>24 câu trắc nghiệm, chọn một đáp án cho mỗi câu</a:t>
             </a:r>
           </a:p>
           <a:p>
@@ -12688,7 +12688,7 @@
                 <a:latin typeface="Segoe UI"/>
                 <a:cs typeface="Segoe UI"/>
               </a:rPr>
-              <a:t>Xếp từ yếu nhất đến mạnh nhất - giơ ngón tay khi đếm đến 3</a:t>
+              <a:t>Xếp từ yếu nhất đến mạnh nhất, rồi giơ ngón tay khi đếm đến 3</a:t>
             </a:r>
           </a:p>
         </p:txBody>
@@ -13277,7 +13277,7 @@
                 <a:latin typeface="Segoe UI"/>
                 <a:cs typeface="Segoe UI"/>
               </a:rPr>
-              <a:t>Các loại nghiên cứu</a:t>
+              <a:t>Câu hỏi quyết định loại nghiên cứu</a:t>
             </a:r>
           </a:p>
         </p:txBody>
@@ -13573,7 +13573,7 @@
                 <a:latin typeface="Segoe UI"/>
                 <a:cs typeface="Segoe UI"/>
               </a:rPr>
-              <a:t>Khóa học này giúp bạn đặt câu hỏi đúng cách - trả lời chúng - và công bố câu trả lời.</a:t>
+              <a:t>Khóa học này giúp bạn đặt câu hỏi đúng cách, trả lời chúng và công bố câu trả lời.</a:t>
             </a:r>
           </a:p>
         </p:txBody>
@@ -14048,7 +14048,7 @@
                 <a:latin typeface="Segoe UI"/>
                 <a:cs typeface="Segoe UI"/>
               </a:rPr>
-              <a:t>Cả lớp trả lời to - slide sau có đáp án</a:t>
+              <a:t>Cả lớp trả lời to. Slide sau có đáp án</a:t>
             </a:r>
           </a:p>
         </p:txBody>
@@ -15528,7 +15528,7 @@
                 <a:latin typeface="Segoe UI"/>
                 <a:cs typeface="Segoe UI"/>
               </a:rPr>
-              <a:t>Mỗi câu: nghiên cứu, audit hay QI - và ai phải phê duyệt?</a:t>
+              <a:t>Mỗi câu: nghiên cứu, audit hay QI? Ai phải phê duyệt?</a:t>
             </a:r>
           </a:p>
         </p:txBody>
@@ -16475,7 +16475,7 @@
                 <a:latin typeface="Segoe UI"/>
                 <a:cs typeface="Segoe UI"/>
               </a:rPr>
-              <a:t>Khóa học đi hết con đường - đề cương của nhóm bao gồm trạm 1 đến 6.</a:t>
+              <a:t>Khóa học đi hết con đường. Đề cương của nhóm bao gồm trạm 1 đến 6.</a:t>
             </a:r>
           </a:p>
         </p:txBody>
@@ -17056,7 +17056,7 @@
                 <a:latin typeface="Segoe UI"/>
                 <a:cs typeface="Segoe UI"/>
               </a:rPr>
-              <a:t>40 phút: câu hỏi đến từ đâu, PICO(T) qua các ví dụ, loại câu hỏi, FINER - rồi bài tập theo cặp</a:t>
+              <a:t>40 phút: câu hỏi đến từ đâu, PICO(T) qua các ví dụ, loại câu hỏi và FINER, rồi bài tập theo cặp</a:t>
             </a:r>
           </a:p>
         </p:txBody>
@@ -18545,7 +18545,7 @@
                 <a:latin typeface="Segoe UI"/>
                 <a:cs typeface="Segoe UI"/>
               </a:rPr>
-              <a:t>Năm phần được gắn nhãn - đáp án ở slide sau</a:t>
+              <a:t>Năm phần được gắn nhãn. Đáp án ở slide sau</a:t>
             </a:r>
           </a:p>
         </p:txBody>
@@ -19867,7 +19867,7 @@
                 <a:latin typeface="Segoe UI"/>
                 <a:cs typeface="Segoe UI"/>
               </a:rPr>
-              <a:t>Mơ hồ và trả lời được</a:t>
+              <a:t>Từ băn khoăn mơ hồ đến câu hỏi trả lời được</a:t>
             </a:r>
           </a:p>
         </p:txBody>
@@ -21718,7 +21718,7 @@
                 <a:latin typeface="Segoe UI"/>
                 <a:cs typeface="Segoe UI"/>
               </a:rPr>
-              <a:t>Đột quỵ: thời gian cửa - kim</a:t>
+              <a:t>Đột quỵ: thời gian cửa-kim</a:t>
             </a:r>
           </a:p>
           <a:p>
@@ -22053,7 +22053,7 @@
                 <a:latin typeface="Segoe UI"/>
                 <a:cs typeface="Segoe UI"/>
               </a:rPr>
-              <a:t>20 phút: mục đích, mục tiêu, giả thuyết không và giả thuyết đối - và một bài tập nhanh</a:t>
+              <a:t>20 phút: mục đích, mục tiêu, giả thuyết không và giả thuyết đối, và một bài tập nhanh</a:t>
             </a:r>
           </a:p>
         </p:txBody>
@@ -22496,7 +22496,7 @@
                 <a:latin typeface="Segoe UI"/>
                 <a:cs typeface="Segoe UI"/>
               </a:rPr>
-              <a:t>Khóa học đưa bạn đến đâu</a:t>
+              <a:t>Khóa học này là Cấp độ 1 trong ba cấp độ</a:t>
             </a:r>
           </a:p>
         </p:txBody>
@@ -22603,7 +22603,7 @@
                 <a:latin typeface="Segoe UI"/>
                 <a:cs typeface="Segoe UI"/>
               </a:rPr>
-              <a:t>Cấp độ 1 là khóa học này; Cấp độ 2 là thực hành phân tích bằng R; Cấp độ 3 là phương pháp nâng cao.</a:t>
+              <a:t>Cấp độ 1 là khóa học này, Cấp độ 2 là thực hành phân tích bằng R, Cấp độ 3 là phương pháp nâng cao.</a:t>
             </a:r>
           </a:p>
         </p:txBody>
@@ -23153,7 +23153,7 @@
                 <a:latin typeface="Segoe UI"/>
                 <a:cs typeface="Segoe UI"/>
               </a:rPr>
-              <a:t>Ta kiểm định H0. Dữ liệu có thể bác bỏ hoặc chưa bác bỏ được - không bao giờ chứng minh H0.</a:t>
+              <a:t>Ta kiểm định H0. Dữ liệu có thể bác bỏ hoặc chưa bác bỏ được, nhưng không bao giờ chứng minh H0.</a:t>
             </a:r>
           </a:p>
         </p:txBody>
@@ -23540,7 +23540,7 @@
                 <a:latin typeface="Segoe UI"/>
                 <a:cs typeface="Segoe UI"/>
               </a:rPr>
-              <a:t>Viết H0 và H1 cho mục tiêu chính - hoặc 'mô tả: không cần giả thuyết'</a:t>
+              <a:t>Viết H0 và H1 cho mục tiêu chính (hoặc 'mô tả: không cần giả thuyết')</a:t>
             </a:r>
           </a:p>
           <a:p>
@@ -23783,7 +23783,7 @@
                 <a:latin typeface="Segoe UI"/>
                 <a:cs typeface="Segoe UI"/>
               </a:rPr>
-              <a:t>Bài tập 3 trong phiếu - đáp án mẫu ở slide sau</a:t>
+              <a:t>Bài tập 3 trong phiếu. Đáp án mẫu ở slide sau</a:t>
             </a:r>
           </a:p>
         </p:txBody>
@@ -24734,7 +24734,7 @@
                 <a:latin typeface="Segoe UI"/>
                 <a:cs typeface="Segoe UI"/>
               </a:rPr>
-              <a:t>30 phút làm việc nhóm - khởi đầu đề cương nghiên cứu</a:t>
+              <a:t>30 phút làm việc nhóm: khởi đầu đề cương nghiên cứu</a:t>
             </a:r>
           </a:p>
         </p:txBody>
@@ -25936,7 +25936,7 @@
                           </a:solidFill>
                           <a:latin typeface="Segoe UI"/>
                         </a:rPr>
-                        <a:t>Không khác biệt / có khác biệt - ta kiểm định H0</a:t>
+                        <a:t>Không khác biệt / có khác biệt (ta kiểm định H0)</a:t>
                       </a:r>
                     </a:p>
                   </a:txBody>
@@ -27958,7 +27958,7 @@
                 <a:latin typeface="Segoe UI"/>
                 <a:cs typeface="Segoe UI"/>
               </a:rPr>
-              <a:t>Slide bổ sung — Buổi 1</a:t>
+              <a:t>Slide bổ sung: Buổi 1</a:t>
             </a:r>
           </a:p>
           <a:p>
@@ -28692,7 +28692,7 @@
                 <a:latin typeface="Segoe UI"/>
                 <a:cs typeface="Segoe UI"/>
               </a:rPr>
-              <a:t>Chữ cái thay đổi; nguyên tắc - nói rõ ràng - vẫn giữ nguyên.</a:t>
+              <a:t>Chữ cái thay đổi, nhưng nguyên tắc vẫn giữ nguyên: nói rõ ràng.</a:t>
             </a:r>
           </a:p>
         </p:txBody>
@@ -31127,7 +31127,7 @@
                 <a:latin typeface="Segoe UI"/>
                 <a:cs typeface="Segoe UI"/>
               </a:rPr>
-              <a:t>Hiểu và diễn giải - bạn sẽ không phải tự tính toán.</a:t>
+              <a:t>Hiểu và diễn giải: bạn sẽ không phải tự tính toán.</a:t>
             </a:r>
           </a:p>
         </p:txBody>
@@ -31515,7 +31515,7 @@
                 <a:latin typeface="Segoe UI"/>
                 <a:cs typeface="Segoe UI"/>
               </a:rPr>
-              <a:t>Xây dựng đề cương</a:t>
+              <a:t>Xây dựng đề cương từng phần một</a:t>
             </a:r>
           </a:p>
         </p:txBody>
@@ -31978,7 +31978,7 @@
                 <a:latin typeface="Segoe UI"/>
                 <a:cs typeface="Segoe UI"/>
               </a:rPr>
-              <a:t>Thống nhất các vai trò bên cạnh - có thể luân phiên mỗi tuần</a:t>
+              <a:t>Thống nhất các vai trò bên cạnh (có thể luân phiên mỗi tuần)</a:t>
             </a:r>
           </a:p>
           <a:p>
@@ -32076,7 +32076,7 @@
                 <a:latin typeface="Segoe UI"/>
                 <a:cs typeface="Segoe UI"/>
               </a:rPr>
-              <a:t>Điều phối - giúp mọi người cùng tham gia</a:t>
+              <a:t>Điều phối: giúp mọi người cùng tham gia</a:t>
             </a:r>
           </a:p>
           <a:p>
@@ -32098,7 +32098,7 @@
                 <a:latin typeface="Segoe UI"/>
                 <a:cs typeface="Segoe UI"/>
               </a:rPr>
-              <a:t>Thư ký - điền vào mẫu</a:t>
+              <a:t>Thư ký: điền vào mẫu</a:t>
             </a:r>
           </a:p>
           <a:p>

--- a/vi/files/slides/Session_1_VN.pptx
+++ b/vi/files/slides/Session_1_VN.pptx
@@ -9425,8 +9425,8 @@
                 <a:solidFill>
                   <a:srgbClr val="006666"/>
                 </a:solidFill>
-                <a:latin typeface="Segoe UI"/>
-                <a:cs typeface="Segoe UI"/>
+                <a:latin typeface="Arial"/>
+                <a:cs typeface="Arial"/>
               </a:rPr>
               <a:t>Nền tảng Nghiên cứu Lâm sàng</a:t>
             </a:r>
@@ -9467,8 +9467,8 @@
                 <a:solidFill>
                   <a:srgbClr val="000000"/>
                 </a:solidFill>
-                <a:latin typeface="Segoe UI"/>
-                <a:cs typeface="Segoe UI"/>
+                <a:latin typeface="Arial"/>
+                <a:cs typeface="Arial"/>
               </a:rPr>
               <a:t>Cấp độ 1: Từ câu hỏi lâm sàng đến công bố</a:t>
             </a:r>
@@ -9485,8 +9485,8 @@
                 <a:solidFill>
                   <a:srgbClr val="000000"/>
                 </a:solidFill>
-                <a:latin typeface="Segoe UI"/>
-                <a:cs typeface="Segoe UI"/>
+                <a:latin typeface="Arial"/>
+                <a:cs typeface="Arial"/>
               </a:rPr>
               <a:t>8 thứ Bảy, mỗi tuần một buổi, 24 giờ học</a:t>
             </a:r>
@@ -9503,8 +9503,8 @@
                 <a:solidFill>
                   <a:srgbClr val="000000"/>
                 </a:solidFill>
-                <a:latin typeface="Segoe UI"/>
-                <a:cs typeface="Segoe UI"/>
+                <a:latin typeface="Arial"/>
+                <a:cs typeface="Arial"/>
               </a:rPr>
               <a:t>Giảng viên: Vương Mỹ Lượng &amp; Bernard Osang'ir</a:t>
             </a:r>
@@ -9542,8 +9542,8 @@
                 <a:solidFill>
                   <a:srgbClr val="000000"/>
                 </a:solidFill>
-                <a:latin typeface="Segoe UI"/>
-                <a:cs typeface="Segoe UI"/>
+                <a:latin typeface="Arial"/>
+                <a:cs typeface="Arial"/>
               </a:rPr>
               <a:t>Date: [dd/mm/yyyy]</a:t>
             </a:r>
@@ -9649,8 +9649,8 @@
                 <a:solidFill>
                   <a:srgbClr val="0D7377"/>
                 </a:solidFill>
-                <a:latin typeface="Segoe UI"/>
-                <a:cs typeface="Segoe UI"/>
+                <a:latin typeface="Arial"/>
+                <a:cs typeface="Arial"/>
               </a:rPr>
               <a:t>Chúng ta cùng học như thế nào</a:t>
             </a:r>
@@ -9720,8 +9720,8 @@
                 <a:solidFill>
                   <a:srgbClr val="FFFFFF"/>
                 </a:solidFill>
-                <a:latin typeface="Segoe UI"/>
-                <a:cs typeface="Segoe UI"/>
+                <a:latin typeface="Arial"/>
+                <a:cs typeface="Arial"/>
               </a:rPr>
               <a:t>Cứ hỏi</a:t>
             </a:r>
@@ -9769,8 +9769,8 @@
                 <a:solidFill>
                   <a:srgbClr val="000000"/>
                 </a:solidFill>
-                <a:latin typeface="Segoe UI"/>
-                <a:cs typeface="Segoe UI"/>
+                <a:latin typeface="Arial"/>
+                <a:cs typeface="Arial"/>
               </a:rPr>
               <a:t>Không có câu hỏi nào ngớ ngẩn</a:t>
             </a:r>
@@ -9790,8 +9790,8 @@
                 <a:solidFill>
                   <a:srgbClr val="000000"/>
                 </a:solidFill>
-                <a:latin typeface="Segoe UI"/>
-                <a:cs typeface="Segoe UI"/>
+                <a:latin typeface="Arial"/>
+                <a:cs typeface="Arial"/>
               </a:rPr>
               <a:t>Nếu bạn chưa hiểu, người khác cũng vậy</a:t>
             </a:r>
@@ -9833,8 +9833,8 @@
                 <a:solidFill>
                   <a:srgbClr val="FFFFFF"/>
                 </a:solidFill>
-                <a:latin typeface="Segoe UI"/>
-                <a:cs typeface="Segoe UI"/>
+                <a:latin typeface="Arial"/>
+                <a:cs typeface="Arial"/>
               </a:rPr>
               <a:t>Đi chậm</a:t>
             </a:r>
@@ -9882,8 +9882,8 @@
                 <a:solidFill>
                   <a:srgbClr val="000000"/>
                 </a:solidFill>
-                <a:latin typeface="Segoe UI"/>
-                <a:cs typeface="Segoe UI"/>
+                <a:latin typeface="Arial"/>
+                <a:cs typeface="Arial"/>
               </a:rPr>
               <a:t>Chúng ta kiểm tra mức hiểu thường xuyên</a:t>
             </a:r>
@@ -9903,8 +9903,8 @@
                 <a:solidFill>
                   <a:srgbClr val="000000"/>
                 </a:solidFill>
-                <a:latin typeface="Segoe UI"/>
-                <a:cs typeface="Segoe UI"/>
+                <a:latin typeface="Arial"/>
+                <a:cs typeface="Arial"/>
               </a:rPr>
               <a:t>Slide bổ sung chỉ khi còn thời gian</a:t>
             </a:r>
@@ -9946,8 +9946,8 @@
                 <a:solidFill>
                   <a:srgbClr val="FFFFFF"/>
                 </a:solidFill>
-                <a:latin typeface="Segoe UI"/>
-                <a:cs typeface="Segoe UI"/>
+                <a:latin typeface="Arial"/>
+                <a:cs typeface="Arial"/>
               </a:rPr>
               <a:t>Mang khoa phòng vào</a:t>
             </a:r>
@@ -9995,8 +9995,8 @@
                 <a:solidFill>
                   <a:srgbClr val="000000"/>
                 </a:solidFill>
-                <a:latin typeface="Segoe UI"/>
-                <a:cs typeface="Segoe UI"/>
+                <a:latin typeface="Arial"/>
+                <a:cs typeface="Arial"/>
               </a:rPr>
               <a:t>Dùng ví dụ từ thực hành của bạn</a:t>
             </a:r>
@@ -10016,8 +10016,8 @@
                 <a:solidFill>
                   <a:srgbClr val="000000"/>
                 </a:solidFill>
-                <a:latin typeface="Segoe UI"/>
-                <a:cs typeface="Segoe UI"/>
+                <a:latin typeface="Arial"/>
+                <a:cs typeface="Arial"/>
               </a:rPr>
               <a:t>Kinh nghiệm của bạn là nguyên liệu</a:t>
             </a:r>
@@ -10059,8 +10059,8 @@
                 <a:solidFill>
                   <a:srgbClr val="FFFFFF"/>
                 </a:solidFill>
-                <a:latin typeface="Segoe UI"/>
-                <a:cs typeface="Segoe UI"/>
+                <a:latin typeface="Arial"/>
+                <a:cs typeface="Arial"/>
               </a:rPr>
               <a:t>Tôn trọng thời gian</a:t>
             </a:r>
@@ -10108,8 +10108,8 @@
                 <a:solidFill>
                   <a:srgbClr val="000000"/>
                 </a:solidFill>
-                <a:latin typeface="Segoe UI"/>
-                <a:cs typeface="Segoe UI"/>
+                <a:latin typeface="Arial"/>
+                <a:cs typeface="Arial"/>
               </a:rPr>
               <a:t>Bắt đầu và kết thúc đúng giờ</a:t>
             </a:r>
@@ -10129,8 +10129,8 @@
                 <a:solidFill>
                   <a:srgbClr val="000000"/>
                 </a:solidFill>
-                <a:latin typeface="Segoe UI"/>
-                <a:cs typeface="Segoe UI"/>
+                <a:latin typeface="Arial"/>
+                <a:cs typeface="Arial"/>
               </a:rPr>
               <a:t>Tắt chuông điện thoại, nghỉ đúng giờ nghỉ</a:t>
             </a:r>
@@ -10167,7 +10167,7 @@
                     <a:lumMod val="50000"/>
                   </a:schemeClr>
                 </a:solidFill>
-                <a:latin typeface="Verdana"/>
+                <a:latin typeface="Arial"/>
               </a:rPr>
               <a:t>Neudata | #ClearDataClearImpact</a:t>
             </a:r>
@@ -10297,8 +10297,8 @@
                 <a:solidFill>
                   <a:srgbClr val="0D7377"/>
                 </a:solidFill>
-                <a:latin typeface="Segoe UI"/>
-                <a:cs typeface="Segoe UI"/>
+                <a:latin typeface="Arial"/>
+                <a:cs typeface="Arial"/>
               </a:rPr>
               <a:t>Bài kiểm tra đầu khóa</a:t>
             </a:r>
@@ -10368,8 +10368,8 @@
                 <a:solidFill>
                   <a:srgbClr val="FFFFFF"/>
                 </a:solidFill>
-                <a:latin typeface="Segoe UI"/>
-                <a:cs typeface="Segoe UI"/>
+                <a:latin typeface="Arial"/>
+                <a:cs typeface="Arial"/>
               </a:rPr>
               <a:t>CÂU HỎI NHANH   |   15 phút</a:t>
             </a:r>
@@ -10406,25 +10406,19 @@
               <a:spcBef>
                 <a:spcPts val="450"/>
               </a:spcBef>
-              <a:buNone/>
-            </a:pPr>
-            <a:r>
-              <a:rPr lang="en-US" sz="1650" b="1" dirty="0">
-                <a:solidFill>
-                  <a:srgbClr val="6C3483"/>
-                </a:solidFill>
-                <a:latin typeface="Segoe UI"/>
-                <a:cs typeface="Segoe UI"/>
-              </a:rPr>
-              <a:t>1.  </a:t>
-            </a:r>
+              <a:buClr>
+                <a:srgbClr val="6C3483"/>
+              </a:buClr>
+              <a:buFont typeface="Arial"/>
+              <a:buChar char="•"/>
+            </a:pPr>
             <a:r>
               <a:rPr lang="en-US" sz="1650" dirty="0">
                 <a:solidFill>
                   <a:srgbClr val="000000"/>
                 </a:solidFill>
-                <a:latin typeface="Segoe UI"/>
-                <a:cs typeface="Segoe UI"/>
+                <a:latin typeface="Arial"/>
+                <a:cs typeface="Arial"/>
               </a:rPr>
               <a:t>Làm cá nhân, không thảo luận, không dùng điện thoại (trừ biểu mẫu trực tuyến)</a:t>
             </a:r>
@@ -10437,25 +10431,19 @@
               <a:spcBef>
                 <a:spcPts val="450"/>
               </a:spcBef>
-              <a:buNone/>
-            </a:pPr>
-            <a:r>
-              <a:rPr lang="en-US" sz="1650" b="1" dirty="0">
-                <a:solidFill>
-                  <a:srgbClr val="6C3483"/>
-                </a:solidFill>
-                <a:latin typeface="Segoe UI"/>
-                <a:cs typeface="Segoe UI"/>
-              </a:rPr>
-              <a:t>2.  </a:t>
-            </a:r>
+              <a:buClr>
+                <a:srgbClr val="6C3483"/>
+              </a:buClr>
+              <a:buFont typeface="Arial"/>
+              <a:buChar char="•"/>
+            </a:pPr>
             <a:r>
               <a:rPr lang="en-US" sz="1650" dirty="0">
                 <a:solidFill>
                   <a:srgbClr val="000000"/>
                 </a:solidFill>
-                <a:latin typeface="Segoe UI"/>
-                <a:cs typeface="Segoe UI"/>
+                <a:latin typeface="Arial"/>
+                <a:cs typeface="Arial"/>
               </a:rPr>
               <a:t>24 câu trắc nghiệm, chọn một đáp án cho mỗi câu</a:t>
             </a:r>
@@ -10468,25 +10456,19 @@
               <a:spcBef>
                 <a:spcPts val="450"/>
               </a:spcBef>
-              <a:buNone/>
-            </a:pPr>
-            <a:r>
-              <a:rPr lang="en-US" sz="1650" b="1" dirty="0">
-                <a:solidFill>
-                  <a:srgbClr val="6C3483"/>
-                </a:solidFill>
-                <a:latin typeface="Segoe UI"/>
-                <a:cs typeface="Segoe UI"/>
-              </a:rPr>
-              <a:t>3.  </a:t>
-            </a:r>
+              <a:buClr>
+                <a:srgbClr val="6C3483"/>
+              </a:buClr>
+              <a:buFont typeface="Arial"/>
+              <a:buChar char="•"/>
+            </a:pPr>
             <a:r>
               <a:rPr lang="en-US" sz="1650" dirty="0">
                 <a:solidFill>
                   <a:srgbClr val="000000"/>
                 </a:solidFill>
-                <a:latin typeface="Segoe UI"/>
-                <a:cs typeface="Segoe UI"/>
+                <a:latin typeface="Arial"/>
+                <a:cs typeface="Arial"/>
               </a:rPr>
               <a:t>Nếu không chắc, hãy đoán: đây không phải kỳ thi</a:t>
             </a:r>
@@ -10499,25 +10481,19 @@
               <a:spcBef>
                 <a:spcPts val="450"/>
               </a:spcBef>
-              <a:buNone/>
-            </a:pPr>
-            <a:r>
-              <a:rPr lang="en-US" sz="1650" b="1" dirty="0">
-                <a:solidFill>
-                  <a:srgbClr val="6C3483"/>
-                </a:solidFill>
-                <a:latin typeface="Segoe UI"/>
-                <a:cs typeface="Segoe UI"/>
-              </a:rPr>
-              <a:t>4.  </a:t>
-            </a:r>
+              <a:buClr>
+                <a:srgbClr val="6C3483"/>
+              </a:buClr>
+              <a:buFont typeface="Arial"/>
+              <a:buChar char="•"/>
+            </a:pPr>
             <a:r>
               <a:rPr lang="en-US" sz="1650" dirty="0">
                 <a:solidFill>
                   <a:srgbClr val="000000"/>
                 </a:solidFill>
-                <a:latin typeface="Segoe UI"/>
-                <a:cs typeface="Segoe UI"/>
+                <a:latin typeface="Arial"/>
+                <a:cs typeface="Arial"/>
               </a:rPr>
               <a:t>Chỉ ghi mã số học viên, không ghi tên</a:t>
             </a:r>
@@ -10561,8 +10537,8 @@
                 <a:solidFill>
                   <a:srgbClr val="6C3483"/>
                 </a:solidFill>
-                <a:latin typeface="Segoe UI"/>
-                <a:cs typeface="Segoe UI"/>
+                <a:latin typeface="Arial"/>
+                <a:cs typeface="Arial"/>
               </a:rPr>
               <a:t>Vì sao kiểm tra bây giờ?</a:t>
             </a:r>
@@ -10583,8 +10559,8 @@
                 <a:solidFill>
                   <a:srgbClr val="000000"/>
                 </a:solidFill>
-                <a:latin typeface="Segoe UI"/>
-                <a:cs typeface="Segoe UI"/>
+                <a:latin typeface="Arial"/>
+                <a:cs typeface="Arial"/>
               </a:rPr>
               <a:t>Biết lớp đang bắt đầu từ đâu</a:t>
             </a:r>
@@ -10605,8 +10581,8 @@
                 <a:solidFill>
                   <a:srgbClr val="000000"/>
                 </a:solidFill>
-                <a:latin typeface="Segoe UI"/>
-                <a:cs typeface="Segoe UI"/>
+                <a:latin typeface="Arial"/>
+                <a:cs typeface="Arial"/>
               </a:rPr>
               <a:t>Cùng bài này ở Buổi 8</a:t>
             </a:r>
@@ -10627,8 +10603,8 @@
                 <a:solidFill>
                   <a:srgbClr val="000000"/>
                 </a:solidFill>
-                <a:latin typeface="Segoe UI"/>
-                <a:cs typeface="Segoe UI"/>
+                <a:latin typeface="Arial"/>
+                <a:cs typeface="Arial"/>
               </a:rPr>
               <a:t>Chúng tôi đánh giá khóa học, không đánh giá bạn</a:t>
             </a:r>
@@ -10674,8 +10650,8 @@
                 <a:solidFill>
                   <a:srgbClr val="6C3483"/>
                 </a:solidFill>
-                <a:latin typeface="Segoe UI"/>
-                <a:cs typeface="Segoe UI"/>
+                <a:latin typeface="Arial"/>
+                <a:cs typeface="Arial"/>
               </a:rPr>
               <a:t>SẢN PHẨM   </a:t>
             </a:r>
@@ -10684,8 +10660,8 @@
                 <a:solidFill>
                   <a:srgbClr val="000000"/>
                 </a:solidFill>
-                <a:latin typeface="Segoe UI"/>
-                <a:cs typeface="Segoe UI"/>
+                <a:latin typeface="Arial"/>
+                <a:cs typeface="Arial"/>
               </a:rPr>
               <a:t>Nộp bài (chỉ ghi mã số học viên)</a:t>
             </a:r>
@@ -10722,7 +10698,7 @@
                     <a:lumMod val="50000"/>
                   </a:schemeClr>
                 </a:solidFill>
-                <a:latin typeface="Verdana"/>
+                <a:latin typeface="Arial"/>
               </a:rPr>
               <a:t>Neudata | #ClearDataClearImpact</a:t>
             </a:r>
@@ -10852,8 +10828,8 @@
                 <a:solidFill>
                   <a:srgbClr val="0D7377"/>
                 </a:solidFill>
-                <a:latin typeface="Segoe UI"/>
-                <a:cs typeface="Segoe UI"/>
+                <a:latin typeface="Arial"/>
+                <a:cs typeface="Arial"/>
               </a:rPr>
               <a:t>Buổi 1 · Hỏi: từ vấn đề lâm sàng đến câu hỏi nghiên cứu</a:t>
             </a:r>
@@ -10920,8 +10896,8 @@
                 <a:solidFill>
                   <a:srgbClr val="0070C0"/>
                 </a:solidFill>
-                <a:latin typeface="Segoe UI"/>
-                <a:cs typeface="Segoe UI"/>
+                <a:latin typeface="Arial"/>
+                <a:cs typeface="Arial"/>
               </a:rPr>
               <a:t>Tuần 1 · Thứ Bảy</a:t>
             </a:r>
@@ -10945,8 +10921,8 @@
                 <a:solidFill>
                   <a:srgbClr val="000000"/>
                 </a:solidFill>
-                <a:latin typeface="Segoe UI"/>
-                <a:cs typeface="Segoe UI"/>
+                <a:latin typeface="Arial"/>
+                <a:cs typeface="Arial"/>
               </a:rPr>
               <a:t>1.1  Vì sao cần nghiên cứu? Bằng chứng, các loại nghiên cứu, nghiên cứu và audit, con đường đến công bố</a:t>
             </a:r>
@@ -10964,8 +10940,8 @@
                 <a:solidFill>
                   <a:srgbClr val="000000"/>
                 </a:solidFill>
-                <a:latin typeface="Segoe UI"/>
-                <a:cs typeface="Segoe UI"/>
+                <a:latin typeface="Arial"/>
+                <a:cs typeface="Arial"/>
               </a:rPr>
               <a:t>Giải lao</a:t>
             </a:r>
@@ -10983,8 +10959,8 @@
                 <a:solidFill>
                   <a:srgbClr val="000000"/>
                 </a:solidFill>
-                <a:latin typeface="Segoe UI"/>
-                <a:cs typeface="Segoe UI"/>
+                <a:latin typeface="Arial"/>
+                <a:cs typeface="Arial"/>
               </a:rPr>
               <a:t>1.2  Từ vấn đề đến câu hỏi: PICO(T) qua các ví dụ, FINER (bài tập theo cặp)</a:t>
             </a:r>
@@ -11002,8 +10978,8 @@
                 <a:solidFill>
                   <a:srgbClr val="000000"/>
                 </a:solidFill>
-                <a:latin typeface="Segoe UI"/>
-                <a:cs typeface="Segoe UI"/>
+                <a:latin typeface="Arial"/>
+                <a:cs typeface="Arial"/>
               </a:rPr>
               <a:t>1.3  Mục đích, mục tiêu và giả thuyết (bài tập nhanh)</a:t>
             </a:r>
@@ -11021,8 +10997,8 @@
                 <a:solidFill>
                   <a:srgbClr val="000000"/>
                 </a:solidFill>
-                <a:latin typeface="Segoe UI"/>
-                <a:cs typeface="Segoe UI"/>
+                <a:latin typeface="Arial"/>
+                <a:cs typeface="Arial"/>
               </a:rPr>
               <a:t>Xây dựng đề cương 1: chủ đề, PICO, câu hỏi, FINER, mục đích và mục tiêu</a:t>
             </a:r>
@@ -11040,8 +11016,8 @@
                 <a:solidFill>
                   <a:srgbClr val="000000"/>
                 </a:solidFill>
-                <a:latin typeface="Segoe UI"/>
-                <a:cs typeface="Segoe UI"/>
+                <a:latin typeface="Arial"/>
+                <a:cs typeface="Arial"/>
               </a:rPr>
               <a:t>Tổng kết: từ khóa, ôn tập, bài về nhà cho thứ Bảy tuần sau</a:t>
             </a:r>
@@ -11078,7 +11054,7 @@
                     <a:lumMod val="50000"/>
                   </a:schemeClr>
                 </a:solidFill>
-                <a:latin typeface="Verdana"/>
+                <a:latin typeface="Arial"/>
               </a:rPr>
               <a:t>Neudata | #ClearDataClearImpact</a:t>
             </a:r>
@@ -11208,8 +11184,8 @@
                 <a:solidFill>
                   <a:srgbClr val="0D7377"/>
                 </a:solidFill>
-                <a:latin typeface="Segoe UI"/>
-                <a:cs typeface="Segoe UI"/>
+                <a:latin typeface="Arial"/>
+                <a:cs typeface="Arial"/>
               </a:rPr>
               <a:t>1.1  Vì sao cần nghiên cứu?</a:t>
             </a:r>
@@ -11278,8 +11254,8 @@
                 <a:solidFill>
                   <a:srgbClr val="0D7377"/>
                 </a:solidFill>
-                <a:latin typeface="Segoe UI"/>
-                <a:cs typeface="Segoe UI"/>
+                <a:latin typeface="Arial"/>
+                <a:cs typeface="Arial"/>
               </a:rPr>
               <a:t>Vì sao cần nghiên cứu khi chúng ta đã có kinh nghiệm?</a:t>
             </a:r>
@@ -11296,8 +11272,8 @@
                 <a:solidFill>
                   <a:srgbClr val="595959"/>
                 </a:solidFill>
-                <a:latin typeface="Segoe UI"/>
-                <a:cs typeface="Segoe UI"/>
+                <a:latin typeface="Arial"/>
+                <a:cs typeface="Arial"/>
               </a:rPr>
               <a:t>35 phút: bằng chứng, tháp bằng chứng, các loại nghiên cứu, nghiên cứu và audit, con đường đến công bố</a:t>
             </a:r>
@@ -11334,7 +11310,7 @@
                     <a:lumMod val="50000"/>
                   </a:schemeClr>
                 </a:solidFill>
-                <a:latin typeface="Verdana"/>
+                <a:latin typeface="Arial"/>
               </a:rPr>
               <a:t>Neudata | #ClearDataClearImpact</a:t>
             </a:r>
@@ -11464,8 +11440,8 @@
                 <a:solidFill>
                   <a:srgbClr val="0D7377"/>
                 </a:solidFill>
-                <a:latin typeface="Segoe UI"/>
-                <a:cs typeface="Segoe UI"/>
+                <a:latin typeface="Arial"/>
+                <a:cs typeface="Arial"/>
               </a:rPr>
               <a:t>Giai thoại và bằng chứng</a:t>
             </a:r>
@@ -11561,8 +11537,8 @@
                 <a:solidFill>
                   <a:srgbClr val="FFFFFF"/>
                 </a:solidFill>
-                <a:latin typeface="Segoe UI"/>
-                <a:cs typeface="Segoe UI"/>
+                <a:latin typeface="Arial"/>
+                <a:cs typeface="Arial"/>
               </a:rPr>
               <a:t>THÔNG ĐIỆP CHÍNH   </a:t>
             </a:r>
@@ -11571,8 +11547,8 @@
                 <a:solidFill>
                   <a:srgbClr val="FFFFFF"/>
                 </a:solidFill>
-                <a:latin typeface="Segoe UI"/>
-                <a:cs typeface="Segoe UI"/>
+                <a:latin typeface="Arial"/>
+                <a:cs typeface="Arial"/>
               </a:rPr>
               <a:t>Kinh nghiệm gợi ra câu hỏi. So sánh công bằng trên nhiều bệnh nhân trả lời câu hỏi.</a:t>
             </a:r>
@@ -11609,7 +11585,7 @@
                     <a:lumMod val="50000"/>
                   </a:schemeClr>
                 </a:solidFill>
-                <a:latin typeface="Verdana"/>
+                <a:latin typeface="Arial"/>
               </a:rPr>
               <a:t>Neudata | #ClearDataClearImpact</a:t>
             </a:r>
@@ -11739,8 +11715,8 @@
                 <a:solidFill>
                   <a:srgbClr val="0D7377"/>
                 </a:solidFill>
-                <a:latin typeface="Segoe UI"/>
-                <a:cs typeface="Segoe UI"/>
+                <a:latin typeface="Arial"/>
+                <a:cs typeface="Arial"/>
               </a:rPr>
               <a:t>Vì sao kinh nghiệm của một khoa là chưa đủ</a:t>
             </a:r>
@@ -11836,8 +11812,8 @@
                 <a:solidFill>
                   <a:srgbClr val="FFFFFF"/>
                 </a:solidFill>
-                <a:latin typeface="Segoe UI"/>
-                <a:cs typeface="Segoe UI"/>
+                <a:latin typeface="Arial"/>
+                <a:cs typeface="Arial"/>
               </a:rPr>
               <a:t>THÔNG ĐIỆP CHÍNH   </a:t>
             </a:r>
@@ -11846,8 +11822,8 @@
                 <a:solidFill>
                   <a:srgbClr val="FFFFFF"/>
                 </a:solidFill>
-                <a:latin typeface="Segoe UI"/>
-                <a:cs typeface="Segoe UI"/>
+                <a:latin typeface="Arial"/>
+                <a:cs typeface="Arial"/>
               </a:rPr>
               <a:t>Số nhỏ dao động do ngẫu nhiên. So sánh lớn và công bằng mới ổn định.</a:t>
             </a:r>
@@ -11884,7 +11860,7 @@
                     <a:lumMod val="50000"/>
                   </a:schemeClr>
                 </a:solidFill>
-                <a:latin typeface="Verdana"/>
+                <a:latin typeface="Arial"/>
               </a:rPr>
               <a:t>Neudata | #ClearDataClearImpact</a:t>
             </a:r>
@@ -12014,8 +11990,8 @@
                 <a:solidFill>
                   <a:srgbClr val="0D7377"/>
                 </a:solidFill>
-                <a:latin typeface="Segoe UI"/>
-                <a:cs typeface="Segoe UI"/>
+                <a:latin typeface="Arial"/>
+                <a:cs typeface="Arial"/>
               </a:rPr>
               <a:t>Tháp bằng chứng</a:t>
             </a:r>
@@ -12081,8 +12057,8 @@
                 <a:solidFill>
                   <a:srgbClr val="0D7377"/>
                 </a:solidFill>
-                <a:latin typeface="Segoe UI"/>
-                <a:cs typeface="Segoe UI"/>
+                <a:latin typeface="Arial"/>
+                <a:cs typeface="Arial"/>
               </a:rPr>
               <a:t>Cách đọc</a:t>
             </a:r>
@@ -12100,8 +12076,8 @@
                 <a:solidFill>
                   <a:srgbClr val="000000"/>
                 </a:solidFill>
-                <a:latin typeface="Segoe UI"/>
-                <a:cs typeface="Segoe UI"/>
+                <a:latin typeface="Arial"/>
+                <a:cs typeface="Arial"/>
               </a:rPr>
               <a:t>Càng cao = càng ít nguy cơ sai lệch với câu hỏi về hiệu quả điều trị</a:t>
             </a:r>
@@ -12119,8 +12095,8 @@
                 <a:solidFill>
                   <a:srgbClr val="000000"/>
                 </a:solidFill>
-                <a:latin typeface="Segoe UI"/>
-                <a:cs typeface="Segoe UI"/>
+                <a:latin typeface="Arial"/>
+                <a:cs typeface="Arial"/>
               </a:rPr>
               <a:t>Bài báo 1 (Boulet) là RCT; Bài báo 2 (Hyun) là đoàn hệ</a:t>
             </a:r>
@@ -12138,8 +12114,8 @@
                 <a:solidFill>
                   <a:srgbClr val="000000"/>
                 </a:solidFill>
-                <a:latin typeface="Segoe UI"/>
-                <a:cs typeface="Segoe UI"/>
+                <a:latin typeface="Arial"/>
+                <a:cs typeface="Arial"/>
               </a:rPr>
               <a:t>Đoàn hệ làm tốt có thể hơn RCT làm kém</a:t>
             </a:r>
@@ -12157,8 +12133,8 @@
                 <a:solidFill>
                   <a:srgbClr val="000000"/>
                 </a:solidFill>
-                <a:latin typeface="Segoe UI"/>
-                <a:cs typeface="Segoe UI"/>
+                <a:latin typeface="Arial"/>
+                <a:cs typeface="Arial"/>
               </a:rPr>
               <a:t>Câu hỏi mô tả không cần RCT</a:t>
             </a:r>
@@ -12226,8 +12202,8 @@
                 <a:solidFill>
                   <a:srgbClr val="FFFFFF"/>
                 </a:solidFill>
-                <a:latin typeface="Segoe UI"/>
-                <a:cs typeface="Segoe UI"/>
+                <a:latin typeface="Arial"/>
+                <a:cs typeface="Arial"/>
               </a:rPr>
               <a:t>THÔNG ĐIỆP CHÍNH   </a:t>
             </a:r>
@@ -12236,8 +12212,8 @@
                 <a:solidFill>
                   <a:srgbClr val="FFFFFF"/>
                 </a:solidFill>
-                <a:latin typeface="Segoe UI"/>
-                <a:cs typeface="Segoe UI"/>
+                <a:latin typeface="Arial"/>
+                <a:cs typeface="Arial"/>
               </a:rPr>
               <a:t>Tháp xếp hạng thiết kế, không phải từng bài báo: vẫn phải kiểm tra chất lượng.</a:t>
             </a:r>
@@ -12274,7 +12250,7 @@
                     <a:lumMod val="50000"/>
                   </a:schemeClr>
                 </a:solidFill>
-                <a:latin typeface="Verdana"/>
+                <a:latin typeface="Arial"/>
               </a:rPr>
               <a:t>Neudata | #ClearDataClearImpact</a:t>
             </a:r>
@@ -12404,8 +12380,8 @@
                 <a:solidFill>
                   <a:srgbClr val="0D7377"/>
                 </a:solidFill>
-                <a:latin typeface="Segoe UI"/>
-                <a:cs typeface="Segoe UI"/>
+                <a:latin typeface="Arial"/>
+                <a:cs typeface="Arial"/>
               </a:rPr>
               <a:t>Câu hỏi nhanh: xếp hạng bằng chứng</a:t>
             </a:r>
@@ -12475,8 +12451,8 @@
                 <a:solidFill>
                   <a:srgbClr val="FFFFFF"/>
                 </a:solidFill>
-                <a:latin typeface="Segoe UI"/>
-                <a:cs typeface="Segoe UI"/>
+                <a:latin typeface="Arial"/>
+                <a:cs typeface="Arial"/>
               </a:rPr>
               <a:t>CÂU HỎI NHANH   |   3 phút</a:t>
             </a:r>
@@ -12513,25 +12489,19 @@
               <a:spcBef>
                 <a:spcPts val="450"/>
               </a:spcBef>
-              <a:buNone/>
-            </a:pPr>
-            <a:r>
-              <a:rPr lang="en-US" sz="1650" b="1" dirty="0">
-                <a:solidFill>
-                  <a:srgbClr val="6C3483"/>
-                </a:solidFill>
-                <a:latin typeface="Segoe UI"/>
-                <a:cs typeface="Segoe UI"/>
-              </a:rPr>
-              <a:t>1.  </a:t>
-            </a:r>
+              <a:buClr>
+                <a:srgbClr val="6C3483"/>
+              </a:buClr>
+              <a:buFont typeface="Arial"/>
+              <a:buChar char="•"/>
+            </a:pPr>
             <a:r>
               <a:rPr lang="en-US" sz="1650" dirty="0">
                 <a:solidFill>
                   <a:srgbClr val="000000"/>
                 </a:solidFill>
-                <a:latin typeface="Segoe UI"/>
-                <a:cs typeface="Segoe UI"/>
+                <a:latin typeface="Arial"/>
+                <a:cs typeface="Arial"/>
               </a:rPr>
               <a:t>Bốn nguồn cùng trả lời: 'Hạn chế dịch có giảm tử vong trong sốc nhiễm khuẩn không?'</a:t>
             </a:r>
@@ -12544,25 +12514,19 @@
               <a:spcBef>
                 <a:spcPts val="450"/>
               </a:spcBef>
-              <a:buNone/>
-            </a:pPr>
-            <a:r>
-              <a:rPr lang="en-US" sz="1650" b="1" dirty="0">
-                <a:solidFill>
-                  <a:srgbClr val="6C3483"/>
-                </a:solidFill>
-                <a:latin typeface="Segoe UI"/>
-                <a:cs typeface="Segoe UI"/>
-              </a:rPr>
-              <a:t>2.  </a:t>
-            </a:r>
+              <a:buClr>
+                <a:srgbClr val="6C3483"/>
+              </a:buClr>
+              <a:buFont typeface="Arial"/>
+              <a:buChar char="•"/>
+            </a:pPr>
             <a:r>
               <a:rPr lang="en-US" sz="1650" dirty="0">
                 <a:solidFill>
                   <a:srgbClr val="000000"/>
                 </a:solidFill>
-                <a:latin typeface="Segoe UI"/>
-                <a:cs typeface="Segoe UI"/>
+                <a:latin typeface="Arial"/>
+                <a:cs typeface="Arial"/>
               </a:rPr>
               <a:t>A: một đồng nghiệp lâu năm: '20 năm nay, bệnh nhân để khô của tôi đều tốt hơn'</a:t>
             </a:r>
@@ -12575,25 +12539,19 @@
               <a:spcBef>
                 <a:spcPts val="450"/>
               </a:spcBef>
-              <a:buNone/>
-            </a:pPr>
-            <a:r>
-              <a:rPr lang="en-US" sz="1650" b="1" dirty="0">
-                <a:solidFill>
-                  <a:srgbClr val="6C3483"/>
-                </a:solidFill>
-                <a:latin typeface="Segoe UI"/>
-                <a:cs typeface="Segoe UI"/>
-              </a:rPr>
-              <a:t>3.  </a:t>
-            </a:r>
+              <a:buClr>
+                <a:srgbClr val="6C3483"/>
+              </a:buClr>
+              <a:buFont typeface="Arial"/>
+              <a:buChar char="•"/>
+            </a:pPr>
             <a:r>
               <a:rPr lang="en-US" sz="1650" dirty="0">
                 <a:solidFill>
                   <a:srgbClr val="000000"/>
                 </a:solidFill>
-                <a:latin typeface="Segoe UI"/>
-                <a:cs typeface="Segoe UI"/>
+                <a:latin typeface="Arial"/>
+                <a:cs typeface="Arial"/>
               </a:rPr>
               <a:t>B: một đoàn hệ từ sổ đăng ký gồm hàng nghìn bệnh nhân nhiễm khuẩn huyết tại ICU</a:t>
             </a:r>
@@ -12606,25 +12564,19 @@
               <a:spcBef>
                 <a:spcPts val="450"/>
               </a:spcBef>
-              <a:buNone/>
-            </a:pPr>
-            <a:r>
-              <a:rPr lang="en-US" sz="1650" b="1" dirty="0">
-                <a:solidFill>
-                  <a:srgbClr val="6C3483"/>
-                </a:solidFill>
-                <a:latin typeface="Segoe UI"/>
-                <a:cs typeface="Segoe UI"/>
-              </a:rPr>
-              <a:t>4.  </a:t>
-            </a:r>
+              <a:buClr>
+                <a:srgbClr val="6C3483"/>
+              </a:buClr>
+              <a:buFont typeface="Arial"/>
+              <a:buChar char="•"/>
+            </a:pPr>
             <a:r>
               <a:rPr lang="en-US" sz="1650" dirty="0">
                 <a:solidFill>
                   <a:srgbClr val="000000"/>
                 </a:solidFill>
-                <a:latin typeface="Segoe UI"/>
-                <a:cs typeface="Segoe UI"/>
+                <a:latin typeface="Arial"/>
+                <a:cs typeface="Arial"/>
               </a:rPr>
               <a:t>C: một thử nghiệm phân nhóm ngẫu nhiên 1.554 bệnh nhân sốc nhiễm khuẩn</a:t>
             </a:r>
@@ -12637,25 +12589,19 @@
               <a:spcBef>
                 <a:spcPts val="450"/>
               </a:spcBef>
-              <a:buNone/>
-            </a:pPr>
-            <a:r>
-              <a:rPr lang="en-US" sz="1650" b="1" dirty="0">
-                <a:solidFill>
-                  <a:srgbClr val="6C3483"/>
-                </a:solidFill>
-                <a:latin typeface="Segoe UI"/>
-                <a:cs typeface="Segoe UI"/>
-              </a:rPr>
-              <a:t>5.  </a:t>
-            </a:r>
+              <a:buClr>
+                <a:srgbClr val="6C3483"/>
+              </a:buClr>
+              <a:buFont typeface="Arial"/>
+              <a:buChar char="•"/>
+            </a:pPr>
             <a:r>
               <a:rPr lang="en-US" sz="1650" dirty="0">
                 <a:solidFill>
                   <a:srgbClr val="000000"/>
                 </a:solidFill>
-                <a:latin typeface="Segoe UI"/>
-                <a:cs typeface="Segoe UI"/>
+                <a:latin typeface="Arial"/>
+                <a:cs typeface="Arial"/>
               </a:rPr>
               <a:t>D: một tổng quan gộp mọi thử nghiệm về hạn chế dịch</a:t>
             </a:r>
@@ -12668,25 +12614,19 @@
               <a:spcBef>
                 <a:spcPts val="450"/>
               </a:spcBef>
-              <a:buNone/>
-            </a:pPr>
-            <a:r>
-              <a:rPr lang="en-US" sz="1650" b="1" dirty="0">
-                <a:solidFill>
-                  <a:srgbClr val="6C3483"/>
-                </a:solidFill>
-                <a:latin typeface="Segoe UI"/>
-                <a:cs typeface="Segoe UI"/>
-              </a:rPr>
-              <a:t>6.  </a:t>
-            </a:r>
+              <a:buClr>
+                <a:srgbClr val="6C3483"/>
+              </a:buClr>
+              <a:buFont typeface="Arial"/>
+              <a:buChar char="•"/>
+            </a:pPr>
             <a:r>
               <a:rPr lang="en-US" sz="1650" dirty="0">
                 <a:solidFill>
                   <a:srgbClr val="000000"/>
                 </a:solidFill>
-                <a:latin typeface="Segoe UI"/>
-                <a:cs typeface="Segoe UI"/>
+                <a:latin typeface="Arial"/>
+                <a:cs typeface="Arial"/>
               </a:rPr>
               <a:t>Xếp từ yếu nhất đến mạnh nhất, rồi giơ ngón tay khi đếm đến 3</a:t>
             </a:r>
@@ -12730,8 +12670,8 @@
                 <a:solidFill>
                   <a:srgbClr val="6C3483"/>
                 </a:solidFill>
-                <a:latin typeface="Segoe UI"/>
-                <a:cs typeface="Segoe UI"/>
+                <a:latin typeface="Arial"/>
+                <a:cs typeface="Arial"/>
               </a:rPr>
               <a:t>Rồi thảo luận</a:t>
             </a:r>
@@ -12752,8 +12692,8 @@
                 <a:solidFill>
                   <a:srgbClr val="000000"/>
                 </a:solidFill>
-                <a:latin typeface="Segoe UI"/>
-                <a:cs typeface="Segoe UI"/>
+                <a:latin typeface="Arial"/>
+                <a:cs typeface="Arial"/>
               </a:rPr>
               <a:t>Nguồn nào sẽ làm bạn đổi cách thực hành?</a:t>
             </a:r>
@@ -12774,8 +12714,8 @@
                 <a:solidFill>
                   <a:srgbClr val="000000"/>
                 </a:solidFill>
-                <a:latin typeface="Segoe UI"/>
-                <a:cs typeface="Segoe UI"/>
+                <a:latin typeface="Arial"/>
+                <a:cs typeface="Arial"/>
               </a:rPr>
               <a:t>Điều gì làm C yếu hơn B?</a:t>
             </a:r>
@@ -12821,8 +12761,8 @@
                 <a:solidFill>
                   <a:srgbClr val="6C3483"/>
                 </a:solidFill>
-                <a:latin typeface="Segoe UI"/>
-                <a:cs typeface="Segoe UI"/>
+                <a:latin typeface="Arial"/>
+                <a:cs typeface="Arial"/>
               </a:rPr>
               <a:t>SẢN PHẨM   </a:t>
             </a:r>
@@ -12831,8 +12771,8 @@
                 <a:solidFill>
                   <a:srgbClr val="000000"/>
                 </a:solidFill>
-                <a:latin typeface="Segoe UI"/>
-                <a:cs typeface="Segoe UI"/>
+                <a:latin typeface="Arial"/>
+                <a:cs typeface="Arial"/>
               </a:rPr>
               <a:t>Mỗi bàn thống nhất một thứ tự xếp hạng</a:t>
             </a:r>
@@ -12869,7 +12809,7 @@
                     <a:lumMod val="50000"/>
                   </a:schemeClr>
                 </a:solidFill>
-                <a:latin typeface="Verdana"/>
+                <a:latin typeface="Arial"/>
               </a:rPr>
               <a:t>Neudata | #ClearDataClearImpact</a:t>
             </a:r>
@@ -12999,8 +12939,8 @@
                 <a:solidFill>
                   <a:srgbClr val="0D7377"/>
                 </a:solidFill>
-                <a:latin typeface="Segoe UI"/>
-                <a:cs typeface="Segoe UI"/>
+                <a:latin typeface="Arial"/>
+                <a:cs typeface="Arial"/>
               </a:rPr>
               <a:t>Chu trình nghiên cứu</a:t>
             </a:r>
@@ -13096,8 +13036,8 @@
                 <a:solidFill>
                   <a:srgbClr val="FFFFFF"/>
                 </a:solidFill>
-                <a:latin typeface="Segoe UI"/>
-                <a:cs typeface="Segoe UI"/>
+                <a:latin typeface="Arial"/>
+                <a:cs typeface="Arial"/>
               </a:rPr>
               <a:t>THÔNG ĐIỆP CHÍNH   </a:t>
             </a:r>
@@ -13106,8 +13046,8 @@
                 <a:solidFill>
                   <a:srgbClr val="FFFFFF"/>
                 </a:solidFill>
-                <a:latin typeface="Segoe UI"/>
-                <a:cs typeface="Segoe UI"/>
+                <a:latin typeface="Arial"/>
+                <a:cs typeface="Arial"/>
               </a:rPr>
               <a:t>Nghiên cứu là một chu trình: kết quả công bố thay đổi thực hành và gợi câu hỏi mới.</a:t>
             </a:r>
@@ -13144,7 +13084,7 @@
                     <a:lumMod val="50000"/>
                   </a:schemeClr>
                 </a:solidFill>
-                <a:latin typeface="Verdana"/>
+                <a:latin typeface="Arial"/>
               </a:rPr>
               <a:t>Neudata | #ClearDataClearImpact</a:t>
             </a:r>
@@ -13274,8 +13214,8 @@
                 <a:solidFill>
                   <a:srgbClr val="0D7377"/>
                 </a:solidFill>
-                <a:latin typeface="Segoe UI"/>
-                <a:cs typeface="Segoe UI"/>
+                <a:latin typeface="Arial"/>
+                <a:cs typeface="Arial"/>
               </a:rPr>
               <a:t>Câu hỏi quyết định loại nghiên cứu</a:t>
             </a:r>
@@ -13371,8 +13311,8 @@
                 <a:solidFill>
                   <a:srgbClr val="FFFFFF"/>
                 </a:solidFill>
-                <a:latin typeface="Segoe UI"/>
-                <a:cs typeface="Segoe UI"/>
+                <a:latin typeface="Arial"/>
+                <a:cs typeface="Arial"/>
               </a:rPr>
               <a:t>THÔNG ĐIỆP CHÍNH   </a:t>
             </a:r>
@@ -13381,8 +13321,8 @@
                 <a:solidFill>
                   <a:srgbClr val="FFFFFF"/>
                 </a:solidFill>
-                <a:latin typeface="Segoe UI"/>
-                <a:cs typeface="Segoe UI"/>
+                <a:latin typeface="Arial"/>
+                <a:cs typeface="Arial"/>
               </a:rPr>
               <a:t>Con số trả lời bao nhiêu, mức nào; lời nói trả lời vì sao, thế nào.</a:t>
             </a:r>
@@ -13419,7 +13359,7 @@
                     <a:lumMod val="50000"/>
                   </a:schemeClr>
                 </a:solidFill>
-                <a:latin typeface="Verdana"/>
+                <a:latin typeface="Arial"/>
               </a:rPr>
               <a:t>Neudata | #ClearDataClearImpact</a:t>
             </a:r>
@@ -13552,8 +13492,8 @@
                 <a:solidFill>
                   <a:srgbClr val="0D7377"/>
                 </a:solidFill>
-                <a:latin typeface="Segoe UI"/>
-                <a:cs typeface="Segoe UI"/>
+                <a:latin typeface="Arial"/>
+                <a:cs typeface="Arial"/>
               </a:rPr>
               <a:t>Mỗi ngày bạn đưa ra những quyết định mà nghiên cứu có thể giúp tốt hơn.</a:t>
             </a:r>
@@ -13570,8 +13510,8 @@
                 <a:solidFill>
                   <a:srgbClr val="595959"/>
                 </a:solidFill>
-                <a:latin typeface="Segoe UI"/>
-                <a:cs typeface="Segoe UI"/>
+                <a:latin typeface="Arial"/>
+                <a:cs typeface="Arial"/>
               </a:rPr>
               <a:t>Khóa học này giúp bạn đặt câu hỏi đúng cách, trả lời chúng và công bố câu trả lời.</a:t>
             </a:r>
@@ -13608,7 +13548,7 @@
                     <a:lumMod val="50000"/>
                   </a:schemeClr>
                 </a:solidFill>
-                <a:latin typeface="Verdana"/>
+                <a:latin typeface="Arial"/>
               </a:rPr>
               <a:t>Neudata | #ClearDataClearImpact</a:t>
             </a:r>
@@ -13738,8 +13678,8 @@
                 <a:solidFill>
                   <a:srgbClr val="0D7377"/>
                 </a:solidFill>
-                <a:latin typeface="Segoe UI"/>
-                <a:cs typeface="Segoe UI"/>
+                <a:latin typeface="Arial"/>
+                <a:cs typeface="Arial"/>
               </a:rPr>
               <a:t>Kiểm tra hiểu bài: loại nghiên cứu nào?</a:t>
             </a:r>
@@ -13809,8 +13749,8 @@
                 <a:solidFill>
                   <a:srgbClr val="FFFFFF"/>
                 </a:solidFill>
-                <a:latin typeface="Segoe UI"/>
-                <a:cs typeface="Segoe UI"/>
+                <a:latin typeface="Arial"/>
+                <a:cs typeface="Arial"/>
               </a:rPr>
               <a:t>CÂU HỎI NHANH   |   2 phút</a:t>
             </a:r>
@@ -13847,25 +13787,19 @@
               <a:spcBef>
                 <a:spcPts val="450"/>
               </a:spcBef>
-              <a:buNone/>
-            </a:pPr>
-            <a:r>
-              <a:rPr lang="en-US" sz="1650" b="1" dirty="0">
-                <a:solidFill>
-                  <a:srgbClr val="6C3483"/>
-                </a:solidFill>
-                <a:latin typeface="Segoe UI"/>
-                <a:cs typeface="Segoe UI"/>
-              </a:rPr>
-              <a:t>1.  </a:t>
-            </a:r>
+              <a:buClr>
+                <a:srgbClr val="6C3483"/>
+              </a:buClr>
+              <a:buFont typeface="Arial"/>
+              <a:buChar char="•"/>
+            </a:pPr>
             <a:r>
               <a:rPr lang="en-US" sz="1650" dirty="0">
                 <a:solidFill>
                   <a:srgbClr val="000000"/>
                 </a:solidFill>
-                <a:latin typeface="Segoe UI"/>
-                <a:cs typeface="Segoe UI"/>
+                <a:latin typeface="Arial"/>
+                <a:cs typeface="Arial"/>
               </a:rPr>
               <a:t>A: đếm số bệnh nhân ICU bị tổn thương do tì đè trong năm nay</a:t>
             </a:r>
@@ -13878,25 +13812,19 @@
               <a:spcBef>
                 <a:spcPts val="450"/>
               </a:spcBef>
-              <a:buNone/>
-            </a:pPr>
-            <a:r>
-              <a:rPr lang="en-US" sz="1650" b="1" dirty="0">
-                <a:solidFill>
-                  <a:srgbClr val="6C3483"/>
-                </a:solidFill>
-                <a:latin typeface="Segoe UI"/>
-                <a:cs typeface="Segoe UI"/>
-              </a:rPr>
-              <a:t>2.  </a:t>
-            </a:r>
+              <a:buClr>
+                <a:srgbClr val="6C3483"/>
+              </a:buClr>
+              <a:buFont typeface="Arial"/>
+              <a:buChar char="•"/>
+            </a:pPr>
             <a:r>
               <a:rPr lang="en-US" sz="1650" dirty="0">
                 <a:solidFill>
                   <a:srgbClr val="000000"/>
                 </a:solidFill>
-                <a:latin typeface="Segoe UI"/>
-                <a:cs typeface="Segoe UI"/>
+                <a:latin typeface="Arial"/>
+                <a:cs typeface="Arial"/>
               </a:rPr>
               <a:t>B: phỏng vấn gia đình về quy định thăm bệnh ở ICU</a:t>
             </a:r>
@@ -13909,25 +13837,19 @@
               <a:spcBef>
                 <a:spcPts val="450"/>
               </a:spcBef>
-              <a:buNone/>
-            </a:pPr>
-            <a:r>
-              <a:rPr lang="en-US" sz="1650" b="1" dirty="0">
-                <a:solidFill>
-                  <a:srgbClr val="6C3483"/>
-                </a:solidFill>
-                <a:latin typeface="Segoe UI"/>
-                <a:cs typeface="Segoe UI"/>
-              </a:rPr>
-              <a:t>3.  </a:t>
-            </a:r>
+              <a:buClr>
+                <a:srgbClr val="6C3483"/>
+              </a:buClr>
+              <a:buFont typeface="Arial"/>
+              <a:buChar char="•"/>
+            </a:pPr>
             <a:r>
               <a:rPr lang="en-US" sz="1650" dirty="0">
                 <a:solidFill>
                   <a:srgbClr val="000000"/>
                 </a:solidFill>
-                <a:latin typeface="Segoe UI"/>
-                <a:cs typeface="Segoe UI"/>
+                <a:latin typeface="Arial"/>
+                <a:cs typeface="Arial"/>
               </a:rPr>
               <a:t>C: phân tích lại hồ sơ ra viện 3 năm để tìm tái nhập viện</a:t>
             </a:r>
@@ -13940,25 +13862,19 @@
               <a:spcBef>
                 <a:spcPts val="450"/>
               </a:spcBef>
-              <a:buNone/>
-            </a:pPr>
-            <a:r>
-              <a:rPr lang="en-US" sz="1650" b="1" dirty="0">
-                <a:solidFill>
-                  <a:srgbClr val="6C3483"/>
-                </a:solidFill>
-                <a:latin typeface="Segoe UI"/>
-                <a:cs typeface="Segoe UI"/>
-              </a:rPr>
-              <a:t>4.  </a:t>
-            </a:r>
+              <a:buClr>
+                <a:srgbClr val="6C3483"/>
+              </a:buClr>
+              <a:buFont typeface="Arial"/>
+              <a:buChar char="•"/>
+            </a:pPr>
             <a:r>
               <a:rPr lang="en-US" sz="1650" dirty="0">
                 <a:solidFill>
                   <a:srgbClr val="000000"/>
                 </a:solidFill>
-                <a:latin typeface="Segoe UI"/>
-                <a:cs typeface="Segoe UI"/>
+                <a:latin typeface="Arial"/>
+                <a:cs typeface="Arial"/>
               </a:rPr>
               <a:t>D: khảo sát thực hành vệ sinh tay kèm thảo luận nhóm với điều dưỡng</a:t>
             </a:r>
@@ -13971,25 +13887,19 @@
               <a:spcBef>
                 <a:spcPts val="450"/>
               </a:spcBef>
-              <a:buNone/>
-            </a:pPr>
-            <a:r>
-              <a:rPr lang="en-US" sz="1650" b="1" dirty="0">
-                <a:solidFill>
-                  <a:srgbClr val="6C3483"/>
-                </a:solidFill>
-                <a:latin typeface="Segoe UI"/>
-                <a:cs typeface="Segoe UI"/>
-              </a:rPr>
-              <a:t>5.  </a:t>
-            </a:r>
+              <a:buClr>
+                <a:srgbClr val="6C3483"/>
+              </a:buClr>
+              <a:buFont typeface="Arial"/>
+              <a:buChar char="•"/>
+            </a:pPr>
             <a:r>
               <a:rPr lang="en-US" sz="1650" dirty="0">
                 <a:solidFill>
                   <a:srgbClr val="000000"/>
                 </a:solidFill>
-                <a:latin typeface="Segoe UI"/>
-                <a:cs typeface="Segoe UI"/>
+                <a:latin typeface="Arial"/>
+                <a:cs typeface="Arial"/>
               </a:rPr>
               <a:t>Mỗi câu: định lượng, định tính hay hỗn hợp? Sơ cấp hay thứ cấp?</a:t>
             </a:r>
@@ -14035,8 +13945,8 @@
                 <a:solidFill>
                   <a:srgbClr val="6C3483"/>
                 </a:solidFill>
-                <a:latin typeface="Segoe UI"/>
-                <a:cs typeface="Segoe UI"/>
+                <a:latin typeface="Arial"/>
+                <a:cs typeface="Arial"/>
               </a:rPr>
               <a:t>SẢN PHẨM   </a:t>
             </a:r>
@@ -14045,8 +13955,8 @@
                 <a:solidFill>
                   <a:srgbClr val="000000"/>
                 </a:solidFill>
-                <a:latin typeface="Segoe UI"/>
-                <a:cs typeface="Segoe UI"/>
+                <a:latin typeface="Arial"/>
+                <a:cs typeface="Arial"/>
               </a:rPr>
               <a:t>Cả lớp trả lời to. Slide sau có đáp án</a:t>
             </a:r>
@@ -14083,7 +13993,7 @@
                     <a:lumMod val="50000"/>
                   </a:schemeClr>
                 </a:solidFill>
-                <a:latin typeface="Verdana"/>
+                <a:latin typeface="Arial"/>
               </a:rPr>
               <a:t>Neudata | #ClearDataClearImpact</a:t>
             </a:r>
@@ -14213,8 +14123,8 @@
                 <a:solidFill>
                   <a:srgbClr val="0D7377"/>
                 </a:solidFill>
-                <a:latin typeface="Segoe UI"/>
-                <a:cs typeface="Segoe UI"/>
+                <a:latin typeface="Arial"/>
+                <a:cs typeface="Arial"/>
               </a:rPr>
               <a:t>Đáp án: loại nghiên cứu nào?</a:t>
             </a:r>
@@ -14284,8 +14194,8 @@
                 <a:solidFill>
                   <a:srgbClr val="FFFFFF"/>
                 </a:solidFill>
-                <a:latin typeface="Segoe UI"/>
-                <a:cs typeface="Segoe UI"/>
+                <a:latin typeface="Arial"/>
+                <a:cs typeface="Arial"/>
               </a:rPr>
               <a:t>A  Đếm số ca</a:t>
             </a:r>
@@ -14333,8 +14243,8 @@
                 <a:solidFill>
                   <a:srgbClr val="000000"/>
                 </a:solidFill>
-                <a:latin typeface="Segoe UI"/>
-                <a:cs typeface="Segoe UI"/>
+                <a:latin typeface="Arial"/>
+                <a:cs typeface="Arial"/>
               </a:rPr>
               <a:t>Định lượng</a:t>
             </a:r>
@@ -14354,8 +14264,8 @@
                 <a:solidFill>
                   <a:srgbClr val="000000"/>
                 </a:solidFill>
-                <a:latin typeface="Segoe UI"/>
-                <a:cs typeface="Segoe UI"/>
+                <a:latin typeface="Arial"/>
+                <a:cs typeface="Arial"/>
               </a:rPr>
               <a:t>Sơ cấp</a:t>
             </a:r>
@@ -14375,8 +14285,8 @@
                 <a:solidFill>
                   <a:srgbClr val="000000"/>
                 </a:solidFill>
-                <a:latin typeface="Segoe UI"/>
-                <a:cs typeface="Segoe UI"/>
+                <a:latin typeface="Arial"/>
+                <a:cs typeface="Arial"/>
               </a:rPr>
               <a:t>(số liệu mới)</a:t>
             </a:r>
@@ -14418,8 +14328,8 @@
                 <a:solidFill>
                   <a:srgbClr val="FFFFFF"/>
                 </a:solidFill>
-                <a:latin typeface="Segoe UI"/>
-                <a:cs typeface="Segoe UI"/>
+                <a:latin typeface="Arial"/>
+                <a:cs typeface="Arial"/>
               </a:rPr>
               <a:t>B  Phỏng vấn</a:t>
             </a:r>
@@ -14467,8 +14377,8 @@
                 <a:solidFill>
                   <a:srgbClr val="000000"/>
                 </a:solidFill>
-                <a:latin typeface="Segoe UI"/>
-                <a:cs typeface="Segoe UI"/>
+                <a:latin typeface="Arial"/>
+                <a:cs typeface="Arial"/>
               </a:rPr>
               <a:t>Định tính</a:t>
             </a:r>
@@ -14488,8 +14398,8 @@
                 <a:solidFill>
                   <a:srgbClr val="000000"/>
                 </a:solidFill>
-                <a:latin typeface="Segoe UI"/>
-                <a:cs typeface="Segoe UI"/>
+                <a:latin typeface="Arial"/>
+                <a:cs typeface="Arial"/>
               </a:rPr>
               <a:t>Sơ cấp</a:t>
             </a:r>
@@ -14509,8 +14419,8 @@
                 <a:solidFill>
                   <a:srgbClr val="000000"/>
                 </a:solidFill>
-                <a:latin typeface="Segoe UI"/>
-                <a:cs typeface="Segoe UI"/>
+                <a:latin typeface="Arial"/>
+                <a:cs typeface="Arial"/>
               </a:rPr>
               <a:t>(lời nói, vì sao)</a:t>
             </a:r>
@@ -14552,8 +14462,8 @@
                 <a:solidFill>
                   <a:srgbClr val="FFFFFF"/>
                 </a:solidFill>
-                <a:latin typeface="Segoe UI"/>
-                <a:cs typeface="Segoe UI"/>
+                <a:latin typeface="Arial"/>
+                <a:cs typeface="Arial"/>
               </a:rPr>
               <a:t>C  Hồ sơ cũ</a:t>
             </a:r>
@@ -14601,8 +14511,8 @@
                 <a:solidFill>
                   <a:srgbClr val="000000"/>
                 </a:solidFill>
-                <a:latin typeface="Segoe UI"/>
-                <a:cs typeface="Segoe UI"/>
+                <a:latin typeface="Arial"/>
+                <a:cs typeface="Arial"/>
               </a:rPr>
               <a:t>Định lượng</a:t>
             </a:r>
@@ -14622,8 +14532,8 @@
                 <a:solidFill>
                   <a:srgbClr val="000000"/>
                 </a:solidFill>
-                <a:latin typeface="Segoe UI"/>
-                <a:cs typeface="Segoe UI"/>
+                <a:latin typeface="Arial"/>
+                <a:cs typeface="Arial"/>
               </a:rPr>
               <a:t>Thứ cấp</a:t>
             </a:r>
@@ -14643,8 +14553,8 @@
                 <a:solidFill>
                   <a:srgbClr val="000000"/>
                 </a:solidFill>
-                <a:latin typeface="Segoe UI"/>
-                <a:cs typeface="Segoe UI"/>
+                <a:latin typeface="Arial"/>
+                <a:cs typeface="Arial"/>
               </a:rPr>
               <a:t>(dữ liệu có sẵn)</a:t>
             </a:r>
@@ -14686,8 +14596,8 @@
                 <a:solidFill>
                   <a:srgbClr val="FFFFFF"/>
                 </a:solidFill>
-                <a:latin typeface="Segoe UI"/>
-                <a:cs typeface="Segoe UI"/>
+                <a:latin typeface="Arial"/>
+                <a:cs typeface="Arial"/>
               </a:rPr>
               <a:t>D  Khảo sát + nhóm</a:t>
             </a:r>
@@ -14735,8 +14645,8 @@
                 <a:solidFill>
                   <a:srgbClr val="000000"/>
                 </a:solidFill>
-                <a:latin typeface="Segoe UI"/>
-                <a:cs typeface="Segoe UI"/>
+                <a:latin typeface="Arial"/>
+                <a:cs typeface="Arial"/>
               </a:rPr>
               <a:t>Hỗn hợp</a:t>
             </a:r>
@@ -14756,8 +14666,8 @@
                 <a:solidFill>
                   <a:srgbClr val="000000"/>
                 </a:solidFill>
-                <a:latin typeface="Segoe UI"/>
-                <a:cs typeface="Segoe UI"/>
+                <a:latin typeface="Arial"/>
+                <a:cs typeface="Arial"/>
               </a:rPr>
               <a:t>Sơ cấp</a:t>
             </a:r>
@@ -14777,8 +14687,8 @@
                 <a:solidFill>
                   <a:srgbClr val="000000"/>
                 </a:solidFill>
-                <a:latin typeface="Segoe UI"/>
-                <a:cs typeface="Segoe UI"/>
+                <a:latin typeface="Arial"/>
+                <a:cs typeface="Arial"/>
               </a:rPr>
               <a:t>(số + lời nói)</a:t>
             </a:r>
@@ -14822,8 +14732,8 @@
                 <a:solidFill>
                   <a:srgbClr val="FFFFFF"/>
                 </a:solidFill>
-                <a:latin typeface="Segoe UI"/>
-                <a:cs typeface="Segoe UI"/>
+                <a:latin typeface="Arial"/>
+                <a:cs typeface="Arial"/>
               </a:rPr>
               <a:t>THÔNG ĐIỆP CHÍNH   </a:t>
             </a:r>
@@ -14832,8 +14742,8 @@
                 <a:solidFill>
                   <a:srgbClr val="FFFFFF"/>
                 </a:solidFill>
-                <a:latin typeface="Segoe UI"/>
-                <a:cs typeface="Segoe UI"/>
+                <a:latin typeface="Arial"/>
+                <a:cs typeface="Arial"/>
               </a:rPr>
               <a:t>Hỏi hai điều: con số hay lời nói? Dữ liệu mới hay có sẵn?</a:t>
             </a:r>
@@ -14870,7 +14780,7 @@
                     <a:lumMod val="50000"/>
                   </a:schemeClr>
                 </a:solidFill>
-                <a:latin typeface="Verdana"/>
+                <a:latin typeface="Arial"/>
               </a:rPr>
               <a:t>Neudata | #ClearDataClearImpact</a:t>
             </a:r>
@@ -15000,8 +14910,8 @@
                 <a:solidFill>
                   <a:srgbClr val="0D7377"/>
                 </a:solidFill>
-                <a:latin typeface="Segoe UI"/>
-                <a:cs typeface="Segoe UI"/>
+                <a:latin typeface="Arial"/>
+                <a:cs typeface="Arial"/>
               </a:rPr>
               <a:t>Nghiên cứu, audit hay cải tiến chất lượng?</a:t>
             </a:r>
@@ -15097,8 +15007,8 @@
                 <a:solidFill>
                   <a:srgbClr val="FFFFFF"/>
                 </a:solidFill>
-                <a:latin typeface="Segoe UI"/>
-                <a:cs typeface="Segoe UI"/>
+                <a:latin typeface="Arial"/>
+                <a:cs typeface="Arial"/>
               </a:rPr>
               <a:t>THÔNG ĐIỆP CHÍNH   </a:t>
             </a:r>
@@ -15107,8 +15017,8 @@
                 <a:solidFill>
                   <a:srgbClr val="FFFFFF"/>
                 </a:solidFill>
-                <a:latin typeface="Segoe UI"/>
-                <a:cs typeface="Segoe UI"/>
+                <a:latin typeface="Arial"/>
+                <a:cs typeface="Arial"/>
               </a:rPr>
               <a:t>Nghiên cứu hỏi điều gì tốt nhất; audit hỏi ta có làm không; QI làm cho tốt hơn.</a:t>
             </a:r>
@@ -15145,7 +15055,7 @@
                     <a:lumMod val="50000"/>
                   </a:schemeClr>
                 </a:solidFill>
-                <a:latin typeface="Verdana"/>
+                <a:latin typeface="Arial"/>
               </a:rPr>
               <a:t>Neudata | #ClearDataClearImpact</a:t>
             </a:r>
@@ -15275,8 +15185,8 @@
                 <a:solidFill>
                   <a:srgbClr val="0D7377"/>
                 </a:solidFill>
-                <a:latin typeface="Segoe UI"/>
-                <a:cs typeface="Segoe UI"/>
+                <a:latin typeface="Arial"/>
+                <a:cs typeface="Arial"/>
               </a:rPr>
               <a:t>Kiểm tra hiểu bài: nghiên cứu, audit hay QI?</a:t>
             </a:r>
@@ -15346,8 +15256,8 @@
                 <a:solidFill>
                   <a:srgbClr val="FFFFFF"/>
                 </a:solidFill>
-                <a:latin typeface="Segoe UI"/>
-                <a:cs typeface="Segoe UI"/>
+                <a:latin typeface="Arial"/>
+                <a:cs typeface="Arial"/>
               </a:rPr>
               <a:t>CÂU HỎI NHANH   |   2 phút</a:t>
             </a:r>
@@ -15384,25 +15294,19 @@
               <a:spcBef>
                 <a:spcPts val="450"/>
               </a:spcBef>
-              <a:buNone/>
-            </a:pPr>
-            <a:r>
-              <a:rPr lang="en-US" sz="1650" b="1" dirty="0">
-                <a:solidFill>
-                  <a:srgbClr val="6C3483"/>
-                </a:solidFill>
-                <a:latin typeface="Segoe UI"/>
-                <a:cs typeface="Segoe UI"/>
-              </a:rPr>
-              <a:t>1.  </a:t>
-            </a:r>
+              <a:buClr>
+                <a:srgbClr val="6C3483"/>
+              </a:buClr>
+              <a:buFont typeface="Arial"/>
+              <a:buChar char="•"/>
+            </a:pPr>
             <a:r>
               <a:rPr lang="en-US" sz="1650" dirty="0">
                 <a:solidFill>
                   <a:srgbClr val="000000"/>
                 </a:solidFill>
-                <a:latin typeface="Segoe UI"/>
-                <a:cs typeface="Segoe UI"/>
+                <a:latin typeface="Arial"/>
+                <a:cs typeface="Arial"/>
               </a:rPr>
               <a:t>A: kiểm tra cân bằng dịch có được ghi hằng ngày theo quy trình không</a:t>
             </a:r>
@@ -15415,25 +15319,19 @@
               <a:spcBef>
                 <a:spcPts val="450"/>
               </a:spcBef>
-              <a:buNone/>
-            </a:pPr>
-            <a:r>
-              <a:rPr lang="en-US" sz="1650" b="1" dirty="0">
-                <a:solidFill>
-                  <a:srgbClr val="6C3483"/>
-                </a:solidFill>
-                <a:latin typeface="Segoe UI"/>
-                <a:cs typeface="Segoe UI"/>
-              </a:rPr>
-              <a:t>2.  </a:t>
-            </a:r>
+              <a:buClr>
+                <a:srgbClr val="6C3483"/>
+              </a:buClr>
+              <a:buFont typeface="Arial"/>
+              <a:buChar char="•"/>
+            </a:pPr>
             <a:r>
               <a:rPr lang="en-US" sz="1650" dirty="0">
                 <a:solidFill>
                   <a:srgbClr val="000000"/>
                 </a:solidFill>
-                <a:latin typeface="Segoe UI"/>
-                <a:cs typeface="Segoe UI"/>
+                <a:latin typeface="Arial"/>
+                <a:cs typeface="Arial"/>
               </a:rPr>
               <a:t>B: phân nhóm ngẫu nhiên bệnh nhân vào hạn chế dịch hoặc dịch thường quy</a:t>
             </a:r>
@@ -15446,25 +15344,19 @@
               <a:spcBef>
                 <a:spcPts val="450"/>
               </a:spcBef>
-              <a:buNone/>
-            </a:pPr>
-            <a:r>
-              <a:rPr lang="en-US" sz="1650" b="1" dirty="0">
-                <a:solidFill>
-                  <a:srgbClr val="6C3483"/>
-                </a:solidFill>
-                <a:latin typeface="Segoe UI"/>
-                <a:cs typeface="Segoe UI"/>
-              </a:rPr>
-              <a:t>3.  </a:t>
-            </a:r>
+              <a:buClr>
+                <a:srgbClr val="6C3483"/>
+              </a:buClr>
+              <a:buFont typeface="Arial"/>
+              <a:buChar char="•"/>
+            </a:pPr>
             <a:r>
               <a:rPr lang="en-US" sz="1650" dirty="0">
                 <a:solidFill>
                   <a:srgbClr val="000000"/>
                 </a:solidFill>
-                <a:latin typeface="Segoe UI"/>
-                <a:cs typeface="Segoe UI"/>
+                <a:latin typeface="Arial"/>
+                <a:cs typeface="Arial"/>
               </a:rPr>
               <a:t>C: thử bảng kiểm bàn giao ca mới theo các chu trình PDSA nhỏ</a:t>
             </a:r>
@@ -15477,25 +15369,19 @@
               <a:spcBef>
                 <a:spcPts val="450"/>
               </a:spcBef>
-              <a:buNone/>
-            </a:pPr>
-            <a:r>
-              <a:rPr lang="en-US" sz="1650" b="1" dirty="0">
-                <a:solidFill>
-                  <a:srgbClr val="6C3483"/>
-                </a:solidFill>
-                <a:latin typeface="Segoe UI"/>
-                <a:cs typeface="Segoe UI"/>
-              </a:rPr>
-              <a:t>4.  </a:t>
-            </a:r>
+              <a:buClr>
+                <a:srgbClr val="6C3483"/>
+              </a:buClr>
+              <a:buFont typeface="Arial"/>
+              <a:buChar char="•"/>
+            </a:pPr>
             <a:r>
               <a:rPr lang="en-US" sz="1650" dirty="0">
                 <a:solidFill>
                   <a:srgbClr val="000000"/>
                 </a:solidFill>
-                <a:latin typeface="Segoe UI"/>
-                <a:cs typeface="Segoe UI"/>
+                <a:latin typeface="Arial"/>
+                <a:cs typeface="Arial"/>
               </a:rPr>
               <a:t>D: phỏng vấn điều dưỡng vì sao ngại ngừng dịch</a:t>
             </a:r>
@@ -15508,25 +15394,19 @@
               <a:spcBef>
                 <a:spcPts val="450"/>
               </a:spcBef>
-              <a:buNone/>
-            </a:pPr>
-            <a:r>
-              <a:rPr lang="en-US" sz="1650" b="1" dirty="0">
-                <a:solidFill>
-                  <a:srgbClr val="6C3483"/>
-                </a:solidFill>
-                <a:latin typeface="Segoe UI"/>
-                <a:cs typeface="Segoe UI"/>
-              </a:rPr>
-              <a:t>5.  </a:t>
-            </a:r>
+              <a:buClr>
+                <a:srgbClr val="6C3483"/>
+              </a:buClr>
+              <a:buFont typeface="Arial"/>
+              <a:buChar char="•"/>
+            </a:pPr>
             <a:r>
               <a:rPr lang="en-US" sz="1650" dirty="0">
                 <a:solidFill>
                   <a:srgbClr val="000000"/>
                 </a:solidFill>
-                <a:latin typeface="Segoe UI"/>
-                <a:cs typeface="Segoe UI"/>
+                <a:latin typeface="Arial"/>
+                <a:cs typeface="Arial"/>
               </a:rPr>
               <a:t>Mỗi câu: nghiên cứu, audit hay QI? Ai phải phê duyệt?</a:t>
             </a:r>
@@ -15572,8 +15452,8 @@
                 <a:solidFill>
                   <a:srgbClr val="6C3483"/>
                 </a:solidFill>
-                <a:latin typeface="Segoe UI"/>
-                <a:cs typeface="Segoe UI"/>
+                <a:latin typeface="Arial"/>
+                <a:cs typeface="Arial"/>
               </a:rPr>
               <a:t>SẢN PHẨM   </a:t>
             </a:r>
@@ -15582,8 +15462,8 @@
                 <a:solidFill>
                   <a:srgbClr val="000000"/>
                 </a:solidFill>
-                <a:latin typeface="Segoe UI"/>
-                <a:cs typeface="Segoe UI"/>
+                <a:latin typeface="Arial"/>
+                <a:cs typeface="Arial"/>
               </a:rPr>
               <a:t>Giơ 1 ngón cho nghiên cứu, 2 cho audit, 3 cho QI</a:t>
             </a:r>
@@ -15620,7 +15500,7 @@
                     <a:lumMod val="50000"/>
                   </a:schemeClr>
                 </a:solidFill>
-                <a:latin typeface="Verdana"/>
+                <a:latin typeface="Arial"/>
               </a:rPr>
               <a:t>Neudata | #ClearDataClearImpact</a:t>
             </a:r>
@@ -15750,8 +15630,8 @@
                 <a:solidFill>
                   <a:srgbClr val="0D7377"/>
                 </a:solidFill>
-                <a:latin typeface="Segoe UI"/>
-                <a:cs typeface="Segoe UI"/>
+                <a:latin typeface="Arial"/>
+                <a:cs typeface="Arial"/>
               </a:rPr>
               <a:t>Đáp án: nghiên cứu, audit hay QI?</a:t>
             </a:r>
@@ -15819,7 +15699,7 @@
                           <a:solidFill>
                             <a:srgbClr val="FFFFFF"/>
                           </a:solidFill>
-                          <a:latin typeface="Segoe UI"/>
+                          <a:latin typeface="Arial"/>
                         </a:rPr>
                         <a:t>Dự án</a:t>
                       </a:r>
@@ -15842,7 +15722,7 @@
                           <a:solidFill>
                             <a:srgbClr val="FFFFFF"/>
                           </a:solidFill>
-                          <a:latin typeface="Segoe UI"/>
+                          <a:latin typeface="Arial"/>
                         </a:rPr>
                         <a:t>Loại</a:t>
                       </a:r>
@@ -15865,7 +15745,7 @@
                           <a:solidFill>
                             <a:srgbClr val="FFFFFF"/>
                           </a:solidFill>
-                          <a:latin typeface="Segoe UI"/>
+                          <a:latin typeface="Arial"/>
                         </a:rPr>
                         <a:t>Phê duyệt trước khi bắt đầu</a:t>
                       </a:r>
@@ -15890,7 +15770,7 @@
                           <a:solidFill>
                             <a:srgbClr val="000000"/>
                           </a:solidFill>
-                          <a:latin typeface="Segoe UI"/>
+                          <a:latin typeface="Arial"/>
                         </a:rPr>
                         <a:t>A  Cân bằng dịch có ghi hằng ngày?</a:t>
                       </a:r>
@@ -15913,7 +15793,7 @@
                           <a:solidFill>
                             <a:srgbClr val="000000"/>
                           </a:solidFill>
-                          <a:latin typeface="Segoe UI"/>
+                          <a:latin typeface="Arial"/>
                         </a:rPr>
                         <a:t>Audit</a:t>
                       </a:r>
@@ -15936,7 +15816,7 @@
                           <a:solidFill>
                             <a:srgbClr val="000000"/>
                           </a:solidFill>
-                          <a:latin typeface="Segoe UI"/>
+                          <a:latin typeface="Arial"/>
                         </a:rPr>
                         <a:t>Nội bộ / quản lý chất lượng</a:t>
                       </a:r>
@@ -15961,7 +15841,7 @@
                           <a:solidFill>
                             <a:srgbClr val="000000"/>
                           </a:solidFill>
-                          <a:latin typeface="Segoe UI"/>
+                          <a:latin typeface="Arial"/>
                         </a:rPr>
                         <a:t>B  Phân nhóm hạn chế dịch vs thường quy</a:t>
                       </a:r>
@@ -15984,7 +15864,7 @@
                           <a:solidFill>
                             <a:srgbClr val="000000"/>
                           </a:solidFill>
-                          <a:latin typeface="Segoe UI"/>
+                          <a:latin typeface="Arial"/>
                         </a:rPr>
                         <a:t>Nghiên cứu</a:t>
                       </a:r>
@@ -16007,7 +15887,7 @@
                           <a:solidFill>
                             <a:srgbClr val="000000"/>
                           </a:solidFill>
-                          <a:latin typeface="Segoe UI"/>
+                          <a:latin typeface="Arial"/>
                         </a:rPr>
                         <a:t>Hội đồng đạo đức + đăng ký thử nghiệm</a:t>
                       </a:r>
@@ -16032,7 +15912,7 @@
                           <a:solidFill>
                             <a:srgbClr val="000000"/>
                           </a:solidFill>
-                          <a:latin typeface="Segoe UI"/>
+                          <a:latin typeface="Arial"/>
                         </a:rPr>
                         <a:t>C  Bảng kiểm bàn giao theo PDSA</a:t>
                       </a:r>
@@ -16055,7 +15935,7 @@
                           <a:solidFill>
                             <a:srgbClr val="000000"/>
                           </a:solidFill>
-                          <a:latin typeface="Segoe UI"/>
+                          <a:latin typeface="Arial"/>
                         </a:rPr>
                         <a:t>Cải tiến chất lượng</a:t>
                       </a:r>
@@ -16078,7 +15958,7 @@
                           <a:solidFill>
                             <a:srgbClr val="000000"/>
                           </a:solidFill>
-                          <a:latin typeface="Segoe UI"/>
+                          <a:latin typeface="Arial"/>
                         </a:rPr>
                         <a:t>Nội bộ; xét đạo đức nếu có rủi ro mới</a:t>
                       </a:r>
@@ -16103,7 +15983,7 @@
                           <a:solidFill>
                             <a:srgbClr val="000000"/>
                           </a:solidFill>
-                          <a:latin typeface="Segoe UI"/>
+                          <a:latin typeface="Arial"/>
                         </a:rPr>
                         <a:t>D  Phỏng vấn điều dưỡng về ngừng dịch</a:t>
                       </a:r>
@@ -16126,7 +16006,7 @@
                           <a:solidFill>
                             <a:srgbClr val="000000"/>
                           </a:solidFill>
-                          <a:latin typeface="Segoe UI"/>
+                          <a:latin typeface="Arial"/>
                         </a:rPr>
                         <a:t>Nghiên cứu (định tính)</a:t>
                       </a:r>
@@ -16149,7 +16029,7 @@
                           <a:solidFill>
                             <a:srgbClr val="000000"/>
                           </a:solidFill>
-                          <a:latin typeface="Segoe UI"/>
+                          <a:latin typeface="Arial"/>
                         </a:rPr>
                         <a:t>Hội đồng đạo đức</a:t>
                       </a:r>
@@ -16197,8 +16077,8 @@
                 <a:solidFill>
                   <a:srgbClr val="595959"/>
                 </a:solidFill>
-                <a:latin typeface="Segoe UI"/>
-                <a:cs typeface="Segoe UI"/>
+                <a:latin typeface="Arial"/>
+                <a:cs typeface="Arial"/>
               </a:rPr>
               <a:t>Quy định khác nhau giữa các cơ sở: xem quy định nội bộ và hỏi hội đồng đạo đức khi không chắc.</a:t>
             </a:r>
@@ -16235,7 +16115,7 @@
                     <a:lumMod val="50000"/>
                   </a:schemeClr>
                 </a:solidFill>
-                <a:latin typeface="Verdana"/>
+                <a:latin typeface="Arial"/>
               </a:rPr>
               <a:t>Neudata | #ClearDataClearImpact</a:t>
             </a:r>
@@ -16365,8 +16245,8 @@
                 <a:solidFill>
                   <a:srgbClr val="0D7377"/>
                 </a:solidFill>
-                <a:latin typeface="Segoe UI"/>
-                <a:cs typeface="Segoe UI"/>
+                <a:latin typeface="Arial"/>
+                <a:cs typeface="Arial"/>
               </a:rPr>
               <a:t>Cả con đường: từ ý tưởng đến công bố</a:t>
             </a:r>
@@ -16462,8 +16342,8 @@
                 <a:solidFill>
                   <a:srgbClr val="FFFFFF"/>
                 </a:solidFill>
-                <a:latin typeface="Segoe UI"/>
-                <a:cs typeface="Segoe UI"/>
+                <a:latin typeface="Arial"/>
+                <a:cs typeface="Arial"/>
               </a:rPr>
               <a:t>THÔNG ĐIỆP CHÍNH   </a:t>
             </a:r>
@@ -16472,8 +16352,8 @@
                 <a:solidFill>
                   <a:srgbClr val="FFFFFF"/>
                 </a:solidFill>
-                <a:latin typeface="Segoe UI"/>
-                <a:cs typeface="Segoe UI"/>
+                <a:latin typeface="Arial"/>
+                <a:cs typeface="Arial"/>
               </a:rPr>
               <a:t>Khóa học đi hết con đường. Đề cương của nhóm bao gồm trạm 1 đến 6.</a:t>
             </a:r>
@@ -16510,7 +16390,7 @@
                     <a:lumMod val="50000"/>
                   </a:schemeClr>
                 </a:solidFill>
-                <a:latin typeface="Verdana"/>
+                <a:latin typeface="Arial"/>
               </a:rPr>
               <a:t>Neudata | #ClearDataClearImpact</a:t>
             </a:r>
@@ -16640,8 +16520,8 @@
                 <a:solidFill>
                   <a:srgbClr val="0D7377"/>
                 </a:solidFill>
-                <a:latin typeface="Segoe UI"/>
-                <a:cs typeface="Segoe UI"/>
+                <a:latin typeface="Arial"/>
+                <a:cs typeface="Arial"/>
               </a:rPr>
               <a:t>Giải lao</a:t>
             </a:r>
@@ -16711,8 +16591,8 @@
                 <a:solidFill>
                   <a:srgbClr val="FFFFFF"/>
                 </a:solidFill>
-                <a:latin typeface="Segoe UI"/>
-                <a:cs typeface="Segoe UI"/>
+                <a:latin typeface="Arial"/>
+                <a:cs typeface="Arial"/>
               </a:rPr>
               <a:t>GIẢI LAO   |   15 phút</a:t>
             </a:r>
@@ -16749,25 +16629,19 @@
               <a:spcBef>
                 <a:spcPts val="450"/>
               </a:spcBef>
-              <a:buNone/>
-            </a:pPr>
-            <a:r>
-              <a:rPr lang="en-US" sz="1650" b="1" dirty="0">
-                <a:solidFill>
-                  <a:srgbClr val="8A99A3"/>
-                </a:solidFill>
-                <a:latin typeface="Segoe UI"/>
-                <a:cs typeface="Segoe UI"/>
-              </a:rPr>
-              <a:t>1.  </a:t>
-            </a:r>
+              <a:buClr>
+                <a:srgbClr val="8A99A3"/>
+              </a:buClr>
+              <a:buFont typeface="Arial"/>
+              <a:buChar char="•"/>
+            </a:pPr>
             <a:r>
               <a:rPr lang="en-US" sz="1650" dirty="0">
                 <a:solidFill>
                   <a:srgbClr val="000000"/>
                 </a:solidFill>
-                <a:latin typeface="Segoe UI"/>
-                <a:cs typeface="Segoe UI"/>
+                <a:latin typeface="Arial"/>
+                <a:cs typeface="Arial"/>
               </a:rPr>
               <a:t>Thư giãn, uống cà phê, trò chuyện với người khác nghề</a:t>
             </a:r>
@@ -16780,25 +16654,19 @@
               <a:spcBef>
                 <a:spcPts val="450"/>
               </a:spcBef>
-              <a:buNone/>
-            </a:pPr>
-            <a:r>
-              <a:rPr lang="en-US" sz="1650" b="1" dirty="0">
-                <a:solidFill>
-                  <a:srgbClr val="8A99A3"/>
-                </a:solidFill>
-                <a:latin typeface="Segoe UI"/>
-                <a:cs typeface="Segoe UI"/>
-              </a:rPr>
-              <a:t>2.  </a:t>
-            </a:r>
+              <a:buClr>
+                <a:srgbClr val="8A99A3"/>
+              </a:buClr>
+              <a:buFont typeface="Arial"/>
+              <a:buChar char="•"/>
+            </a:pPr>
             <a:r>
               <a:rPr lang="en-US" sz="1650" dirty="0">
                 <a:solidFill>
                   <a:srgbClr val="000000"/>
                 </a:solidFill>
-                <a:latin typeface="Segoe UI"/>
-                <a:cs typeface="Segoe UI"/>
+                <a:latin typeface="Arial"/>
+                <a:cs typeface="Arial"/>
               </a:rPr>
               <a:t>Suy nghĩ: nhóm bạn có thể làm vấn đề nào từ khoa mình hôm nay?</a:t>
             </a:r>
@@ -16835,7 +16703,7 @@
                     <a:lumMod val="50000"/>
                   </a:schemeClr>
                 </a:solidFill>
-                <a:latin typeface="Verdana"/>
+                <a:latin typeface="Arial"/>
               </a:rPr>
               <a:t>Neudata | #ClearDataClearImpact</a:t>
             </a:r>
@@ -16965,8 +16833,8 @@
                 <a:solidFill>
                   <a:srgbClr val="0D7377"/>
                 </a:solidFill>
-                <a:latin typeface="Segoe UI"/>
-                <a:cs typeface="Segoe UI"/>
+                <a:latin typeface="Arial"/>
+                <a:cs typeface="Arial"/>
               </a:rPr>
               <a:t>1.2  Từ vấn đề đến câu hỏi</a:t>
             </a:r>
@@ -17035,8 +16903,8 @@
                 <a:solidFill>
                   <a:srgbClr val="0D7377"/>
                 </a:solidFill>
-                <a:latin typeface="Segoe UI"/>
-                <a:cs typeface="Segoe UI"/>
+                <a:latin typeface="Arial"/>
+                <a:cs typeface="Arial"/>
               </a:rPr>
               <a:t>Một câu hỏi tốt là một nửa câu trả lời.</a:t>
             </a:r>
@@ -17053,8 +16921,8 @@
                 <a:solidFill>
                   <a:srgbClr val="595959"/>
                 </a:solidFill>
-                <a:latin typeface="Segoe UI"/>
-                <a:cs typeface="Segoe UI"/>
+                <a:latin typeface="Arial"/>
+                <a:cs typeface="Arial"/>
               </a:rPr>
               <a:t>40 phút: câu hỏi đến từ đâu, PICO(T) qua các ví dụ, loại câu hỏi và FINER, rồi bài tập theo cặp</a:t>
             </a:r>
@@ -17091,7 +16959,7 @@
                     <a:lumMod val="50000"/>
                   </a:schemeClr>
                 </a:solidFill>
-                <a:latin typeface="Verdana"/>
+                <a:latin typeface="Arial"/>
               </a:rPr>
               <a:t>Neudata | #ClearDataClearImpact</a:t>
             </a:r>
@@ -17221,8 +17089,8 @@
                 <a:solidFill>
                   <a:srgbClr val="0D7377"/>
                 </a:solidFill>
-                <a:latin typeface="Segoe UI"/>
-                <a:cs typeface="Segoe UI"/>
+                <a:latin typeface="Arial"/>
+                <a:cs typeface="Arial"/>
               </a:rPr>
               <a:t>Câu hỏi nghiên cứu đến từ đâu?</a:t>
             </a:r>
@@ -17318,8 +17186,8 @@
                 <a:solidFill>
                   <a:srgbClr val="FFFFFF"/>
                 </a:solidFill>
-                <a:latin typeface="Segoe UI"/>
-                <a:cs typeface="Segoe UI"/>
+                <a:latin typeface="Arial"/>
+                <a:cs typeface="Arial"/>
               </a:rPr>
               <a:t>THÔNG ĐIỆP CHÍNH   </a:t>
             </a:r>
@@ -17328,8 +17196,8 @@
                 <a:solidFill>
                   <a:srgbClr val="FFFFFF"/>
                 </a:solidFill>
-                <a:latin typeface="Segoe UI"/>
-                <a:cs typeface="Segoe UI"/>
+                <a:latin typeface="Arial"/>
+                <a:cs typeface="Arial"/>
               </a:rPr>
               <a:t>Nếu đã có câu trả lời, hãy áp dụng. Nếu chưa, bạn có một câu hỏi nghiên cứu.</a:t>
             </a:r>
@@ -17366,7 +17234,7 @@
                     <a:lumMod val="50000"/>
                   </a:schemeClr>
                 </a:solidFill>
-                <a:latin typeface="Verdana"/>
+                <a:latin typeface="Arial"/>
               </a:rPr>
               <a:t>Neudata | #ClearDataClearImpact</a:t>
             </a:r>
@@ -17496,8 +17364,8 @@
                 <a:solidFill>
                   <a:srgbClr val="0D7377"/>
                 </a:solidFill>
-                <a:latin typeface="Segoe UI"/>
-                <a:cs typeface="Segoe UI"/>
+                <a:latin typeface="Arial"/>
+                <a:cs typeface="Arial"/>
               </a:rPr>
               <a:t>PICO(T): ví dụ xuyên suốt</a:t>
             </a:r>
@@ -17593,8 +17461,8 @@
                 <a:solidFill>
                   <a:srgbClr val="FFFFFF"/>
                 </a:solidFill>
-                <a:latin typeface="Segoe UI"/>
-                <a:cs typeface="Segoe UI"/>
+                <a:latin typeface="Arial"/>
+                <a:cs typeface="Arial"/>
               </a:rPr>
               <a:t>THÔNG ĐIỆP CHÍNH   </a:t>
             </a:r>
@@ -17603,8 +17471,8 @@
                 <a:solidFill>
                   <a:srgbClr val="FFFFFF"/>
                 </a:solidFill>
-                <a:latin typeface="Segoe UI"/>
-                <a:cs typeface="Segoe UI"/>
+                <a:latin typeface="Arial"/>
+                <a:cs typeface="Arial"/>
               </a:rPr>
               <a:t>Buổi nào chúng ta cũng quay lại câu hỏi này.</a:t>
             </a:r>
@@ -17641,7 +17509,7 @@
                     <a:lumMod val="50000"/>
                   </a:schemeClr>
                 </a:solidFill>
-                <a:latin typeface="Verdana"/>
+                <a:latin typeface="Arial"/>
               </a:rPr>
               <a:t>Neudata | #ClearDataClearImpact</a:t>
             </a:r>
@@ -17771,8 +17639,8 @@
                 <a:solidFill>
                   <a:srgbClr val="0D7377"/>
                 </a:solidFill>
-                <a:latin typeface="Segoe UI"/>
-                <a:cs typeface="Segoe UI"/>
+                <a:latin typeface="Arial"/>
+                <a:cs typeface="Arial"/>
               </a:rPr>
               <a:t>Tám thứ Bảy, tám buổi học</a:t>
             </a:r>
@@ -17861,7 +17729,7 @@
                     <a:lumMod val="50000"/>
                   </a:schemeClr>
                 </a:solidFill>
-                <a:latin typeface="Verdana"/>
+                <a:latin typeface="Arial"/>
               </a:rPr>
               <a:t>Neudata | #ClearDataClearImpact</a:t>
             </a:r>
@@ -17991,8 +17859,8 @@
                 <a:solidFill>
                   <a:srgbClr val="0D7377"/>
                 </a:solidFill>
-                <a:latin typeface="Segoe UI"/>
-                <a:cs typeface="Segoe UI"/>
+                <a:latin typeface="Arial"/>
+                <a:cs typeface="Arial"/>
               </a:rPr>
               <a:t>PICO(T) tại khoa: ba ví dụ mẫu</a:t>
             </a:r>
@@ -18088,8 +17956,8 @@
                 <a:solidFill>
                   <a:srgbClr val="FFFFFF"/>
                 </a:solidFill>
-                <a:latin typeface="Segoe UI"/>
-                <a:cs typeface="Segoe UI"/>
+                <a:latin typeface="Arial"/>
+                <a:cs typeface="Arial"/>
               </a:rPr>
               <a:t>THÔNG ĐIỆP CHÍNH   </a:t>
             </a:r>
@@ -18098,8 +17966,8 @@
                 <a:solidFill>
                   <a:srgbClr val="FFFFFF"/>
                 </a:solidFill>
-                <a:latin typeface="Segoe UI"/>
-                <a:cs typeface="Segoe UI"/>
+                <a:latin typeface="Arial"/>
+                <a:cs typeface="Arial"/>
               </a:rPr>
               <a:t>Câu hỏi điều trị dùng PICO, câu hỏi nguy cơ dùng PECO, câu hỏi 'bao nhiêu?' chỉ cần P và O.</a:t>
             </a:r>
@@ -18136,7 +18004,7 @@
                     <a:lumMod val="50000"/>
                   </a:schemeClr>
                 </a:solidFill>
-                <a:latin typeface="Verdana"/>
+                <a:latin typeface="Arial"/>
               </a:rPr>
               <a:t>Neudata | #ClearDataClearImpact</a:t>
             </a:r>
@@ -18266,8 +18134,8 @@
                 <a:solidFill>
                   <a:srgbClr val="0D7377"/>
                 </a:solidFill>
-                <a:latin typeface="Segoe UI"/>
-                <a:cs typeface="Segoe UI"/>
+                <a:latin typeface="Arial"/>
+                <a:cs typeface="Arial"/>
               </a:rPr>
               <a:t>Kiểm tra hiểu bài: tìm PICO</a:t>
             </a:r>
@@ -18337,8 +18205,8 @@
                 <a:solidFill>
                   <a:srgbClr val="FFFFFF"/>
                 </a:solidFill>
-                <a:latin typeface="Segoe UI"/>
-                <a:cs typeface="Segoe UI"/>
+                <a:latin typeface="Arial"/>
+                <a:cs typeface="Arial"/>
               </a:rPr>
               <a:t>CÂU HỎI NHANH   |   3 phút</a:t>
             </a:r>
@@ -18375,25 +18243,19 @@
               <a:spcBef>
                 <a:spcPts val="450"/>
               </a:spcBef>
-              <a:buNone/>
-            </a:pPr>
-            <a:r>
-              <a:rPr lang="en-US" sz="1650" b="1" dirty="0">
-                <a:solidFill>
-                  <a:srgbClr val="6C3483"/>
-                </a:solidFill>
-                <a:latin typeface="Segoe UI"/>
-                <a:cs typeface="Segoe UI"/>
-              </a:rPr>
-              <a:t>1.  </a:t>
-            </a:r>
+              <a:buClr>
+                <a:srgbClr val="6C3483"/>
+              </a:buClr>
+              <a:buFont typeface="Arial"/>
+              <a:buChar char="•"/>
+            </a:pPr>
             <a:r>
               <a:rPr lang="en-US" sz="1650" dirty="0">
                 <a:solidFill>
                   <a:srgbClr val="000000"/>
                 </a:solidFill>
-                <a:latin typeface="Segoe UI"/>
-                <a:cs typeface="Segoe UI"/>
+                <a:latin typeface="Arial"/>
+                <a:cs typeface="Arial"/>
               </a:rPr>
               <a:t>Đọc câu hỏi: 'Ở người ≥65 tuổi sau mổ gãy cổ xương đùi, gói chăm sóc không dùng thuốc hằng ngày, so với chăm sóc thường quy, có giảm mê sảng trong 7 ngày đầu không?'</a:t>
             </a:r>
@@ -18406,25 +18268,19 @@
               <a:spcBef>
                 <a:spcPts val="450"/>
               </a:spcBef>
-              <a:buNone/>
-            </a:pPr>
-            <a:r>
-              <a:rPr lang="en-US" sz="1650" b="1" dirty="0">
-                <a:solidFill>
-                  <a:srgbClr val="6C3483"/>
-                </a:solidFill>
-                <a:latin typeface="Segoe UI"/>
-                <a:cs typeface="Segoe UI"/>
-              </a:rPr>
-              <a:t>2.  </a:t>
-            </a:r>
+              <a:buClr>
+                <a:srgbClr val="6C3483"/>
+              </a:buClr>
+              <a:buFont typeface="Arial"/>
+              <a:buChar char="•"/>
+            </a:pPr>
             <a:r>
               <a:rPr lang="en-US" sz="1650" dirty="0">
                 <a:solidFill>
                   <a:srgbClr val="000000"/>
                 </a:solidFill>
-                <a:latin typeface="Segoe UI"/>
-                <a:cs typeface="Segoe UI"/>
+                <a:latin typeface="Arial"/>
+                <a:cs typeface="Arial"/>
               </a:rPr>
               <a:t>Những từ nào là P? I? C? O? T?</a:t>
             </a:r>
@@ -18437,25 +18293,19 @@
               <a:spcBef>
                 <a:spcPts val="450"/>
               </a:spcBef>
-              <a:buNone/>
-            </a:pPr>
-            <a:r>
-              <a:rPr lang="en-US" sz="1650" b="1" dirty="0">
-                <a:solidFill>
-                  <a:srgbClr val="6C3483"/>
-                </a:solidFill>
-                <a:latin typeface="Segoe UI"/>
-                <a:cs typeface="Segoe UI"/>
-              </a:rPr>
-              <a:t>3.  </a:t>
-            </a:r>
+              <a:buClr>
+                <a:srgbClr val="6C3483"/>
+              </a:buClr>
+              <a:buFont typeface="Arial"/>
+              <a:buChar char="•"/>
+            </a:pPr>
             <a:r>
               <a:rPr lang="en-US" sz="1650" dirty="0">
                 <a:solidFill>
                   <a:srgbClr val="000000"/>
                 </a:solidFill>
-                <a:latin typeface="Segoe UI"/>
-                <a:cs typeface="Segoe UI"/>
+                <a:latin typeface="Arial"/>
+                <a:cs typeface="Arial"/>
               </a:rPr>
               <a:t>Ghi năm chữ cái vào phiếu (Bài tập 1, phần khởi động)</a:t>
             </a:r>
@@ -18468,25 +18318,19 @@
               <a:spcBef>
                 <a:spcPts val="450"/>
               </a:spcBef>
-              <a:buNone/>
-            </a:pPr>
-            <a:r>
-              <a:rPr lang="en-US" sz="1650" b="1" dirty="0">
-                <a:solidFill>
-                  <a:srgbClr val="6C3483"/>
-                </a:solidFill>
-                <a:latin typeface="Segoe UI"/>
-                <a:cs typeface="Segoe UI"/>
-              </a:rPr>
-              <a:t>4.  </a:t>
-            </a:r>
+              <a:buClr>
+                <a:srgbClr val="6C3483"/>
+              </a:buClr>
+              <a:buFont typeface="Arial"/>
+              <a:buChar char="•"/>
+            </a:pPr>
             <a:r>
               <a:rPr lang="en-US" sz="1650" dirty="0">
                 <a:solidFill>
                   <a:srgbClr val="000000"/>
                 </a:solidFill>
-                <a:latin typeface="Segoe UI"/>
-                <a:cs typeface="Segoe UI"/>
+                <a:latin typeface="Arial"/>
+                <a:cs typeface="Arial"/>
               </a:rPr>
               <a:t>So sánh với người bên cạnh</a:t>
             </a:r>
@@ -18532,8 +18376,8 @@
                 <a:solidFill>
                   <a:srgbClr val="6C3483"/>
                 </a:solidFill>
-                <a:latin typeface="Segoe UI"/>
-                <a:cs typeface="Segoe UI"/>
+                <a:latin typeface="Arial"/>
+                <a:cs typeface="Arial"/>
               </a:rPr>
               <a:t>SẢN PHẨM   </a:t>
             </a:r>
@@ -18542,8 +18386,8 @@
                 <a:solidFill>
                   <a:srgbClr val="000000"/>
                 </a:solidFill>
-                <a:latin typeface="Segoe UI"/>
-                <a:cs typeface="Segoe UI"/>
+                <a:latin typeface="Arial"/>
+                <a:cs typeface="Arial"/>
               </a:rPr>
               <a:t>Năm phần được gắn nhãn. Đáp án ở slide sau</a:t>
             </a:r>
@@ -18580,7 +18424,7 @@
                     <a:lumMod val="50000"/>
                   </a:schemeClr>
                 </a:solidFill>
-                <a:latin typeface="Verdana"/>
+                <a:latin typeface="Arial"/>
               </a:rPr>
               <a:t>Neudata | #ClearDataClearImpact</a:t>
             </a:r>
@@ -18710,8 +18554,8 @@
                 <a:solidFill>
                   <a:srgbClr val="0D7377"/>
                 </a:solidFill>
-                <a:latin typeface="Segoe UI"/>
-                <a:cs typeface="Segoe UI"/>
+                <a:latin typeface="Arial"/>
+                <a:cs typeface="Arial"/>
               </a:rPr>
               <a:t>Đáp án: tìm PICO</a:t>
             </a:r>
@@ -18781,8 +18625,8 @@
                 <a:solidFill>
                   <a:srgbClr val="FFFFFF"/>
                 </a:solidFill>
-                <a:latin typeface="Segoe UI"/>
-                <a:cs typeface="Segoe UI"/>
+                <a:latin typeface="Arial"/>
+                <a:cs typeface="Arial"/>
               </a:rPr>
               <a:t>P</a:t>
             </a:r>
@@ -18830,8 +18674,8 @@
                 <a:solidFill>
                   <a:srgbClr val="000000"/>
                 </a:solidFill>
-                <a:latin typeface="Segoe UI"/>
-                <a:cs typeface="Segoe UI"/>
+                <a:latin typeface="Arial"/>
+                <a:cs typeface="Arial"/>
               </a:rPr>
               <a:t>Người ≥65 tuổi</a:t>
             </a:r>
@@ -18851,8 +18695,8 @@
                 <a:solidFill>
                   <a:srgbClr val="000000"/>
                 </a:solidFill>
-                <a:latin typeface="Segoe UI"/>
-                <a:cs typeface="Segoe UI"/>
+                <a:latin typeface="Arial"/>
+                <a:cs typeface="Arial"/>
               </a:rPr>
               <a:t>sau mổ gãy</a:t>
             </a:r>
@@ -18872,8 +18716,8 @@
                 <a:solidFill>
                   <a:srgbClr val="000000"/>
                 </a:solidFill>
-                <a:latin typeface="Segoe UI"/>
-                <a:cs typeface="Segoe UI"/>
+                <a:latin typeface="Arial"/>
+                <a:cs typeface="Arial"/>
               </a:rPr>
               <a:t>cổ xương đùi</a:t>
             </a:r>
@@ -18915,8 +18759,8 @@
                 <a:solidFill>
                   <a:srgbClr val="FFFFFF"/>
                 </a:solidFill>
-                <a:latin typeface="Segoe UI"/>
-                <a:cs typeface="Segoe UI"/>
+                <a:latin typeface="Arial"/>
+                <a:cs typeface="Arial"/>
               </a:rPr>
               <a:t>I</a:t>
             </a:r>
@@ -18964,8 +18808,8 @@
                 <a:solidFill>
                   <a:srgbClr val="000000"/>
                 </a:solidFill>
-                <a:latin typeface="Segoe UI"/>
-                <a:cs typeface="Segoe UI"/>
+                <a:latin typeface="Arial"/>
+                <a:cs typeface="Arial"/>
               </a:rPr>
               <a:t>Gói phòng mê sảng</a:t>
             </a:r>
@@ -18985,8 +18829,8 @@
                 <a:solidFill>
                   <a:srgbClr val="000000"/>
                 </a:solidFill>
-                <a:latin typeface="Segoe UI"/>
-                <a:cs typeface="Segoe UI"/>
+                <a:latin typeface="Arial"/>
+                <a:cs typeface="Arial"/>
               </a:rPr>
               <a:t>không dùng thuốc</a:t>
             </a:r>
@@ -19006,8 +18850,8 @@
                 <a:solidFill>
                   <a:srgbClr val="000000"/>
                 </a:solidFill>
-                <a:latin typeface="Segoe UI"/>
-                <a:cs typeface="Segoe UI"/>
+                <a:latin typeface="Arial"/>
+                <a:cs typeface="Arial"/>
               </a:rPr>
               <a:t>hằng ngày</a:t>
             </a:r>
@@ -19049,8 +18893,8 @@
                 <a:solidFill>
                   <a:srgbClr val="FFFFFF"/>
                 </a:solidFill>
-                <a:latin typeface="Segoe UI"/>
-                <a:cs typeface="Segoe UI"/>
+                <a:latin typeface="Arial"/>
+                <a:cs typeface="Arial"/>
               </a:rPr>
               <a:t>C</a:t>
             </a:r>
@@ -19098,8 +18942,8 @@
                 <a:solidFill>
                   <a:srgbClr val="000000"/>
                 </a:solidFill>
-                <a:latin typeface="Segoe UI"/>
-                <a:cs typeface="Segoe UI"/>
+                <a:latin typeface="Arial"/>
+                <a:cs typeface="Arial"/>
               </a:rPr>
               <a:t>Chăm sóc</a:t>
             </a:r>
@@ -19119,8 +18963,8 @@
                 <a:solidFill>
                   <a:srgbClr val="000000"/>
                 </a:solidFill>
-                <a:latin typeface="Segoe UI"/>
-                <a:cs typeface="Segoe UI"/>
+                <a:latin typeface="Arial"/>
+                <a:cs typeface="Arial"/>
               </a:rPr>
               <a:t>thường quy</a:t>
             </a:r>
@@ -19162,8 +19006,8 @@
                 <a:solidFill>
                   <a:srgbClr val="FFFFFF"/>
                 </a:solidFill>
-                <a:latin typeface="Segoe UI"/>
-                <a:cs typeface="Segoe UI"/>
+                <a:latin typeface="Arial"/>
+                <a:cs typeface="Arial"/>
               </a:rPr>
               <a:t>O</a:t>
             </a:r>
@@ -19211,8 +19055,8 @@
                 <a:solidFill>
                   <a:srgbClr val="000000"/>
                 </a:solidFill>
-                <a:latin typeface="Segoe UI"/>
-                <a:cs typeface="Segoe UI"/>
+                <a:latin typeface="Arial"/>
+                <a:cs typeface="Arial"/>
               </a:rPr>
               <a:t>Mê sảng</a:t>
             </a:r>
@@ -19232,8 +19076,8 @@
                 <a:solidFill>
                   <a:srgbClr val="000000"/>
                 </a:solidFill>
-                <a:latin typeface="Segoe UI"/>
-                <a:cs typeface="Segoe UI"/>
+                <a:latin typeface="Arial"/>
+                <a:cs typeface="Arial"/>
               </a:rPr>
               <a:t>(sàng lọc</a:t>
             </a:r>
@@ -19253,8 +19097,8 @@
                 <a:solidFill>
                   <a:srgbClr val="000000"/>
                 </a:solidFill>
-                <a:latin typeface="Segoe UI"/>
-                <a:cs typeface="Segoe UI"/>
+                <a:latin typeface="Arial"/>
+                <a:cs typeface="Arial"/>
               </a:rPr>
               <a:t>hằng ngày)</a:t>
             </a:r>
@@ -19296,8 +19140,8 @@
                 <a:solidFill>
                   <a:srgbClr val="FFFFFF"/>
                 </a:solidFill>
-                <a:latin typeface="Segoe UI"/>
-                <a:cs typeface="Segoe UI"/>
+                <a:latin typeface="Arial"/>
+                <a:cs typeface="Arial"/>
               </a:rPr>
               <a:t>T</a:t>
             </a:r>
@@ -19345,8 +19189,8 @@
                 <a:solidFill>
                   <a:srgbClr val="000000"/>
                 </a:solidFill>
-                <a:latin typeface="Segoe UI"/>
-                <a:cs typeface="Segoe UI"/>
+                <a:latin typeface="Arial"/>
+                <a:cs typeface="Arial"/>
               </a:rPr>
               <a:t>7 ngày đầu</a:t>
             </a:r>
@@ -19366,8 +19210,8 @@
                 <a:solidFill>
                   <a:srgbClr val="000000"/>
                 </a:solidFill>
-                <a:latin typeface="Segoe UI"/>
-                <a:cs typeface="Segoe UI"/>
+                <a:latin typeface="Arial"/>
+                <a:cs typeface="Arial"/>
               </a:rPr>
               <a:t>sau mổ</a:t>
             </a:r>
@@ -19411,8 +19255,8 @@
                 <a:solidFill>
                   <a:srgbClr val="FFFFFF"/>
                 </a:solidFill>
-                <a:latin typeface="Segoe UI"/>
-                <a:cs typeface="Segoe UI"/>
+                <a:latin typeface="Arial"/>
+                <a:cs typeface="Arial"/>
               </a:rPr>
               <a:t>THÔNG ĐIỆP CHÍNH   </a:t>
             </a:r>
@@ -19421,8 +19265,8 @@
                 <a:solidFill>
                   <a:srgbClr val="FFFFFF"/>
                 </a:solidFill>
-                <a:latin typeface="Segoe UI"/>
-                <a:cs typeface="Segoe UI"/>
+                <a:latin typeface="Arial"/>
+                <a:cs typeface="Arial"/>
               </a:rPr>
               <a:t>Chẩn đoán khiến bệnh nhân vào nghiên cứu thuộc P, không phải O.</a:t>
             </a:r>
@@ -19459,7 +19303,7 @@
                     <a:lumMod val="50000"/>
                   </a:schemeClr>
                 </a:solidFill>
-                <a:latin typeface="Verdana"/>
+                <a:latin typeface="Arial"/>
               </a:rPr>
               <a:t>Neudata | #ClearDataClearImpact</a:t>
             </a:r>
@@ -19589,8 +19433,8 @@
                 <a:solidFill>
                   <a:srgbClr val="0D7377"/>
                 </a:solidFill>
-                <a:latin typeface="Segoe UI"/>
-                <a:cs typeface="Segoe UI"/>
+                <a:latin typeface="Arial"/>
+                <a:cs typeface="Arial"/>
               </a:rPr>
               <a:t>Hai nhóm câu hỏi</a:t>
             </a:r>
@@ -19686,8 +19530,8 @@
                 <a:solidFill>
                   <a:srgbClr val="FFFFFF"/>
                 </a:solidFill>
-                <a:latin typeface="Segoe UI"/>
-                <a:cs typeface="Segoe UI"/>
+                <a:latin typeface="Arial"/>
+                <a:cs typeface="Arial"/>
               </a:rPr>
               <a:t>THÔNG ĐIỆP CHÍNH   </a:t>
             </a:r>
@@ -19696,8 +19540,8 @@
                 <a:solidFill>
                   <a:srgbClr val="FFFFFF"/>
                 </a:solidFill>
-                <a:latin typeface="Segoe UI"/>
-                <a:cs typeface="Segoe UI"/>
+                <a:latin typeface="Arial"/>
+                <a:cs typeface="Arial"/>
               </a:rPr>
               <a:t>Câu hỏi mô tả thì mô tả. Câu hỏi phân tích thì so sánh hoặc kiểm định nguyên nhân.</a:t>
             </a:r>
@@ -19734,7 +19578,7 @@
                     <a:lumMod val="50000"/>
                   </a:schemeClr>
                 </a:solidFill>
-                <a:latin typeface="Verdana"/>
+                <a:latin typeface="Arial"/>
               </a:rPr>
               <a:t>Neudata | #ClearDataClearImpact</a:t>
             </a:r>
@@ -19864,8 +19708,8 @@
                 <a:solidFill>
                   <a:srgbClr val="0D7377"/>
                 </a:solidFill>
-                <a:latin typeface="Segoe UI"/>
-                <a:cs typeface="Segoe UI"/>
+                <a:latin typeface="Arial"/>
+                <a:cs typeface="Arial"/>
               </a:rPr>
               <a:t>Từ băn khoăn mơ hồ đến câu hỏi trả lời được</a:t>
             </a:r>
@@ -19961,8 +19805,8 @@
                 <a:solidFill>
                   <a:srgbClr val="FFFFFF"/>
                 </a:solidFill>
-                <a:latin typeface="Segoe UI"/>
-                <a:cs typeface="Segoe UI"/>
+                <a:latin typeface="Arial"/>
+                <a:cs typeface="Arial"/>
               </a:rPr>
               <a:t>THÔNG ĐIỆP CHÍNH   </a:t>
             </a:r>
@@ -19971,8 +19815,8 @@
                 <a:solidFill>
                   <a:srgbClr val="FFFFFF"/>
                 </a:solidFill>
-                <a:latin typeface="Segoe UI"/>
-                <a:cs typeface="Segoe UI"/>
+                <a:latin typeface="Arial"/>
+                <a:cs typeface="Arial"/>
               </a:rPr>
               <a:t>Nếu chưa điền đủ bốn ô PICO, câu hỏi chưa sẵn sàng.</a:t>
             </a:r>
@@ -20009,7 +19853,7 @@
                     <a:lumMod val="50000"/>
                   </a:schemeClr>
                 </a:solidFill>
-                <a:latin typeface="Verdana"/>
+                <a:latin typeface="Arial"/>
               </a:rPr>
               <a:t>Neudata | #ClearDataClearImpact</a:t>
             </a:r>
@@ -20139,8 +19983,8 @@
                 <a:solidFill>
                   <a:srgbClr val="0D7377"/>
                 </a:solidFill>
-                <a:latin typeface="Segoe UI"/>
-                <a:cs typeface="Segoe UI"/>
+                <a:latin typeface="Arial"/>
+                <a:cs typeface="Arial"/>
               </a:rPr>
               <a:t>FINER: câu hỏi có đáng hỏi không?</a:t>
             </a:r>
@@ -20206,8 +20050,8 @@
                 <a:solidFill>
                   <a:srgbClr val="595959"/>
                 </a:solidFill>
-                <a:latin typeface="Segoe UI"/>
-                <a:cs typeface="Segoe UI"/>
+                <a:latin typeface="Arial"/>
+                <a:cs typeface="Arial"/>
               </a:rPr>
               <a:t>Kiểm tra mọi câu hỏi với năm tiêu chí trước khi đầu tư thời gian.</a:t>
             </a:r>
@@ -20249,8 +20093,8 @@
                 <a:solidFill>
                   <a:srgbClr val="FFFFFF"/>
                 </a:solidFill>
-                <a:latin typeface="Segoe UI"/>
-                <a:cs typeface="Segoe UI"/>
+                <a:latin typeface="Arial"/>
+                <a:cs typeface="Arial"/>
               </a:rPr>
               <a:t>Khả thi</a:t>
             </a:r>
@@ -20298,8 +20142,8 @@
                 <a:solidFill>
                   <a:srgbClr val="000000"/>
                 </a:solidFill>
-                <a:latin typeface="Segoe UI"/>
-                <a:cs typeface="Segoe UI"/>
+                <a:latin typeface="Arial"/>
+                <a:cs typeface="Arial"/>
               </a:rPr>
               <a:t>Đủ bệnh nhân</a:t>
             </a:r>
@@ -20319,8 +20163,8 @@
                 <a:solidFill>
                   <a:srgbClr val="000000"/>
                 </a:solidFill>
-                <a:latin typeface="Segoe UI"/>
-                <a:cs typeface="Segoe UI"/>
+                <a:latin typeface="Arial"/>
+                <a:cs typeface="Arial"/>
               </a:rPr>
               <a:t>Thời gian, kinh phí,</a:t>
             </a:r>
@@ -20340,8 +20184,8 @@
                 <a:solidFill>
                   <a:srgbClr val="000000"/>
                 </a:solidFill>
-                <a:latin typeface="Segoe UI"/>
-                <a:cs typeface="Segoe UI"/>
+                <a:latin typeface="Arial"/>
+                <a:cs typeface="Arial"/>
               </a:rPr>
               <a:t>kỹ năng, dữ liệu</a:t>
             </a:r>
@@ -20383,8 +20227,8 @@
                 <a:solidFill>
                   <a:srgbClr val="FFFFFF"/>
                 </a:solidFill>
-                <a:latin typeface="Segoe UI"/>
-                <a:cs typeface="Segoe UI"/>
+                <a:latin typeface="Arial"/>
+                <a:cs typeface="Arial"/>
               </a:rPr>
               <a:t>Thú vị</a:t>
             </a:r>
@@ -20432,8 +20276,8 @@
                 <a:solidFill>
                   <a:srgbClr val="000000"/>
                 </a:solidFill>
-                <a:latin typeface="Segoe UI"/>
-                <a:cs typeface="Segoe UI"/>
+                <a:latin typeface="Arial"/>
+                <a:cs typeface="Arial"/>
               </a:rPr>
               <a:t>Với bạn, nhóm</a:t>
             </a:r>
@@ -20453,8 +20297,8 @@
                 <a:solidFill>
                   <a:srgbClr val="000000"/>
                 </a:solidFill>
-                <a:latin typeface="Segoe UI"/>
-                <a:cs typeface="Segoe UI"/>
+                <a:latin typeface="Arial"/>
+                <a:cs typeface="Arial"/>
               </a:rPr>
               <a:t>và người đọc</a:t>
             </a:r>
@@ -20496,8 +20340,8 @@
                 <a:solidFill>
                   <a:srgbClr val="FFFFFF"/>
                 </a:solidFill>
-                <a:latin typeface="Segoe UI"/>
-                <a:cs typeface="Segoe UI"/>
+                <a:latin typeface="Arial"/>
+                <a:cs typeface="Arial"/>
               </a:rPr>
               <a:t>Mới</a:t>
             </a:r>
@@ -20545,8 +20389,8 @@
                 <a:solidFill>
                   <a:srgbClr val="000000"/>
                 </a:solidFill>
-                <a:latin typeface="Segoe UI"/>
-                <a:cs typeface="Segoe UI"/>
+                <a:latin typeface="Arial"/>
+                <a:cs typeface="Arial"/>
               </a:rPr>
               <a:t>Khẳng định, bác bỏ</a:t>
             </a:r>
@@ -20566,8 +20410,8 @@
                 <a:solidFill>
                   <a:srgbClr val="000000"/>
                 </a:solidFill>
-                <a:latin typeface="Segoe UI"/>
-                <a:cs typeface="Segoe UI"/>
+                <a:latin typeface="Arial"/>
+                <a:cs typeface="Arial"/>
               </a:rPr>
               <a:t>hoặc mở rộng</a:t>
             </a:r>
@@ -20587,8 +20431,8 @@
                 <a:solidFill>
                   <a:srgbClr val="000000"/>
                 </a:solidFill>
-                <a:latin typeface="Segoe UI"/>
-                <a:cs typeface="Segoe UI"/>
+                <a:latin typeface="Arial"/>
+                <a:cs typeface="Arial"/>
               </a:rPr>
               <a:t>điều đã biết</a:t>
             </a:r>
@@ -20630,8 +20474,8 @@
                 <a:solidFill>
                   <a:srgbClr val="FFFFFF"/>
                 </a:solidFill>
-                <a:latin typeface="Segoe UI"/>
-                <a:cs typeface="Segoe UI"/>
+                <a:latin typeface="Arial"/>
+                <a:cs typeface="Arial"/>
               </a:rPr>
               <a:t>Đạo đức</a:t>
             </a:r>
@@ -20679,8 +20523,8 @@
                 <a:solidFill>
                   <a:srgbClr val="000000"/>
                 </a:solidFill>
-                <a:latin typeface="Segoe UI"/>
-                <a:cs typeface="Segoe UI"/>
+                <a:latin typeface="Arial"/>
+                <a:cs typeface="Arial"/>
               </a:rPr>
               <a:t>Hội đồng đạo đức</a:t>
             </a:r>
@@ -20700,8 +20544,8 @@
                 <a:solidFill>
                   <a:srgbClr val="000000"/>
                 </a:solidFill>
-                <a:latin typeface="Segoe UI"/>
-                <a:cs typeface="Segoe UI"/>
+                <a:latin typeface="Arial"/>
+                <a:cs typeface="Arial"/>
               </a:rPr>
               <a:t>có thể phê duyệt</a:t>
             </a:r>
@@ -20743,8 +20587,8 @@
                 <a:solidFill>
                   <a:srgbClr val="FFFFFF"/>
                 </a:solidFill>
-                <a:latin typeface="Segoe UI"/>
-                <a:cs typeface="Segoe UI"/>
+                <a:latin typeface="Arial"/>
+                <a:cs typeface="Arial"/>
               </a:rPr>
               <a:t>Phù hợp</a:t>
             </a:r>
@@ -20792,8 +20636,8 @@
                 <a:solidFill>
                   <a:srgbClr val="000000"/>
                 </a:solidFill>
-                <a:latin typeface="Segoe UI"/>
-                <a:cs typeface="Segoe UI"/>
+                <a:latin typeface="Arial"/>
+                <a:cs typeface="Arial"/>
               </a:rPr>
               <a:t>Có thể thay đổi</a:t>
             </a:r>
@@ -20813,8 +20657,8 @@
                 <a:solidFill>
                   <a:srgbClr val="000000"/>
                 </a:solidFill>
-                <a:latin typeface="Segoe UI"/>
-                <a:cs typeface="Segoe UI"/>
+                <a:latin typeface="Arial"/>
+                <a:cs typeface="Arial"/>
               </a:rPr>
               <a:t>thực hành, chính sách</a:t>
             </a:r>
@@ -20834,8 +20678,8 @@
                 <a:solidFill>
                   <a:srgbClr val="000000"/>
                 </a:solidFill>
-                <a:latin typeface="Segoe UI"/>
-                <a:cs typeface="Segoe UI"/>
+                <a:latin typeface="Arial"/>
+                <a:cs typeface="Arial"/>
               </a:rPr>
               <a:t>hay nghiên cứu</a:t>
             </a:r>
@@ -20879,8 +20723,8 @@
                 <a:solidFill>
                   <a:srgbClr val="FFFFFF"/>
                 </a:solidFill>
-                <a:latin typeface="Segoe UI"/>
-                <a:cs typeface="Segoe UI"/>
+                <a:latin typeface="Arial"/>
+                <a:cs typeface="Arial"/>
               </a:rPr>
               <a:t>THÔNG ĐIỆP CHÍNH   </a:t>
             </a:r>
@@ -20889,8 +20733,8 @@
                 <a:solidFill>
                   <a:srgbClr val="FFFFFF"/>
                 </a:solidFill>
-                <a:latin typeface="Segoe UI"/>
-                <a:cs typeface="Segoe UI"/>
+                <a:latin typeface="Arial"/>
+                <a:cs typeface="Arial"/>
               </a:rPr>
               <a:t>Nếu câu hỏi trượt một tiêu chí, hãy viết lại trước khi đi tiếp.</a:t>
             </a:r>
@@ -20927,7 +20771,7 @@
                     <a:lumMod val="50000"/>
                   </a:schemeClr>
                 </a:solidFill>
-                <a:latin typeface="Verdana"/>
+                <a:latin typeface="Arial"/>
               </a:rPr>
               <a:t>Neudata | #ClearDataClearImpact</a:t>
             </a:r>
@@ -21057,8 +20901,8 @@
                 <a:solidFill>
                   <a:srgbClr val="0D7377"/>
                 </a:solidFill>
-                <a:latin typeface="Segoe UI"/>
-                <a:cs typeface="Segoe UI"/>
+                <a:latin typeface="Arial"/>
+                <a:cs typeface="Arial"/>
               </a:rPr>
               <a:t>Kiểm tra FINER cho ví dụ xuyên suốt</a:t>
             </a:r>
@@ -21154,8 +20998,8 @@
                 <a:solidFill>
                   <a:srgbClr val="FFFFFF"/>
                 </a:solidFill>
-                <a:latin typeface="Segoe UI"/>
-                <a:cs typeface="Segoe UI"/>
+                <a:latin typeface="Arial"/>
+                <a:cs typeface="Arial"/>
               </a:rPr>
               <a:t>THÔNG ĐIỆP CHÍNH   </a:t>
             </a:r>
@@ -21164,8 +21008,8 @@
                 <a:solidFill>
                   <a:srgbClr val="FFFFFF"/>
                 </a:solidFill>
-                <a:latin typeface="Segoe UI"/>
-                <a:cs typeface="Segoe UI"/>
+                <a:latin typeface="Arial"/>
+                <a:cs typeface="Arial"/>
               </a:rPr>
               <a:t>Câu hỏi quan trọng nhưng không khả thi với một khoa: cần viết lại.</a:t>
             </a:r>
@@ -21202,7 +21046,7 @@
                     <a:lumMod val="50000"/>
                   </a:schemeClr>
                 </a:solidFill>
-                <a:latin typeface="Verdana"/>
+                <a:latin typeface="Arial"/>
               </a:rPr>
               <a:t>Neudata | #ClearDataClearImpact</a:t>
             </a:r>
@@ -21332,8 +21176,8 @@
                 <a:solidFill>
                   <a:srgbClr val="0D7377"/>
                 </a:solidFill>
-                <a:latin typeface="Segoe UI"/>
-                <a:cs typeface="Segoe UI"/>
+                <a:latin typeface="Arial"/>
+                <a:cs typeface="Arial"/>
               </a:rPr>
               <a:t>Bài tập theo cặp: từ tình huống đến câu hỏi</a:t>
             </a:r>
@@ -21403,8 +21247,8 @@
                 <a:solidFill>
                   <a:srgbClr val="FFFFFF"/>
                 </a:solidFill>
-                <a:latin typeface="Segoe UI"/>
-                <a:cs typeface="Segoe UI"/>
+                <a:latin typeface="Arial"/>
+                <a:cs typeface="Arial"/>
               </a:rPr>
               <a:t>LÀM VIỆC NHÓM   |   11 phút</a:t>
             </a:r>
@@ -21441,25 +21285,19 @@
               <a:spcBef>
                 <a:spcPts val="450"/>
               </a:spcBef>
-              <a:buNone/>
-            </a:pPr>
-            <a:r>
-              <a:rPr lang="en-US" sz="1650" b="1" dirty="0">
-                <a:solidFill>
-                  <a:srgbClr val="0D7377"/>
-                </a:solidFill>
-                <a:latin typeface="Segoe UI"/>
-                <a:cs typeface="Segoe UI"/>
-              </a:rPr>
-              <a:t>1.  </a:t>
-            </a:r>
+              <a:buClr>
+                <a:srgbClr val="0D7377"/>
+              </a:buClr>
+              <a:buFont typeface="Arial"/>
+              <a:buChar char="•"/>
+            </a:pPr>
             <a:r>
               <a:rPr lang="en-US" sz="1650" dirty="0">
                 <a:solidFill>
                   <a:srgbClr val="000000"/>
                 </a:solidFill>
-                <a:latin typeface="Segoe UI"/>
-                <a:cs typeface="Segoe UI"/>
+                <a:latin typeface="Arial"/>
+                <a:cs typeface="Arial"/>
               </a:rPr>
               <a:t>Chọn MỘT tình huống trong Bài tập 1 của phiếu</a:t>
             </a:r>
@@ -21472,25 +21310,19 @@
               <a:spcBef>
                 <a:spcPts val="450"/>
               </a:spcBef>
-              <a:buNone/>
-            </a:pPr>
-            <a:r>
-              <a:rPr lang="en-US" sz="1650" b="1" dirty="0">
-                <a:solidFill>
-                  <a:srgbClr val="0D7377"/>
-                </a:solidFill>
-                <a:latin typeface="Segoe UI"/>
-                <a:cs typeface="Segoe UI"/>
-              </a:rPr>
-              <a:t>2.  </a:t>
-            </a:r>
+              <a:buClr>
+                <a:srgbClr val="0D7377"/>
+              </a:buClr>
+              <a:buFont typeface="Arial"/>
+              <a:buChar char="•"/>
+            </a:pPr>
             <a:r>
               <a:rPr lang="en-US" sz="1650" dirty="0">
                 <a:solidFill>
                   <a:srgbClr val="000000"/>
                 </a:solidFill>
-                <a:latin typeface="Segoe UI"/>
-                <a:cs typeface="Segoe UI"/>
+                <a:latin typeface="Arial"/>
+                <a:cs typeface="Arial"/>
               </a:rPr>
               <a:t>Điền các ô PICO(T)</a:t>
             </a:r>
@@ -21503,25 +21335,19 @@
               <a:spcBef>
                 <a:spcPts val="450"/>
               </a:spcBef>
-              <a:buNone/>
-            </a:pPr>
-            <a:r>
-              <a:rPr lang="en-US" sz="1650" b="1" dirty="0">
-                <a:solidFill>
-                  <a:srgbClr val="0D7377"/>
-                </a:solidFill>
-                <a:latin typeface="Segoe UI"/>
-                <a:cs typeface="Segoe UI"/>
-              </a:rPr>
-              <a:t>3.  </a:t>
-            </a:r>
+              <a:buClr>
+                <a:srgbClr val="0D7377"/>
+              </a:buClr>
+              <a:buFont typeface="Arial"/>
+              <a:buChar char="•"/>
+            </a:pPr>
             <a:r>
               <a:rPr lang="en-US" sz="1650" dirty="0">
                 <a:solidFill>
                   <a:srgbClr val="000000"/>
                 </a:solidFill>
-                <a:latin typeface="Segoe UI"/>
-                <a:cs typeface="Segoe UI"/>
+                <a:latin typeface="Arial"/>
+                <a:cs typeface="Arial"/>
               </a:rPr>
               <a:t>Viết câu hỏi thành một câu</a:t>
             </a:r>
@@ -21534,25 +21360,19 @@
               <a:spcBef>
                 <a:spcPts val="450"/>
               </a:spcBef>
-              <a:buNone/>
-            </a:pPr>
-            <a:r>
-              <a:rPr lang="en-US" sz="1650" b="1" dirty="0">
-                <a:solidFill>
-                  <a:srgbClr val="0D7377"/>
-                </a:solidFill>
-                <a:latin typeface="Segoe UI"/>
-                <a:cs typeface="Segoe UI"/>
-              </a:rPr>
-              <a:t>4.  </a:t>
-            </a:r>
+              <a:buClr>
+                <a:srgbClr val="0D7377"/>
+              </a:buClr>
+              <a:buFont typeface="Arial"/>
+              <a:buChar char="•"/>
+            </a:pPr>
             <a:r>
               <a:rPr lang="en-US" sz="1650" dirty="0">
                 <a:solidFill>
                   <a:srgbClr val="000000"/>
                 </a:solidFill>
-                <a:latin typeface="Segoe UI"/>
-                <a:cs typeface="Segoe UI"/>
+                <a:latin typeface="Arial"/>
+                <a:cs typeface="Arial"/>
               </a:rPr>
               <a:t>Gắn đèn FINER nhanh (xanh / vàng / đỏ)</a:t>
             </a:r>
@@ -21565,25 +21385,19 @@
               <a:spcBef>
                 <a:spcPts val="450"/>
               </a:spcBef>
-              <a:buNone/>
-            </a:pPr>
-            <a:r>
-              <a:rPr lang="en-US" sz="1650" b="1" dirty="0">
-                <a:solidFill>
-                  <a:srgbClr val="0D7377"/>
-                </a:solidFill>
-                <a:latin typeface="Segoe UI"/>
-                <a:cs typeface="Segoe UI"/>
-              </a:rPr>
-              <a:t>5.  </a:t>
-            </a:r>
+              <a:buClr>
+                <a:srgbClr val="0D7377"/>
+              </a:buClr>
+              <a:buFont typeface="Arial"/>
+              <a:buChar char="•"/>
+            </a:pPr>
             <a:r>
               <a:rPr lang="en-US" sz="1650" dirty="0">
                 <a:solidFill>
                   <a:srgbClr val="000000"/>
                 </a:solidFill>
-                <a:latin typeface="Segoe UI"/>
-                <a:cs typeface="Segoe UI"/>
+                <a:latin typeface="Arial"/>
+                <a:cs typeface="Arial"/>
               </a:rPr>
               <a:t>Viết H0 và H1 (hoặc giải thích vì sao không cần)</a:t>
             </a:r>
@@ -21627,8 +21441,8 @@
                 <a:solidFill>
                   <a:srgbClr val="0D7377"/>
                 </a:solidFill>
-                <a:latin typeface="Segoe UI"/>
-                <a:cs typeface="Segoe UI"/>
+                <a:latin typeface="Arial"/>
+                <a:cs typeface="Arial"/>
               </a:rPr>
               <a:t>Tình huống</a:t>
             </a:r>
@@ -21649,8 +21463,8 @@
                 <a:solidFill>
                   <a:srgbClr val="000000"/>
                 </a:solidFill>
-                <a:latin typeface="Segoe UI"/>
-                <a:cs typeface="Segoe UI"/>
+                <a:latin typeface="Arial"/>
+                <a:cs typeface="Arial"/>
               </a:rPr>
               <a:t>Viêm phổi liên quan thở máy</a:t>
             </a:r>
@@ -21671,8 +21485,8 @@
                 <a:solidFill>
                   <a:srgbClr val="000000"/>
                 </a:solidFill>
-                <a:latin typeface="Segoe UI"/>
-                <a:cs typeface="Segoe UI"/>
+                <a:latin typeface="Arial"/>
+                <a:cs typeface="Arial"/>
               </a:rPr>
               <a:t>Tổn thương do tì đè</a:t>
             </a:r>
@@ -21693,8 +21507,8 @@
                 <a:solidFill>
                   <a:srgbClr val="000000"/>
                 </a:solidFill>
-                <a:latin typeface="Segoe UI"/>
-                <a:cs typeface="Segoe UI"/>
+                <a:latin typeface="Arial"/>
+                <a:cs typeface="Arial"/>
               </a:rPr>
               <a:t>Mê sảng</a:t>
             </a:r>
@@ -21715,8 +21529,8 @@
                 <a:solidFill>
                   <a:srgbClr val="000000"/>
                 </a:solidFill>
-                <a:latin typeface="Segoe UI"/>
-                <a:cs typeface="Segoe UI"/>
+                <a:latin typeface="Arial"/>
+                <a:cs typeface="Arial"/>
               </a:rPr>
               <a:t>Đột quỵ: thời gian cửa-kim</a:t>
             </a:r>
@@ -21737,8 +21551,8 @@
                 <a:solidFill>
                   <a:srgbClr val="000000"/>
                 </a:solidFill>
-                <a:latin typeface="Segoe UI"/>
-                <a:cs typeface="Segoe UI"/>
+                <a:latin typeface="Arial"/>
+                <a:cs typeface="Arial"/>
               </a:rPr>
               <a:t>Sai sót dùng thuốc</a:t>
             </a:r>
@@ -21784,8 +21598,8 @@
                 <a:solidFill>
                   <a:srgbClr val="0D7377"/>
                 </a:solidFill>
-                <a:latin typeface="Segoe UI"/>
-                <a:cs typeface="Segoe UI"/>
+                <a:latin typeface="Arial"/>
+                <a:cs typeface="Arial"/>
               </a:rPr>
               <a:t>SẢN PHẨM   </a:t>
             </a:r>
@@ -21794,8 +21608,8 @@
                 <a:solidFill>
                   <a:srgbClr val="000000"/>
                 </a:solidFill>
-                <a:latin typeface="Segoe UI"/>
-                <a:cs typeface="Segoe UI"/>
+                <a:latin typeface="Arial"/>
+                <a:cs typeface="Arial"/>
               </a:rPr>
               <a:t>Một câu hỏi PICO + đèn FINER + giả thuyết, sẵn sàng đọc to</a:t>
             </a:r>
@@ -21832,7 +21646,7 @@
                     <a:lumMod val="50000"/>
                   </a:schemeClr>
                 </a:solidFill>
-                <a:latin typeface="Verdana"/>
+                <a:latin typeface="Arial"/>
               </a:rPr>
               <a:t>Neudata | #ClearDataClearImpact</a:t>
             </a:r>
@@ -21962,8 +21776,8 @@
                 <a:solidFill>
                   <a:srgbClr val="0D7377"/>
                 </a:solidFill>
-                <a:latin typeface="Segoe UI"/>
-                <a:cs typeface="Segoe UI"/>
+                <a:latin typeface="Arial"/>
+                <a:cs typeface="Arial"/>
               </a:rPr>
               <a:t>1.3  Mục đích, mục tiêu, giả thuyết</a:t>
             </a:r>
@@ -22032,8 +21846,8 @@
                 <a:solidFill>
                   <a:srgbClr val="0D7377"/>
                 </a:solidFill>
-                <a:latin typeface="Segoe UI"/>
-                <a:cs typeface="Segoe UI"/>
+                <a:latin typeface="Arial"/>
+                <a:cs typeface="Arial"/>
               </a:rPr>
               <a:t>Câu hỏi cho biết ta muốn biết gì. Mục đích và mục tiêu cho biết ta sẽ làm gì.</a:t>
             </a:r>
@@ -22050,8 +21864,8 @@
                 <a:solidFill>
                   <a:srgbClr val="595959"/>
                 </a:solidFill>
-                <a:latin typeface="Segoe UI"/>
-                <a:cs typeface="Segoe UI"/>
+                <a:latin typeface="Arial"/>
+                <a:cs typeface="Arial"/>
               </a:rPr>
               <a:t>20 phút: mục đích, mục tiêu, giả thuyết không và giả thuyết đối, và một bài tập nhanh</a:t>
             </a:r>
@@ -22088,7 +21902,7 @@
                     <a:lumMod val="50000"/>
                   </a:schemeClr>
                 </a:solidFill>
-                <a:latin typeface="Verdana"/>
+                <a:latin typeface="Arial"/>
               </a:rPr>
               <a:t>Neudata | #ClearDataClearImpact</a:t>
             </a:r>
@@ -22218,8 +22032,8 @@
                 <a:solidFill>
                   <a:srgbClr val="0D7377"/>
                 </a:solidFill>
-                <a:latin typeface="Segoe UI"/>
-                <a:cs typeface="Segoe UI"/>
+                <a:latin typeface="Arial"/>
+                <a:cs typeface="Arial"/>
               </a:rPr>
               <a:t>Mục đích, mục tiêu, giả thuyết</a:t>
             </a:r>
@@ -22315,8 +22129,8 @@
                 <a:solidFill>
                   <a:srgbClr val="FFFFFF"/>
                 </a:solidFill>
-                <a:latin typeface="Segoe UI"/>
-                <a:cs typeface="Segoe UI"/>
+                <a:latin typeface="Arial"/>
+                <a:cs typeface="Arial"/>
               </a:rPr>
               <a:t>THÔNG ĐIỆP CHÍNH   </a:t>
             </a:r>
@@ -22325,8 +22139,8 @@
                 <a:solidFill>
                   <a:srgbClr val="FFFFFF"/>
                 </a:solidFill>
-                <a:latin typeface="Segoe UI"/>
-                <a:cs typeface="Segoe UI"/>
+                <a:latin typeface="Arial"/>
+                <a:cs typeface="Arial"/>
               </a:rPr>
               <a:t>Một mục đích, 2-3 mục tiêu đo được, một giả thuyết cho mỗi mục tiêu chính.</a:t>
             </a:r>
@@ -22363,7 +22177,7 @@
                     <a:lumMod val="50000"/>
                   </a:schemeClr>
                 </a:solidFill>
-                <a:latin typeface="Verdana"/>
+                <a:latin typeface="Arial"/>
               </a:rPr>
               <a:t>Neudata | #ClearDataClearImpact</a:t>
             </a:r>
@@ -22493,8 +22307,8 @@
                 <a:solidFill>
                   <a:srgbClr val="0D7377"/>
                 </a:solidFill>
-                <a:latin typeface="Segoe UI"/>
-                <a:cs typeface="Segoe UI"/>
+                <a:latin typeface="Arial"/>
+                <a:cs typeface="Arial"/>
               </a:rPr>
               <a:t>Khóa học này là Cấp độ 1 trong ba cấp độ</a:t>
             </a:r>
@@ -22590,8 +22404,8 @@
                 <a:solidFill>
                   <a:srgbClr val="FFFFFF"/>
                 </a:solidFill>
-                <a:latin typeface="Segoe UI"/>
-                <a:cs typeface="Segoe UI"/>
+                <a:latin typeface="Arial"/>
+                <a:cs typeface="Arial"/>
               </a:rPr>
               <a:t>THÔNG ĐIỆP CHÍNH   </a:t>
             </a:r>
@@ -22600,8 +22414,8 @@
                 <a:solidFill>
                   <a:srgbClr val="FFFFFF"/>
                 </a:solidFill>
-                <a:latin typeface="Segoe UI"/>
-                <a:cs typeface="Segoe UI"/>
+                <a:latin typeface="Arial"/>
+                <a:cs typeface="Arial"/>
               </a:rPr>
               <a:t>Cấp độ 1 là khóa học này, Cấp độ 2 là thực hành phân tích bằng R, Cấp độ 3 là phương pháp nâng cao.</a:t>
             </a:r>
@@ -22638,7 +22452,7 @@
                     <a:lumMod val="50000"/>
                   </a:schemeClr>
                 </a:solidFill>
-                <a:latin typeface="Verdana"/>
+                <a:latin typeface="Arial"/>
               </a:rPr>
               <a:t>Neudata | #ClearDataClearImpact</a:t>
             </a:r>
@@ -22768,8 +22582,8 @@
                 <a:solidFill>
                   <a:srgbClr val="0D7377"/>
                 </a:solidFill>
-                <a:latin typeface="Segoe UI"/>
-                <a:cs typeface="Segoe UI"/>
+                <a:latin typeface="Arial"/>
+                <a:cs typeface="Arial"/>
               </a:rPr>
               <a:t>Mục tiêu bắt đầu bằng động từ đo được</a:t>
             </a:r>
@@ -22865,8 +22679,8 @@
                 <a:solidFill>
                   <a:srgbClr val="FFFFFF"/>
                 </a:solidFill>
-                <a:latin typeface="Segoe UI"/>
-                <a:cs typeface="Segoe UI"/>
+                <a:latin typeface="Arial"/>
+                <a:cs typeface="Arial"/>
               </a:rPr>
               <a:t>THÔNG ĐIỆP CHÍNH   </a:t>
             </a:r>
@@ -22875,8 +22689,8 @@
                 <a:solidFill>
                   <a:srgbClr val="FFFFFF"/>
                 </a:solidFill>
-                <a:latin typeface="Segoe UI"/>
-                <a:cs typeface="Segoe UI"/>
+                <a:latin typeface="Arial"/>
+                <a:cs typeface="Arial"/>
               </a:rPr>
               <a:t>Nếu không nói được sẽ đo bằng cách nào, đó chưa phải là mục tiêu.</a:t>
             </a:r>
@@ -22913,7 +22727,7 @@
                     <a:lumMod val="50000"/>
                   </a:schemeClr>
                 </a:solidFill>
-                <a:latin typeface="Verdana"/>
+                <a:latin typeface="Arial"/>
               </a:rPr>
               <a:t>Neudata | #ClearDataClearImpact</a:t>
             </a:r>
@@ -23043,8 +22857,8 @@
                 <a:solidFill>
                   <a:srgbClr val="0D7377"/>
                 </a:solidFill>
-                <a:latin typeface="Segoe UI"/>
-                <a:cs typeface="Segoe UI"/>
+                <a:latin typeface="Arial"/>
+                <a:cs typeface="Arial"/>
               </a:rPr>
               <a:t>Giả thuyết không và giả thuyết đối</a:t>
             </a:r>
@@ -23140,8 +22954,8 @@
                 <a:solidFill>
                   <a:srgbClr val="FFFFFF"/>
                 </a:solidFill>
-                <a:latin typeface="Segoe UI"/>
-                <a:cs typeface="Segoe UI"/>
+                <a:latin typeface="Arial"/>
+                <a:cs typeface="Arial"/>
               </a:rPr>
               <a:t>THÔNG ĐIỆP CHÍNH   </a:t>
             </a:r>
@@ -23150,8 +22964,8 @@
                 <a:solidFill>
                   <a:srgbClr val="FFFFFF"/>
                 </a:solidFill>
-                <a:latin typeface="Segoe UI"/>
-                <a:cs typeface="Segoe UI"/>
+                <a:latin typeface="Arial"/>
+                <a:cs typeface="Arial"/>
               </a:rPr>
               <a:t>Ta kiểm định H0. Dữ liệu có thể bác bỏ hoặc chưa bác bỏ được, nhưng không bao giờ chứng minh H0.</a:t>
             </a:r>
@@ -23188,7 +23002,7 @@
                     <a:lumMod val="50000"/>
                   </a:schemeClr>
                 </a:solidFill>
-                <a:latin typeface="Verdana"/>
+                <a:latin typeface="Arial"/>
               </a:rPr>
               <a:t>Neudata | #ClearDataClearImpact</a:t>
             </a:r>
@@ -23318,8 +23132,8 @@
                 <a:solidFill>
                   <a:srgbClr val="0D7377"/>
                 </a:solidFill>
-                <a:latin typeface="Segoe UI"/>
-                <a:cs typeface="Segoe UI"/>
+                <a:latin typeface="Arial"/>
+                <a:cs typeface="Arial"/>
               </a:rPr>
               <a:t>Bài tập nhanh: mục đích, mục tiêu, giả thuyết</a:t>
             </a:r>
@@ -23389,8 +23203,8 @@
                 <a:solidFill>
                   <a:srgbClr val="FFFFFF"/>
                 </a:solidFill>
-                <a:latin typeface="Segoe UI"/>
-                <a:cs typeface="Segoe UI"/>
+                <a:latin typeface="Arial"/>
+                <a:cs typeface="Arial"/>
               </a:rPr>
               <a:t>BÀI TẬP CÁ NHÂN   |   7 phút</a:t>
             </a:r>
@@ -23427,25 +23241,19 @@
               <a:spcBef>
                 <a:spcPts val="450"/>
               </a:spcBef>
-              <a:buNone/>
-            </a:pPr>
-            <a:r>
-              <a:rPr lang="en-US" sz="1650" b="1" dirty="0">
-                <a:solidFill>
-                  <a:srgbClr val="0B376C"/>
-                </a:solidFill>
-                <a:latin typeface="Segoe UI"/>
-                <a:cs typeface="Segoe UI"/>
-              </a:rPr>
-              <a:t>1.  </a:t>
-            </a:r>
+              <a:buClr>
+                <a:srgbClr val="0B376C"/>
+              </a:buClr>
+              <a:buFont typeface="Arial"/>
+              <a:buChar char="•"/>
+            </a:pPr>
             <a:r>
               <a:rPr lang="en-US" sz="1650" dirty="0">
                 <a:solidFill>
                   <a:srgbClr val="000000"/>
                 </a:solidFill>
-                <a:latin typeface="Segoe UI"/>
-                <a:cs typeface="Segoe UI"/>
+                <a:latin typeface="Arial"/>
+                <a:cs typeface="Arial"/>
               </a:rPr>
               <a:t>Dùng câu hỏi từ bài tập theo cặp (hoặc ví dụ mê sảng)</a:t>
             </a:r>
@@ -23458,25 +23266,19 @@
               <a:spcBef>
                 <a:spcPts val="450"/>
               </a:spcBef>
-              <a:buNone/>
-            </a:pPr>
-            <a:r>
-              <a:rPr lang="en-US" sz="1650" b="1" dirty="0">
-                <a:solidFill>
-                  <a:srgbClr val="0B376C"/>
-                </a:solidFill>
-                <a:latin typeface="Segoe UI"/>
-                <a:cs typeface="Segoe UI"/>
-              </a:rPr>
-              <a:t>2.  </a:t>
-            </a:r>
+              <a:buClr>
+                <a:srgbClr val="0B376C"/>
+              </a:buClr>
+              <a:buFont typeface="Arial"/>
+              <a:buChar char="•"/>
+            </a:pPr>
             <a:r>
               <a:rPr lang="en-US" sz="1650" dirty="0">
                 <a:solidFill>
                   <a:srgbClr val="000000"/>
                 </a:solidFill>
-                <a:latin typeface="Segoe UI"/>
-                <a:cs typeface="Segoe UI"/>
+                <a:latin typeface="Arial"/>
+                <a:cs typeface="Arial"/>
               </a:rPr>
               <a:t>Viết MỘT mục đích: 'So sánh...' hoặc 'Mô tả...'</a:t>
             </a:r>
@@ -23489,25 +23291,19 @@
               <a:spcBef>
                 <a:spcPts val="450"/>
               </a:spcBef>
-              <a:buNone/>
-            </a:pPr>
-            <a:r>
-              <a:rPr lang="en-US" sz="1650" b="1" dirty="0">
-                <a:solidFill>
-                  <a:srgbClr val="0B376C"/>
-                </a:solidFill>
-                <a:latin typeface="Segoe UI"/>
-                <a:cs typeface="Segoe UI"/>
-              </a:rPr>
-              <a:t>3.  </a:t>
-            </a:r>
+              <a:buClr>
+                <a:srgbClr val="0B376C"/>
+              </a:buClr>
+              <a:buFont typeface="Arial"/>
+              <a:buChar char="•"/>
+            </a:pPr>
             <a:r>
               <a:rPr lang="en-US" sz="1650" dirty="0">
                 <a:solidFill>
                   <a:srgbClr val="000000"/>
                 </a:solidFill>
-                <a:latin typeface="Segoe UI"/>
-                <a:cs typeface="Segoe UI"/>
+                <a:latin typeface="Arial"/>
+                <a:cs typeface="Arial"/>
               </a:rPr>
               <a:t>Viết HAI mục tiêu với động từ đo được; đánh dấu mục tiêu chính</a:t>
             </a:r>
@@ -23520,25 +23316,19 @@
               <a:spcBef>
                 <a:spcPts val="450"/>
               </a:spcBef>
-              <a:buNone/>
-            </a:pPr>
-            <a:r>
-              <a:rPr lang="en-US" sz="1650" b="1" dirty="0">
-                <a:solidFill>
-                  <a:srgbClr val="0B376C"/>
-                </a:solidFill>
-                <a:latin typeface="Segoe UI"/>
-                <a:cs typeface="Segoe UI"/>
-              </a:rPr>
-              <a:t>4.  </a:t>
-            </a:r>
+              <a:buClr>
+                <a:srgbClr val="0B376C"/>
+              </a:buClr>
+              <a:buFont typeface="Arial"/>
+              <a:buChar char="•"/>
+            </a:pPr>
             <a:r>
               <a:rPr lang="en-US" sz="1650" dirty="0">
                 <a:solidFill>
                   <a:srgbClr val="000000"/>
                 </a:solidFill>
-                <a:latin typeface="Segoe UI"/>
-                <a:cs typeface="Segoe UI"/>
+                <a:latin typeface="Arial"/>
+                <a:cs typeface="Arial"/>
               </a:rPr>
               <a:t>Viết H0 và H1 cho mục tiêu chính (hoặc 'mô tả: không cần giả thuyết')</a:t>
             </a:r>
@@ -23551,25 +23341,19 @@
               <a:spcBef>
                 <a:spcPts val="450"/>
               </a:spcBef>
-              <a:buNone/>
-            </a:pPr>
-            <a:r>
-              <a:rPr lang="en-US" sz="1650" b="1" dirty="0">
-                <a:solidFill>
-                  <a:srgbClr val="0B376C"/>
-                </a:solidFill>
-                <a:latin typeface="Segoe UI"/>
-                <a:cs typeface="Segoe UI"/>
-              </a:rPr>
-              <a:t>5.  </a:t>
-            </a:r>
+              <a:buClr>
+                <a:srgbClr val="0B376C"/>
+              </a:buClr>
+              <a:buFont typeface="Arial"/>
+              <a:buChar char="•"/>
+            </a:pPr>
             <a:r>
               <a:rPr lang="en-US" sz="1650" dirty="0">
                 <a:solidFill>
                   <a:srgbClr val="000000"/>
                 </a:solidFill>
-                <a:latin typeface="Segoe UI"/>
-                <a:cs typeface="Segoe UI"/>
+                <a:latin typeface="Arial"/>
+                <a:cs typeface="Arial"/>
               </a:rPr>
               <a:t>Đổi phiếu với người bên cạnh: mọi động từ có đo được không?</a:t>
             </a:r>
@@ -23613,8 +23397,8 @@
                 <a:solidFill>
                   <a:srgbClr val="0B376C"/>
                 </a:solidFill>
-                <a:latin typeface="Segoe UI"/>
-                <a:cs typeface="Segoe UI"/>
+                <a:latin typeface="Arial"/>
+                <a:cs typeface="Arial"/>
               </a:rPr>
               <a:t>Động từ dùng được</a:t>
             </a:r>
@@ -23635,8 +23419,8 @@
                 <a:solidFill>
                   <a:srgbClr val="000000"/>
                 </a:solidFill>
-                <a:latin typeface="Segoe UI"/>
-                <a:cs typeface="Segoe UI"/>
+                <a:latin typeface="Arial"/>
+                <a:cs typeface="Arial"/>
               </a:rPr>
               <a:t>so sánh</a:t>
             </a:r>
@@ -23657,8 +23441,8 @@
                 <a:solidFill>
                   <a:srgbClr val="000000"/>
                 </a:solidFill>
-                <a:latin typeface="Segoe UI"/>
-                <a:cs typeface="Segoe UI"/>
+                <a:latin typeface="Arial"/>
+                <a:cs typeface="Arial"/>
               </a:rPr>
               <a:t>ước tính</a:t>
             </a:r>
@@ -23679,8 +23463,8 @@
                 <a:solidFill>
                   <a:srgbClr val="000000"/>
                 </a:solidFill>
-                <a:latin typeface="Segoe UI"/>
-                <a:cs typeface="Segoe UI"/>
+                <a:latin typeface="Arial"/>
+                <a:cs typeface="Arial"/>
               </a:rPr>
               <a:t>mô tả</a:t>
             </a:r>
@@ -23701,8 +23485,8 @@
                 <a:solidFill>
                   <a:srgbClr val="000000"/>
                 </a:solidFill>
-                <a:latin typeface="Segoe UI"/>
-                <a:cs typeface="Segoe UI"/>
+                <a:latin typeface="Arial"/>
+                <a:cs typeface="Arial"/>
               </a:rPr>
               <a:t>xác định</a:t>
             </a:r>
@@ -23723,8 +23507,8 @@
                 <a:solidFill>
                   <a:srgbClr val="000000"/>
                 </a:solidFill>
-                <a:latin typeface="Segoe UI"/>
-                <a:cs typeface="Segoe UI"/>
+                <a:latin typeface="Arial"/>
+                <a:cs typeface="Arial"/>
               </a:rPr>
               <a:t>đo lường</a:t>
             </a:r>
@@ -23770,8 +23554,8 @@
                 <a:solidFill>
                   <a:srgbClr val="0B376C"/>
                 </a:solidFill>
-                <a:latin typeface="Segoe UI"/>
-                <a:cs typeface="Segoe UI"/>
+                <a:latin typeface="Arial"/>
+                <a:cs typeface="Arial"/>
               </a:rPr>
               <a:t>SẢN PHẨM   </a:t>
             </a:r>
@@ -23780,8 +23564,8 @@
                 <a:solidFill>
                   <a:srgbClr val="000000"/>
                 </a:solidFill>
-                <a:latin typeface="Segoe UI"/>
-                <a:cs typeface="Segoe UI"/>
+                <a:latin typeface="Arial"/>
+                <a:cs typeface="Arial"/>
               </a:rPr>
               <a:t>Bài tập 3 trong phiếu. Đáp án mẫu ở slide sau</a:t>
             </a:r>
@@ -23818,7 +23602,7 @@
                     <a:lumMod val="50000"/>
                   </a:schemeClr>
                 </a:solidFill>
-                <a:latin typeface="Verdana"/>
+                <a:latin typeface="Arial"/>
               </a:rPr>
               <a:t>Neudata | #ClearDataClearImpact</a:t>
             </a:r>
@@ -23948,8 +23732,8 @@
                 <a:solidFill>
                   <a:srgbClr val="0D7377"/>
                 </a:solidFill>
-                <a:latin typeface="Segoe UI"/>
-                <a:cs typeface="Segoe UI"/>
+                <a:latin typeface="Arial"/>
+                <a:cs typeface="Arial"/>
               </a:rPr>
               <a:t>Đáp án mẫu: ví dụ mê sảng</a:t>
             </a:r>
@@ -24019,8 +23803,8 @@
                 <a:solidFill>
                   <a:srgbClr val="FFFFFF"/>
                 </a:solidFill>
-                <a:latin typeface="Segoe UI"/>
-                <a:cs typeface="Segoe UI"/>
+                <a:latin typeface="Arial"/>
+                <a:cs typeface="Arial"/>
               </a:rPr>
               <a:t>Mục đích</a:t>
             </a:r>
@@ -24068,8 +23852,8 @@
                 <a:solidFill>
                   <a:srgbClr val="000000"/>
                 </a:solidFill>
-                <a:latin typeface="Segoe UI"/>
-                <a:cs typeface="Segoe UI"/>
+                <a:latin typeface="Arial"/>
+                <a:cs typeface="Arial"/>
               </a:rPr>
               <a:t>So sánh gói chăm sóc</a:t>
             </a:r>
@@ -24089,8 +23873,8 @@
                 <a:solidFill>
                   <a:srgbClr val="000000"/>
                 </a:solidFill>
-                <a:latin typeface="Segoe UI"/>
-                <a:cs typeface="Segoe UI"/>
+                <a:latin typeface="Arial"/>
+                <a:cs typeface="Arial"/>
               </a:rPr>
               <a:t>không dùng thuốc với</a:t>
             </a:r>
@@ -24110,8 +23894,8 @@
                 <a:solidFill>
                   <a:srgbClr val="000000"/>
                 </a:solidFill>
-                <a:latin typeface="Segoe UI"/>
-                <a:cs typeface="Segoe UI"/>
+                <a:latin typeface="Arial"/>
+                <a:cs typeface="Arial"/>
               </a:rPr>
               <a:t>chăm sóc thường quy</a:t>
             </a:r>
@@ -24131,8 +23915,8 @@
                 <a:solidFill>
                   <a:srgbClr val="000000"/>
                 </a:solidFill>
-                <a:latin typeface="Segoe UI"/>
-                <a:cs typeface="Segoe UI"/>
+                <a:latin typeface="Arial"/>
+                <a:cs typeface="Arial"/>
               </a:rPr>
               <a:t>sau mổ gãy cổ xương đùi</a:t>
             </a:r>
@@ -24174,8 +23958,8 @@
                 <a:solidFill>
                   <a:srgbClr val="FFFFFF"/>
                 </a:solidFill>
-                <a:latin typeface="Segoe UI"/>
-                <a:cs typeface="Segoe UI"/>
+                <a:latin typeface="Arial"/>
+                <a:cs typeface="Arial"/>
               </a:rPr>
               <a:t>Mục tiêu</a:t>
             </a:r>
@@ -24223,10 +24007,10 @@
                 <a:solidFill>
                   <a:srgbClr val="000000"/>
                 </a:solidFill>
-                <a:latin typeface="Segoe UI"/>
-                <a:cs typeface="Segoe UI"/>
-              </a:rPr>
-              <a:t>1. (Chính) So sánh</a:t>
+                <a:latin typeface="Arial"/>
+                <a:cs typeface="Arial"/>
+              </a:rPr>
+              <a:t>(Chính) So sánh</a:t>
             </a:r>
           </a:p>
           <a:p>
@@ -24244,8 +24028,8 @@
                 <a:solidFill>
                   <a:srgbClr val="000000"/>
                 </a:solidFill>
-                <a:latin typeface="Segoe UI"/>
-                <a:cs typeface="Segoe UI"/>
+                <a:latin typeface="Arial"/>
+                <a:cs typeface="Arial"/>
               </a:rPr>
               <a:t>mê sảng trong 7 ngày</a:t>
             </a:r>
@@ -24265,10 +24049,10 @@
                 <a:solidFill>
                   <a:srgbClr val="000000"/>
                 </a:solidFill>
-                <a:latin typeface="Segoe UI"/>
-                <a:cs typeface="Segoe UI"/>
-              </a:rPr>
-              <a:t>2. So sánh thời gian</a:t>
+                <a:latin typeface="Arial"/>
+                <a:cs typeface="Arial"/>
+              </a:rPr>
+              <a:t>So sánh thời gian</a:t>
             </a:r>
           </a:p>
           <a:p>
@@ -24286,8 +24070,8 @@
                 <a:solidFill>
                   <a:srgbClr val="000000"/>
                 </a:solidFill>
-                <a:latin typeface="Segoe UI"/>
-                <a:cs typeface="Segoe UI"/>
+                <a:latin typeface="Arial"/>
+                <a:cs typeface="Arial"/>
               </a:rPr>
               <a:t>nằm viện</a:t>
             </a:r>
@@ -24329,8 +24113,8 @@
                 <a:solidFill>
                   <a:srgbClr val="FFFFFF"/>
                 </a:solidFill>
-                <a:latin typeface="Segoe UI"/>
-                <a:cs typeface="Segoe UI"/>
+                <a:latin typeface="Arial"/>
+                <a:cs typeface="Arial"/>
               </a:rPr>
               <a:t>Giả thuyết</a:t>
             </a:r>
@@ -24378,8 +24162,8 @@
                 <a:solidFill>
                   <a:srgbClr val="000000"/>
                 </a:solidFill>
-                <a:latin typeface="Segoe UI"/>
-                <a:cs typeface="Segoe UI"/>
+                <a:latin typeface="Arial"/>
+                <a:cs typeface="Arial"/>
               </a:rPr>
               <a:t>H0: tỷ lệ mê sảng</a:t>
             </a:r>
@@ -24399,8 +24183,8 @@
                 <a:solidFill>
                   <a:srgbClr val="000000"/>
                 </a:solidFill>
-                <a:latin typeface="Segoe UI"/>
-                <a:cs typeface="Segoe UI"/>
+                <a:latin typeface="Arial"/>
+                <a:cs typeface="Arial"/>
               </a:rPr>
               <a:t>như nhau ở hai nhóm</a:t>
             </a:r>
@@ -24420,8 +24204,8 @@
                 <a:solidFill>
                   <a:srgbClr val="000000"/>
                 </a:solidFill>
-                <a:latin typeface="Segoe UI"/>
-                <a:cs typeface="Segoe UI"/>
+                <a:latin typeface="Arial"/>
+                <a:cs typeface="Arial"/>
               </a:rPr>
               <a:t>H1: khác nhau</a:t>
             </a:r>
@@ -24465,8 +24249,8 @@
                 <a:solidFill>
                   <a:srgbClr val="FFFFFF"/>
                 </a:solidFill>
-                <a:latin typeface="Segoe UI"/>
-                <a:cs typeface="Segoe UI"/>
+                <a:latin typeface="Arial"/>
+                <a:cs typeface="Arial"/>
               </a:rPr>
               <a:t>THÔNG ĐIỆP CHÍNH   </a:t>
             </a:r>
@@ -24475,8 +24259,8 @@
                 <a:solidFill>
                   <a:srgbClr val="FFFFFF"/>
                 </a:solidFill>
-                <a:latin typeface="Segoe UI"/>
-                <a:cs typeface="Segoe UI"/>
+                <a:latin typeface="Arial"/>
+                <a:cs typeface="Arial"/>
               </a:rPr>
               <a:t>Mục đích, mục tiêu chính và giả thuyết cùng nêu một kết cục.</a:t>
             </a:r>
@@ -24513,7 +24297,7 @@
                     <a:lumMod val="50000"/>
                   </a:schemeClr>
                 </a:solidFill>
-                <a:latin typeface="Verdana"/>
+                <a:latin typeface="Arial"/>
               </a:rPr>
               <a:t>Neudata | #ClearDataClearImpact</a:t>
             </a:r>
@@ -24643,8 +24427,8 @@
                 <a:solidFill>
                   <a:srgbClr val="0D7377"/>
                 </a:solidFill>
-                <a:latin typeface="Segoe UI"/>
-                <a:cs typeface="Segoe UI"/>
+                <a:latin typeface="Arial"/>
+                <a:cs typeface="Arial"/>
               </a:rPr>
               <a:t>Xây dựng đề cương 1</a:t>
             </a:r>
@@ -24713,8 +24497,8 @@
                 <a:solidFill>
                   <a:srgbClr val="0D7377"/>
                 </a:solidFill>
-                <a:latin typeface="Segoe UI"/>
-                <a:cs typeface="Segoe UI"/>
+                <a:latin typeface="Arial"/>
+                <a:cs typeface="Arial"/>
               </a:rPr>
               <a:t>Đến lượt nhóm bạn: một chủ đề, một câu hỏi, một mục đích.</a:t>
             </a:r>
@@ -24731,8 +24515,8 @@
                 <a:solidFill>
                   <a:srgbClr val="595959"/>
                 </a:solidFill>
-                <a:latin typeface="Segoe UI"/>
-                <a:cs typeface="Segoe UI"/>
+                <a:latin typeface="Arial"/>
+                <a:cs typeface="Arial"/>
               </a:rPr>
               <a:t>30 phút làm việc nhóm: khởi đầu đề cương nghiên cứu</a:t>
             </a:r>
@@ -24769,7 +24553,7 @@
                     <a:lumMod val="50000"/>
                   </a:schemeClr>
                 </a:solidFill>
-                <a:latin typeface="Verdana"/>
+                <a:latin typeface="Arial"/>
               </a:rPr>
               <a:t>Neudata | #ClearDataClearImpact</a:t>
             </a:r>
@@ -24899,8 +24683,8 @@
                 <a:solidFill>
                   <a:srgbClr val="0D7377"/>
                 </a:solidFill>
-                <a:latin typeface="Segoe UI"/>
-                <a:cs typeface="Segoe UI"/>
+                <a:latin typeface="Arial"/>
+                <a:cs typeface="Arial"/>
               </a:rPr>
               <a:t>Xây dựng đề cương 1: câu hỏi của nhóm</a:t>
             </a:r>
@@ -24970,8 +24754,8 @@
                 <a:solidFill>
                   <a:srgbClr val="FFFFFF"/>
                 </a:solidFill>
-                <a:latin typeface="Segoe UI"/>
-                <a:cs typeface="Segoe UI"/>
+                <a:latin typeface="Arial"/>
+                <a:cs typeface="Arial"/>
               </a:rPr>
               <a:t>XÂY DỰNG ĐỀ CƯƠNG   |   28 phút</a:t>
             </a:r>
@@ -25008,25 +24792,19 @@
               <a:spcBef>
                 <a:spcPts val="450"/>
               </a:spcBef>
-              <a:buNone/>
-            </a:pPr>
-            <a:r>
-              <a:rPr lang="en-US" sz="1650" b="1" dirty="0">
-                <a:solidFill>
-                  <a:srgbClr val="055F56"/>
-                </a:solidFill>
-                <a:latin typeface="Segoe UI"/>
-                <a:cs typeface="Segoe UI"/>
-              </a:rPr>
-              <a:t>1.  </a:t>
-            </a:r>
+              <a:buClr>
+                <a:srgbClr val="055F56"/>
+              </a:buClr>
+              <a:buFont typeface="Arial"/>
+              <a:buChar char="•"/>
+            </a:pPr>
             <a:r>
               <a:rPr lang="en-US" sz="1650" dirty="0">
                 <a:solidFill>
                   <a:srgbClr val="000000"/>
                 </a:solidFill>
-                <a:latin typeface="Segoe UI"/>
-                <a:cs typeface="Segoe UI"/>
+                <a:latin typeface="Arial"/>
+                <a:cs typeface="Arial"/>
               </a:rPr>
               <a:t>Chọn MỘT vấn đề của khoa (liệt kê 3 ý, bỏ phiếu, chọn một)</a:t>
             </a:r>
@@ -25039,25 +24817,19 @@
               <a:spcBef>
                 <a:spcPts val="450"/>
               </a:spcBef>
-              <a:buNone/>
-            </a:pPr>
-            <a:r>
-              <a:rPr lang="en-US" sz="1650" b="1" dirty="0">
-                <a:solidFill>
-                  <a:srgbClr val="055F56"/>
-                </a:solidFill>
-                <a:latin typeface="Segoe UI"/>
-                <a:cs typeface="Segoe UI"/>
-              </a:rPr>
-              <a:t>2.  </a:t>
-            </a:r>
+              <a:buClr>
+                <a:srgbClr val="055F56"/>
+              </a:buClr>
+              <a:buFont typeface="Arial"/>
+              <a:buChar char="•"/>
+            </a:pPr>
             <a:r>
               <a:rPr lang="en-US" sz="1650" dirty="0">
                 <a:solidFill>
                   <a:srgbClr val="000000"/>
                 </a:solidFill>
-                <a:latin typeface="Segoe UI"/>
-                <a:cs typeface="Segoe UI"/>
+                <a:latin typeface="Arial"/>
+                <a:cs typeface="Arial"/>
               </a:rPr>
               <a:t>Điền bảng PICO(T) và viết câu hỏi trong một câu</a:t>
             </a:r>
@@ -25070,25 +24842,19 @@
               <a:spcBef>
                 <a:spcPts val="450"/>
               </a:spcBef>
-              <a:buNone/>
-            </a:pPr>
-            <a:r>
-              <a:rPr lang="en-US" sz="1650" b="1" dirty="0">
-                <a:solidFill>
-                  <a:srgbClr val="055F56"/>
-                </a:solidFill>
-                <a:latin typeface="Segoe UI"/>
-                <a:cs typeface="Segoe UI"/>
-              </a:rPr>
-              <a:t>3.  </a:t>
-            </a:r>
+              <a:buClr>
+                <a:srgbClr val="055F56"/>
+              </a:buClr>
+              <a:buFont typeface="Arial"/>
+              <a:buChar char="•"/>
+            </a:pPr>
             <a:r>
               <a:rPr lang="en-US" sz="1650" dirty="0">
                 <a:solidFill>
                   <a:srgbClr val="000000"/>
                 </a:solidFill>
-                <a:latin typeface="Segoe UI"/>
-                <a:cs typeface="Segoe UI"/>
+                <a:latin typeface="Arial"/>
+                <a:cs typeface="Arial"/>
               </a:rPr>
               <a:t>Đèn FINER cho từng chữ cái; viết lại nếu có đèn đỏ</a:t>
             </a:r>
@@ -25101,25 +24867,19 @@
               <a:spcBef>
                 <a:spcPts val="450"/>
               </a:spcBef>
-              <a:buNone/>
-            </a:pPr>
-            <a:r>
-              <a:rPr lang="en-US" sz="1650" b="1" dirty="0">
-                <a:solidFill>
-                  <a:srgbClr val="055F56"/>
-                </a:solidFill>
-                <a:latin typeface="Segoe UI"/>
-                <a:cs typeface="Segoe UI"/>
-              </a:rPr>
-              <a:t>4.  </a:t>
-            </a:r>
+              <a:buClr>
+                <a:srgbClr val="055F56"/>
+              </a:buClr>
+              <a:buFont typeface="Arial"/>
+              <a:buChar char="•"/>
+            </a:pPr>
             <a:r>
               <a:rPr lang="en-US" sz="1650" dirty="0">
                 <a:solidFill>
                   <a:srgbClr val="000000"/>
                 </a:solidFill>
-                <a:latin typeface="Segoe UI"/>
-                <a:cs typeface="Segoe UI"/>
+                <a:latin typeface="Arial"/>
+                <a:cs typeface="Arial"/>
               </a:rPr>
               <a:t>Nghiên cứu, audit hay QI? Ghi con đường phê duyệt</a:t>
             </a:r>
@@ -25132,25 +24892,19 @@
               <a:spcBef>
                 <a:spcPts val="450"/>
               </a:spcBef>
-              <a:buNone/>
-            </a:pPr>
-            <a:r>
-              <a:rPr lang="en-US" sz="1650" b="1" dirty="0">
-                <a:solidFill>
-                  <a:srgbClr val="055F56"/>
-                </a:solidFill>
-                <a:latin typeface="Segoe UI"/>
-                <a:cs typeface="Segoe UI"/>
-              </a:rPr>
-              <a:t>5.  </a:t>
-            </a:r>
+              <a:buClr>
+                <a:srgbClr val="055F56"/>
+              </a:buClr>
+              <a:buFont typeface="Arial"/>
+              <a:buChar char="•"/>
+            </a:pPr>
             <a:r>
               <a:rPr lang="en-US" sz="1650" dirty="0">
                 <a:solidFill>
                   <a:srgbClr val="000000"/>
                 </a:solidFill>
-                <a:latin typeface="Segoe UI"/>
-                <a:cs typeface="Segoe UI"/>
+                <a:latin typeface="Arial"/>
+                <a:cs typeface="Arial"/>
               </a:rPr>
               <a:t>Mục đích + 2-3 mục tiêu (đánh dấu mục tiêu chính) + H0/H1</a:t>
             </a:r>
@@ -25163,25 +24917,19 @@
               <a:spcBef>
                 <a:spcPts val="450"/>
               </a:spcBef>
-              <a:buNone/>
-            </a:pPr>
-            <a:r>
-              <a:rPr lang="en-US" sz="1650" b="1" dirty="0">
-                <a:solidFill>
-                  <a:srgbClr val="055F56"/>
-                </a:solidFill>
-                <a:latin typeface="Segoe UI"/>
-                <a:cs typeface="Segoe UI"/>
-              </a:rPr>
-              <a:t>6.  </a:t>
-            </a:r>
+              <a:buClr>
+                <a:srgbClr val="055F56"/>
+              </a:buClr>
+              <a:buFont typeface="Arial"/>
+              <a:buChar char="•"/>
+            </a:pPr>
             <a:r>
               <a:rPr lang="en-US" sz="1650" dirty="0">
                 <a:solidFill>
                   <a:srgbClr val="000000"/>
                 </a:solidFill>
-                <a:latin typeface="Segoe UI"/>
-                <a:cs typeface="Segoe UI"/>
+                <a:latin typeface="Arial"/>
+                <a:cs typeface="Arial"/>
               </a:rPr>
               <a:t>Một nhóm đọc to câu hỏi</a:t>
             </a:r>
@@ -25225,8 +24973,8 @@
                 <a:solidFill>
                   <a:srgbClr val="055F56"/>
                 </a:solidFill>
-                <a:latin typeface="Segoe UI"/>
-                <a:cs typeface="Segoe UI"/>
+                <a:latin typeface="Arial"/>
+                <a:cs typeface="Arial"/>
               </a:rPr>
               <a:t>Thời gian</a:t>
             </a:r>
@@ -25246,8 +24994,8 @@
                 <a:solidFill>
                   <a:srgbClr val="000000"/>
                 </a:solidFill>
-                <a:latin typeface="Segoe UI"/>
-                <a:cs typeface="Segoe UI"/>
+                <a:latin typeface="Arial"/>
+                <a:cs typeface="Arial"/>
               </a:rPr>
               <a:t>0-7 phút: chọn chủ đề</a:t>
             </a:r>
@@ -25267,8 +25015,8 @@
                 <a:solidFill>
                   <a:srgbClr val="000000"/>
                 </a:solidFill>
-                <a:latin typeface="Segoe UI"/>
-                <a:cs typeface="Segoe UI"/>
+                <a:latin typeface="Arial"/>
+                <a:cs typeface="Arial"/>
               </a:rPr>
               <a:t>7-14: PICO + câu hỏi</a:t>
             </a:r>
@@ -25288,8 +25036,8 @@
                 <a:solidFill>
                   <a:srgbClr val="000000"/>
                 </a:solidFill>
-                <a:latin typeface="Segoe UI"/>
-                <a:cs typeface="Segoe UI"/>
+                <a:latin typeface="Arial"/>
+                <a:cs typeface="Arial"/>
               </a:rPr>
               <a:t>14-19: FINER + viết lại</a:t>
             </a:r>
@@ -25309,8 +25057,8 @@
                 <a:solidFill>
                   <a:srgbClr val="000000"/>
                 </a:solidFill>
-                <a:latin typeface="Segoe UI"/>
-                <a:cs typeface="Segoe UI"/>
+                <a:latin typeface="Arial"/>
+                <a:cs typeface="Arial"/>
               </a:rPr>
               <a:t>19-25: mục đích, mục tiêu, H0/H1</a:t>
             </a:r>
@@ -25330,8 +25078,8 @@
                 <a:solidFill>
                   <a:srgbClr val="000000"/>
                 </a:solidFill>
-                <a:latin typeface="Segoe UI"/>
-                <a:cs typeface="Segoe UI"/>
+                <a:latin typeface="Arial"/>
+                <a:cs typeface="Arial"/>
               </a:rPr>
               <a:t>25-28: 1 nhóm đọc to</a:t>
             </a:r>
@@ -25377,8 +25125,8 @@
                 <a:solidFill>
                   <a:srgbClr val="055F56"/>
                 </a:solidFill>
-                <a:latin typeface="Segoe UI"/>
-                <a:cs typeface="Segoe UI"/>
+                <a:latin typeface="Arial"/>
+                <a:cs typeface="Arial"/>
               </a:rPr>
               <a:t>SẢN PHẨM   </a:t>
             </a:r>
@@ -25387,8 +25135,8 @@
                 <a:solidFill>
                   <a:srgbClr val="000000"/>
                 </a:solidFill>
-                <a:latin typeface="Segoe UI"/>
-                <a:cs typeface="Segoe UI"/>
+                <a:latin typeface="Arial"/>
+                <a:cs typeface="Arial"/>
               </a:rPr>
               <a:t>Bắt đầu Đề cương Phần 1: PICO, câu hỏi, FINER, mục đích, mục tiêu</a:t>
             </a:r>
@@ -25425,7 +25173,7 @@
                     <a:lumMod val="50000"/>
                   </a:schemeClr>
                 </a:solidFill>
-                <a:latin typeface="Verdana"/>
+                <a:latin typeface="Arial"/>
               </a:rPr>
               <a:t>Neudata | #ClearDataClearImpact</a:t>
             </a:r>
@@ -25555,8 +25303,8 @@
                 <a:solidFill>
                   <a:srgbClr val="0D7377"/>
                 </a:solidFill>
-                <a:latin typeface="Segoe UI"/>
-                <a:cs typeface="Segoe UI"/>
+                <a:latin typeface="Arial"/>
+                <a:cs typeface="Arial"/>
               </a:rPr>
               <a:t>Từ khóa của buổi học</a:t>
             </a:r>
@@ -25623,7 +25371,7 @@
                           <a:solidFill>
                             <a:srgbClr val="FFFFFF"/>
                           </a:solidFill>
-                          <a:latin typeface="Segoe UI"/>
+                          <a:latin typeface="Arial"/>
                         </a:rPr>
                         <a:t>Từ khóa</a:t>
                       </a:r>
@@ -25646,7 +25394,7 @@
                           <a:solidFill>
                             <a:srgbClr val="FFFFFF"/>
                           </a:solidFill>
-                          <a:latin typeface="Segoe UI"/>
+                          <a:latin typeface="Arial"/>
                         </a:rPr>
                         <a:t>Trong một câu</a:t>
                       </a:r>
@@ -25671,7 +25419,7 @@
                           <a:solidFill>
                             <a:srgbClr val="000000"/>
                           </a:solidFill>
-                          <a:latin typeface="Segoe UI"/>
+                          <a:latin typeface="Arial"/>
                         </a:rPr>
                         <a:t>Tháp bằng chứng</a:t>
                       </a:r>
@@ -25694,7 +25442,7 @@
                           <a:solidFill>
                             <a:srgbClr val="000000"/>
                           </a:solidFill>
-                          <a:latin typeface="Segoe UI"/>
+                          <a:latin typeface="Arial"/>
                         </a:rPr>
                         <a:t>Xếp hạng thiết kế theo mức chống sai lệch</a:t>
                       </a:r>
@@ -25719,7 +25467,7 @@
                           <a:solidFill>
                             <a:srgbClr val="000000"/>
                           </a:solidFill>
-                          <a:latin typeface="Segoe UI"/>
+                          <a:latin typeface="Arial"/>
                         </a:rPr>
                         <a:t>Nghiên cứu / audit / QI</a:t>
                       </a:r>
@@ -25742,7 +25490,7 @@
                           <a:solidFill>
                             <a:srgbClr val="000000"/>
                           </a:solidFill>
-                          <a:latin typeface="Segoe UI"/>
+                          <a:latin typeface="Arial"/>
                         </a:rPr>
                         <a:t>Điều gì tốt nhất? / Ta có làm không? / Làm sao tốt hơn?</a:t>
                       </a:r>
@@ -25767,7 +25515,7 @@
                           <a:solidFill>
                             <a:srgbClr val="000000"/>
                           </a:solidFill>
-                          <a:latin typeface="Segoe UI"/>
+                          <a:latin typeface="Arial"/>
                         </a:rPr>
                         <a:t>PICO(T) / PECO</a:t>
                       </a:r>
@@ -25790,7 +25538,7 @@
                           <a:solidFill>
                             <a:srgbClr val="000000"/>
                           </a:solidFill>
-                          <a:latin typeface="Segoe UI"/>
+                          <a:latin typeface="Arial"/>
                         </a:rPr>
                         <a:t>Đối tượng, Can thiệp (hoặc Phơi nhiễm), So sánh, Kết cục, Thời gian</a:t>
                       </a:r>
@@ -25815,7 +25563,7 @@
                           <a:solidFill>
                             <a:srgbClr val="000000"/>
                           </a:solidFill>
-                          <a:latin typeface="Segoe UI"/>
+                          <a:latin typeface="Arial"/>
                         </a:rPr>
                         <a:t>FINER</a:t>
                       </a:r>
@@ -25838,7 +25586,7 @@
                           <a:solidFill>
                             <a:srgbClr val="000000"/>
                           </a:solidFill>
-                          <a:latin typeface="Segoe UI"/>
+                          <a:latin typeface="Arial"/>
                         </a:rPr>
                         <a:t>Khả thi, Thú vị, Mới, Đạo đức, Phù hợp</a:t>
                       </a:r>
@@ -25863,7 +25611,7 @@
                           <a:solidFill>
                             <a:srgbClr val="000000"/>
                           </a:solidFill>
-                          <a:latin typeface="Segoe UI"/>
+                          <a:latin typeface="Arial"/>
                         </a:rPr>
                         <a:t>Mục đích / mục tiêu</a:t>
                       </a:r>
@@ -25886,7 +25634,7 @@
                           <a:solidFill>
                             <a:srgbClr val="000000"/>
                           </a:solidFill>
-                          <a:latin typeface="Segoe UI"/>
+                          <a:latin typeface="Arial"/>
                         </a:rPr>
                         <a:t>Lý do chung / việc cụ thể, đo được</a:t>
                       </a:r>
@@ -25911,7 +25659,7 @@
                           <a:solidFill>
                             <a:srgbClr val="000000"/>
                           </a:solidFill>
-                          <a:latin typeface="Segoe UI"/>
+                          <a:latin typeface="Arial"/>
                         </a:rPr>
                         <a:t>H0 / H1</a:t>
                       </a:r>
@@ -25934,7 +25682,7 @@
                           <a:solidFill>
                             <a:srgbClr val="000000"/>
                           </a:solidFill>
-                          <a:latin typeface="Segoe UI"/>
+                          <a:latin typeface="Arial"/>
                         </a:rPr>
                         <a:t>Không khác biệt / có khác biệt (ta kiểm định H0)</a:t>
                       </a:r>
@@ -25981,7 +25729,7 @@
                     <a:lumMod val="50000"/>
                   </a:schemeClr>
                 </a:solidFill>
-                <a:latin typeface="Verdana"/>
+                <a:latin typeface="Arial"/>
               </a:rPr>
               <a:t>Neudata | #ClearDataClearImpact</a:t>
             </a:r>
@@ -26111,8 +25859,8 @@
                 <a:solidFill>
                   <a:srgbClr val="0D7377"/>
                 </a:solidFill>
-                <a:latin typeface="Segoe UI"/>
-                <a:cs typeface="Segoe UI"/>
+                <a:latin typeface="Arial"/>
+                <a:cs typeface="Arial"/>
               </a:rPr>
               <a:t>Ôn tập Buổi 1</a:t>
             </a:r>
@@ -26182,10 +25930,10 @@
                 <a:solidFill>
                   <a:srgbClr val="FFFFFF"/>
                 </a:solidFill>
-                <a:latin typeface="Segoe UI"/>
-                <a:cs typeface="Segoe UI"/>
-              </a:rPr>
-              <a:t>1. Vì sao nghiên cứu</a:t>
+                <a:latin typeface="Arial"/>
+                <a:cs typeface="Arial"/>
+              </a:rPr>
+              <a:t>Vì sao nghiên cứu</a:t>
             </a:r>
           </a:p>
         </p:txBody>
@@ -26231,8 +25979,8 @@
                 <a:solidFill>
                   <a:srgbClr val="000000"/>
                 </a:solidFill>
-                <a:latin typeface="Segoe UI"/>
-                <a:cs typeface="Segoe UI"/>
+                <a:latin typeface="Arial"/>
+                <a:cs typeface="Arial"/>
               </a:rPr>
               <a:t>Kinh nghiệm đặt câu hỏi;</a:t>
             </a:r>
@@ -26252,8 +26000,8 @@
                 <a:solidFill>
                   <a:srgbClr val="000000"/>
                 </a:solidFill>
-                <a:latin typeface="Segoe UI"/>
-                <a:cs typeface="Segoe UI"/>
+                <a:latin typeface="Arial"/>
+                <a:cs typeface="Arial"/>
               </a:rPr>
               <a:t>so sánh công bằng</a:t>
             </a:r>
@@ -26273,8 +26021,8 @@
                 <a:solidFill>
                   <a:srgbClr val="000000"/>
                 </a:solidFill>
-                <a:latin typeface="Segoe UI"/>
-                <a:cs typeface="Segoe UI"/>
+                <a:latin typeface="Arial"/>
+                <a:cs typeface="Arial"/>
               </a:rPr>
               <a:t>trên đủ bệnh nhân trả lời</a:t>
             </a:r>
@@ -26316,10 +26064,10 @@
                 <a:solidFill>
                   <a:srgbClr val="FFFFFF"/>
                 </a:solidFill>
-                <a:latin typeface="Segoe UI"/>
-                <a:cs typeface="Segoe UI"/>
-              </a:rPr>
-              <a:t>2. Hỏi chính xác</a:t>
+                <a:latin typeface="Arial"/>
+                <a:cs typeface="Arial"/>
+              </a:rPr>
+              <a:t>Hỏi chính xác</a:t>
             </a:r>
           </a:p>
         </p:txBody>
@@ -26365,8 +26113,8 @@
                 <a:solidFill>
                   <a:srgbClr val="000000"/>
                 </a:solidFill>
-                <a:latin typeface="Segoe UI"/>
-                <a:cs typeface="Segoe UI"/>
+                <a:latin typeface="Arial"/>
+                <a:cs typeface="Arial"/>
               </a:rPr>
               <a:t>Câu hỏi PICO(T),</a:t>
             </a:r>
@@ -26386,8 +26134,8 @@
                 <a:solidFill>
                   <a:srgbClr val="000000"/>
                 </a:solidFill>
-                <a:latin typeface="Segoe UI"/>
-                <a:cs typeface="Segoe UI"/>
+                <a:latin typeface="Arial"/>
+                <a:cs typeface="Arial"/>
               </a:rPr>
               <a:t>một kết cục chính,</a:t>
             </a:r>
@@ -26407,8 +26155,8 @@
                 <a:solidFill>
                   <a:srgbClr val="000000"/>
                 </a:solidFill>
-                <a:latin typeface="Segoe UI"/>
-                <a:cs typeface="Segoe UI"/>
+                <a:latin typeface="Arial"/>
+                <a:cs typeface="Arial"/>
               </a:rPr>
               <a:t>FINER trước khi bắt đầu</a:t>
             </a:r>
@@ -26450,10 +26198,10 @@
                 <a:solidFill>
                   <a:srgbClr val="FFFFFF"/>
                 </a:solidFill>
-                <a:latin typeface="Segoe UI"/>
-                <a:cs typeface="Segoe UI"/>
-              </a:rPr>
-              <a:t>3. Lập kế hoạch</a:t>
+                <a:latin typeface="Arial"/>
+                <a:cs typeface="Arial"/>
+              </a:rPr>
+              <a:t>Lập kế hoạch</a:t>
             </a:r>
           </a:p>
         </p:txBody>
@@ -26499,8 +26247,8 @@
                 <a:solidFill>
                   <a:srgbClr val="000000"/>
                 </a:solidFill>
-                <a:latin typeface="Segoe UI"/>
-                <a:cs typeface="Segoe UI"/>
+                <a:latin typeface="Arial"/>
+                <a:cs typeface="Arial"/>
               </a:rPr>
               <a:t>Một mục đích, 2-3</a:t>
             </a:r>
@@ -26520,8 +26268,8 @@
                 <a:solidFill>
                   <a:srgbClr val="000000"/>
                 </a:solidFill>
-                <a:latin typeface="Segoe UI"/>
-                <a:cs typeface="Segoe UI"/>
+                <a:latin typeface="Arial"/>
+                <a:cs typeface="Arial"/>
               </a:rPr>
               <a:t>mục tiêu đo được,</a:t>
             </a:r>
@@ -26541,8 +26289,8 @@
                 <a:solidFill>
                   <a:srgbClr val="000000"/>
                 </a:solidFill>
-                <a:latin typeface="Segoe UI"/>
-                <a:cs typeface="Segoe UI"/>
+                <a:latin typeface="Arial"/>
+                <a:cs typeface="Arial"/>
               </a:rPr>
               <a:t>H0/H1 kiểm định được</a:t>
             </a:r>
@@ -26586,8 +26334,8 @@
                 <a:solidFill>
                   <a:srgbClr val="FFFFFF"/>
                 </a:solidFill>
-                <a:latin typeface="Segoe UI"/>
-                <a:cs typeface="Segoe UI"/>
+                <a:latin typeface="Arial"/>
+                <a:cs typeface="Arial"/>
               </a:rPr>
               <a:t>THÔNG ĐIỆP CHÍNH   </a:t>
             </a:r>
@@ -26596,8 +26344,8 @@
                 <a:solidFill>
                   <a:srgbClr val="FFFFFF"/>
                 </a:solidFill>
-                <a:latin typeface="Segoe UI"/>
-                <a:cs typeface="Segoe UI"/>
+                <a:latin typeface="Arial"/>
+                <a:cs typeface="Arial"/>
               </a:rPr>
               <a:t>Thứ Bảy tuần sau: tìm và đọc những gì đã biết về câu hỏi của bạn.</a:t>
             </a:r>
@@ -26634,7 +26382,7 @@
                     <a:lumMod val="50000"/>
                   </a:schemeClr>
                 </a:solidFill>
-                <a:latin typeface="Verdana"/>
+                <a:latin typeface="Arial"/>
               </a:rPr>
               <a:t>Neudata | #ClearDataClearImpact</a:t>
             </a:r>
@@ -26764,8 +26512,8 @@
                 <a:solidFill>
                   <a:srgbClr val="0D7377"/>
                 </a:solidFill>
-                <a:latin typeface="Segoe UI"/>
-                <a:cs typeface="Segoe UI"/>
+                <a:latin typeface="Arial"/>
+                <a:cs typeface="Arial"/>
               </a:rPr>
               <a:t>Câu hỏi cuối buổi</a:t>
             </a:r>
@@ -26835,8 +26583,8 @@
                 <a:solidFill>
                   <a:srgbClr val="FFFFFF"/>
                 </a:solidFill>
-                <a:latin typeface="Segoe UI"/>
-                <a:cs typeface="Segoe UI"/>
+                <a:latin typeface="Arial"/>
+                <a:cs typeface="Arial"/>
               </a:rPr>
               <a:t>CÂU HỎI NHANH   |   2 phút</a:t>
             </a:r>
@@ -26873,25 +26621,19 @@
               <a:spcBef>
                 <a:spcPts val="450"/>
               </a:spcBef>
-              <a:buNone/>
-            </a:pPr>
-            <a:r>
-              <a:rPr lang="en-US" sz="1650" b="1" dirty="0">
-                <a:solidFill>
-                  <a:srgbClr val="6C3483"/>
-                </a:solidFill>
-                <a:latin typeface="Segoe UI"/>
-                <a:cs typeface="Segoe UI"/>
-              </a:rPr>
-              <a:t>1.  </a:t>
-            </a:r>
+              <a:buClr>
+                <a:srgbClr val="6C3483"/>
+              </a:buClr>
+              <a:buFont typeface="Arial"/>
+              <a:buChar char="•"/>
+            </a:pPr>
             <a:r>
               <a:rPr lang="en-US" sz="1650" dirty="0">
                 <a:solidFill>
                   <a:srgbClr val="000000"/>
                 </a:solidFill>
-                <a:latin typeface="Segoe UI"/>
-                <a:cs typeface="Segoe UI"/>
+                <a:latin typeface="Arial"/>
+                <a:cs typeface="Arial"/>
               </a:rPr>
               <a:t>Ví dụ xuyên suốt trượt tiêu chí FINER nào, và vì sao?</a:t>
             </a:r>
@@ -26904,25 +26646,19 @@
               <a:spcBef>
                 <a:spcPts val="450"/>
               </a:spcBef>
-              <a:buNone/>
-            </a:pPr>
-            <a:r>
-              <a:rPr lang="en-US" sz="1650" b="1" dirty="0">
-                <a:solidFill>
-                  <a:srgbClr val="6C3483"/>
-                </a:solidFill>
-                <a:latin typeface="Segoe UI"/>
-                <a:cs typeface="Segoe UI"/>
-              </a:rPr>
-              <a:t>2.  </a:t>
-            </a:r>
+              <a:buClr>
+                <a:srgbClr val="6C3483"/>
+              </a:buClr>
+              <a:buFont typeface="Arial"/>
+              <a:buChar char="•"/>
+            </a:pPr>
             <a:r>
               <a:rPr lang="en-US" sz="1650" dirty="0">
                 <a:solidFill>
                   <a:srgbClr val="000000"/>
                 </a:solidFill>
-                <a:latin typeface="Segoe UI"/>
-                <a:cs typeface="Segoe UI"/>
+                <a:latin typeface="Arial"/>
+                <a:cs typeface="Arial"/>
               </a:rPr>
               <a:t>Viết lại thành mục tiêu: 'Tìm hiểu về tổn thương do tì đè ở khoa'</a:t>
             </a:r>
@@ -26935,25 +26671,19 @@
               <a:spcBef>
                 <a:spcPts val="450"/>
               </a:spcBef>
-              <a:buNone/>
-            </a:pPr>
-            <a:r>
-              <a:rPr lang="en-US" sz="1650" b="1" dirty="0">
-                <a:solidFill>
-                  <a:srgbClr val="6C3483"/>
-                </a:solidFill>
-                <a:latin typeface="Segoe UI"/>
-                <a:cs typeface="Segoe UI"/>
-              </a:rPr>
-              <a:t>3.  </a:t>
-            </a:r>
+              <a:buClr>
+                <a:srgbClr val="6C3483"/>
+              </a:buClr>
+              <a:buFont typeface="Arial"/>
+              <a:buChar char="•"/>
+            </a:pPr>
             <a:r>
               <a:rPr lang="en-US" sz="1650" dirty="0">
                 <a:solidFill>
                   <a:srgbClr val="000000"/>
                 </a:solidFill>
-                <a:latin typeface="Segoe UI"/>
-                <a:cs typeface="Segoe UI"/>
+                <a:latin typeface="Arial"/>
+                <a:cs typeface="Arial"/>
               </a:rPr>
               <a:t>Viết cả hai câu trả lời lên giấy dán (không ghi tên) và dán lên cửa khi ra về</a:t>
             </a:r>
@@ -26999,8 +26729,8 @@
                 <a:solidFill>
                   <a:srgbClr val="6C3483"/>
                 </a:solidFill>
-                <a:latin typeface="Segoe UI"/>
-                <a:cs typeface="Segoe UI"/>
+                <a:latin typeface="Arial"/>
+                <a:cs typeface="Arial"/>
               </a:rPr>
               <a:t>SẢN PHẨM   </a:t>
             </a:r>
@@ -27009,8 +26739,8 @@
                 <a:solidFill>
                   <a:srgbClr val="000000"/>
                 </a:solidFill>
-                <a:latin typeface="Segoe UI"/>
-                <a:cs typeface="Segoe UI"/>
+                <a:latin typeface="Arial"/>
+                <a:cs typeface="Arial"/>
               </a:rPr>
               <a:t>Mỗi người một tờ giấy dán (giảng viên đọc trước thứ Bảy tuần sau)</a:t>
             </a:r>
@@ -27047,7 +26777,7 @@
                     <a:lumMod val="50000"/>
                   </a:schemeClr>
                 </a:solidFill>
-                <a:latin typeface="Verdana"/>
+                <a:latin typeface="Arial"/>
               </a:rPr>
               <a:t>Neudata | #ClearDataClearImpact</a:t>
             </a:r>
@@ -27177,8 +26907,8 @@
                 <a:solidFill>
                   <a:srgbClr val="0D7377"/>
                 </a:solidFill>
-                <a:latin typeface="Segoe UI"/>
-                <a:cs typeface="Segoe UI"/>
+                <a:latin typeface="Arial"/>
+                <a:cs typeface="Arial"/>
               </a:rPr>
               <a:t>Bài về nhà cho thứ Bảy tuần sau (Buổi 2)</a:t>
             </a:r>
@@ -27248,8 +26978,8 @@
                 <a:solidFill>
                   <a:srgbClr val="FFFFFF"/>
                 </a:solidFill>
-                <a:latin typeface="Segoe UI"/>
-                <a:cs typeface="Segoe UI"/>
+                <a:latin typeface="Arial"/>
+                <a:cs typeface="Arial"/>
               </a:rPr>
               <a:t>BÀI TẬP CÁ NHÂN</a:t>
             </a:r>
@@ -27286,25 +27016,19 @@
               <a:spcBef>
                 <a:spcPts val="450"/>
               </a:spcBef>
-              <a:buNone/>
-            </a:pPr>
-            <a:r>
-              <a:rPr lang="en-US" sz="1650" b="1" dirty="0">
-                <a:solidFill>
-                  <a:srgbClr val="0B376C"/>
-                </a:solidFill>
-                <a:latin typeface="Segoe UI"/>
-                <a:cs typeface="Segoe UI"/>
-              </a:rPr>
-              <a:t>1.  </a:t>
-            </a:r>
+              <a:buClr>
+                <a:srgbClr val="0B376C"/>
+              </a:buClr>
+              <a:buFont typeface="Arial"/>
+              <a:buChar char="•"/>
+            </a:pPr>
             <a:r>
               <a:rPr lang="en-US" sz="1650" dirty="0">
                 <a:solidFill>
                   <a:srgbClr val="000000"/>
                 </a:solidFill>
-                <a:latin typeface="Segoe UI"/>
-                <a:cs typeface="Segoe UI"/>
+                <a:latin typeface="Arial"/>
+                <a:cs typeface="Arial"/>
               </a:rPr>
               <a:t>Nhóm: hoàn thành PICO, câu hỏi, mục đích và mục tiêu nếu chưa xong</a:t>
             </a:r>
@@ -27317,25 +27041,19 @@
               <a:spcBef>
                 <a:spcPts val="450"/>
               </a:spcBef>
-              <a:buNone/>
-            </a:pPr>
-            <a:r>
-              <a:rPr lang="en-US" sz="1650" b="1" dirty="0">
-                <a:solidFill>
-                  <a:srgbClr val="0B376C"/>
-                </a:solidFill>
-                <a:latin typeface="Segoe UI"/>
-                <a:cs typeface="Segoe UI"/>
-              </a:rPr>
-              <a:t>2.  </a:t>
-            </a:r>
+              <a:buClr>
+                <a:srgbClr val="0B376C"/>
+              </a:buClr>
+              <a:buFont typeface="Arial"/>
+              <a:buChar char="•"/>
+            </a:pPr>
             <a:r>
               <a:rPr lang="en-US" sz="1650" dirty="0">
                 <a:solidFill>
                   <a:srgbClr val="000000"/>
                 </a:solidFill>
-                <a:latin typeface="Segoe UI"/>
-                <a:cs typeface="Segoe UI"/>
+                <a:latin typeface="Arial"/>
+                <a:cs typeface="Arial"/>
               </a:rPr>
               <a:t>Mọi người: với mỗi từ PICO, viết 2-3 từ đồng nghĩa tiếng Anh (Bài tập 5)</a:t>
             </a:r>
@@ -27348,25 +27066,19 @@
               <a:spcBef>
                 <a:spcPts val="450"/>
               </a:spcBef>
-              <a:buNone/>
-            </a:pPr>
-            <a:r>
-              <a:rPr lang="en-US" sz="1650" b="1" dirty="0">
-                <a:solidFill>
-                  <a:srgbClr val="0B376C"/>
-                </a:solidFill>
-                <a:latin typeface="Segoe UI"/>
-                <a:cs typeface="Segoe UI"/>
-              </a:rPr>
-              <a:t>3.  </a:t>
-            </a:r>
+              <a:buClr>
+                <a:srgbClr val="0B376C"/>
+              </a:buClr>
+              <a:buFont typeface="Arial"/>
+              <a:buChar char="•"/>
+            </a:pPr>
             <a:r>
               <a:rPr lang="en-US" sz="1650" dirty="0">
                 <a:solidFill>
                   <a:srgbClr val="000000"/>
                 </a:solidFill>
-                <a:latin typeface="Segoe UI"/>
-                <a:cs typeface="Segoe UI"/>
+                <a:latin typeface="Arial"/>
+                <a:cs typeface="Arial"/>
               </a:rPr>
               <a:t>Mọi người: nghĩ một con số tại khoa cho thấy vấn đề (audit, số ca)</a:t>
             </a:r>
@@ -27379,25 +27091,19 @@
               <a:spcBef>
                 <a:spcPts val="450"/>
               </a:spcBef>
-              <a:buNone/>
-            </a:pPr>
-            <a:r>
-              <a:rPr lang="en-US" sz="1650" b="1" dirty="0">
-                <a:solidFill>
-                  <a:srgbClr val="0B376C"/>
-                </a:solidFill>
-                <a:latin typeface="Segoe UI"/>
-                <a:cs typeface="Segoe UI"/>
-              </a:rPr>
-              <a:t>4.  </a:t>
-            </a:r>
+              <a:buClr>
+                <a:srgbClr val="0B376C"/>
+              </a:buClr>
+              <a:buFont typeface="Arial"/>
+              <a:buChar char="•"/>
+            </a:pPr>
             <a:r>
               <a:rPr lang="en-US" sz="1650" dirty="0">
                 <a:solidFill>
                   <a:srgbClr val="000000"/>
                 </a:solidFill>
-                <a:latin typeface="Segoe UI"/>
-                <a:cs typeface="Segoe UI"/>
+                <a:latin typeface="Arial"/>
+                <a:cs typeface="Arial"/>
               </a:rPr>
               <a:t>Không bắt buộc: cài Zotero (miễn phí, zotero.org) lên laptop</a:t>
             </a:r>
@@ -27441,8 +27147,8 @@
                 <a:solidFill>
                   <a:srgbClr val="0B376C"/>
                 </a:solidFill>
-                <a:latin typeface="Segoe UI"/>
-                <a:cs typeface="Segoe UI"/>
+                <a:latin typeface="Arial"/>
+                <a:cs typeface="Arial"/>
               </a:rPr>
               <a:t>Mang theo thứ Bảy tuần sau</a:t>
             </a:r>
@@ -27463,8 +27169,8 @@
                 <a:solidFill>
                   <a:srgbClr val="000000"/>
                 </a:solidFill>
-                <a:latin typeface="Segoe UI"/>
-                <a:cs typeface="Segoe UI"/>
+                <a:latin typeface="Arial"/>
+                <a:cs typeface="Arial"/>
               </a:rPr>
               <a:t>Câu hỏi PICO của nhóm</a:t>
             </a:r>
@@ -27485,8 +27191,8 @@
                 <a:solidFill>
                   <a:srgbClr val="000000"/>
                 </a:solidFill>
-                <a:latin typeface="Segoe UI"/>
-                <a:cs typeface="Segoe UI"/>
+                <a:latin typeface="Arial"/>
+                <a:cs typeface="Arial"/>
               </a:rPr>
               <a:t>Danh sách từ đồng nghĩa</a:t>
             </a:r>
@@ -27507,8 +27213,8 @@
                 <a:solidFill>
                   <a:srgbClr val="000000"/>
                 </a:solidFill>
-                <a:latin typeface="Segoe UI"/>
-                <a:cs typeface="Segoe UI"/>
+                <a:latin typeface="Arial"/>
+                <a:cs typeface="Arial"/>
               </a:rPr>
               <a:t>Mỗi nhóm một laptop hoặc điện thoại</a:t>
             </a:r>
@@ -27554,8 +27260,8 @@
                 <a:solidFill>
                   <a:srgbClr val="0B376C"/>
                 </a:solidFill>
-                <a:latin typeface="Segoe UI"/>
-                <a:cs typeface="Segoe UI"/>
+                <a:latin typeface="Arial"/>
+                <a:cs typeface="Arial"/>
               </a:rPr>
               <a:t>SẢN PHẨM   </a:t>
             </a:r>
@@ -27564,8 +27270,8 @@
                 <a:solidFill>
                   <a:srgbClr val="000000"/>
                 </a:solidFill>
-                <a:latin typeface="Segoe UI"/>
-                <a:cs typeface="Segoe UI"/>
+                <a:latin typeface="Arial"/>
+                <a:cs typeface="Arial"/>
               </a:rPr>
               <a:t>Câu hỏi PICO sẵn sàng cho buổi tìm kiếm thứ Bảy tuần sau</a:t>
             </a:r>
@@ -27602,7 +27308,7 @@
                     <a:lumMod val="50000"/>
                   </a:schemeClr>
                 </a:solidFill>
-                <a:latin typeface="Verdana"/>
+                <a:latin typeface="Arial"/>
               </a:rPr>
               <a:t>Neudata | #ClearDataClearImpact</a:t>
             </a:r>
@@ -27732,8 +27438,8 @@
                 <a:solidFill>
                   <a:srgbClr val="0D7377"/>
                 </a:solidFill>
-                <a:latin typeface="Segoe UI"/>
-                <a:cs typeface="Segoe UI"/>
+                <a:latin typeface="Arial"/>
+                <a:cs typeface="Arial"/>
               </a:rPr>
               <a:t>Hai sản phẩm của nhóm bạn</a:t>
             </a:r>
@@ -27822,7 +27528,7 @@
                     <a:lumMod val="50000"/>
                   </a:schemeClr>
                 </a:solidFill>
-                <a:latin typeface="Verdana"/>
+                <a:latin typeface="Arial"/>
               </a:rPr>
               <a:t>Neudata | #ClearDataClearImpact</a:t>
             </a:r>
@@ -27955,8 +27661,8 @@
                 <a:solidFill>
                   <a:srgbClr val="0D7377"/>
                 </a:solidFill>
-                <a:latin typeface="Segoe UI"/>
-                <a:cs typeface="Segoe UI"/>
+                <a:latin typeface="Arial"/>
+                <a:cs typeface="Arial"/>
               </a:rPr>
               <a:t>Slide bổ sung: Buổi 1</a:t>
             </a:r>
@@ -27973,8 +27679,8 @@
                 <a:solidFill>
                   <a:srgbClr val="595959"/>
                 </a:solidFill>
-                <a:latin typeface="Segoe UI"/>
-                <a:cs typeface="Segoe UI"/>
+                <a:latin typeface="Arial"/>
+                <a:cs typeface="Arial"/>
               </a:rPr>
               <a:t>Dùng nếu còn thời gian, hoặc để tự học</a:t>
             </a:r>
@@ -28011,7 +27717,7 @@
                     <a:lumMod val="50000"/>
                   </a:schemeClr>
                 </a:solidFill>
-                <a:latin typeface="Verdana"/>
+                <a:latin typeface="Arial"/>
               </a:rPr>
               <a:t>Neudata | #ClearDataClearImpact</a:t>
             </a:r>
@@ -28141,8 +27847,8 @@
                 <a:solidFill>
                   <a:srgbClr val="0D7377"/>
                 </a:solidFill>
-                <a:latin typeface="Segoe UI"/>
-                <a:cs typeface="Segoe UI"/>
+                <a:latin typeface="Arial"/>
+                <a:cs typeface="Arial"/>
               </a:rPr>
               <a:t>PICO cho các loại câu hỏi khác</a:t>
             </a:r>
@@ -28212,8 +27918,8 @@
                 <a:solidFill>
                   <a:srgbClr val="FFFFFF"/>
                 </a:solidFill>
-                <a:latin typeface="Segoe UI"/>
-                <a:cs typeface="Segoe UI"/>
+                <a:latin typeface="Arial"/>
+                <a:cs typeface="Arial"/>
               </a:rPr>
               <a:t>Chẩn đoán</a:t>
             </a:r>
@@ -28261,8 +27967,8 @@
                 <a:solidFill>
                   <a:srgbClr val="000000"/>
                 </a:solidFill>
-                <a:latin typeface="Segoe UI"/>
-                <a:cs typeface="Segoe UI"/>
+                <a:latin typeface="Arial"/>
+                <a:cs typeface="Arial"/>
               </a:rPr>
               <a:t>P: người được xét nghiệm</a:t>
             </a:r>
@@ -28282,8 +27988,8 @@
                 <a:solidFill>
                   <a:srgbClr val="000000"/>
                 </a:solidFill>
-                <a:latin typeface="Segoe UI"/>
-                <a:cs typeface="Segoe UI"/>
+                <a:latin typeface="Arial"/>
+                <a:cs typeface="Arial"/>
               </a:rPr>
               <a:t>I: xét nghiệm mới</a:t>
             </a:r>
@@ -28303,8 +28009,8 @@
                 <a:solidFill>
                   <a:srgbClr val="000000"/>
                 </a:solidFill>
-                <a:latin typeface="Segoe UI"/>
-                <a:cs typeface="Segoe UI"/>
+                <a:latin typeface="Arial"/>
+                <a:cs typeface="Arial"/>
               </a:rPr>
               <a:t>C: tiêu chuẩn tham chiếu</a:t>
             </a:r>
@@ -28324,8 +28030,8 @@
                 <a:solidFill>
                   <a:srgbClr val="000000"/>
                 </a:solidFill>
-                <a:latin typeface="Segoe UI"/>
-                <a:cs typeface="Segoe UI"/>
+                <a:latin typeface="Arial"/>
+                <a:cs typeface="Arial"/>
               </a:rPr>
               <a:t>O: độ chính xác</a:t>
             </a:r>
@@ -28367,8 +28073,8 @@
                 <a:solidFill>
                   <a:srgbClr val="FFFFFF"/>
                 </a:solidFill>
-                <a:latin typeface="Segoe UI"/>
-                <a:cs typeface="Segoe UI"/>
+                <a:latin typeface="Arial"/>
+                <a:cs typeface="Arial"/>
               </a:rPr>
               <a:t>Tiên lượng</a:t>
             </a:r>
@@ -28416,8 +28122,8 @@
                 <a:solidFill>
                   <a:srgbClr val="000000"/>
                 </a:solidFill>
-                <a:latin typeface="Segoe UI"/>
-                <a:cs typeface="Segoe UI"/>
+                <a:latin typeface="Arial"/>
+                <a:cs typeface="Arial"/>
               </a:rPr>
               <a:t>P: bệnh nhân mắc X</a:t>
             </a:r>
@@ -28437,8 +28143,8 @@
                 <a:solidFill>
                   <a:srgbClr val="000000"/>
                 </a:solidFill>
-                <a:latin typeface="Segoe UI"/>
-                <a:cs typeface="Segoe UI"/>
+                <a:latin typeface="Arial"/>
+                <a:cs typeface="Arial"/>
               </a:rPr>
               <a:t>E: yếu tố nguy cơ</a:t>
             </a:r>
@@ -28458,8 +28164,8 @@
                 <a:solidFill>
                   <a:srgbClr val="000000"/>
                 </a:solidFill>
-                <a:latin typeface="Segoe UI"/>
-                <a:cs typeface="Segoe UI"/>
+                <a:latin typeface="Arial"/>
+                <a:cs typeface="Arial"/>
               </a:rPr>
               <a:t>O: điều xảy ra</a:t>
             </a:r>
@@ -28479,8 +28185,8 @@
                 <a:solidFill>
                   <a:srgbClr val="000000"/>
                 </a:solidFill>
-                <a:latin typeface="Segoe UI"/>
-                <a:cs typeface="Segoe UI"/>
+                <a:latin typeface="Arial"/>
+                <a:cs typeface="Arial"/>
               </a:rPr>
               <a:t>T: đến khi nào</a:t>
             </a:r>
@@ -28522,8 +28228,8 @@
                 <a:solidFill>
                   <a:srgbClr val="FFFFFF"/>
                 </a:solidFill>
-                <a:latin typeface="Segoe UI"/>
-                <a:cs typeface="Segoe UI"/>
+                <a:latin typeface="Arial"/>
+                <a:cs typeface="Arial"/>
               </a:rPr>
               <a:t>Định tính (SPIDER)</a:t>
             </a:r>
@@ -28571,8 +28277,8 @@
                 <a:solidFill>
                   <a:srgbClr val="000000"/>
                 </a:solidFill>
-                <a:latin typeface="Segoe UI"/>
-                <a:cs typeface="Segoe UI"/>
+                <a:latin typeface="Arial"/>
+                <a:cs typeface="Arial"/>
               </a:rPr>
               <a:t>Mẫu, Hiện tượng</a:t>
             </a:r>
@@ -28592,8 +28298,8 @@
                 <a:solidFill>
                   <a:srgbClr val="000000"/>
                 </a:solidFill>
-                <a:latin typeface="Segoe UI"/>
-                <a:cs typeface="Segoe UI"/>
+                <a:latin typeface="Arial"/>
+                <a:cs typeface="Arial"/>
               </a:rPr>
               <a:t>quan tâm, Thiết kế,</a:t>
             </a:r>
@@ -28613,8 +28319,8 @@
                 <a:solidFill>
                   <a:srgbClr val="000000"/>
                 </a:solidFill>
-                <a:latin typeface="Segoe UI"/>
-                <a:cs typeface="Segoe UI"/>
+                <a:latin typeface="Arial"/>
+                <a:cs typeface="Arial"/>
               </a:rPr>
               <a:t>Đánh giá,</a:t>
             </a:r>
@@ -28634,8 +28340,8 @@
                 <a:solidFill>
                   <a:srgbClr val="000000"/>
                 </a:solidFill>
-                <a:latin typeface="Segoe UI"/>
-                <a:cs typeface="Segoe UI"/>
+                <a:latin typeface="Arial"/>
+                <a:cs typeface="Arial"/>
               </a:rPr>
               <a:t>Loại nghiên cứu</a:t>
             </a:r>
@@ -28679,8 +28385,8 @@
                 <a:solidFill>
                   <a:srgbClr val="FFFFFF"/>
                 </a:solidFill>
-                <a:latin typeface="Segoe UI"/>
-                <a:cs typeface="Segoe UI"/>
+                <a:latin typeface="Arial"/>
+                <a:cs typeface="Arial"/>
               </a:rPr>
               <a:t>THÔNG ĐIỆP CHÍNH   </a:t>
             </a:r>
@@ -28689,8 +28395,8 @@
                 <a:solidFill>
                   <a:srgbClr val="FFFFFF"/>
                 </a:solidFill>
-                <a:latin typeface="Segoe UI"/>
-                <a:cs typeface="Segoe UI"/>
+                <a:latin typeface="Arial"/>
+                <a:cs typeface="Arial"/>
               </a:rPr>
               <a:t>Chữ cái thay đổi, nhưng nguyên tắc vẫn giữ nguyên: nói rõ ràng.</a:t>
             </a:r>
@@ -28727,7 +28433,7 @@
                     <a:lumMod val="50000"/>
                   </a:schemeClr>
                 </a:solidFill>
-                <a:latin typeface="Verdana"/>
+                <a:latin typeface="Arial"/>
               </a:rPr>
               <a:t>Neudata | #ClearDataClearImpact</a:t>
             </a:r>
@@ -28857,8 +28563,8 @@
                 <a:solidFill>
                   <a:srgbClr val="0D7377"/>
                 </a:solidFill>
-                <a:latin typeface="Segoe UI"/>
-                <a:cs typeface="Segoe UI"/>
+                <a:latin typeface="Arial"/>
+                <a:cs typeface="Arial"/>
               </a:rPr>
               <a:t>H1 một phía hay hai phía?</a:t>
             </a:r>
@@ -28928,8 +28634,8 @@
                 <a:solidFill>
                   <a:srgbClr val="FFFFFF"/>
                 </a:solidFill>
-                <a:latin typeface="Segoe UI"/>
-                <a:cs typeface="Segoe UI"/>
+                <a:latin typeface="Arial"/>
+                <a:cs typeface="Arial"/>
               </a:rPr>
               <a:t>Hai phía (thường dùng)</a:t>
             </a:r>
@@ -28977,8 +28683,8 @@
                 <a:solidFill>
                   <a:srgbClr val="000000"/>
                 </a:solidFill>
-                <a:latin typeface="Segoe UI"/>
-                <a:cs typeface="Segoe UI"/>
+                <a:latin typeface="Arial"/>
+                <a:cs typeface="Arial"/>
               </a:rPr>
               <a:t>'Tử vong khác nhau'</a:t>
             </a:r>
@@ -28998,8 +28704,8 @@
                 <a:solidFill>
                   <a:srgbClr val="000000"/>
                 </a:solidFill>
-                <a:latin typeface="Segoe UI"/>
-                <a:cs typeface="Segoe UI"/>
+                <a:latin typeface="Arial"/>
+                <a:cs typeface="Arial"/>
               </a:rPr>
               <a:t>Cho phép có lợi</a:t>
             </a:r>
@@ -29019,8 +28725,8 @@
                 <a:solidFill>
                   <a:srgbClr val="000000"/>
                 </a:solidFill>
-                <a:latin typeface="Segoe UI"/>
-                <a:cs typeface="Segoe UI"/>
+                <a:latin typeface="Arial"/>
+                <a:cs typeface="Arial"/>
               </a:rPr>
               <a:t>HOẶC có hại</a:t>
             </a:r>
@@ -29062,8 +28768,8 @@
                 <a:solidFill>
                   <a:srgbClr val="FFFFFF"/>
                 </a:solidFill>
-                <a:latin typeface="Segoe UI"/>
-                <a:cs typeface="Segoe UI"/>
+                <a:latin typeface="Arial"/>
+                <a:cs typeface="Arial"/>
               </a:rPr>
               <a:t>Một phía (hiếm)</a:t>
             </a:r>
@@ -29111,8 +28817,8 @@
                 <a:solidFill>
                   <a:srgbClr val="000000"/>
                 </a:solidFill>
-                <a:latin typeface="Segoe UI"/>
-                <a:cs typeface="Segoe UI"/>
+                <a:latin typeface="Arial"/>
+                <a:cs typeface="Arial"/>
               </a:rPr>
               <a:t>'Tử vong thấp hơn'</a:t>
             </a:r>
@@ -29132,8 +28838,8 @@
                 <a:solidFill>
                   <a:srgbClr val="000000"/>
                 </a:solidFill>
-                <a:latin typeface="Segoe UI"/>
-                <a:cs typeface="Segoe UI"/>
+                <a:latin typeface="Arial"/>
+                <a:cs typeface="Arial"/>
               </a:rPr>
               <a:t>Bỏ qua khả năng có hại</a:t>
             </a:r>
@@ -29153,8 +28859,8 @@
                 <a:solidFill>
                   <a:srgbClr val="000000"/>
                 </a:solidFill>
-                <a:latin typeface="Segoe UI"/>
-                <a:cs typeface="Segoe UI"/>
+                <a:latin typeface="Arial"/>
+                <a:cs typeface="Arial"/>
               </a:rPr>
               <a:t>Cần lý do mạnh</a:t>
             </a:r>
@@ -29196,8 +28902,8 @@
                 <a:solidFill>
                   <a:srgbClr val="FFFFFF"/>
                 </a:solidFill>
-                <a:latin typeface="Segoe UI"/>
-                <a:cs typeface="Segoe UI"/>
+                <a:latin typeface="Arial"/>
+                <a:cs typeface="Arial"/>
               </a:rPr>
               <a:t>Không kém hơn</a:t>
             </a:r>
@@ -29245,8 +28951,8 @@
                 <a:solidFill>
                   <a:srgbClr val="000000"/>
                 </a:solidFill>
-                <a:latin typeface="Segoe UI"/>
-                <a:cs typeface="Segoe UI"/>
+                <a:latin typeface="Arial"/>
+                <a:cs typeface="Arial"/>
               </a:rPr>
               <a:t>'Không kém hơn quá</a:t>
             </a:r>
@@ -29266,8 +28972,8 @@
                 <a:solidFill>
                   <a:srgbClr val="000000"/>
                 </a:solidFill>
-                <a:latin typeface="Segoe UI"/>
-                <a:cs typeface="Segoe UI"/>
+                <a:latin typeface="Arial"/>
+                <a:cs typeface="Arial"/>
               </a:rPr>
               <a:t>một ngưỡng định trước'</a:t>
             </a:r>
@@ -29287,8 +28993,8 @@
                 <a:solidFill>
                   <a:srgbClr val="000000"/>
                 </a:solidFill>
-                <a:latin typeface="Segoe UI"/>
-                <a:cs typeface="Segoe UI"/>
+                <a:latin typeface="Arial"/>
+                <a:cs typeface="Arial"/>
               </a:rPr>
               <a:t>(Buổi 3)</a:t>
             </a:r>
@@ -29332,8 +29038,8 @@
                 <a:solidFill>
                   <a:srgbClr val="FFFFFF"/>
                 </a:solidFill>
-                <a:latin typeface="Segoe UI"/>
-                <a:cs typeface="Segoe UI"/>
+                <a:latin typeface="Arial"/>
+                <a:cs typeface="Arial"/>
               </a:rPr>
               <a:t>THÔNG ĐIỆP CHÍNH   </a:t>
             </a:r>
@@ -29342,8 +29048,8 @@
                 <a:solidFill>
                   <a:srgbClr val="FFFFFF"/>
                 </a:solidFill>
-                <a:latin typeface="Segoe UI"/>
-                <a:cs typeface="Segoe UI"/>
+                <a:latin typeface="Arial"/>
+                <a:cs typeface="Arial"/>
               </a:rPr>
               <a:t>Khi không chắc, hãy viết H1 hai phía.</a:t>
             </a:r>
@@ -29380,7 +29086,7 @@
                     <a:lumMod val="50000"/>
                   </a:schemeClr>
                 </a:solidFill>
-                <a:latin typeface="Verdana"/>
+                <a:latin typeface="Arial"/>
               </a:rPr>
               <a:t>Neudata | #ClearDataClearImpact</a:t>
             </a:r>
@@ -29510,8 +29216,8 @@
                 <a:solidFill>
                   <a:srgbClr val="0D7377"/>
                 </a:solidFill>
-                <a:latin typeface="Segoe UI"/>
-                <a:cs typeface="Segoe UI"/>
+                <a:latin typeface="Arial"/>
+                <a:cs typeface="Arial"/>
               </a:rPr>
               <a:t>Luyện thêm: trượt tiêu chí FINER nào?</a:t>
             </a:r>
@@ -29581,8 +29287,8 @@
                 <a:solidFill>
                   <a:srgbClr val="FFFFFF"/>
                 </a:solidFill>
-                <a:latin typeface="Segoe UI"/>
-                <a:cs typeface="Segoe UI"/>
+                <a:latin typeface="Arial"/>
+                <a:cs typeface="Arial"/>
               </a:rPr>
               <a:t>CÂU HỎI NHANH   |   4 phút</a:t>
             </a:r>
@@ -29619,25 +29325,19 @@
               <a:spcBef>
                 <a:spcPts val="450"/>
               </a:spcBef>
-              <a:buNone/>
-            </a:pPr>
-            <a:r>
-              <a:rPr lang="en-US" sz="1650" b="1" dirty="0">
-                <a:solidFill>
-                  <a:srgbClr val="6C3483"/>
-                </a:solidFill>
-                <a:latin typeface="Segoe UI"/>
-                <a:cs typeface="Segoe UI"/>
-              </a:rPr>
-              <a:t>1.  </a:t>
-            </a:r>
+              <a:buClr>
+                <a:srgbClr val="6C3483"/>
+              </a:buClr>
+              <a:buFont typeface="Arial"/>
+              <a:buChar char="•"/>
+            </a:pPr>
             <a:r>
               <a:rPr lang="en-US" sz="1650" dirty="0">
                 <a:solidFill>
                   <a:srgbClr val="000000"/>
                 </a:solidFill>
-                <a:latin typeface="Segoe UI"/>
-                <a:cs typeface="Segoe UI"/>
+                <a:latin typeface="Arial"/>
+                <a:cs typeface="Arial"/>
               </a:rPr>
               <a:t>Mọi người lớn nằm viện trong cả nước: vitamin D có giảm tử vong trong 10 năm?</a:t>
             </a:r>
@@ -29650,25 +29350,19 @@
               <a:spcBef>
                 <a:spcPts val="450"/>
               </a:spcBef>
-              <a:buNone/>
-            </a:pPr>
-            <a:r>
-              <a:rPr lang="en-US" sz="1650" b="1" dirty="0">
-                <a:solidFill>
-                  <a:srgbClr val="6C3483"/>
-                </a:solidFill>
-                <a:latin typeface="Segoe UI"/>
-                <a:cs typeface="Segoe UI"/>
-              </a:rPr>
-              <a:t>2.  </a:t>
-            </a:r>
+              <a:buClr>
+                <a:srgbClr val="6C3483"/>
+              </a:buClr>
+              <a:buFont typeface="Arial"/>
+              <a:buChar char="•"/>
+            </a:pPr>
             <a:r>
               <a:rPr lang="en-US" sz="1650" dirty="0">
                 <a:solidFill>
                   <a:srgbClr val="000000"/>
                 </a:solidFill>
-                <a:latin typeface="Segoe UI"/>
-                <a:cs typeface="Segoe UI"/>
+                <a:latin typeface="Arial"/>
+                <a:cs typeface="Arial"/>
               </a:rPr>
               <a:t>Sốc nhiễm khuẩn: hoãn kháng sinh 24 giờ có giảm kháng thuốc?</a:t>
             </a:r>
@@ -29681,25 +29375,19 @@
               <a:spcBef>
                 <a:spcPts val="450"/>
               </a:spcBef>
-              <a:buNone/>
-            </a:pPr>
-            <a:r>
-              <a:rPr lang="en-US" sz="1650" b="1" dirty="0">
-                <a:solidFill>
-                  <a:srgbClr val="6C3483"/>
-                </a:solidFill>
-                <a:latin typeface="Segoe UI"/>
-                <a:cs typeface="Segoe UI"/>
-              </a:rPr>
-              <a:t>3.  </a:t>
-            </a:r>
+              <a:buClr>
+                <a:srgbClr val="6C3483"/>
+              </a:buClr>
+              <a:buFont typeface="Arial"/>
+              <a:buChar char="•"/>
+            </a:pPr>
             <a:r>
               <a:rPr lang="en-US" sz="1650" dirty="0">
                 <a:solidFill>
                   <a:srgbClr val="000000"/>
                 </a:solidFill>
-                <a:latin typeface="Segoe UI"/>
-                <a:cs typeface="Segoe UI"/>
+                <a:latin typeface="Arial"/>
+                <a:cs typeface="Arial"/>
               </a:rPr>
               <a:t>Điều dưỡng ICU có rửa tay không? (đã audit hằng tháng suốt 5 năm)</a:t>
             </a:r>
@@ -29712,25 +29400,19 @@
               <a:spcBef>
                 <a:spcPts val="450"/>
               </a:spcBef>
-              <a:buNone/>
-            </a:pPr>
-            <a:r>
-              <a:rPr lang="en-US" sz="1650" b="1" dirty="0">
-                <a:solidFill>
-                  <a:srgbClr val="6C3483"/>
-                </a:solidFill>
-                <a:latin typeface="Segoe UI"/>
-                <a:cs typeface="Segoe UI"/>
-              </a:rPr>
-              <a:t>4.  </a:t>
-            </a:r>
+              <a:buClr>
+                <a:srgbClr val="6C3483"/>
+              </a:buClr>
+              <a:buFont typeface="Arial"/>
+              <a:buChar char="•"/>
+            </a:pPr>
             <a:r>
               <a:rPr lang="en-US" sz="1650" dirty="0">
                 <a:solidFill>
                   <a:srgbClr val="000000"/>
                 </a:solidFill>
-                <a:latin typeface="Segoe UI"/>
-                <a:cs typeface="Segoe UI"/>
+                <a:latin typeface="Arial"/>
+                <a:cs typeface="Arial"/>
               </a:rPr>
               <a:t>Viêm phổi: màu của tờ y lệnh có ảnh hưởng tử vong 28 ngày?</a:t>
             </a:r>
@@ -29776,8 +29458,8 @@
                 <a:solidFill>
                   <a:srgbClr val="6C3483"/>
                 </a:solidFill>
-                <a:latin typeface="Segoe UI"/>
-                <a:cs typeface="Segoe UI"/>
+                <a:latin typeface="Arial"/>
+                <a:cs typeface="Arial"/>
               </a:rPr>
               <a:t>SẢN PHẨM   </a:t>
             </a:r>
@@ -29786,8 +29468,8 @@
                 <a:solidFill>
                   <a:srgbClr val="000000"/>
                 </a:solidFill>
-                <a:latin typeface="Segoe UI"/>
-                <a:cs typeface="Segoe UI"/>
+                <a:latin typeface="Arial"/>
+                <a:cs typeface="Arial"/>
               </a:rPr>
               <a:t>Mỗi câu một chữ cái</a:t>
             </a:r>
@@ -29824,7 +29506,7 @@
                     <a:lumMod val="50000"/>
                   </a:schemeClr>
                 </a:solidFill>
-                <a:latin typeface="Verdana"/>
+                <a:latin typeface="Arial"/>
               </a:rPr>
               <a:t>Neudata | #ClearDataClearImpact</a:t>
             </a:r>
@@ -29954,8 +29636,8 @@
                 <a:solidFill>
                   <a:srgbClr val="0D7377"/>
                 </a:solidFill>
-                <a:latin typeface="Segoe UI"/>
-                <a:cs typeface="Segoe UI"/>
+                <a:latin typeface="Arial"/>
+                <a:cs typeface="Arial"/>
               </a:rPr>
               <a:t>Mơ hồ và trả lời được: ví dụ tại khoa</a:t>
             </a:r>
@@ -30051,8 +29733,8 @@
                 <a:solidFill>
                   <a:srgbClr val="FFFFFF"/>
                 </a:solidFill>
-                <a:latin typeface="Segoe UI"/>
-                <a:cs typeface="Segoe UI"/>
+                <a:latin typeface="Arial"/>
+                <a:cs typeface="Arial"/>
               </a:rPr>
               <a:t>THÔNG ĐIỆP CHÍNH   </a:t>
             </a:r>
@@ -30061,8 +29743,8 @@
                 <a:solidFill>
                   <a:srgbClr val="FFFFFF"/>
                 </a:solidFill>
-                <a:latin typeface="Segoe UI"/>
-                <a:cs typeface="Segoe UI"/>
+                <a:latin typeface="Arial"/>
+                <a:cs typeface="Arial"/>
               </a:rPr>
               <a:t>Luyện trên khoa của bạn: lấy một câu hỏi hành lang và điền các ô PICO.</a:t>
             </a:r>
@@ -30099,7 +29781,7 @@
                     <a:lumMod val="50000"/>
                   </a:schemeClr>
                 </a:solidFill>
-                <a:latin typeface="Verdana"/>
+                <a:latin typeface="Arial"/>
               </a:rPr>
               <a:t>Neudata | #ClearDataClearImpact</a:t>
             </a:r>
@@ -30253,8 +29935,8 @@
                 <a:solidFill>
                   <a:srgbClr val="4472C4"/>
                 </a:solidFill>
-                <a:latin typeface="Segoe UI"/>
-                <a:cs typeface="Segoe UI"/>
+                <a:latin typeface="Arial"/>
+                <a:cs typeface="Arial"/>
               </a:rPr>
               <a:t>Copyright © Neudata, 2026</a:t>
             </a:r>
@@ -30399,7 +30081,7 @@
                     <a:lumMod val="50000"/>
                   </a:schemeClr>
                 </a:solidFill>
-                <a:latin typeface="Verdana"/>
+                <a:latin typeface="Arial"/>
               </a:rPr>
               <a:t>Neudata | #ClearDataClearImpact</a:t>
             </a:r>
@@ -30505,8 +30187,8 @@
                 <a:solidFill>
                   <a:srgbClr val="0D7377"/>
                 </a:solidFill>
-                <a:latin typeface="Segoe UI"/>
-                <a:cs typeface="Segoe UI"/>
+                <a:latin typeface="Arial"/>
+                <a:cs typeface="Arial"/>
               </a:rPr>
               <a:t>Sau khóa học, bạn sẽ có thể</a:t>
             </a:r>
@@ -30576,8 +30258,8 @@
                 <a:solidFill>
                   <a:srgbClr val="FFFFFF"/>
                 </a:solidFill>
-                <a:latin typeface="Segoe UI"/>
-                <a:cs typeface="Segoe UI"/>
+                <a:latin typeface="Arial"/>
+                <a:cs typeface="Arial"/>
               </a:rPr>
               <a:t>HỎI &amp; TÌM</a:t>
             </a:r>
@@ -30625,8 +30307,8 @@
                 <a:solidFill>
                   <a:srgbClr val="000000"/>
                 </a:solidFill>
-                <a:latin typeface="Segoe UI"/>
-                <a:cs typeface="Segoe UI"/>
+                <a:latin typeface="Arial"/>
+                <a:cs typeface="Arial"/>
               </a:rPr>
               <a:t>Biến vấn đề thành câu hỏi PICO</a:t>
             </a:r>
@@ -30646,8 +30328,8 @@
                 <a:solidFill>
                   <a:srgbClr val="000000"/>
                 </a:solidFill>
-                <a:latin typeface="Segoe UI"/>
-                <a:cs typeface="Segoe UI"/>
+                <a:latin typeface="Arial"/>
+                <a:cs typeface="Arial"/>
               </a:rPr>
               <a:t>Tìm PubMed, quản lý tài liệu</a:t>
             </a:r>
@@ -30667,8 +30349,8 @@
                 <a:solidFill>
                   <a:srgbClr val="000000"/>
                 </a:solidFill>
-                <a:latin typeface="Segoe UI"/>
-                <a:cs typeface="Segoe UI"/>
+                <a:latin typeface="Arial"/>
+                <a:cs typeface="Arial"/>
               </a:rPr>
               <a:t>Đọc một bài báo trong 15 phút</a:t>
             </a:r>
@@ -30710,8 +30392,8 @@
                 <a:solidFill>
                   <a:srgbClr val="FFFFFF"/>
                 </a:solidFill>
-                <a:latin typeface="Segoe UI"/>
-                <a:cs typeface="Segoe UI"/>
+                <a:latin typeface="Arial"/>
+                <a:cs typeface="Arial"/>
               </a:rPr>
               <a:t>THIẾT KẾ</a:t>
             </a:r>
@@ -30759,8 +30441,8 @@
                 <a:solidFill>
                   <a:srgbClr val="000000"/>
                 </a:solidFill>
-                <a:latin typeface="Segoe UI"/>
-                <a:cs typeface="Segoe UI"/>
+                <a:latin typeface="Arial"/>
+                <a:cs typeface="Arial"/>
               </a:rPr>
               <a:t>Chọn đúng thiết kế nghiên cứu</a:t>
             </a:r>
@@ -30780,8 +30462,8 @@
                 <a:solidFill>
                   <a:srgbClr val="000000"/>
                 </a:solidFill>
-                <a:latin typeface="Segoe UI"/>
-                <a:cs typeface="Segoe UI"/>
+                <a:latin typeface="Arial"/>
+                <a:cs typeface="Arial"/>
               </a:rPr>
               <a:t>Nhận biết sai lệch và nhiễu</a:t>
             </a:r>
@@ -30801,8 +30483,8 @@
                 <a:solidFill>
                   <a:srgbClr val="000000"/>
                 </a:solidFill>
-                <a:latin typeface="Segoe UI"/>
-                <a:cs typeface="Segoe UI"/>
+                <a:latin typeface="Arial"/>
+                <a:cs typeface="Arial"/>
               </a:rPr>
               <a:t>Đọc RR, OR, NNT và biểu đồ rừng</a:t>
             </a:r>
@@ -30844,8 +30526,8 @@
                 <a:solidFill>
                   <a:srgbClr val="FFFFFF"/>
                 </a:solidFill>
-                <a:latin typeface="Segoe UI"/>
-                <a:cs typeface="Segoe UI"/>
+                <a:latin typeface="Arial"/>
+                <a:cs typeface="Arial"/>
               </a:rPr>
               <a:t>PHÂN TÍCH</a:t>
             </a:r>
@@ -30893,8 +30575,8 @@
                 <a:solidFill>
                   <a:srgbClr val="000000"/>
                 </a:solidFill>
-                <a:latin typeface="Segoe UI"/>
-                <a:cs typeface="Segoe UI"/>
+                <a:latin typeface="Arial"/>
+                <a:cs typeface="Arial"/>
               </a:rPr>
               <a:t>Lập kế hoạch dữ liệu và CRF</a:t>
             </a:r>
@@ -30914,8 +30596,8 @@
                 <a:solidFill>
                   <a:srgbClr val="000000"/>
                 </a:solidFill>
-                <a:latin typeface="Segoe UI"/>
-                <a:cs typeface="Segoe UI"/>
+                <a:latin typeface="Arial"/>
+                <a:cs typeface="Arial"/>
               </a:rPr>
               <a:t>Đọc CI, giá trị p, hồi quy</a:t>
             </a:r>
@@ -30935,8 +30617,8 @@
                 <a:solidFill>
                   <a:srgbClr val="000000"/>
                 </a:solidFill>
-                <a:latin typeface="Segoe UI"/>
-                <a:cs typeface="Segoe UI"/>
+                <a:latin typeface="Arial"/>
+                <a:cs typeface="Arial"/>
               </a:rPr>
               <a:t>Diễn giải kết quả một bộ dữ liệu thật</a:t>
             </a:r>
@@ -30978,8 +30660,8 @@
                 <a:solidFill>
                   <a:srgbClr val="FFFFFF"/>
                 </a:solidFill>
-                <a:latin typeface="Segoe UI"/>
-                <a:cs typeface="Segoe UI"/>
+                <a:latin typeface="Arial"/>
+                <a:cs typeface="Arial"/>
               </a:rPr>
               <a:t>VIẾT &amp; CÔNG BỐ</a:t>
             </a:r>
@@ -31027,8 +30709,8 @@
                 <a:solidFill>
                   <a:srgbClr val="000000"/>
                 </a:solidFill>
-                <a:latin typeface="Segoe UI"/>
-                <a:cs typeface="Segoe UI"/>
+                <a:latin typeface="Arial"/>
+                <a:cs typeface="Arial"/>
               </a:rPr>
               <a:t>Lập kế hoạch đạo đức và đăng ký</a:t>
             </a:r>
@@ -31048,8 +30730,8 @@
                 <a:solidFill>
                   <a:srgbClr val="000000"/>
                 </a:solidFill>
-                <a:latin typeface="Segoe UI"/>
-                <a:cs typeface="Segoe UI"/>
+                <a:latin typeface="Arial"/>
+                <a:cs typeface="Arial"/>
               </a:rPr>
               <a:t>Viết từng phần của bài báo</a:t>
             </a:r>
@@ -31069,8 +30751,8 @@
                 <a:solidFill>
                   <a:srgbClr val="000000"/>
                 </a:solidFill>
-                <a:latin typeface="Segoe UI"/>
-                <a:cs typeface="Segoe UI"/>
+                <a:latin typeface="Arial"/>
+                <a:cs typeface="Arial"/>
               </a:rPr>
               <a:t>Nộp bài và trả lời phản biện</a:t>
             </a:r>
@@ -31114,8 +30796,8 @@
                 <a:solidFill>
                   <a:srgbClr val="FFFFFF"/>
                 </a:solidFill>
-                <a:latin typeface="Segoe UI"/>
-                <a:cs typeface="Segoe UI"/>
+                <a:latin typeface="Arial"/>
+                <a:cs typeface="Arial"/>
               </a:rPr>
               <a:t>THÔNG ĐIỆP CHÍNH   </a:t>
             </a:r>
@@ -31124,8 +30806,8 @@
                 <a:solidFill>
                   <a:srgbClr val="FFFFFF"/>
                 </a:solidFill>
-                <a:latin typeface="Segoe UI"/>
-                <a:cs typeface="Segoe UI"/>
+                <a:latin typeface="Arial"/>
+                <a:cs typeface="Arial"/>
               </a:rPr>
               <a:t>Hiểu và diễn giải: bạn sẽ không phải tự tính toán.</a:t>
             </a:r>
@@ -31162,7 +30844,7 @@
                     <a:lumMod val="50000"/>
                   </a:schemeClr>
                 </a:solidFill>
-                <a:latin typeface="Verdana"/>
+                <a:latin typeface="Arial"/>
               </a:rPr>
               <a:t>Neudata | #ClearDataClearImpact</a:t>
             </a:r>
@@ -31292,8 +30974,8 @@
                 <a:solidFill>
                   <a:srgbClr val="0D7377"/>
                 </a:solidFill>
-                <a:latin typeface="Segoe UI"/>
-                <a:cs typeface="Segoe UI"/>
+                <a:latin typeface="Arial"/>
+                <a:cs typeface="Arial"/>
               </a:rPr>
               <a:t>Mỗi buổi học diễn ra như thế nào</a:t>
             </a:r>
@@ -31382,7 +31064,7 @@
                     <a:lumMod val="50000"/>
                   </a:schemeClr>
                 </a:solidFill>
-                <a:latin typeface="Verdana"/>
+                <a:latin typeface="Arial"/>
               </a:rPr>
               <a:t>Neudata | #ClearDataClearImpact</a:t>
             </a:r>
@@ -31512,8 +31194,8 @@
                 <a:solidFill>
                   <a:srgbClr val="0D7377"/>
                 </a:solidFill>
-                <a:latin typeface="Segoe UI"/>
-                <a:cs typeface="Segoe UI"/>
+                <a:latin typeface="Arial"/>
+                <a:cs typeface="Arial"/>
               </a:rPr>
               <a:t>Xây dựng đề cương từng phần một</a:t>
             </a:r>
@@ -31609,8 +31291,8 @@
                 <a:solidFill>
                   <a:srgbClr val="FFFFFF"/>
                 </a:solidFill>
-                <a:latin typeface="Segoe UI"/>
-                <a:cs typeface="Segoe UI"/>
+                <a:latin typeface="Arial"/>
+                <a:cs typeface="Arial"/>
               </a:rPr>
               <a:t>THÔNG ĐIỆP CHÍNH   </a:t>
             </a:r>
@@ -31619,8 +31301,8 @@
                 <a:solidFill>
                   <a:srgbClr val="FFFFFF"/>
                 </a:solidFill>
-                <a:latin typeface="Segoe UI"/>
-                <a:cs typeface="Segoe UI"/>
+                <a:latin typeface="Arial"/>
+                <a:cs typeface="Arial"/>
               </a:rPr>
               <a:t>Cùng nhóm, cùng mẫu, mỗi hai tuần một phần, trình bày ở Buổi 8.</a:t>
             </a:r>
@@ -31657,7 +31339,7 @@
                     <a:lumMod val="50000"/>
                   </a:schemeClr>
                 </a:solidFill>
-                <a:latin typeface="Verdana"/>
+                <a:latin typeface="Arial"/>
               </a:rPr>
               <a:t>Neudata | #ClearDataClearImpact</a:t>
             </a:r>
@@ -31787,8 +31469,8 @@
                 <a:solidFill>
                   <a:srgbClr val="0D7377"/>
                 </a:solidFill>
-                <a:latin typeface="Segoe UI"/>
-                <a:cs typeface="Segoe UI"/>
+                <a:latin typeface="Arial"/>
+                <a:cs typeface="Arial"/>
               </a:rPr>
               <a:t>Làm quen với nhóm</a:t>
             </a:r>
@@ -31858,8 +31540,8 @@
                 <a:solidFill>
                   <a:srgbClr val="FFFFFF"/>
                 </a:solidFill>
-                <a:latin typeface="Segoe UI"/>
-                <a:cs typeface="Segoe UI"/>
+                <a:latin typeface="Arial"/>
+                <a:cs typeface="Arial"/>
               </a:rPr>
               <a:t>LÀM VIỆC NHÓM   |   10 phút</a:t>
             </a:r>
@@ -31896,25 +31578,19 @@
               <a:spcBef>
                 <a:spcPts val="450"/>
               </a:spcBef>
-              <a:buNone/>
-            </a:pPr>
-            <a:r>
-              <a:rPr lang="en-US" sz="1650" b="1" dirty="0">
-                <a:solidFill>
-                  <a:srgbClr val="0D7377"/>
-                </a:solidFill>
-                <a:latin typeface="Segoe UI"/>
-                <a:cs typeface="Segoe UI"/>
-              </a:rPr>
-              <a:t>1.  </a:t>
-            </a:r>
+              <a:buClr>
+                <a:srgbClr val="0D7377"/>
+              </a:buClr>
+              <a:buFont typeface="Arial"/>
+              <a:buChar char="•"/>
+            </a:pPr>
             <a:r>
               <a:rPr lang="en-US" sz="1650" dirty="0">
                 <a:solidFill>
                   <a:srgbClr val="000000"/>
                 </a:solidFill>
-                <a:latin typeface="Segoe UI"/>
-                <a:cs typeface="Segoe UI"/>
+                <a:latin typeface="Arial"/>
+                <a:cs typeface="Arial"/>
               </a:rPr>
               <a:t>Ngồi theo nhóm (5 nhóm, mỗi nhóm khoảng 6 người, trộn các nghề)</a:t>
             </a:r>
@@ -31927,25 +31603,19 @@
               <a:spcBef>
                 <a:spcPts val="450"/>
               </a:spcBef>
-              <a:buNone/>
-            </a:pPr>
-            <a:r>
-              <a:rPr lang="en-US" sz="1650" b="1" dirty="0">
-                <a:solidFill>
-                  <a:srgbClr val="0D7377"/>
-                </a:solidFill>
-                <a:latin typeface="Segoe UI"/>
-                <a:cs typeface="Segoe UI"/>
-              </a:rPr>
-              <a:t>2.  </a:t>
-            </a:r>
+              <a:buClr>
+                <a:srgbClr val="0D7377"/>
+              </a:buClr>
+              <a:buFont typeface="Arial"/>
+              <a:buChar char="•"/>
+            </a:pPr>
             <a:r>
               <a:rPr lang="en-US" sz="1650" dirty="0">
                 <a:solidFill>
                   <a:srgbClr val="000000"/>
                 </a:solidFill>
-                <a:latin typeface="Segoe UI"/>
-                <a:cs typeface="Segoe UI"/>
+                <a:latin typeface="Arial"/>
+                <a:cs typeface="Arial"/>
               </a:rPr>
               <a:t>Giới thiệu: tên, khoa, một câu hỏi bạn mong nghiên cứu trả lời được</a:t>
             </a:r>
@@ -31958,25 +31628,19 @@
               <a:spcBef>
                 <a:spcPts val="450"/>
               </a:spcBef>
-              <a:buNone/>
-            </a:pPr>
-            <a:r>
-              <a:rPr lang="en-US" sz="1650" b="1" dirty="0">
-                <a:solidFill>
-                  <a:srgbClr val="0D7377"/>
-                </a:solidFill>
-                <a:latin typeface="Segoe UI"/>
-                <a:cs typeface="Segoe UI"/>
-              </a:rPr>
-              <a:t>3.  </a:t>
-            </a:r>
+              <a:buClr>
+                <a:srgbClr val="0D7377"/>
+              </a:buClr>
+              <a:buFont typeface="Arial"/>
+              <a:buChar char="•"/>
+            </a:pPr>
             <a:r>
               <a:rPr lang="en-US" sz="1650" dirty="0">
                 <a:solidFill>
                   <a:srgbClr val="000000"/>
                 </a:solidFill>
-                <a:latin typeface="Segoe UI"/>
-                <a:cs typeface="Segoe UI"/>
+                <a:latin typeface="Arial"/>
+                <a:cs typeface="Arial"/>
               </a:rPr>
               <a:t>Thống nhất các vai trò bên cạnh (có thể luân phiên mỗi tuần)</a:t>
             </a:r>
@@ -31989,25 +31653,19 @@
               <a:spcBef>
                 <a:spcPts val="450"/>
               </a:spcBef>
-              <a:buNone/>
-            </a:pPr>
-            <a:r>
-              <a:rPr lang="en-US" sz="1650" b="1" dirty="0">
-                <a:solidFill>
-                  <a:srgbClr val="0D7377"/>
-                </a:solidFill>
-                <a:latin typeface="Segoe UI"/>
-                <a:cs typeface="Segoe UI"/>
-              </a:rPr>
-              <a:t>4.  </a:t>
-            </a:r>
+              <a:buClr>
+                <a:srgbClr val="0D7377"/>
+              </a:buClr>
+              <a:buFont typeface="Arial"/>
+              <a:buChar char="•"/>
+            </a:pPr>
             <a:r>
               <a:rPr lang="en-US" sz="1650" dirty="0">
                 <a:solidFill>
                   <a:srgbClr val="000000"/>
                 </a:solidFill>
-                <a:latin typeface="Segoe UI"/>
-                <a:cs typeface="Segoe UI"/>
+                <a:latin typeface="Arial"/>
+                <a:cs typeface="Arial"/>
               </a:rPr>
               <a:t>Chọn tên nhóm</a:t>
             </a:r>
@@ -32051,8 +31709,8 @@
                 <a:solidFill>
                   <a:srgbClr val="0D7377"/>
                 </a:solidFill>
-                <a:latin typeface="Segoe UI"/>
-                <a:cs typeface="Segoe UI"/>
+                <a:latin typeface="Arial"/>
+                <a:cs typeface="Arial"/>
               </a:rPr>
               <a:t>Vai trò trong nhóm</a:t>
             </a:r>
@@ -32073,8 +31731,8 @@
                 <a:solidFill>
                   <a:srgbClr val="000000"/>
                 </a:solidFill>
-                <a:latin typeface="Segoe UI"/>
-                <a:cs typeface="Segoe UI"/>
+                <a:latin typeface="Arial"/>
+                <a:cs typeface="Arial"/>
               </a:rPr>
               <a:t>Điều phối: giúp mọi người cùng tham gia</a:t>
             </a:r>
@@ -32095,8 +31753,8 @@
                 <a:solidFill>
                   <a:srgbClr val="000000"/>
                 </a:solidFill>
-                <a:latin typeface="Segoe UI"/>
-                <a:cs typeface="Segoe UI"/>
+                <a:latin typeface="Arial"/>
+                <a:cs typeface="Arial"/>
               </a:rPr>
               <a:t>Thư ký: điền vào mẫu</a:t>
             </a:r>
@@ -32117,8 +31775,8 @@
                 <a:solidFill>
                   <a:srgbClr val="000000"/>
                 </a:solidFill>
-                <a:latin typeface="Segoe UI"/>
-                <a:cs typeface="Segoe UI"/>
+                <a:latin typeface="Arial"/>
+                <a:cs typeface="Arial"/>
               </a:rPr>
               <a:t>Bấm giờ</a:t>
             </a:r>
@@ -32139,8 +31797,8 @@
                 <a:solidFill>
                   <a:srgbClr val="000000"/>
                 </a:solidFill>
-                <a:latin typeface="Segoe UI"/>
-                <a:cs typeface="Segoe UI"/>
+                <a:latin typeface="Arial"/>
+                <a:cs typeface="Arial"/>
               </a:rPr>
               <a:t>Phụ trách tài liệu</a:t>
             </a:r>
@@ -32161,8 +31819,8 @@
                 <a:solidFill>
                   <a:srgbClr val="000000"/>
                 </a:solidFill>
-                <a:latin typeface="Segoe UI"/>
-                <a:cs typeface="Segoe UI"/>
+                <a:latin typeface="Arial"/>
+                <a:cs typeface="Arial"/>
               </a:rPr>
               <a:t>Phụ trách phương pháp &amp; dữ liệu</a:t>
             </a:r>
@@ -32183,8 +31841,8 @@
                 <a:solidFill>
                   <a:srgbClr val="000000"/>
                 </a:solidFill>
-                <a:latin typeface="Segoe UI"/>
-                <a:cs typeface="Segoe UI"/>
+                <a:latin typeface="Arial"/>
+                <a:cs typeface="Arial"/>
               </a:rPr>
               <a:t>Người trình bày</a:t>
             </a:r>
@@ -32230,8 +31888,8 @@
                 <a:solidFill>
                   <a:srgbClr val="0D7377"/>
                 </a:solidFill>
-                <a:latin typeface="Segoe UI"/>
-                <a:cs typeface="Segoe UI"/>
+                <a:latin typeface="Arial"/>
+                <a:cs typeface="Arial"/>
               </a:rPr>
               <a:t>SẢN PHẨM   </a:t>
             </a:r>
@@ -32240,8 +31898,8 @@
                 <a:solidFill>
                   <a:srgbClr val="000000"/>
                 </a:solidFill>
-                <a:latin typeface="Segoe UI"/>
-                <a:cs typeface="Segoe UI"/>
+                <a:latin typeface="Arial"/>
+                <a:cs typeface="Arial"/>
               </a:rPr>
               <a:t>Tên nhóm + vai trò ghi trên phiếu nhóm</a:t>
             </a:r>
@@ -32278,7 +31936,7 @@
                     <a:lumMod val="50000"/>
                   </a:schemeClr>
                 </a:solidFill>
-                <a:latin typeface="Verdana"/>
+                <a:latin typeface="Arial"/>
               </a:rPr>
               <a:t>Neudata | #ClearDataClearImpact</a:t>
             </a:r>
@@ -32395,7 +32053,7 @@
     </a:clrScheme>
     <a:fontScheme name="Office">
       <a:majorFont>
-        <a:latin typeface="Calibri"/>
+        <a:latin typeface="Arial"/>
         <a:ea typeface=""/>
         <a:cs typeface=""/>
         <a:font script="Jpan" typeface="ＭＳ Ｐゴシック"/>
@@ -32430,7 +32088,7 @@
         <a:font script="Geor" typeface="Sylfaen"/>
       </a:majorFont>
       <a:minorFont>
-        <a:latin typeface="Calibri"/>
+        <a:latin typeface="Arial"/>
         <a:ea typeface=""/>
         <a:cs typeface=""/>
         <a:font script="Jpan" typeface="ＭＳ Ｐゴシック"/>
@@ -32715,7 +32373,7 @@
     </a:clrScheme>
     <a:fontScheme name="Office">
       <a:majorFont>
-        <a:latin typeface="Calibri Light" panose="020F0302020204030204"/>
+        <a:latin typeface="Arial" panose="020F0302020204030204"/>
         <a:ea typeface=""/>
         <a:cs typeface=""/>
         <a:font script="Jpan" typeface="游ゴシック Light"/>
@@ -32750,7 +32408,7 @@
         <a:font script="Geor" typeface="Sylfaen"/>
       </a:majorFont>
       <a:minorFont>
-        <a:latin typeface="Calibri" panose="020F0502020204030204"/>
+        <a:latin typeface="Arial" panose="020F0502020204030204"/>
         <a:ea typeface=""/>
         <a:cs typeface=""/>
         <a:font script="Jpan" typeface="游ゴシック"/>
@@ -32976,7 +32634,7 @@
     </a:clrScheme>
     <a:fontScheme name="Office">
       <a:majorFont>
-        <a:latin typeface="Calibri Light" panose="020F0302020204030204"/>
+        <a:latin typeface="Arial" panose="020F0302020204030204"/>
         <a:ea typeface=""/>
         <a:cs typeface=""/>
         <a:font script="Jpan" typeface="游ゴシック Light"/>
@@ -33011,7 +32669,7 @@
         <a:font script="Geor" typeface="Sylfaen"/>
       </a:majorFont>
       <a:minorFont>
-        <a:latin typeface="Calibri" panose="020F0502020204030204"/>
+        <a:latin typeface="Arial" panose="020F0502020204030204"/>
         <a:ea typeface=""/>
         <a:cs typeface=""/>
         <a:font script="Jpan" typeface="游ゴシック"/>

--- a/vi/files/slides/Session_1_VN.pptx
+++ b/vi/files/slides/Session_1_VN.pptx
@@ -9447,7 +9447,7 @@
                 <a:latin typeface="Arial"/>
                 <a:cs typeface="Arial"/>
               </a:rPr>
-              <a:t>Date: 31/10/2026</a:t>
+              <a:t>Ngày: 31/10/2026</a:t>
             </a:r>
           </a:p>
         </p:txBody>

--- a/vi/files/slides/Session_1_VN.pptx
+++ b/vi/files/slides/Session_1_VN.pptx
@@ -64,6 +64,7 @@
     <p:sldId id="306" r:id="rId150"/>
     <p:sldId id="307" r:id="rId151"/>
     <p:sldId id="308" r:id="rId152"/>
+    <p:sldId id="309" r:id="rId153"/>
   </p:sldIdLst>
   <p:sldSz cx="12192000" cy="6858000"/>
   <p:notesSz cx="6858000" cy="9144000"/>
@@ -954,6 +955,12 @@
               <a:t>Thời gian: 15 phút. Phần học Buổi 1 bắt đầu lúc 0:35 (20:05).</a:t>
             </a:r>
           </a:p>
+          <a:p>
+            <a:r>
+              <a:rPr lang="en-US" sz="1400" b="0" dirty="0"/>
+              <a:t>Biểu mẫu được tạo một lần từ Course/Assessment/google_form (các bước trong README).</a:t>
+            </a:r>
+          </a:p>
         </p:txBody>
       </p:sp>
       <p:sp>
@@ -1647,6 +1654,12 @@
               <a:t>Thời gian: 2 phút.</a:t>
             </a:r>
           </a:p>
+          <a:p>
+            <a:r>
+              <a:rPr lang="en-US" sz="1400" b="0" dirty="0"/>
+              <a:t>Trước Buổi 1, gửi email hai tệp PDF gốc (Course/Papers, tệp có chữ 'original') kèm phiếu bài tập Buổi 1.</a:t>
+            </a:r>
+          </a:p>
         </p:txBody>
       </p:sp>
       <p:sp>
@@ -5028,19 +5041,25 @@
           <a:p>
             <a:r>
               <a:rPr lang="en-US" sz="1400" b="0" dirty="0"/>
-              <a:t>Slide bổ sung. Chẩn đoán: xét nghiệm mới là I, tiêu chuẩn tham chiếu là C, kết cục là độ chính xác (Buổi 4).</a:t>
+              <a:t>Slide dự phòng cho 'Ba ví dụ khác: PICO, PECO và P + O' (theo đề nghị của người phản biện).</a:t>
             </a:r>
           </a:p>
           <a:p>
             <a:r>
               <a:rPr lang="en-US" sz="1400" b="0" dirty="0"/>
-              <a:t>Tiên lượng: PECO cộng mốc thời gian. Câu hỏi định tính thường dùng SPIDER (Cooke và cộng sự, 2012).</a:t>
+              <a:t>Dùng như một bài tập ngắn: học viên viết mỗi dòng một câu hỏi vào chat, hoặc giảng viên gọi hai hoặc ba người (bật micro). Sau đó chiếu slide này.</a:t>
             </a:r>
           </a:p>
           <a:p>
             <a:r>
               <a:rPr lang="en-US" sz="1400" b="0" dirty="0"/>
-              <a:t>Thời gian: 2 phút nếu dùng.</a:t>
+              <a:t>Nhấn mạnh: câu hỏi điều trị dùng 'làm giảm' vì bảng kiểm được chủ động áp dụng. Câu hỏi PECO dùng 'có liên quan' vì béo phì không được chỉ định. Câu hỏi 'bao nhiêu' không có phép so sánh.</a:t>
+            </a:r>
+          </a:p>
+          <a:p>
+            <a:r>
+              <a:rPr lang="en-US" sz="1400" b="0" dirty="0"/>
+              <a:t>Thời gian: 5 phút nếu dùng.</a:t>
             </a:r>
           </a:p>
         </p:txBody>
@@ -5121,13 +5140,19 @@
           <a:p>
             <a:r>
               <a:rPr lang="en-US" sz="1400" b="0" dirty="0"/>
-              <a:t>Slide bổ sung. Đáp án: 1 Khả thi (quá lớn, quá dài). 2 Đạo đức (hoãn kháng sinh gây hại). 3 Mới (tháng nào cũng đã đo). 4 Phù hợp (không có tác động hợp lý tới thực hành).</a:t>
+              <a:t>Slide bổ sung. Chẩn đoán: xét nghiệm mới là I, tiêu chuẩn tham chiếu là C, kết cục là độ chính xác (Buổi 4).</a:t>
             </a:r>
           </a:p>
           <a:p>
             <a:r>
               <a:rPr lang="en-US" sz="1400" b="0" dirty="0"/>
-              <a:t>Thời gian: 4 phút nếu dùng.</a:t>
+              <a:t>Tiên lượng: PECO cộng mốc thời gian. Câu hỏi định tính thường dùng SPIDER (Cooke và cộng sự, 2012).</a:t>
+            </a:r>
+          </a:p>
+          <a:p>
+            <a:r>
+              <a:rPr lang="en-US" sz="1400" b="0" dirty="0"/>
+              <a:t>Thời gian: 2 phút nếu dùng.</a:t>
             </a:r>
           </a:p>
         </p:txBody>
@@ -5208,13 +5233,13 @@
           <a:p>
             <a:r>
               <a:rPr lang="en-US" sz="1400" b="0" dirty="0"/>
-              <a:t>Slide bổ sung. Đây là câu hỏi PECO (quan sát): khó phân bổ ngẫu nhiên điều dưỡng vào ca đêm.</a:t>
+              <a:t>Slide bổ sung. Đáp án: 1 Khả thi (quá lớn, quá dài). 2 Đạo đức (hoãn kháng sinh gây hại). 3 Mới (tháng nào cũng đã đo). 4 Phù hợp (không có tác động hợp lý tới thực hành).</a:t>
             </a:r>
           </a:p>
           <a:p>
             <a:r>
               <a:rPr lang="en-US" sz="1400" b="0" dirty="0"/>
-              <a:t>Thời gian: 3 phút nếu dùng.</a:t>
+              <a:t>Thời gian: 4 phút nếu dùng.</a:t>
             </a:r>
           </a:p>
         </p:txBody>
@@ -5250,6 +5275,93 @@
 </file>
 
 <file path=ppt/notesSlides/notesSlide53.xml><?xml version="1.0" encoding="utf-8"?>
+<p:notes xmlns:a="http://schemas.openxmlformats.org/drawingml/2006/main" xmlns:r="http://schemas.openxmlformats.org/officeDocument/2006/relationships" xmlns:p="http://schemas.openxmlformats.org/presentationml/2006/main">
+  <p:cSld>
+    <p:spTree>
+      <p:nvGrpSpPr>
+        <p:cNvPr id="1" name=""/>
+        <p:cNvGrpSpPr/>
+        <p:nvPr/>
+      </p:nvGrpSpPr>
+      <p:grpSpPr>
+        <a:xfrm>
+          <a:off x="0" y="0"/>
+          <a:ext cx="0" cy="0"/>
+          <a:chOff x="0" y="0"/>
+          <a:chExt cx="0" cy="0"/>
+        </a:xfrm>
+      </p:grpSpPr>
+      <p:sp>
+        <p:nvSpPr>
+          <p:cNvPr id="2" name="Slide Image Placeholder 1"/>
+          <p:cNvSpPr>
+            <a:spLocks noGrp="1" noRot="1" noChangeAspect="1"/>
+          </p:cNvSpPr>
+          <p:nvPr>
+            <p:ph type="sldImg"/>
+          </p:nvPr>
+        </p:nvSpPr>
+        <p:spPr/>
+      </p:sp>
+      <p:sp>
+        <p:nvSpPr>
+          <p:cNvPr id="3" name="Notes Placeholder 2"/>
+          <p:cNvSpPr>
+            <a:spLocks noGrp="1"/>
+          </p:cNvSpPr>
+          <p:nvPr>
+            <p:ph type="body" idx="1"/>
+          </p:nvPr>
+        </p:nvSpPr>
+        <p:spPr/>
+        <p:txBody>
+          <a:bodyPr/>
+          <a:lstStyle/>
+          <a:p>
+            <a:r>
+              <a:rPr lang="en-US" sz="1400" b="0" dirty="0"/>
+              <a:t>Slide bổ sung. Đây là câu hỏi PECO (quan sát): khó phân bổ ngẫu nhiên điều dưỡng vào ca đêm.</a:t>
+            </a:r>
+          </a:p>
+          <a:p>
+            <a:r>
+              <a:rPr lang="en-US" sz="1400" b="0" dirty="0"/>
+              <a:t>Thời gian: 3 phút nếu dùng.</a:t>
+            </a:r>
+          </a:p>
+        </p:txBody>
+      </p:sp>
+      <p:sp>
+        <p:nvSpPr>
+          <p:cNvPr id="4" name="Slide Number Placeholder 3"/>
+          <p:cNvSpPr>
+            <a:spLocks noGrp="1"/>
+          </p:cNvSpPr>
+          <p:nvPr>
+            <p:ph type="sldNum" sz="quarter" idx="10"/>
+          </p:nvPr>
+        </p:nvSpPr>
+        <p:spPr/>
+        <p:txBody>
+          <a:bodyPr/>
+          <a:lstStyle/>
+          <a:p>
+            <a:fld id="{F7021451-1387-4CA6-816F-3879F97B5CBC}" type="slidenum">
+              <a:rPr lang="en-US"/>
+              <a:t>1</a:t>
+            </a:fld>
+          </a:p>
+        </p:txBody>
+      </p:sp>
+    </p:spTree>
+  </p:cSld>
+  <p:clrMapOvr>
+    <a:masterClrMapping/>
+  </p:clrMapOvr>
+</p:notes>
+</file>
+
+<file path=ppt/notesSlides/notesSlide54.xml><?xml version="1.0" encoding="utf-8"?>
 <p:notes xmlns:a="http://schemas.openxmlformats.org/drawingml/2006/main" xmlns:r="http://schemas.openxmlformats.org/officeDocument/2006/relationships" xmlns:p="http://schemas.openxmlformats.org/presentationml/2006/main">
   <p:cSld>
     <p:spTree>
@@ -19919,7 +20031,7 @@
                 <a:latin typeface="Arial"/>
                 <a:cs typeface="Arial"/>
               </a:rPr>
-              <a:t>Cả hai đều truy cập mở. Tải về từ trang web khóa học (trang Hai bài báo).</a:t>
+              <a:t>Cả hai đều truy cập mở. Bạn nhận hai tệp PDF qua email trước Buổi 1.</a:t>
             </a:r>
           </a:p>
         </p:txBody>
@@ -42952,7 +43064,7 @@
                 <a:latin typeface="Arial"/>
                 <a:cs typeface="Arial"/>
               </a:rPr>
-              <a:t>PICO cho các loại câu hỏi khác</a:t>
+              <a:t>Bổ sung: ba ví dụ viết thành câu hỏi nghiên cứu</a:t>
             </a:r>
           </a:p>
         </p:txBody>
@@ -42987,13 +43099,52 @@
       </p:sp>
       <p:sp>
         <p:nvSpPr>
+          <p:cNvPr id="19" name="Intro"/>
+          <p:cNvSpPr txBox="1"/>
+          <p:nvPr/>
+        </p:nvSpPr>
+        <p:spPr>
+          <a:xfrm>
+            <a:off x="457200" y="1100000"/>
+            <a:ext cx="11277600" cy="480000"/>
+          </a:xfrm>
+          <a:prstGeom prst="rect">
+            <a:avLst/>
+          </a:prstGeom>
+          <a:noFill/>
+          <a:ln>
+            <a:noFill/>
+          </a:ln>
+        </p:spPr>
+        <p:txBody>
+          <a:bodyPr wrap="square" lIns="91440" tIns="45720" rIns="91440" bIns="45720" rtlCol="0" anchor="t"/>
+          <a:lstStyle/>
+          <a:p>
+            <a:pPr marL="0" indent="0" algn="l">
+              <a:buNone/>
+            </a:pPr>
+            <a:r>
+              <a:rPr lang="en-US" sz="1700" i="1" dirty="0">
+                <a:solidFill>
+                  <a:srgbClr val="595959"/>
+                </a:solidFill>
+                <a:latin typeface="Arial"/>
+                <a:cs typeface="Arial"/>
+              </a:rPr>
+              <a:t>Slide dự phòng cho 'Ba ví dụ khác': viết câu hỏi cho từng dòng, rồi so sánh.</a:t>
+            </a:r>
+          </a:p>
+        </p:txBody>
+      </p:sp>
+      <p:sp>
+        <p:nvSpPr>
           <p:cNvPr id="70" name="CardHead"/>
           <p:cNvSpPr/>
           <p:nvPr/>
         </p:nvSpPr>
         <p:spPr>
           <a:xfrm>
-            <a:off x="457200" y="1561706"/>
+            <a:off x="457200" y="1959815"/>
             <a:ext cx="3625866" cy="640000"/>
           </a:xfrm>
           <a:prstGeom prst="rect">
@@ -43023,7 +43174,7 @@
                 <a:latin typeface="Arial"/>
                 <a:cs typeface="Arial"/>
               </a:rPr>
-              <a:t>Chẩn đoán</a:t>
+              <a:t>Điều trị (PICO)</a:t>
             </a:r>
           </a:p>
         </p:txBody>
@@ -43036,8 +43187,8 @@
         </p:nvSpPr>
         <p:spPr>
           <a:xfrm>
-            <a:off x="457200" y="2201706"/>
-            <a:ext cx="3625866" cy="2364880"/>
+            <a:off x="457200" y="2599815"/>
+            <a:ext cx="3625866" cy="2050555"/>
           </a:xfrm>
           <a:prstGeom prst="rect">
             <a:avLst/>
@@ -43065,16 +43216,87 @@
               <a:buNone/>
             </a:pPr>
             <a:r>
-              <a:rPr lang="en-US" sz="1400" dirty="0">
+              <a:rPr lang="en-US" sz="1750" dirty="0">
                 <a:solidFill>
                   <a:srgbClr val="000000"/>
                 </a:solidFill>
                 <a:latin typeface="Arial"/>
                 <a:cs typeface="Arial"/>
               </a:rPr>
-              <a:t>P: người được xét nghiệm</a:t>
-            </a:r>
-          </a:p>
+              <a:t>Ở người lớn thở máy tại ICU, bảng kiểm đầu giường 2 lần/ngày, so với chăm sóc thường quy, có làm giảm viêm phổi liên quan thở máy đến ngày 28 tại ICU không?</a:t>
+            </a:r>
+          </a:p>
+        </p:txBody>
+      </p:sp>
+      <p:sp>
+        <p:nvSpPr>
+          <p:cNvPr id="72" name="CardHead"/>
+          <p:cNvSpPr/>
+          <p:nvPr/>
+        </p:nvSpPr>
+        <p:spPr>
+          <a:xfrm>
+            <a:off x="4283066" y="1959815"/>
+            <a:ext cx="3625866" cy="640000"/>
+          </a:xfrm>
+          <a:prstGeom prst="rect">
+            <a:avLst/>
+          </a:prstGeom>
+          <a:solidFill>
+            <a:srgbClr val="0B376C"/>
+          </a:solidFill>
+          <a:ln>
+            <a:noFill/>
+          </a:ln>
+        </p:spPr>
+        <p:txBody>
+          <a:bodyPr wrap="square" lIns="91440" tIns="45720" rIns="91440" bIns="45720" rtlCol="0" anchor="ctr">
+            <a:normAutofit/>
+          </a:bodyPr>
+          <a:lstStyle/>
+          <a:p>
+            <a:pPr marL="0" indent="0" algn="ctr">
+              <a:buNone/>
+            </a:pPr>
+            <a:r>
+              <a:rPr lang="en-US" sz="1900" b="1" dirty="0">
+                <a:solidFill>
+                  <a:srgbClr val="FFFFFF"/>
+                </a:solidFill>
+                <a:latin typeface="Arial"/>
+                <a:cs typeface="Arial"/>
+              </a:rPr>
+              <a:t>Yếu tố nguy cơ (PECO)</a:t>
+            </a:r>
+          </a:p>
+        </p:txBody>
+      </p:sp>
+      <p:sp>
+        <p:nvSpPr>
+          <p:cNvPr id="73" name="CardBody"/>
+          <p:cNvSpPr/>
+          <p:nvPr/>
+        </p:nvSpPr>
+        <p:spPr>
+          <a:xfrm>
+            <a:off x="4283066" y="2599815"/>
+            <a:ext cx="3625866" cy="2050555"/>
+          </a:xfrm>
+          <a:prstGeom prst="rect">
+            <a:avLst/>
+          </a:prstGeom>
+          <a:solidFill>
+            <a:srgbClr val="EAF2F5"/>
+          </a:solidFill>
+          <a:ln>
+            <a:noFill/>
+          </a:ln>
+        </p:spPr>
+        <p:txBody>
+          <a:bodyPr wrap="square" lIns="137160" tIns="91440" rIns="137160" bIns="91440" rtlCol="0" anchor="ctr">
+            <a:normAutofit/>
+          </a:bodyPr>
+          <a:lstStyle/>
           <a:p>
             <a:pPr marL="0" indent="0" algn="ctr">
               <a:lnSpc>
@@ -43086,16 +43308,87 @@
               <a:buNone/>
             </a:pPr>
             <a:r>
-              <a:rPr lang="en-US" sz="1400" dirty="0">
+              <a:rPr lang="en-US" sz="1750" dirty="0">
                 <a:solidFill>
                   <a:srgbClr val="000000"/>
                 </a:solidFill>
                 <a:latin typeface="Arial"/>
                 <a:cs typeface="Arial"/>
               </a:rPr>
-              <a:t>I: xét nghiệm mới</a:t>
-            </a:r>
-          </a:p>
+              <a:t>Ở người lớn nằm khoa nội, béo phì (BMI từ 30 trở lên), so với BMI dưới 30, có liên quan với tổn thương do tì đè mới trong thời gian nằm viện không?</a:t>
+            </a:r>
+          </a:p>
+        </p:txBody>
+      </p:sp>
+      <p:sp>
+        <p:nvSpPr>
+          <p:cNvPr id="74" name="CardHead"/>
+          <p:cNvSpPr/>
+          <p:nvPr/>
+        </p:nvSpPr>
+        <p:spPr>
+          <a:xfrm>
+            <a:off x="8108932" y="1959815"/>
+            <a:ext cx="3625866" cy="640000"/>
+          </a:xfrm>
+          <a:prstGeom prst="rect">
+            <a:avLst/>
+          </a:prstGeom>
+          <a:solidFill>
+            <a:srgbClr val="5FA39B"/>
+          </a:solidFill>
+          <a:ln>
+            <a:noFill/>
+          </a:ln>
+        </p:spPr>
+        <p:txBody>
+          <a:bodyPr wrap="square" lIns="91440" tIns="45720" rIns="91440" bIns="45720" rtlCol="0" anchor="ctr">
+            <a:normAutofit/>
+          </a:bodyPr>
+          <a:lstStyle/>
+          <a:p>
+            <a:pPr marL="0" indent="0" algn="ctr">
+              <a:buNone/>
+            </a:pPr>
+            <a:r>
+              <a:rPr lang="en-US" sz="1900" b="1" dirty="0">
+                <a:solidFill>
+                  <a:srgbClr val="FFFFFF"/>
+                </a:solidFill>
+                <a:latin typeface="Arial"/>
+                <a:cs typeface="Arial"/>
+              </a:rPr>
+              <a:t>Bao nhiêu? (P + O)</a:t>
+            </a:r>
+          </a:p>
+        </p:txBody>
+      </p:sp>
+      <p:sp>
+        <p:nvSpPr>
+          <p:cNvPr id="75" name="CardBody"/>
+          <p:cNvSpPr/>
+          <p:nvPr/>
+        </p:nvSpPr>
+        <p:spPr>
+          <a:xfrm>
+            <a:off x="8108932" y="2599815"/>
+            <a:ext cx="3625866" cy="2050555"/>
+          </a:xfrm>
+          <a:prstGeom prst="rect">
+            <a:avLst/>
+          </a:prstGeom>
+          <a:solidFill>
+            <a:srgbClr val="EAF2F5"/>
+          </a:solidFill>
+          <a:ln>
+            <a:noFill/>
+          </a:ln>
+        </p:spPr>
+        <p:txBody>
+          <a:bodyPr wrap="square" lIns="137160" tIns="91440" rIns="137160" bIns="91440" rtlCol="0" anchor="ctr">
+            <a:normAutofit/>
+          </a:bodyPr>
+          <a:lstStyle/>
           <a:p>
             <a:pPr marL="0" indent="0" algn="ctr">
               <a:lnSpc>
@@ -43107,408 +43400,14 @@
               <a:buNone/>
             </a:pPr>
             <a:r>
-              <a:rPr lang="en-US" sz="1400" dirty="0">
+              <a:rPr lang="en-US" sz="1750" dirty="0">
                 <a:solidFill>
                   <a:srgbClr val="000000"/>
                 </a:solidFill>
                 <a:latin typeface="Arial"/>
                 <a:cs typeface="Arial"/>
               </a:rPr>
-              <a:t>C: tiêu chuẩn tham chiếu</a:t>
-            </a:r>
-          </a:p>
-          <a:p>
-            <a:pPr marL="0" indent="0" algn="ctr">
-              <a:lnSpc>
-                <a:spcPct val="104000"/>
-              </a:lnSpc>
-              <a:spcBef>
-                <a:spcPts val="400"/>
-              </a:spcBef>
-              <a:buNone/>
-            </a:pPr>
-            <a:r>
-              <a:rPr lang="en-US" sz="1400" dirty="0">
-                <a:solidFill>
-                  <a:srgbClr val="000000"/>
-                </a:solidFill>
-                <a:latin typeface="Arial"/>
-                <a:cs typeface="Arial"/>
-              </a:rPr>
-              <a:t>O: độ chính xác</a:t>
-            </a:r>
-          </a:p>
-          <a:p>
-            <a:pPr marL="0" indent="0" algn="ctr">
-              <a:lnSpc>
-                <a:spcPct val="104000"/>
-              </a:lnSpc>
-              <a:spcBef>
-                <a:spcPts val="400"/>
-              </a:spcBef>
-              <a:buNone/>
-            </a:pPr>
-            <a:r>
-              <a:rPr lang="en-US" sz="1400" i="1" dirty="0">
-                <a:solidFill>
-                  <a:srgbClr val="000000"/>
-                </a:solidFill>
-                <a:latin typeface="Arial"/>
-                <a:cs typeface="Arial"/>
-              </a:rPr>
-              <a:t>Ví dụ: ở người nghi nhiễm khuẩn huyết tại khoa cấp cứu, qSOFA chính xác đến đâu so với Sepsis-3?</a:t>
-            </a:r>
-          </a:p>
-        </p:txBody>
-      </p:sp>
-      <p:sp>
-        <p:nvSpPr>
-          <p:cNvPr id="72" name="CardHead"/>
-          <p:cNvSpPr/>
-          <p:nvPr/>
-        </p:nvSpPr>
-        <p:spPr>
-          <a:xfrm>
-            <a:off x="4283066" y="1561706"/>
-            <a:ext cx="3625866" cy="640000"/>
-          </a:xfrm>
-          <a:prstGeom prst="rect">
-            <a:avLst/>
-          </a:prstGeom>
-          <a:solidFill>
-            <a:srgbClr val="0B376C"/>
-          </a:solidFill>
-          <a:ln>
-            <a:noFill/>
-          </a:ln>
-        </p:spPr>
-        <p:txBody>
-          <a:bodyPr wrap="square" lIns="91440" tIns="45720" rIns="91440" bIns="45720" rtlCol="0" anchor="ctr">
-            <a:normAutofit/>
-          </a:bodyPr>
-          <a:lstStyle/>
-          <a:p>
-            <a:pPr marL="0" indent="0" algn="ctr">
-              <a:buNone/>
-            </a:pPr>
-            <a:r>
-              <a:rPr lang="en-US" sz="1900" b="1" dirty="0">
-                <a:solidFill>
-                  <a:srgbClr val="FFFFFF"/>
-                </a:solidFill>
-                <a:latin typeface="Arial"/>
-                <a:cs typeface="Arial"/>
-              </a:rPr>
-              <a:t>Tiên lượng</a:t>
-            </a:r>
-          </a:p>
-        </p:txBody>
-      </p:sp>
-      <p:sp>
-        <p:nvSpPr>
-          <p:cNvPr id="73" name="CardBody"/>
-          <p:cNvSpPr/>
-          <p:nvPr/>
-        </p:nvSpPr>
-        <p:spPr>
-          <a:xfrm>
-            <a:off x="4283066" y="2201706"/>
-            <a:ext cx="3625866" cy="2364880"/>
-          </a:xfrm>
-          <a:prstGeom prst="rect">
-            <a:avLst/>
-          </a:prstGeom>
-          <a:solidFill>
-            <a:srgbClr val="EAF2F5"/>
-          </a:solidFill>
-          <a:ln>
-            <a:noFill/>
-          </a:ln>
-        </p:spPr>
-        <p:txBody>
-          <a:bodyPr wrap="square" lIns="137160" tIns="91440" rIns="137160" bIns="91440" rtlCol="0" anchor="ctr">
-            <a:normAutofit/>
-          </a:bodyPr>
-          <a:lstStyle/>
-          <a:p>
-            <a:pPr marL="0" indent="0" algn="ctr">
-              <a:lnSpc>
-                <a:spcPct val="104000"/>
-              </a:lnSpc>
-              <a:spcBef>
-                <a:spcPts val="400"/>
-              </a:spcBef>
-              <a:buNone/>
-            </a:pPr>
-            <a:r>
-              <a:rPr lang="en-US" sz="1400" dirty="0">
-                <a:solidFill>
-                  <a:srgbClr val="000000"/>
-                </a:solidFill>
-                <a:latin typeface="Arial"/>
-                <a:cs typeface="Arial"/>
-              </a:rPr>
-              <a:t>P: người bệnh mắc một tình trạng</a:t>
-            </a:r>
-          </a:p>
-          <a:p>
-            <a:pPr marL="0" indent="0" algn="ctr">
-              <a:lnSpc>
-                <a:spcPct val="104000"/>
-              </a:lnSpc>
-              <a:spcBef>
-                <a:spcPts val="400"/>
-              </a:spcBef>
-              <a:buNone/>
-            </a:pPr>
-            <a:r>
-              <a:rPr lang="en-US" sz="1400" dirty="0">
-                <a:solidFill>
-                  <a:srgbClr val="000000"/>
-                </a:solidFill>
-                <a:latin typeface="Arial"/>
-                <a:cs typeface="Arial"/>
-              </a:rPr>
-              <a:t>E: yếu tố nguy cơ</a:t>
-            </a:r>
-          </a:p>
-          <a:p>
-            <a:pPr marL="0" indent="0" algn="ctr">
-              <a:lnSpc>
-                <a:spcPct val="104000"/>
-              </a:lnSpc>
-              <a:spcBef>
-                <a:spcPts val="400"/>
-              </a:spcBef>
-              <a:buNone/>
-            </a:pPr>
-            <a:r>
-              <a:rPr lang="en-US" sz="1400" dirty="0">
-                <a:solidFill>
-                  <a:srgbClr val="000000"/>
-                </a:solidFill>
-                <a:latin typeface="Arial"/>
-                <a:cs typeface="Arial"/>
-              </a:rPr>
-              <a:t>O: điều xảy ra</a:t>
-            </a:r>
-          </a:p>
-          <a:p>
-            <a:pPr marL="0" indent="0" algn="ctr">
-              <a:lnSpc>
-                <a:spcPct val="104000"/>
-              </a:lnSpc>
-              <a:spcBef>
-                <a:spcPts val="400"/>
-              </a:spcBef>
-              <a:buNone/>
-            </a:pPr>
-            <a:r>
-              <a:rPr lang="en-US" sz="1400" dirty="0">
-                <a:solidFill>
-                  <a:srgbClr val="000000"/>
-                </a:solidFill>
-                <a:latin typeface="Arial"/>
-                <a:cs typeface="Arial"/>
-              </a:rPr>
-              <a:t>T: đến khi nào</a:t>
-            </a:r>
-          </a:p>
-          <a:p>
-            <a:pPr marL="0" indent="0" algn="ctr">
-              <a:lnSpc>
-                <a:spcPct val="104000"/>
-              </a:lnSpc>
-              <a:spcBef>
-                <a:spcPts val="400"/>
-              </a:spcBef>
-              <a:buNone/>
-            </a:pPr>
-            <a:r>
-              <a:rPr lang="en-US" sz="1400" i="1" dirty="0">
-                <a:solidFill>
-                  <a:srgbClr val="000000"/>
-                </a:solidFill>
-                <a:latin typeface="Arial"/>
-                <a:cs typeface="Arial"/>
-              </a:rPr>
-              <a:t>Ví dụ: trong sốc nhiễm khuẩn, lactate trên 4 mmol/L lúc nhập viện có liên quan với tử vong đến ngày 28 không?</a:t>
-            </a:r>
-          </a:p>
-        </p:txBody>
-      </p:sp>
-      <p:sp>
-        <p:nvSpPr>
-          <p:cNvPr id="74" name="CardHead"/>
-          <p:cNvSpPr/>
-          <p:nvPr/>
-        </p:nvSpPr>
-        <p:spPr>
-          <a:xfrm>
-            <a:off x="8108932" y="1561706"/>
-            <a:ext cx="3625866" cy="640000"/>
-          </a:xfrm>
-          <a:prstGeom prst="rect">
-            <a:avLst/>
-          </a:prstGeom>
-          <a:solidFill>
-            <a:srgbClr val="5FA39B"/>
-          </a:solidFill>
-          <a:ln>
-            <a:noFill/>
-          </a:ln>
-        </p:spPr>
-        <p:txBody>
-          <a:bodyPr wrap="square" lIns="91440" tIns="45720" rIns="91440" bIns="45720" rtlCol="0" anchor="ctr">
-            <a:normAutofit/>
-          </a:bodyPr>
-          <a:lstStyle/>
-          <a:p>
-            <a:pPr marL="0" indent="0" algn="ctr">
-              <a:buNone/>
-            </a:pPr>
-            <a:r>
-              <a:rPr lang="en-US" sz="1900" b="1" dirty="0">
-                <a:solidFill>
-                  <a:srgbClr val="FFFFFF"/>
-                </a:solidFill>
-                <a:latin typeface="Arial"/>
-                <a:cs typeface="Arial"/>
-              </a:rPr>
-              <a:t>Định tính (SPIDER)</a:t>
-            </a:r>
-          </a:p>
-        </p:txBody>
-      </p:sp>
-      <p:sp>
-        <p:nvSpPr>
-          <p:cNvPr id="75" name="CardBody"/>
-          <p:cNvSpPr/>
-          <p:nvPr/>
-        </p:nvSpPr>
-        <p:spPr>
-          <a:xfrm>
-            <a:off x="8108932" y="2201706"/>
-            <a:ext cx="3625866" cy="2364880"/>
-          </a:xfrm>
-          <a:prstGeom prst="rect">
-            <a:avLst/>
-          </a:prstGeom>
-          <a:solidFill>
-            <a:srgbClr val="EAF2F5"/>
-          </a:solidFill>
-          <a:ln>
-            <a:noFill/>
-          </a:ln>
-        </p:spPr>
-        <p:txBody>
-          <a:bodyPr wrap="square" lIns="137160" tIns="91440" rIns="137160" bIns="91440" rtlCol="0" anchor="ctr">
-            <a:normAutofit/>
-          </a:bodyPr>
-          <a:lstStyle/>
-          <a:p>
-            <a:pPr marL="0" indent="0" algn="ctr">
-              <a:lnSpc>
-                <a:spcPct val="104000"/>
-              </a:lnSpc>
-              <a:spcBef>
-                <a:spcPts val="400"/>
-              </a:spcBef>
-              <a:buNone/>
-            </a:pPr>
-            <a:r>
-              <a:rPr lang="en-US" sz="1400" dirty="0">
-                <a:solidFill>
-                  <a:srgbClr val="000000"/>
-                </a:solidFill>
-                <a:latin typeface="Arial"/>
-                <a:cs typeface="Arial"/>
-              </a:rPr>
-              <a:t>S: Mẫu (Sample)</a:t>
-            </a:r>
-          </a:p>
-          <a:p>
-            <a:pPr marL="0" indent="0" algn="ctr">
-              <a:lnSpc>
-                <a:spcPct val="104000"/>
-              </a:lnSpc>
-              <a:spcBef>
-                <a:spcPts val="400"/>
-              </a:spcBef>
-              <a:buNone/>
-            </a:pPr>
-            <a:r>
-              <a:rPr lang="en-US" sz="1400" dirty="0">
-                <a:solidFill>
-                  <a:srgbClr val="000000"/>
-                </a:solidFill>
-                <a:latin typeface="Arial"/>
-                <a:cs typeface="Arial"/>
-              </a:rPr>
-              <a:t>PI: Hiện tượng quan tâm</a:t>
-            </a:r>
-          </a:p>
-          <a:p>
-            <a:pPr marL="0" indent="0" algn="ctr">
-              <a:lnSpc>
-                <a:spcPct val="104000"/>
-              </a:lnSpc>
-              <a:spcBef>
-                <a:spcPts val="400"/>
-              </a:spcBef>
-              <a:buNone/>
-            </a:pPr>
-            <a:r>
-              <a:rPr lang="en-US" sz="1400" dirty="0">
-                <a:solidFill>
-                  <a:srgbClr val="000000"/>
-                </a:solidFill>
-                <a:latin typeface="Arial"/>
-                <a:cs typeface="Arial"/>
-              </a:rPr>
-              <a:t>D: Thiết kế (Design)</a:t>
-            </a:r>
-          </a:p>
-          <a:p>
-            <a:pPr marL="0" indent="0" algn="ctr">
-              <a:lnSpc>
-                <a:spcPct val="104000"/>
-              </a:lnSpc>
-              <a:spcBef>
-                <a:spcPts val="400"/>
-              </a:spcBef>
-              <a:buNone/>
-            </a:pPr>
-            <a:r>
-              <a:rPr lang="en-US" sz="1400" dirty="0">
-                <a:solidFill>
-                  <a:srgbClr val="000000"/>
-                </a:solidFill>
-                <a:latin typeface="Arial"/>
-                <a:cs typeface="Arial"/>
-              </a:rPr>
-              <a:t>E: Đánh giá, R: Loại nghiên cứu</a:t>
-            </a:r>
-          </a:p>
-          <a:p>
-            <a:pPr marL="0" indent="0" algn="ctr">
-              <a:lnSpc>
-                <a:spcPct val="104000"/>
-              </a:lnSpc>
-              <a:spcBef>
-                <a:spcPts val="400"/>
-              </a:spcBef>
-              <a:buNone/>
-            </a:pPr>
-            <a:r>
-              <a:rPr lang="en-US" sz="1400" i="1" dirty="0">
-                <a:solidFill>
-                  <a:srgbClr val="000000"/>
-                </a:solidFill>
-                <a:latin typeface="Arial"/>
-                <a:cs typeface="Arial"/>
-              </a:rPr>
-              <a:t>Ví dụ: điều dưỡng ICU trải nghiệm việc ngừng dịch truyền như thế nào, qua phỏng vấn?</a:t>
+              <a:t>Ở người từ 65 tuổi trở lên sau mổ gãy cổ xương đùi, mê sảng xảy ra ở bao nhiêu người trong 7 ngày đầu?</a:t>
             </a:r>
           </a:p>
         </p:txBody>
@@ -43563,7 +43462,7 @@
                 <a:latin typeface="Arial"/>
                 <a:cs typeface="Arial"/>
               </a:rPr>
-              <a:t>Chữ cái thay đổi, nhưng nguyên tắc giữ nguyên: nói rõ ràng.</a:t>
+              <a:t>Mỗi câu hỏi nêu rõ người bệnh, phép so sánh (nếu có), kết cục và thời gian.</a:t>
             </a:r>
           </a:p>
         </p:txBody>
@@ -43731,7 +43630,7 @@
                 <a:latin typeface="Arial"/>
                 <a:cs typeface="Arial"/>
               </a:rPr>
-              <a:t>Luyện thêm: trượt tiêu chí FINER nào?</a:t>
+              <a:t>PICO cho các loại câu hỏi khác</a:t>
             </a:r>
           </a:p>
         </p:txBody>
@@ -43766,181 +43665,542 @@
       </p:sp>
       <p:sp>
         <p:nvSpPr>
-          <p:cNvPr id="50" name="Banner"/>
-          <p:cNvSpPr/>
-          <p:nvPr/>
-        </p:nvSpPr>
-        <p:spPr>
-          <a:xfrm>
-            <a:off x="457200" y="1120000"/>
-            <a:ext cx="11277600" cy="470000"/>
+          <p:cNvPr id="70" name="CardHead"/>
+          <p:cNvSpPr/>
+          <p:nvPr/>
+        </p:nvSpPr>
+        <p:spPr>
+          <a:xfrm>
+            <a:off x="457200" y="1561706"/>
+            <a:ext cx="3625866" cy="640000"/>
           </a:xfrm>
           <a:prstGeom prst="rect">
             <a:avLst/>
           </a:prstGeom>
           <a:solidFill>
-            <a:srgbClr val="6C3483"/>
+            <a:srgbClr val="0D7377"/>
           </a:solidFill>
           <a:ln>
             <a:noFill/>
           </a:ln>
         </p:spPr>
         <p:txBody>
-          <a:bodyPr wrap="square" lIns="182880" tIns="45720" rIns="182880" bIns="45720" rtlCol="0" anchor="ctr">
+          <a:bodyPr wrap="square" lIns="91440" tIns="45720" rIns="91440" bIns="45720" rtlCol="0" anchor="ctr">
             <a:normAutofit/>
           </a:bodyPr>
           <a:lstStyle/>
           <a:p>
-            <a:pPr marL="0" indent="0" algn="l">
-              <a:buNone/>
-            </a:pPr>
-            <a:r>
-              <a:rPr lang="en-US" sz="1500" b="1" dirty="0">
+            <a:pPr marL="0" indent="0" algn="ctr">
+              <a:buNone/>
+            </a:pPr>
+            <a:r>
+              <a:rPr lang="en-US" sz="1900" b="1" dirty="0">
                 <a:solidFill>
                   <a:srgbClr val="FFFFFF"/>
                 </a:solidFill>
                 <a:latin typeface="Arial"/>
                 <a:cs typeface="Arial"/>
               </a:rPr>
-              <a:t>CÂU HỎI NHANH   |   4 phút</a:t>
-            </a:r>
-          </a:p>
-        </p:txBody>
-      </p:sp>
-      <p:sp>
-        <p:nvSpPr>
-          <p:cNvPr id="51" name="Steps"/>
-          <p:cNvSpPr txBox="1"/>
-          <p:nvPr/>
-        </p:nvSpPr>
-        <p:spPr>
-          <a:xfrm>
-            <a:off x="457200" y="1720000"/>
-            <a:ext cx="11277600" cy="3510000"/>
+              <a:t>Chẩn đoán</a:t>
+            </a:r>
+          </a:p>
+        </p:txBody>
+      </p:sp>
+      <p:sp>
+        <p:nvSpPr>
+          <p:cNvPr id="71" name="CardBody"/>
+          <p:cNvSpPr/>
+          <p:nvPr/>
+        </p:nvSpPr>
+        <p:spPr>
+          <a:xfrm>
+            <a:off x="457200" y="2201706"/>
+            <a:ext cx="3625866" cy="2364880"/>
           </a:xfrm>
           <a:prstGeom prst="rect">
             <a:avLst/>
           </a:prstGeom>
-          <a:noFill/>
-          <a:ln>
-            <a:noFill/>
-          </a:ln>
-        </p:spPr>
-        <p:txBody>
-          <a:bodyPr wrap="square" lIns="91440" tIns="45720" rIns="91440" bIns="45720" rtlCol="0" anchor="t"/>
-          <a:lstStyle/>
-          <a:p>
-            <a:pPr marL="380000" indent="-380000" algn="l">
+          <a:solidFill>
+            <a:srgbClr val="EAF2F5"/>
+          </a:solidFill>
+          <a:ln>
+            <a:noFill/>
+          </a:ln>
+        </p:spPr>
+        <p:txBody>
+          <a:bodyPr wrap="square" lIns="137160" tIns="91440" rIns="137160" bIns="91440" rtlCol="0" anchor="ctr">
+            <a:normAutofit/>
+          </a:bodyPr>
+          <a:lstStyle/>
+          <a:p>
+            <a:pPr marL="0" indent="0" algn="ctr">
               <a:lnSpc>
                 <a:spcPct val="104000"/>
               </a:lnSpc>
               <a:spcBef>
-                <a:spcPts val="450"/>
+                <a:spcPts val="400"/>
               </a:spcBef>
-              <a:buClr>
-                <a:srgbClr val="6C3483"/>
-              </a:buClr>
-              <a:buFont typeface="Arial"/>
-              <a:buChar char="•"/>
-            </a:pPr>
-            <a:r>
-              <a:rPr lang="en-US" sz="1650" dirty="0">
+              <a:buNone/>
+            </a:pPr>
+            <a:r>
+              <a:rPr lang="en-US" sz="1400" dirty="0">
                 <a:solidFill>
                   <a:srgbClr val="000000"/>
                 </a:solidFill>
                 <a:latin typeface="Arial"/>
                 <a:cs typeface="Arial"/>
               </a:rPr>
-              <a:t>Mọi người lớn nằm viện trong cả nước: vitamin D có giảm tử vong trong 10 năm?</a:t>
-            </a:r>
-          </a:p>
-          <a:p>
-            <a:pPr marL="380000" indent="-380000" algn="l">
+              <a:t>P: người được xét nghiệm</a:t>
+            </a:r>
+          </a:p>
+          <a:p>
+            <a:pPr marL="0" indent="0" algn="ctr">
               <a:lnSpc>
                 <a:spcPct val="104000"/>
               </a:lnSpc>
               <a:spcBef>
-                <a:spcPts val="450"/>
+                <a:spcPts val="400"/>
               </a:spcBef>
-              <a:buClr>
-                <a:srgbClr val="6C3483"/>
-              </a:buClr>
-              <a:buFont typeface="Arial"/>
-              <a:buChar char="•"/>
-            </a:pPr>
-            <a:r>
-              <a:rPr lang="en-US" sz="1650" dirty="0">
+              <a:buNone/>
+            </a:pPr>
+            <a:r>
+              <a:rPr lang="en-US" sz="1400" dirty="0">
                 <a:solidFill>
                   <a:srgbClr val="000000"/>
                 </a:solidFill>
                 <a:latin typeface="Arial"/>
                 <a:cs typeface="Arial"/>
               </a:rPr>
-              <a:t>Sốc nhiễm khuẩn: hoãn kháng sinh 24 giờ có giảm kháng thuốc?</a:t>
-            </a:r>
-          </a:p>
-          <a:p>
-            <a:pPr marL="380000" indent="-380000" algn="l">
+              <a:t>I: xét nghiệm mới</a:t>
+            </a:r>
+          </a:p>
+          <a:p>
+            <a:pPr marL="0" indent="0" algn="ctr">
               <a:lnSpc>
                 <a:spcPct val="104000"/>
               </a:lnSpc>
               <a:spcBef>
-                <a:spcPts val="450"/>
+                <a:spcPts val="400"/>
               </a:spcBef>
-              <a:buClr>
-                <a:srgbClr val="6C3483"/>
-              </a:buClr>
-              <a:buFont typeface="Arial"/>
-              <a:buChar char="•"/>
-            </a:pPr>
-            <a:r>
-              <a:rPr lang="en-US" sz="1650" dirty="0">
+              <a:buNone/>
+            </a:pPr>
+            <a:r>
+              <a:rPr lang="en-US" sz="1400" dirty="0">
                 <a:solidFill>
                   <a:srgbClr val="000000"/>
                 </a:solidFill>
                 <a:latin typeface="Arial"/>
                 <a:cs typeface="Arial"/>
               </a:rPr>
-              <a:t>Điều dưỡng ICU có rửa tay không? (đã audit hằng tháng suốt 5 năm)</a:t>
-            </a:r>
-          </a:p>
-          <a:p>
-            <a:pPr marL="380000" indent="-380000" algn="l">
+              <a:t>C: tiêu chuẩn tham chiếu</a:t>
+            </a:r>
+          </a:p>
+          <a:p>
+            <a:pPr marL="0" indent="0" algn="ctr">
               <a:lnSpc>
                 <a:spcPct val="104000"/>
               </a:lnSpc>
               <a:spcBef>
-                <a:spcPts val="450"/>
+                <a:spcPts val="400"/>
               </a:spcBef>
-              <a:buClr>
-                <a:srgbClr val="6C3483"/>
-              </a:buClr>
-              <a:buFont typeface="Arial"/>
-              <a:buChar char="•"/>
-            </a:pPr>
-            <a:r>
-              <a:rPr lang="en-US" sz="1650" dirty="0">
+              <a:buNone/>
+            </a:pPr>
+            <a:r>
+              <a:rPr lang="en-US" sz="1400" dirty="0">
                 <a:solidFill>
                   <a:srgbClr val="000000"/>
                 </a:solidFill>
                 <a:latin typeface="Arial"/>
                 <a:cs typeface="Arial"/>
               </a:rPr>
-              <a:t>Viêm phổi: màu của tờ y lệnh có ảnh hưởng tử vong 28 ngày?</a:t>
-            </a:r>
-          </a:p>
-        </p:txBody>
-      </p:sp>
-      <p:sp>
-        <p:nvSpPr>
-          <p:cNvPr id="53" name="Deliverable"/>
-          <p:cNvSpPr/>
-          <p:nvPr/>
-        </p:nvSpPr>
-        <p:spPr>
-          <a:xfrm>
-            <a:off x="457200" y="5350000"/>
-            <a:ext cx="11277600" cy="600000"/>
+              <a:t>O: độ chính xác</a:t>
+            </a:r>
+          </a:p>
+          <a:p>
+            <a:pPr marL="0" indent="0" algn="ctr">
+              <a:lnSpc>
+                <a:spcPct val="104000"/>
+              </a:lnSpc>
+              <a:spcBef>
+                <a:spcPts val="400"/>
+              </a:spcBef>
+              <a:buNone/>
+            </a:pPr>
+            <a:r>
+              <a:rPr lang="en-US" sz="1400" i="1" dirty="0">
+                <a:solidFill>
+                  <a:srgbClr val="000000"/>
+                </a:solidFill>
+                <a:latin typeface="Arial"/>
+                <a:cs typeface="Arial"/>
+              </a:rPr>
+              <a:t>Ví dụ: ở người nghi nhiễm khuẩn huyết tại khoa cấp cứu, qSOFA chính xác đến đâu so với Sepsis-3?</a:t>
+            </a:r>
+          </a:p>
+        </p:txBody>
+      </p:sp>
+      <p:sp>
+        <p:nvSpPr>
+          <p:cNvPr id="72" name="CardHead"/>
+          <p:cNvSpPr/>
+          <p:nvPr/>
+        </p:nvSpPr>
+        <p:spPr>
+          <a:xfrm>
+            <a:off x="4283066" y="1561706"/>
+            <a:ext cx="3625866" cy="640000"/>
+          </a:xfrm>
+          <a:prstGeom prst="rect">
+            <a:avLst/>
+          </a:prstGeom>
+          <a:solidFill>
+            <a:srgbClr val="0B376C"/>
+          </a:solidFill>
+          <a:ln>
+            <a:noFill/>
+          </a:ln>
+        </p:spPr>
+        <p:txBody>
+          <a:bodyPr wrap="square" lIns="91440" tIns="45720" rIns="91440" bIns="45720" rtlCol="0" anchor="ctr">
+            <a:normAutofit/>
+          </a:bodyPr>
+          <a:lstStyle/>
+          <a:p>
+            <a:pPr marL="0" indent="0" algn="ctr">
+              <a:buNone/>
+            </a:pPr>
+            <a:r>
+              <a:rPr lang="en-US" sz="1900" b="1" dirty="0">
+                <a:solidFill>
+                  <a:srgbClr val="FFFFFF"/>
+                </a:solidFill>
+                <a:latin typeface="Arial"/>
+                <a:cs typeface="Arial"/>
+              </a:rPr>
+              <a:t>Tiên lượng</a:t>
+            </a:r>
+          </a:p>
+        </p:txBody>
+      </p:sp>
+      <p:sp>
+        <p:nvSpPr>
+          <p:cNvPr id="73" name="CardBody"/>
+          <p:cNvSpPr/>
+          <p:nvPr/>
+        </p:nvSpPr>
+        <p:spPr>
+          <a:xfrm>
+            <a:off x="4283066" y="2201706"/>
+            <a:ext cx="3625866" cy="2364880"/>
+          </a:xfrm>
+          <a:prstGeom prst="rect">
+            <a:avLst/>
+          </a:prstGeom>
+          <a:solidFill>
+            <a:srgbClr val="EAF2F5"/>
+          </a:solidFill>
+          <a:ln>
+            <a:noFill/>
+          </a:ln>
+        </p:spPr>
+        <p:txBody>
+          <a:bodyPr wrap="square" lIns="137160" tIns="91440" rIns="137160" bIns="91440" rtlCol="0" anchor="ctr">
+            <a:normAutofit/>
+          </a:bodyPr>
+          <a:lstStyle/>
+          <a:p>
+            <a:pPr marL="0" indent="0" algn="ctr">
+              <a:lnSpc>
+                <a:spcPct val="104000"/>
+              </a:lnSpc>
+              <a:spcBef>
+                <a:spcPts val="400"/>
+              </a:spcBef>
+              <a:buNone/>
+            </a:pPr>
+            <a:r>
+              <a:rPr lang="en-US" sz="1400" dirty="0">
+                <a:solidFill>
+                  <a:srgbClr val="000000"/>
+                </a:solidFill>
+                <a:latin typeface="Arial"/>
+                <a:cs typeface="Arial"/>
+              </a:rPr>
+              <a:t>P: người bệnh mắc một tình trạng</a:t>
+            </a:r>
+          </a:p>
+          <a:p>
+            <a:pPr marL="0" indent="0" algn="ctr">
+              <a:lnSpc>
+                <a:spcPct val="104000"/>
+              </a:lnSpc>
+              <a:spcBef>
+                <a:spcPts val="400"/>
+              </a:spcBef>
+              <a:buNone/>
+            </a:pPr>
+            <a:r>
+              <a:rPr lang="en-US" sz="1400" dirty="0">
+                <a:solidFill>
+                  <a:srgbClr val="000000"/>
+                </a:solidFill>
+                <a:latin typeface="Arial"/>
+                <a:cs typeface="Arial"/>
+              </a:rPr>
+              <a:t>E: yếu tố nguy cơ</a:t>
+            </a:r>
+          </a:p>
+          <a:p>
+            <a:pPr marL="0" indent="0" algn="ctr">
+              <a:lnSpc>
+                <a:spcPct val="104000"/>
+              </a:lnSpc>
+              <a:spcBef>
+                <a:spcPts val="400"/>
+              </a:spcBef>
+              <a:buNone/>
+            </a:pPr>
+            <a:r>
+              <a:rPr lang="en-US" sz="1400" dirty="0">
+                <a:solidFill>
+                  <a:srgbClr val="000000"/>
+                </a:solidFill>
+                <a:latin typeface="Arial"/>
+                <a:cs typeface="Arial"/>
+              </a:rPr>
+              <a:t>O: điều xảy ra</a:t>
+            </a:r>
+          </a:p>
+          <a:p>
+            <a:pPr marL="0" indent="0" algn="ctr">
+              <a:lnSpc>
+                <a:spcPct val="104000"/>
+              </a:lnSpc>
+              <a:spcBef>
+                <a:spcPts val="400"/>
+              </a:spcBef>
+              <a:buNone/>
+            </a:pPr>
+            <a:r>
+              <a:rPr lang="en-US" sz="1400" dirty="0">
+                <a:solidFill>
+                  <a:srgbClr val="000000"/>
+                </a:solidFill>
+                <a:latin typeface="Arial"/>
+                <a:cs typeface="Arial"/>
+              </a:rPr>
+              <a:t>T: đến khi nào</a:t>
+            </a:r>
+          </a:p>
+          <a:p>
+            <a:pPr marL="0" indent="0" algn="ctr">
+              <a:lnSpc>
+                <a:spcPct val="104000"/>
+              </a:lnSpc>
+              <a:spcBef>
+                <a:spcPts val="400"/>
+              </a:spcBef>
+              <a:buNone/>
+            </a:pPr>
+            <a:r>
+              <a:rPr lang="en-US" sz="1400" i="1" dirty="0">
+                <a:solidFill>
+                  <a:srgbClr val="000000"/>
+                </a:solidFill>
+                <a:latin typeface="Arial"/>
+                <a:cs typeface="Arial"/>
+              </a:rPr>
+              <a:t>Ví dụ: trong sốc nhiễm khuẩn, lactate trên 4 mmol/L lúc nhập viện có liên quan với tử vong đến ngày 28 không?</a:t>
+            </a:r>
+          </a:p>
+        </p:txBody>
+      </p:sp>
+      <p:sp>
+        <p:nvSpPr>
+          <p:cNvPr id="74" name="CardHead"/>
+          <p:cNvSpPr/>
+          <p:nvPr/>
+        </p:nvSpPr>
+        <p:spPr>
+          <a:xfrm>
+            <a:off x="8108932" y="1561706"/>
+            <a:ext cx="3625866" cy="640000"/>
+          </a:xfrm>
+          <a:prstGeom prst="rect">
+            <a:avLst/>
+          </a:prstGeom>
+          <a:solidFill>
+            <a:srgbClr val="5FA39B"/>
+          </a:solidFill>
+          <a:ln>
+            <a:noFill/>
+          </a:ln>
+        </p:spPr>
+        <p:txBody>
+          <a:bodyPr wrap="square" lIns="91440" tIns="45720" rIns="91440" bIns="45720" rtlCol="0" anchor="ctr">
+            <a:normAutofit/>
+          </a:bodyPr>
+          <a:lstStyle/>
+          <a:p>
+            <a:pPr marL="0" indent="0" algn="ctr">
+              <a:buNone/>
+            </a:pPr>
+            <a:r>
+              <a:rPr lang="en-US" sz="1900" b="1" dirty="0">
+                <a:solidFill>
+                  <a:srgbClr val="FFFFFF"/>
+                </a:solidFill>
+                <a:latin typeface="Arial"/>
+                <a:cs typeface="Arial"/>
+              </a:rPr>
+              <a:t>Định tính (SPIDER)</a:t>
+            </a:r>
+          </a:p>
+        </p:txBody>
+      </p:sp>
+      <p:sp>
+        <p:nvSpPr>
+          <p:cNvPr id="75" name="CardBody"/>
+          <p:cNvSpPr/>
+          <p:nvPr/>
+        </p:nvSpPr>
+        <p:spPr>
+          <a:xfrm>
+            <a:off x="8108932" y="2201706"/>
+            <a:ext cx="3625866" cy="2364880"/>
+          </a:xfrm>
+          <a:prstGeom prst="rect">
+            <a:avLst/>
+          </a:prstGeom>
+          <a:solidFill>
+            <a:srgbClr val="EAF2F5"/>
+          </a:solidFill>
+          <a:ln>
+            <a:noFill/>
+          </a:ln>
+        </p:spPr>
+        <p:txBody>
+          <a:bodyPr wrap="square" lIns="137160" tIns="91440" rIns="137160" bIns="91440" rtlCol="0" anchor="ctr">
+            <a:normAutofit/>
+          </a:bodyPr>
+          <a:lstStyle/>
+          <a:p>
+            <a:pPr marL="0" indent="0" algn="ctr">
+              <a:lnSpc>
+                <a:spcPct val="104000"/>
+              </a:lnSpc>
+              <a:spcBef>
+                <a:spcPts val="400"/>
+              </a:spcBef>
+              <a:buNone/>
+            </a:pPr>
+            <a:r>
+              <a:rPr lang="en-US" sz="1400" dirty="0">
+                <a:solidFill>
+                  <a:srgbClr val="000000"/>
+                </a:solidFill>
+                <a:latin typeface="Arial"/>
+                <a:cs typeface="Arial"/>
+              </a:rPr>
+              <a:t>S: Mẫu (Sample)</a:t>
+            </a:r>
+          </a:p>
+          <a:p>
+            <a:pPr marL="0" indent="0" algn="ctr">
+              <a:lnSpc>
+                <a:spcPct val="104000"/>
+              </a:lnSpc>
+              <a:spcBef>
+                <a:spcPts val="400"/>
+              </a:spcBef>
+              <a:buNone/>
+            </a:pPr>
+            <a:r>
+              <a:rPr lang="en-US" sz="1400" dirty="0">
+                <a:solidFill>
+                  <a:srgbClr val="000000"/>
+                </a:solidFill>
+                <a:latin typeface="Arial"/>
+                <a:cs typeface="Arial"/>
+              </a:rPr>
+              <a:t>PI: Hiện tượng quan tâm</a:t>
+            </a:r>
+          </a:p>
+          <a:p>
+            <a:pPr marL="0" indent="0" algn="ctr">
+              <a:lnSpc>
+                <a:spcPct val="104000"/>
+              </a:lnSpc>
+              <a:spcBef>
+                <a:spcPts val="400"/>
+              </a:spcBef>
+              <a:buNone/>
+            </a:pPr>
+            <a:r>
+              <a:rPr lang="en-US" sz="1400" dirty="0">
+                <a:solidFill>
+                  <a:srgbClr val="000000"/>
+                </a:solidFill>
+                <a:latin typeface="Arial"/>
+                <a:cs typeface="Arial"/>
+              </a:rPr>
+              <a:t>D: Thiết kế (Design)</a:t>
+            </a:r>
+          </a:p>
+          <a:p>
+            <a:pPr marL="0" indent="0" algn="ctr">
+              <a:lnSpc>
+                <a:spcPct val="104000"/>
+              </a:lnSpc>
+              <a:spcBef>
+                <a:spcPts val="400"/>
+              </a:spcBef>
+              <a:buNone/>
+            </a:pPr>
+            <a:r>
+              <a:rPr lang="en-US" sz="1400" dirty="0">
+                <a:solidFill>
+                  <a:srgbClr val="000000"/>
+                </a:solidFill>
+                <a:latin typeface="Arial"/>
+                <a:cs typeface="Arial"/>
+              </a:rPr>
+              <a:t>E: Đánh giá, R: Loại nghiên cứu</a:t>
+            </a:r>
+          </a:p>
+          <a:p>
+            <a:pPr marL="0" indent="0" algn="ctr">
+              <a:lnSpc>
+                <a:spcPct val="104000"/>
+              </a:lnSpc>
+              <a:spcBef>
+                <a:spcPts val="400"/>
+              </a:spcBef>
+              <a:buNone/>
+            </a:pPr>
+            <a:r>
+              <a:rPr lang="en-US" sz="1400" i="1" dirty="0">
+                <a:solidFill>
+                  <a:srgbClr val="000000"/>
+                </a:solidFill>
+                <a:latin typeface="Arial"/>
+                <a:cs typeface="Arial"/>
+              </a:rPr>
+              <a:t>Ví dụ: điều dưỡng ICU trải nghiệm việc ngừng dịch truyền như thế nào, qua phỏng vấn?</a:t>
+            </a:r>
+          </a:p>
+        </p:txBody>
+      </p:sp>
+      <p:sp>
+        <p:nvSpPr>
+          <p:cNvPr id="60" name="Takeaway"/>
+          <p:cNvSpPr/>
+          <p:nvPr/>
+        </p:nvSpPr>
+        <p:spPr>
+          <a:xfrm>
+            <a:off x="457200" y="5390000"/>
+            <a:ext cx="11277600" cy="560000"/>
           </a:xfrm>
           <a:prstGeom prst="roundRect">
             <a:avLst>
@@ -43948,12 +44208,10 @@
             </a:avLst>
           </a:prstGeom>
           <a:solidFill>
-            <a:srgbClr val="FFFFFF"/>
+            <a:srgbClr val="0D7377"/>
           </a:solidFill>
-          <a:ln w="15875">
-            <a:solidFill>
-              <a:srgbClr val="6C3483"/>
-            </a:solidFill>
+          <a:ln>
+            <a:noFill/>
           </a:ln>
         </p:spPr>
         <p:txBody>
@@ -43968,22 +44226,22 @@
             <a:r>
               <a:rPr lang="en-US" sz="1300" b="1" dirty="0">
                 <a:solidFill>
-                  <a:srgbClr val="6C3483"/>
-                </a:solidFill>
-                <a:latin typeface="Arial"/>
-                <a:cs typeface="Arial"/>
-              </a:rPr>
-              <a:t>SẢN PHẨM   </a:t>
-            </a:r>
-            <a:r>
-              <a:rPr lang="en-US" sz="1500" dirty="0">
-                <a:solidFill>
-                  <a:srgbClr val="000000"/>
-                </a:solidFill>
-                <a:latin typeface="Arial"/>
-                <a:cs typeface="Arial"/>
-              </a:rPr>
-              <a:t>Mỗi câu một chữ cái, trong bình chọn</a:t>
+                  <a:srgbClr val="FFFFFF"/>
+                </a:solidFill>
+                <a:latin typeface="Arial"/>
+                <a:cs typeface="Arial"/>
+              </a:rPr>
+              <a:t>THÔNG ĐIỆP CHÍNH   </a:t>
+            </a:r>
+            <a:r>
+              <a:rPr lang="en-US" sz="1550" dirty="0">
+                <a:solidFill>
+                  <a:srgbClr val="FFFFFF"/>
+                </a:solidFill>
+                <a:latin typeface="Arial"/>
+                <a:cs typeface="Arial"/>
+              </a:rPr>
+              <a:t>Chữ cái thay đổi, nhưng nguyên tắc giữ nguyên: nói rõ ràng.</a:t>
             </a:r>
           </a:p>
         </p:txBody>
@@ -44151,7 +44409,7 @@
                 <a:latin typeface="Arial"/>
                 <a:cs typeface="Arial"/>
               </a:rPr>
-              <a:t>Mơ hồ và trả lời được: thêm một ví dụ tại khoa</a:t>
+              <a:t>Luyện thêm: trượt tiêu chí FINER nào?</a:t>
             </a:r>
           </a:p>
         </p:txBody>
@@ -44186,366 +44444,181 @@
       </p:sp>
       <p:sp>
         <p:nvSpPr>
-          <p:cNvPr id="70" name="CardHead"/>
-          <p:cNvSpPr/>
-          <p:nvPr/>
-        </p:nvSpPr>
-        <p:spPr>
-          <a:xfrm>
-            <a:off x="457200" y="1535249"/>
-            <a:ext cx="5538800" cy="640000"/>
+          <p:cNvPr id="50" name="Banner"/>
+          <p:cNvSpPr/>
+          <p:nvPr/>
+        </p:nvSpPr>
+        <p:spPr>
+          <a:xfrm>
+            <a:off x="457200" y="1120000"/>
+            <a:ext cx="11277600" cy="470000"/>
           </a:xfrm>
           <a:prstGeom prst="rect">
             <a:avLst/>
           </a:prstGeom>
           <a:solidFill>
-            <a:srgbClr val="B23B2E"/>
+            <a:srgbClr val="6C3483"/>
           </a:solidFill>
           <a:ln>
             <a:noFill/>
           </a:ln>
         </p:spPr>
         <p:txBody>
-          <a:bodyPr wrap="square" lIns="91440" tIns="45720" rIns="91440" bIns="45720" rtlCol="0" anchor="ctr">
+          <a:bodyPr wrap="square" lIns="182880" tIns="45720" rIns="182880" bIns="45720" rtlCol="0" anchor="ctr">
             <a:normAutofit/>
           </a:bodyPr>
           <a:lstStyle/>
           <a:p>
-            <a:pPr marL="0" indent="0" algn="ctr">
-              <a:buNone/>
-            </a:pPr>
-            <a:r>
-              <a:rPr lang="en-US" sz="1900" b="1" dirty="0">
+            <a:pPr marL="0" indent="0" algn="l">
+              <a:buNone/>
+            </a:pPr>
+            <a:r>
+              <a:rPr lang="en-US" sz="1500" b="1" dirty="0">
                 <a:solidFill>
                   <a:srgbClr val="FFFFFF"/>
                 </a:solidFill>
                 <a:latin typeface="Arial"/>
                 <a:cs typeface="Arial"/>
               </a:rPr>
-              <a:t>Mơ hồ</a:t>
-            </a:r>
-          </a:p>
-        </p:txBody>
-      </p:sp>
-      <p:sp>
-        <p:nvSpPr>
-          <p:cNvPr id="71" name="CardBody"/>
-          <p:cNvSpPr/>
-          <p:nvPr/>
-        </p:nvSpPr>
-        <p:spPr>
-          <a:xfrm>
-            <a:off x="457200" y="2175249"/>
-            <a:ext cx="5538800" cy="2444253"/>
+              <a:t>CÂU HỎI NHANH   |   4 phút</a:t>
+            </a:r>
+          </a:p>
+        </p:txBody>
+      </p:sp>
+      <p:sp>
+        <p:nvSpPr>
+          <p:cNvPr id="51" name="Steps"/>
+          <p:cNvSpPr txBox="1"/>
+          <p:nvPr/>
+        </p:nvSpPr>
+        <p:spPr>
+          <a:xfrm>
+            <a:off x="457200" y="1720000"/>
+            <a:ext cx="11277600" cy="3510000"/>
           </a:xfrm>
           <a:prstGeom prst="rect">
             <a:avLst/>
           </a:prstGeom>
-          <a:solidFill>
-            <a:srgbClr val="EAF2F5"/>
-          </a:solidFill>
-          <a:ln>
-            <a:noFill/>
-          </a:ln>
-        </p:spPr>
-        <p:txBody>
-          <a:bodyPr wrap="square" lIns="137160" tIns="91440" rIns="137160" bIns="91440" rtlCol="0" anchor="ctr">
-            <a:normAutofit/>
-          </a:bodyPr>
-          <a:lstStyle/>
-          <a:p>
-            <a:pPr marL="0" indent="0" algn="ctr">
+          <a:noFill/>
+          <a:ln>
+            <a:noFill/>
+          </a:ln>
+        </p:spPr>
+        <p:txBody>
+          <a:bodyPr wrap="square" lIns="91440" tIns="45720" rIns="91440" bIns="45720" rtlCol="0" anchor="t"/>
+          <a:lstStyle/>
+          <a:p>
+            <a:pPr marL="380000" indent="-380000" algn="l">
               <a:lnSpc>
                 <a:spcPct val="104000"/>
               </a:lnSpc>
               <a:spcBef>
-                <a:spcPts val="400"/>
+                <a:spcPts val="450"/>
               </a:spcBef>
-              <a:buNone/>
-            </a:pPr>
-            <a:r>
-              <a:rPr lang="en-US" sz="1950" b="1" dirty="0">
+              <a:buClr>
+                <a:srgbClr val="6C3483"/>
+              </a:buClr>
+              <a:buFont typeface="Arial"/>
+              <a:buChar char="•"/>
+            </a:pPr>
+            <a:r>
+              <a:rPr lang="en-US" sz="1650" dirty="0">
                 <a:solidFill>
                   <a:srgbClr val="000000"/>
                 </a:solidFill>
                 <a:latin typeface="Arial"/>
                 <a:cs typeface="Arial"/>
               </a:rPr>
-              <a:t>"Ca đêm có gây sai sót thuốc không?"</a:t>
-            </a:r>
-          </a:p>
-          <a:p>
-            <a:pPr marL="0" indent="0" algn="ctr">
+              <a:t>Mọi người lớn nằm viện trong cả nước: vitamin D có giảm tử vong trong 10 năm?</a:t>
+            </a:r>
+          </a:p>
+          <a:p>
+            <a:pPr marL="380000" indent="-380000" algn="l">
               <a:lnSpc>
                 <a:spcPct val="104000"/>
               </a:lnSpc>
               <a:spcBef>
-                <a:spcPts val="400"/>
+                <a:spcPts val="450"/>
               </a:spcBef>
-              <a:buNone/>
-            </a:pPr>
-            <a:r>
-              <a:rPr lang="en-US" sz="1950" dirty="0">
+              <a:buClr>
+                <a:srgbClr val="6C3483"/>
+              </a:buClr>
+              <a:buFont typeface="Arial"/>
+              <a:buChar char="•"/>
+            </a:pPr>
+            <a:r>
+              <a:rPr lang="en-US" sz="1650" dirty="0">
                 <a:solidFill>
                   <a:srgbClr val="000000"/>
                 </a:solidFill>
                 <a:latin typeface="Arial"/>
                 <a:cs typeface="Arial"/>
               </a:rPr>
-              <a:t>Nhân viên nào?</a:t>
-            </a:r>
-          </a:p>
-          <a:p>
-            <a:pPr marL="0" indent="0" algn="ctr">
+              <a:t>Sốc nhiễm khuẩn: hoãn kháng sinh 24 giờ có giảm kháng thuốc?</a:t>
+            </a:r>
+          </a:p>
+          <a:p>
+            <a:pPr marL="380000" indent="-380000" algn="l">
               <a:lnSpc>
                 <a:spcPct val="104000"/>
               </a:lnSpc>
               <a:spcBef>
-                <a:spcPts val="400"/>
+                <a:spcPts val="450"/>
               </a:spcBef>
-              <a:buNone/>
-            </a:pPr>
-            <a:r>
-              <a:rPr lang="en-US" sz="1950" dirty="0">
+              <a:buClr>
+                <a:srgbClr val="6C3483"/>
+              </a:buClr>
+              <a:buFont typeface="Arial"/>
+              <a:buChar char="•"/>
+            </a:pPr>
+            <a:r>
+              <a:rPr lang="en-US" sz="1650" dirty="0">
                 <a:solidFill>
                   <a:srgbClr val="000000"/>
                 </a:solidFill>
                 <a:latin typeface="Arial"/>
                 <a:cs typeface="Arial"/>
               </a:rPr>
-              <a:t>So với cái gì?</a:t>
-            </a:r>
-          </a:p>
-          <a:p>
-            <a:pPr marL="0" indent="0" algn="ctr">
+              <a:t>Điều dưỡng ICU có rửa tay không? (đã audit hằng tháng suốt 5 năm)</a:t>
+            </a:r>
+          </a:p>
+          <a:p>
+            <a:pPr marL="380000" indent="-380000" algn="l">
               <a:lnSpc>
                 <a:spcPct val="104000"/>
               </a:lnSpc>
               <a:spcBef>
-                <a:spcPts val="400"/>
+                <a:spcPts val="450"/>
               </a:spcBef>
-              <a:buNone/>
-            </a:pPr>
-            <a:r>
-              <a:rPr lang="en-US" sz="1950" dirty="0">
+              <a:buClr>
+                <a:srgbClr val="6C3483"/>
+              </a:buClr>
+              <a:buFont typeface="Arial"/>
+              <a:buChar char="•"/>
+            </a:pPr>
+            <a:r>
+              <a:rPr lang="en-US" sz="1650" dirty="0">
                 <a:solidFill>
                   <a:srgbClr val="000000"/>
                 </a:solidFill>
                 <a:latin typeface="Arial"/>
                 <a:cs typeface="Arial"/>
               </a:rPr>
-              <a:t>Sai sót nào, đếm thế nào?</a:t>
-            </a:r>
-          </a:p>
-          <a:p>
-            <a:pPr marL="0" indent="0" algn="ctr">
-              <a:lnSpc>
-                <a:spcPct val="104000"/>
-              </a:lnSpc>
-              <a:spcBef>
-                <a:spcPts val="400"/>
-              </a:spcBef>
-              <a:buNone/>
-            </a:pPr>
-            <a:r>
-              <a:rPr lang="en-US" sz="1950" dirty="0">
-                <a:solidFill>
-                  <a:srgbClr val="000000"/>
-                </a:solidFill>
-                <a:latin typeface="Arial"/>
-                <a:cs typeface="Arial"/>
-              </a:rPr>
-              <a:t>Trong bao lâu?</a:t>
-            </a:r>
-          </a:p>
-        </p:txBody>
-      </p:sp>
-      <p:sp>
-        <p:nvSpPr>
-          <p:cNvPr id="72" name="CardHead"/>
-          <p:cNvSpPr/>
-          <p:nvPr/>
-        </p:nvSpPr>
-        <p:spPr>
-          <a:xfrm>
-            <a:off x="6196000" y="1535249"/>
-            <a:ext cx="5538800" cy="640000"/>
-          </a:xfrm>
-          <a:prstGeom prst="rect">
-            <a:avLst/>
-          </a:prstGeom>
-          <a:solidFill>
-            <a:srgbClr val="2E8B57"/>
-          </a:solidFill>
-          <a:ln>
-            <a:noFill/>
-          </a:ln>
-        </p:spPr>
-        <p:txBody>
-          <a:bodyPr wrap="square" lIns="91440" tIns="45720" rIns="91440" bIns="45720" rtlCol="0" anchor="ctr">
-            <a:normAutofit/>
-          </a:bodyPr>
-          <a:lstStyle/>
-          <a:p>
-            <a:pPr marL="0" indent="0" algn="ctr">
-              <a:buNone/>
-            </a:pPr>
-            <a:r>
-              <a:rPr lang="en-US" sz="1900" b="1" dirty="0">
-                <a:solidFill>
-                  <a:srgbClr val="FFFFFF"/>
-                </a:solidFill>
-                <a:latin typeface="Arial"/>
-                <a:cs typeface="Arial"/>
-              </a:rPr>
-              <a:t>Trả lời được, nhờ PECO</a:t>
-            </a:r>
-          </a:p>
-        </p:txBody>
-      </p:sp>
-      <p:sp>
-        <p:nvSpPr>
-          <p:cNvPr id="73" name="CardBody"/>
-          <p:cNvSpPr/>
-          <p:nvPr/>
-        </p:nvSpPr>
-        <p:spPr>
-          <a:xfrm>
-            <a:off x="6196000" y="2175249"/>
-            <a:ext cx="5538800" cy="2444253"/>
-          </a:xfrm>
-          <a:prstGeom prst="rect">
-            <a:avLst/>
-          </a:prstGeom>
-          <a:solidFill>
-            <a:srgbClr val="EAF2F5"/>
-          </a:solidFill>
-          <a:ln>
-            <a:noFill/>
-          </a:ln>
-        </p:spPr>
-        <p:txBody>
-          <a:bodyPr wrap="square" lIns="137160" tIns="91440" rIns="137160" bIns="91440" rtlCol="0" anchor="ctr">
-            <a:normAutofit/>
-          </a:bodyPr>
-          <a:lstStyle/>
-          <a:p>
-            <a:pPr marL="0" indent="0" algn="ctr">
-              <a:lnSpc>
-                <a:spcPct val="104000"/>
-              </a:lnSpc>
-              <a:spcBef>
-                <a:spcPts val="400"/>
-              </a:spcBef>
-              <a:buNone/>
-            </a:pPr>
-            <a:r>
-              <a:rPr lang="en-US" sz="1950" dirty="0">
-                <a:solidFill>
-                  <a:srgbClr val="000000"/>
-                </a:solidFill>
-                <a:latin typeface="Arial"/>
-                <a:cs typeface="Arial"/>
-              </a:rPr>
-              <a:t>P: Ở điều dưỡng khoa phòng,</a:t>
-            </a:r>
-          </a:p>
-          <a:p>
-            <a:pPr marL="0" indent="0" algn="ctr">
-              <a:lnSpc>
-                <a:spcPct val="104000"/>
-              </a:lnSpc>
-              <a:spcBef>
-                <a:spcPts val="400"/>
-              </a:spcBef>
-              <a:buNone/>
-            </a:pPr>
-            <a:r>
-              <a:rPr lang="en-US" sz="1950" dirty="0">
-                <a:solidFill>
-                  <a:srgbClr val="000000"/>
-                </a:solidFill>
-                <a:latin typeface="Arial"/>
-                <a:cs typeface="Arial"/>
-              </a:rPr>
-              <a:t>E: làm ca đêm,</a:t>
-            </a:r>
-          </a:p>
-          <a:p>
-            <a:pPr marL="0" indent="0" algn="ctr">
-              <a:lnSpc>
-                <a:spcPct val="104000"/>
-              </a:lnSpc>
-              <a:spcBef>
-                <a:spcPts val="400"/>
-              </a:spcBef>
-              <a:buNone/>
-            </a:pPr>
-            <a:r>
-              <a:rPr lang="en-US" sz="1950" dirty="0">
-                <a:solidFill>
-                  <a:srgbClr val="000000"/>
-                </a:solidFill>
-                <a:latin typeface="Arial"/>
-                <a:cs typeface="Arial"/>
-              </a:rPr>
-              <a:t>C: so với ca ngày,</a:t>
-            </a:r>
-          </a:p>
-          <a:p>
-            <a:pPr marL="0" indent="0" algn="ctr">
-              <a:lnSpc>
-                <a:spcPct val="104000"/>
-              </a:lnSpc>
-              <a:spcBef>
-                <a:spcPts val="400"/>
-              </a:spcBef>
-              <a:buNone/>
-            </a:pPr>
-            <a:r>
-              <a:rPr lang="en-US" sz="1950" dirty="0">
-                <a:solidFill>
-                  <a:srgbClr val="000000"/>
-                </a:solidFill>
-                <a:latin typeface="Arial"/>
-                <a:cs typeface="Arial"/>
-              </a:rPr>
-              <a:t>O: có liên quan với nhiều sai sót hơn trên 1000 liều thuốc</a:t>
-            </a:r>
-          </a:p>
-          <a:p>
-            <a:pPr marL="0" indent="0" algn="ctr">
-              <a:lnSpc>
-                <a:spcPct val="104000"/>
-              </a:lnSpc>
-              <a:spcBef>
-                <a:spcPts val="400"/>
-              </a:spcBef>
-              <a:buNone/>
-            </a:pPr>
-            <a:r>
-              <a:rPr lang="en-US" sz="1950" dirty="0">
-                <a:solidFill>
-                  <a:srgbClr val="000000"/>
-                </a:solidFill>
-                <a:latin typeface="Arial"/>
-                <a:cs typeface="Arial"/>
-              </a:rPr>
-              <a:t>T: trong 6 tháng không?</a:t>
-            </a:r>
-          </a:p>
-        </p:txBody>
-      </p:sp>
-      <p:sp>
-        <p:nvSpPr>
-          <p:cNvPr id="60" name="Takeaway"/>
-          <p:cNvSpPr/>
-          <p:nvPr/>
-        </p:nvSpPr>
-        <p:spPr>
-          <a:xfrm>
-            <a:off x="457200" y="5390000"/>
-            <a:ext cx="11277600" cy="560000"/>
+              <a:t>Viêm phổi: màu của tờ y lệnh có ảnh hưởng tử vong 28 ngày?</a:t>
+            </a:r>
+          </a:p>
+        </p:txBody>
+      </p:sp>
+      <p:sp>
+        <p:nvSpPr>
+          <p:cNvPr id="53" name="Deliverable"/>
+          <p:cNvSpPr/>
+          <p:nvPr/>
+        </p:nvSpPr>
+        <p:spPr>
+          <a:xfrm>
+            <a:off x="457200" y="5350000"/>
+            <a:ext cx="11277600" cy="600000"/>
           </a:xfrm>
           <a:prstGeom prst="roundRect">
             <a:avLst>
@@ -44553,10 +44626,12 @@
             </a:avLst>
           </a:prstGeom>
           <a:solidFill>
-            <a:srgbClr val="0D7377"/>
+            <a:srgbClr val="FFFFFF"/>
           </a:solidFill>
-          <a:ln>
-            <a:noFill/>
+          <a:ln w="15875">
+            <a:solidFill>
+              <a:srgbClr val="6C3483"/>
+            </a:solidFill>
           </a:ln>
         </p:spPr>
         <p:txBody>
@@ -44571,22 +44646,22 @@
             <a:r>
               <a:rPr lang="en-US" sz="1300" b="1" dirty="0">
                 <a:solidFill>
-                  <a:srgbClr val="FFFFFF"/>
-                </a:solidFill>
-                <a:latin typeface="Arial"/>
-                <a:cs typeface="Arial"/>
-              </a:rPr>
-              <a:t>THÔNG ĐIỆP CHÍNH   </a:t>
-            </a:r>
-            <a:r>
-              <a:rPr lang="en-US" sz="1550" dirty="0">
-                <a:solidFill>
-                  <a:srgbClr val="FFFFFF"/>
-                </a:solidFill>
-                <a:latin typeface="Arial"/>
-                <a:cs typeface="Arial"/>
-              </a:rPr>
-              <a:t>Luyện tại khoa của bạn: lấy một câu hỏi hành lang và điền vào các ô.</a:t>
+                  <a:srgbClr val="6C3483"/>
+                </a:solidFill>
+                <a:latin typeface="Arial"/>
+                <a:cs typeface="Arial"/>
+              </a:rPr>
+              <a:t>SẢN PHẨM   </a:t>
+            </a:r>
+            <a:r>
+              <a:rPr lang="en-US" sz="1500" dirty="0">
+                <a:solidFill>
+                  <a:srgbClr val="000000"/>
+                </a:solidFill>
+                <a:latin typeface="Arial"/>
+                <a:cs typeface="Arial"/>
+              </a:rPr>
+              <a:t>Mỗi câu một chữ cái, trong bình chọn</a:t>
             </a:r>
           </a:p>
         </p:txBody>
@@ -44696,6 +44771,609 @@
 </file>
 
 <file path=ppt/slides/slide53.xml><?xml version="1.0" encoding="utf-8"?>
+<p:sld xmlns:a="http://schemas.openxmlformats.org/drawingml/2006/main" xmlns:r="http://schemas.openxmlformats.org/officeDocument/2006/relationships" xmlns:p="http://schemas.openxmlformats.org/presentationml/2006/main">
+  <p:cSld>
+    <p:bg>
+      <p:bgPr>
+        <a:solidFill>
+          <a:schemeClr val="bg1"/>
+        </a:solidFill>
+        <a:effectLst/>
+      </p:bgPr>
+    </p:bg>
+    <p:spTree>
+      <p:nvGrpSpPr>
+        <p:cNvPr id="1" name=""/>
+        <p:cNvGrpSpPr/>
+        <p:nvPr/>
+      </p:nvGrpSpPr>
+      <p:grpSpPr>
+        <a:xfrm>
+          <a:off x="0" y="0"/>
+          <a:ext cx="0" cy="0"/>
+          <a:chOff x="0" y="0"/>
+          <a:chExt cx="0" cy="0"/>
+        </a:xfrm>
+      </p:grpSpPr>
+      <p:sp>
+        <p:nvSpPr>
+          <p:cNvPr id="10" name="Title"/>
+          <p:cNvSpPr txBox="1"/>
+          <p:nvPr/>
+        </p:nvSpPr>
+        <p:spPr>
+          <a:xfrm>
+            <a:off x="457200" y="160000"/>
+            <a:ext cx="11277600" cy="750000"/>
+          </a:xfrm>
+          <a:prstGeom prst="rect">
+            <a:avLst/>
+          </a:prstGeom>
+          <a:noFill/>
+          <a:ln>
+            <a:noFill/>
+          </a:ln>
+        </p:spPr>
+        <p:txBody>
+          <a:bodyPr wrap="square" lIns="91440" tIns="45720" rIns="91440" bIns="45720" rtlCol="0" anchor="ctr"/>
+          <a:lstStyle/>
+          <a:p>
+            <a:pPr marL="0" indent="0" algn="l">
+              <a:buNone/>
+            </a:pPr>
+            <a:r>
+              <a:rPr lang="en-US" sz="2800" b="1" dirty="0">
+                <a:solidFill>
+                  <a:srgbClr val="0D7377"/>
+                </a:solidFill>
+                <a:latin typeface="Arial"/>
+                <a:cs typeface="Arial"/>
+              </a:rPr>
+              <a:t>Mơ hồ và trả lời được: thêm một ví dụ tại khoa</a:t>
+            </a:r>
+          </a:p>
+        </p:txBody>
+      </p:sp>
+      <p:sp>
+        <p:nvSpPr>
+          <p:cNvPr id="11" name="Rule"/>
+          <p:cNvSpPr/>
+          <p:nvPr/>
+        </p:nvSpPr>
+        <p:spPr>
+          <a:xfrm>
+            <a:off x="457200" y="940000"/>
+            <a:ext cx="11277600" cy="0"/>
+          </a:xfrm>
+          <a:prstGeom prst="line">
+            <a:avLst/>
+          </a:prstGeom>
+          <a:ln w="19050">
+            <a:solidFill>
+              <a:srgbClr val="0D7377"/>
+            </a:solidFill>
+          </a:ln>
+        </p:spPr>
+        <p:txBody>
+          <a:bodyPr/>
+          <a:lstStyle/>
+          <a:p>
+            <a:endParaRPr/>
+          </a:p>
+        </p:txBody>
+      </p:sp>
+      <p:sp>
+        <p:nvSpPr>
+          <p:cNvPr id="70" name="CardHead"/>
+          <p:cNvSpPr/>
+          <p:nvPr/>
+        </p:nvSpPr>
+        <p:spPr>
+          <a:xfrm>
+            <a:off x="457200" y="1535249"/>
+            <a:ext cx="5538800" cy="640000"/>
+          </a:xfrm>
+          <a:prstGeom prst="rect">
+            <a:avLst/>
+          </a:prstGeom>
+          <a:solidFill>
+            <a:srgbClr val="B23B2E"/>
+          </a:solidFill>
+          <a:ln>
+            <a:noFill/>
+          </a:ln>
+        </p:spPr>
+        <p:txBody>
+          <a:bodyPr wrap="square" lIns="91440" tIns="45720" rIns="91440" bIns="45720" rtlCol="0" anchor="ctr">
+            <a:normAutofit/>
+          </a:bodyPr>
+          <a:lstStyle/>
+          <a:p>
+            <a:pPr marL="0" indent="0" algn="ctr">
+              <a:buNone/>
+            </a:pPr>
+            <a:r>
+              <a:rPr lang="en-US" sz="1900" b="1" dirty="0">
+                <a:solidFill>
+                  <a:srgbClr val="FFFFFF"/>
+                </a:solidFill>
+                <a:latin typeface="Arial"/>
+                <a:cs typeface="Arial"/>
+              </a:rPr>
+              <a:t>Mơ hồ</a:t>
+            </a:r>
+          </a:p>
+        </p:txBody>
+      </p:sp>
+      <p:sp>
+        <p:nvSpPr>
+          <p:cNvPr id="71" name="CardBody"/>
+          <p:cNvSpPr/>
+          <p:nvPr/>
+        </p:nvSpPr>
+        <p:spPr>
+          <a:xfrm>
+            <a:off x="457200" y="2175249"/>
+            <a:ext cx="5538800" cy="2444253"/>
+          </a:xfrm>
+          <a:prstGeom prst="rect">
+            <a:avLst/>
+          </a:prstGeom>
+          <a:solidFill>
+            <a:srgbClr val="EAF2F5"/>
+          </a:solidFill>
+          <a:ln>
+            <a:noFill/>
+          </a:ln>
+        </p:spPr>
+        <p:txBody>
+          <a:bodyPr wrap="square" lIns="137160" tIns="91440" rIns="137160" bIns="91440" rtlCol="0" anchor="ctr">
+            <a:normAutofit/>
+          </a:bodyPr>
+          <a:lstStyle/>
+          <a:p>
+            <a:pPr marL="0" indent="0" algn="ctr">
+              <a:lnSpc>
+                <a:spcPct val="104000"/>
+              </a:lnSpc>
+              <a:spcBef>
+                <a:spcPts val="400"/>
+              </a:spcBef>
+              <a:buNone/>
+            </a:pPr>
+            <a:r>
+              <a:rPr lang="en-US" sz="1950" b="1" dirty="0">
+                <a:solidFill>
+                  <a:srgbClr val="000000"/>
+                </a:solidFill>
+                <a:latin typeface="Arial"/>
+                <a:cs typeface="Arial"/>
+              </a:rPr>
+              <a:t>"Ca đêm có gây sai sót thuốc không?"</a:t>
+            </a:r>
+          </a:p>
+          <a:p>
+            <a:pPr marL="0" indent="0" algn="ctr">
+              <a:lnSpc>
+                <a:spcPct val="104000"/>
+              </a:lnSpc>
+              <a:spcBef>
+                <a:spcPts val="400"/>
+              </a:spcBef>
+              <a:buNone/>
+            </a:pPr>
+            <a:r>
+              <a:rPr lang="en-US" sz="1950" dirty="0">
+                <a:solidFill>
+                  <a:srgbClr val="000000"/>
+                </a:solidFill>
+                <a:latin typeface="Arial"/>
+                <a:cs typeface="Arial"/>
+              </a:rPr>
+              <a:t>Nhân viên nào?</a:t>
+            </a:r>
+          </a:p>
+          <a:p>
+            <a:pPr marL="0" indent="0" algn="ctr">
+              <a:lnSpc>
+                <a:spcPct val="104000"/>
+              </a:lnSpc>
+              <a:spcBef>
+                <a:spcPts val="400"/>
+              </a:spcBef>
+              <a:buNone/>
+            </a:pPr>
+            <a:r>
+              <a:rPr lang="en-US" sz="1950" dirty="0">
+                <a:solidFill>
+                  <a:srgbClr val="000000"/>
+                </a:solidFill>
+                <a:latin typeface="Arial"/>
+                <a:cs typeface="Arial"/>
+              </a:rPr>
+              <a:t>So với cái gì?</a:t>
+            </a:r>
+          </a:p>
+          <a:p>
+            <a:pPr marL="0" indent="0" algn="ctr">
+              <a:lnSpc>
+                <a:spcPct val="104000"/>
+              </a:lnSpc>
+              <a:spcBef>
+                <a:spcPts val="400"/>
+              </a:spcBef>
+              <a:buNone/>
+            </a:pPr>
+            <a:r>
+              <a:rPr lang="en-US" sz="1950" dirty="0">
+                <a:solidFill>
+                  <a:srgbClr val="000000"/>
+                </a:solidFill>
+                <a:latin typeface="Arial"/>
+                <a:cs typeface="Arial"/>
+              </a:rPr>
+              <a:t>Sai sót nào, đếm thế nào?</a:t>
+            </a:r>
+          </a:p>
+          <a:p>
+            <a:pPr marL="0" indent="0" algn="ctr">
+              <a:lnSpc>
+                <a:spcPct val="104000"/>
+              </a:lnSpc>
+              <a:spcBef>
+                <a:spcPts val="400"/>
+              </a:spcBef>
+              <a:buNone/>
+            </a:pPr>
+            <a:r>
+              <a:rPr lang="en-US" sz="1950" dirty="0">
+                <a:solidFill>
+                  <a:srgbClr val="000000"/>
+                </a:solidFill>
+                <a:latin typeface="Arial"/>
+                <a:cs typeface="Arial"/>
+              </a:rPr>
+              <a:t>Trong bao lâu?</a:t>
+            </a:r>
+          </a:p>
+        </p:txBody>
+      </p:sp>
+      <p:sp>
+        <p:nvSpPr>
+          <p:cNvPr id="72" name="CardHead"/>
+          <p:cNvSpPr/>
+          <p:nvPr/>
+        </p:nvSpPr>
+        <p:spPr>
+          <a:xfrm>
+            <a:off x="6196000" y="1535249"/>
+            <a:ext cx="5538800" cy="640000"/>
+          </a:xfrm>
+          <a:prstGeom prst="rect">
+            <a:avLst/>
+          </a:prstGeom>
+          <a:solidFill>
+            <a:srgbClr val="2E8B57"/>
+          </a:solidFill>
+          <a:ln>
+            <a:noFill/>
+          </a:ln>
+        </p:spPr>
+        <p:txBody>
+          <a:bodyPr wrap="square" lIns="91440" tIns="45720" rIns="91440" bIns="45720" rtlCol="0" anchor="ctr">
+            <a:normAutofit/>
+          </a:bodyPr>
+          <a:lstStyle/>
+          <a:p>
+            <a:pPr marL="0" indent="0" algn="ctr">
+              <a:buNone/>
+            </a:pPr>
+            <a:r>
+              <a:rPr lang="en-US" sz="1900" b="1" dirty="0">
+                <a:solidFill>
+                  <a:srgbClr val="FFFFFF"/>
+                </a:solidFill>
+                <a:latin typeface="Arial"/>
+                <a:cs typeface="Arial"/>
+              </a:rPr>
+              <a:t>Trả lời được, nhờ PECO</a:t>
+            </a:r>
+          </a:p>
+        </p:txBody>
+      </p:sp>
+      <p:sp>
+        <p:nvSpPr>
+          <p:cNvPr id="73" name="CardBody"/>
+          <p:cNvSpPr/>
+          <p:nvPr/>
+        </p:nvSpPr>
+        <p:spPr>
+          <a:xfrm>
+            <a:off x="6196000" y="2175249"/>
+            <a:ext cx="5538800" cy="2444253"/>
+          </a:xfrm>
+          <a:prstGeom prst="rect">
+            <a:avLst/>
+          </a:prstGeom>
+          <a:solidFill>
+            <a:srgbClr val="EAF2F5"/>
+          </a:solidFill>
+          <a:ln>
+            <a:noFill/>
+          </a:ln>
+        </p:spPr>
+        <p:txBody>
+          <a:bodyPr wrap="square" lIns="137160" tIns="91440" rIns="137160" bIns="91440" rtlCol="0" anchor="ctr">
+            <a:normAutofit/>
+          </a:bodyPr>
+          <a:lstStyle/>
+          <a:p>
+            <a:pPr marL="0" indent="0" algn="ctr">
+              <a:lnSpc>
+                <a:spcPct val="104000"/>
+              </a:lnSpc>
+              <a:spcBef>
+                <a:spcPts val="400"/>
+              </a:spcBef>
+              <a:buNone/>
+            </a:pPr>
+            <a:r>
+              <a:rPr lang="en-US" sz="1950" dirty="0">
+                <a:solidFill>
+                  <a:srgbClr val="000000"/>
+                </a:solidFill>
+                <a:latin typeface="Arial"/>
+                <a:cs typeface="Arial"/>
+              </a:rPr>
+              <a:t>P: Ở điều dưỡng khoa phòng,</a:t>
+            </a:r>
+          </a:p>
+          <a:p>
+            <a:pPr marL="0" indent="0" algn="ctr">
+              <a:lnSpc>
+                <a:spcPct val="104000"/>
+              </a:lnSpc>
+              <a:spcBef>
+                <a:spcPts val="400"/>
+              </a:spcBef>
+              <a:buNone/>
+            </a:pPr>
+            <a:r>
+              <a:rPr lang="en-US" sz="1950" dirty="0">
+                <a:solidFill>
+                  <a:srgbClr val="000000"/>
+                </a:solidFill>
+                <a:latin typeface="Arial"/>
+                <a:cs typeface="Arial"/>
+              </a:rPr>
+              <a:t>E: làm ca đêm,</a:t>
+            </a:r>
+          </a:p>
+          <a:p>
+            <a:pPr marL="0" indent="0" algn="ctr">
+              <a:lnSpc>
+                <a:spcPct val="104000"/>
+              </a:lnSpc>
+              <a:spcBef>
+                <a:spcPts val="400"/>
+              </a:spcBef>
+              <a:buNone/>
+            </a:pPr>
+            <a:r>
+              <a:rPr lang="en-US" sz="1950" dirty="0">
+                <a:solidFill>
+                  <a:srgbClr val="000000"/>
+                </a:solidFill>
+                <a:latin typeface="Arial"/>
+                <a:cs typeface="Arial"/>
+              </a:rPr>
+              <a:t>C: so với ca ngày,</a:t>
+            </a:r>
+          </a:p>
+          <a:p>
+            <a:pPr marL="0" indent="0" algn="ctr">
+              <a:lnSpc>
+                <a:spcPct val="104000"/>
+              </a:lnSpc>
+              <a:spcBef>
+                <a:spcPts val="400"/>
+              </a:spcBef>
+              <a:buNone/>
+            </a:pPr>
+            <a:r>
+              <a:rPr lang="en-US" sz="1950" dirty="0">
+                <a:solidFill>
+                  <a:srgbClr val="000000"/>
+                </a:solidFill>
+                <a:latin typeface="Arial"/>
+                <a:cs typeface="Arial"/>
+              </a:rPr>
+              <a:t>O: có liên quan với nhiều sai sót hơn trên 1000 liều thuốc</a:t>
+            </a:r>
+          </a:p>
+          <a:p>
+            <a:pPr marL="0" indent="0" algn="ctr">
+              <a:lnSpc>
+                <a:spcPct val="104000"/>
+              </a:lnSpc>
+              <a:spcBef>
+                <a:spcPts val="400"/>
+              </a:spcBef>
+              <a:buNone/>
+            </a:pPr>
+            <a:r>
+              <a:rPr lang="en-US" sz="1950" dirty="0">
+                <a:solidFill>
+                  <a:srgbClr val="000000"/>
+                </a:solidFill>
+                <a:latin typeface="Arial"/>
+                <a:cs typeface="Arial"/>
+              </a:rPr>
+              <a:t>T: trong 6 tháng không?</a:t>
+            </a:r>
+          </a:p>
+        </p:txBody>
+      </p:sp>
+      <p:sp>
+        <p:nvSpPr>
+          <p:cNvPr id="60" name="Takeaway"/>
+          <p:cNvSpPr/>
+          <p:nvPr/>
+        </p:nvSpPr>
+        <p:spPr>
+          <a:xfrm>
+            <a:off x="457200" y="5390000"/>
+            <a:ext cx="11277600" cy="560000"/>
+          </a:xfrm>
+          <a:prstGeom prst="roundRect">
+            <a:avLst>
+              <a:gd name="adj" fmla="val 12000"/>
+            </a:avLst>
+          </a:prstGeom>
+          <a:solidFill>
+            <a:srgbClr val="0D7377"/>
+          </a:solidFill>
+          <a:ln>
+            <a:noFill/>
+          </a:ln>
+        </p:spPr>
+        <p:txBody>
+          <a:bodyPr wrap="square" lIns="182880" tIns="45720" rIns="182880" bIns="45720" rtlCol="0" anchor="ctr">
+            <a:normAutofit/>
+          </a:bodyPr>
+          <a:lstStyle/>
+          <a:p>
+            <a:pPr marL="0" indent="0" algn="ctr">
+              <a:buNone/>
+            </a:pPr>
+            <a:r>
+              <a:rPr lang="en-US" sz="1300" b="1" dirty="0">
+                <a:solidFill>
+                  <a:srgbClr val="FFFFFF"/>
+                </a:solidFill>
+                <a:latin typeface="Arial"/>
+                <a:cs typeface="Arial"/>
+              </a:rPr>
+              <a:t>THÔNG ĐIỆP CHÍNH   </a:t>
+            </a:r>
+            <a:r>
+              <a:rPr lang="en-US" sz="1550" dirty="0">
+                <a:solidFill>
+                  <a:srgbClr val="FFFFFF"/>
+                </a:solidFill>
+                <a:latin typeface="Arial"/>
+                <a:cs typeface="Arial"/>
+              </a:rPr>
+              <a:t>Luyện tại khoa của bạn: lấy một câu hỏi hành lang và điền vào các ô.</a:t>
+            </a:r>
+          </a:p>
+        </p:txBody>
+      </p:sp>
+      <p:sp>
+        <p:nvSpPr>
+          <p:cNvPr id="901" name="Footer"/>
+          <p:cNvSpPr txBox="1"/>
+          <p:nvPr/>
+        </p:nvSpPr>
+        <p:spPr>
+          <a:xfrm>
+            <a:off x="4599946" y="6458701"/>
+            <a:ext cx="2845651" cy="276999"/>
+          </a:xfrm>
+          <a:prstGeom prst="rect">
+            <a:avLst/>
+          </a:prstGeom>
+          <a:noFill/>
+          <a:ln>
+            <a:noFill/>
+          </a:ln>
+        </p:spPr>
+        <p:txBody>
+          <a:bodyPr wrap="none" lIns="91440" tIns="45720" rIns="91440" bIns="45720" rtlCol="0" anchor="t"/>
+          <a:lstStyle/>
+          <a:p>
+            <a:r>
+              <a:rPr lang="en-US" sz="1200" dirty="0">
+                <a:solidFill>
+                  <a:schemeClr val="accent5">
+                    <a:lumMod val="50000"/>
+                  </a:schemeClr>
+                </a:solidFill>
+                <a:latin typeface="Arial"/>
+              </a:rPr>
+              <a:t>Neudata | #ClearDataClearImpact</a:t>
+            </a:r>
+          </a:p>
+        </p:txBody>
+      </p:sp>
+      <p:pic>
+        <p:nvPicPr>
+          <p:cNvPr id="902" name="Logo"/>
+          <p:cNvPicPr>
+            <a:picLocks noChangeAspect="1"/>
+          </p:cNvPicPr>
+          <p:nvPr/>
+        </p:nvPicPr>
+        <p:blipFill>
+          <a:blip r:embed="rId3"/>
+          <a:stretch>
+            <a:fillRect/>
+          </a:stretch>
+        </p:blipFill>
+        <p:spPr>
+          <a:xfrm>
+            <a:off x="138853" y="6122125"/>
+            <a:ext cx="716763" cy="683623"/>
+          </a:xfrm>
+          <a:prstGeom prst="rect">
+            <a:avLst/>
+          </a:prstGeom>
+        </p:spPr>
+      </p:pic>
+      <p:sp>
+        <p:nvSpPr>
+          <p:cNvPr id="903" name="Slide Number"/>
+          <p:cNvSpPr>
+            <a:spLocks noGrp="1"/>
+          </p:cNvSpPr>
+          <p:nvPr>
+            <p:ph type="sldNum" sz="quarter" idx="12"/>
+          </p:nvPr>
+        </p:nvSpPr>
+        <p:spPr>
+          <a:xfrm>
+            <a:off x="11330000" y="6470000"/>
+            <a:ext cx="620000" cy="320000"/>
+          </a:xfrm>
+        </p:spPr>
+        <p:txBody>
+          <a:bodyPr/>
+          <a:lstStyle/>
+          <a:p>
+            <a:pPr algn="r"/>
+            <a:fld id="{C1FF6DA9-008F-8B48-92A6-B652298478BF}" type="slidenum">
+              <a:rPr lang="en-US" sz="1050" smtClean="0">
+                <a:solidFill>
+                  <a:schemeClr val="accent5">
+                    <a:lumMod val="50000"/>
+                  </a:schemeClr>
+                </a:solidFill>
+              </a:rPr>
+              <a:t>2</a:t>
+            </a:fld>
+            <a:endParaRPr lang="en-US"/>
+          </a:p>
+        </p:txBody>
+      </p:sp>
+    </p:spTree>
+  </p:cSld>
+  <p:clrMapOvr>
+    <a:masterClrMapping/>
+  </p:clrMapOvr>
+</p:sld>
+</file>
+
+<file path=ppt/slides/slide54.xml><?xml version="1.0" encoding="utf-8"?>
 <p:sld xmlns:a="http://schemas.openxmlformats.org/drawingml/2006/main" xmlns:r="http://schemas.openxmlformats.org/officeDocument/2006/relationships" xmlns:p="http://schemas.openxmlformats.org/presentationml/2006/main">
   <p:cSld>
     <p:bg>

--- a/vi/files/slides/Session_1_VN.pptx
+++ b/vi/files/slides/Session_1_VN.pptx
@@ -742,13 +742,7 @@
           <a:p>
             <a:r>
               <a:rPr lang="en-US" sz="1400" b="0" dirty="0"/>
-              <a:t>Slide tiêu đề (0:00, 19:30). Chào mừng cả lớp, mỗi giảng viên tự giới thiệu một câu.</a:t>
-            </a:r>
-          </a:p>
-          <a:p>
-            <a:r>
-              <a:rPr lang="en-US" sz="1400" b="0" dirty="0"/>
-              <a:t>Trong tám tối thứ Bảy, chúng ta đi hết con đường từ một câu hỏi tại giường bệnh đến một bài báo sẵn sàng để nộp. Không cần phần mềm, không học công thức: học bằng hình ảnh, ví dụ và bài tập ngắn cả lớp cùng làm.</a:t>
+              <a:t>Chào mừng cả lớp. Mỗi giảng viên tự giới thiệu một câu.</a:t>
             </a:r>
           </a:p>
           <a:p>
@@ -841,13 +835,7 @@
           <a:p>
             <a:r>
               <a:rPr lang="en-US" sz="1400" b="0" dirty="0"/>
-              <a:t>Đây là nơi an toàn để nói 'tôi chưa hiểu'. Có thể nhắn riêng cho giảng viên trong chat.</a:t>
-            </a:r>
-          </a:p>
-          <a:p>
-            <a:r>
-              <a:rPr lang="en-US" sz="1400" b="0" dirty="0"/>
-              <a:t>Chat bằng tiếng Việt hoặc tiếng Anh, miễn giúp bạn suy nghĩ. Không nêu tên hay chi tiết nhận dạng người bệnh.</a:t>
+              <a:t>Có thể nhắn riêng cho giảng viên. Chat bằng tiếng Việt hoặc tiếng Anh đều được.</a:t>
             </a:r>
           </a:p>
           <a:p>
@@ -934,31 +922,7 @@
           <a:p>
             <a:r>
               <a:rPr lang="en-US" sz="1400" b="0" dirty="0"/>
-              <a:t>Dán đường link Google Form vào chat. Biểu mẫu hỏi họ và tên để ghép bài làm ở Buổi 1 và Buổi 8.</a:t>
-            </a:r>
-          </a:p>
-          <a:p>
-            <a:r>
-              <a:rPr lang="en-US" sz="1400" b="0" dirty="0"/>
-              <a:t>Học viên không thấy điểm hay đáp án sau khi gửi. Giảng viên xem kết quả ngay trong thẻ Câu trả lời (Responses) của biểu mẫu và bảng kết quả liên kết.</a:t>
-            </a:r>
-          </a:p>
-          <a:p>
-            <a:r>
-              <a:rPr lang="en-US" sz="1400" b="0" dirty="0"/>
-              <a:t>Đóng biểu mẫu sau 15 phút. Hôm nay không chữa đáp án: đáp án được chia sẻ sau lần làm thứ hai ở Buổi 8.</a:t>
-            </a:r>
-          </a:p>
-          <a:p>
-            <a:r>
-              <a:rPr lang="en-US" sz="1400" b="0" dirty="0"/>
-              <a:t>Thời gian: 15 phút. Phần học Buổi 1 bắt đầu lúc 0:35 (20:05).</a:t>
-            </a:r>
-          </a:p>
-          <a:p>
-            <a:r>
-              <a:rPr lang="en-US" sz="1400" b="0" dirty="0"/>
-              <a:t>Biểu mẫu được tạo một lần từ Course/Assessment/google_form (các bước trong README).</a:t>
+              <a:t>Question form in VNM - https://forms.gle/7U2tjio2qVatVJja7</a:t>
             </a:r>
           </a:p>
         </p:txBody>
@@ -1039,25 +1003,13 @@
           <a:p>
             <a:r>
               <a:rPr lang="en-US" sz="1400" b="0" dirty="0"/>
-              <a:t>Mở đầu Buổi 1 (0:35, 20:05), ngay sau bài kiểm tra đầu khóa.</a:t>
+              <a:t>Bắt đầu lúc 20:05, ngay sau bài kiểm tra. Mục tiêu: mỗi người ra về với bản nháp câu hỏi, mục tiêu tổng quát và mục tiêu cụ thể.</a:t>
             </a:r>
           </a:p>
           <a:p>
             <a:r>
               <a:rPr lang="en-US" sz="1400" b="0" dirty="0"/>
-              <a:t>Mục tiêu hôm nay: mỗi người ra về với bản nháp câu hỏi nghiên cứu, mục tiêu tổng quát và mục tiêu cụ thể của riêng mình.</a:t>
-            </a:r>
-          </a:p>
-          <a:p>
-            <a:r>
-              <a:rPr lang="en-US" sz="1400" b="0" dirty="0"/>
-              <a:t>Học viên hầu như chưa có nền tảng nghiên cứu và đây là buổi tối sau giờ làm: đi chậm, dừng lại ở mọi slide kiểm tra.</a:t>
-            </a:r>
-          </a:p>
-          <a:p>
-            <a:r>
-              <a:rPr lang="en-US" sz="1400" b="0" dirty="0"/>
-              <a:t>Thời gian: 1 phút. Chỉ vào chương trình, không đọc to.</a:t>
+              <a:t>Chỉ vào chương trình, không đọc to. Thời gian: 1 phút.</a:t>
             </a:r>
           </a:p>
         </p:txBody>
@@ -1138,19 +1090,13 @@
           <a:p>
             <a:r>
               <a:rPr lang="en-US" sz="1400" b="0" dirty="0"/>
-              <a:t>Phần 1.1 (0:35-1:10, 20:05-20:40).</a:t>
+              <a:t>Phần 1.1: 20:05-20:40. Mời hai ba người trả lời. Thường gặp: mình nhớ những ca đáng nhớ, đồng nghiệp mỗi người một ý, thực hành thay đổi.</a:t>
             </a:r>
           </a:p>
           <a:p>
             <a:r>
               <a:rPr lang="en-US" sz="1400" b="0" dirty="0"/>
-              <a:t>Mời hai ba người bật micro trả lời. Thường gặp: kinh nghiệm thiên về những ca đáng nhớ, đồng nghiệp mỗi người một ý, thực hành thay đổi.</a:t>
-            </a:r>
-          </a:p>
-          <a:p>
-            <a:r>
-              <a:rPr lang="en-US" sz="1400" b="0" dirty="0"/>
-              <a:t>Ý chính: kinh nghiệm giúp nảy ra câu hỏi, nhưng không đủ để trả lời câu hỏi.</a:t>
+              <a:t>Ý chính: kinh nghiệm giúp nảy ra câu hỏi, nhưng không trả lời được câu hỏi.</a:t>
             </a:r>
           </a:p>
           <a:p>
@@ -1237,25 +1183,19 @@
           <a:p>
             <a:r>
               <a:rPr lang="en-US" sz="1400" b="0" dirty="0"/>
-              <a:t>Bên trái: một bác sĩ, ba người bệnh, không có nhóm so sánh. Bên phải: mỗi nhóm 50 người bệnh, đếm mọi ca tử vong.</a:t>
+              <a:t>Các con số chỉ để minh họa. CLASSIC (NEJM 2022, 1554 người bệnh) thấy tử vong 90 ngày như nhau giữa hạn chế dịch và truyền dịch chuẩn (42.3% so với 42.1%).</a:t>
             </a:r>
           </a:p>
           <a:p>
             <a:r>
               <a:rPr lang="en-US" sz="1400" b="0" dirty="0"/>
-              <a:t>Các con số chỉ để minh họa, nhưng xu hướng là có thật: thử nghiệm lớn CLASSIC (NEJM 2022, 1554 người bệnh) thấy tử vong 90 ngày như nhau giữa hạn chế dịch và truyền dịch chuẩn (42.3% so với 42.1%).</a:t>
+              <a:t>Hỏi: 'Vì sao mình nhớ ba ca tốt?' Thường gặp: sai lệch nhớ lại (recall bias).</a:t>
             </a:r>
           </a:p>
           <a:p>
             <a:r>
               <a:rPr lang="en-US" sz="1400" b="0" dirty="0"/>
-              <a:t>Hỏi: 'Vì sao mình nhớ ba ca tốt?' Thường gặp: sai lệch nhớ lại (recall bias). Ca kịch tính thì nhớ, ca thất bại thì quên.</a:t>
-            </a:r>
-          </a:p>
-          <a:p>
-            <a:r>
-              <a:rPr lang="en-US" sz="1400" b="0" dirty="0"/>
-              <a:t>Thời gian: 4 phút. Cả khóa học dựa trên ý này.</a:t>
+              <a:t>Thời gian: 4 phút.</a:t>
             </a:r>
           </a:p>
         </p:txBody>
@@ -1336,19 +1276,19 @@
           <a:p>
             <a:r>
               <a:rPr lang="en-US" sz="1400" b="0" dirty="0"/>
-              <a:t>Hình mô phỏng: nguy cơ tử vong thật là 40%. Hàng trên: 20 khoa, mỗi khoa 5 người bệnh, tỷ lệ tử vong từ 0% đến 80% chỉ do ngẫu nhiên. Nhóm 500 người tập trung quanh 40%.</a:t>
+              <a:t>Nguy cơ tử vong thật là 40%. Khoa có 5 người bệnh dao động từ 0% đến 80% do ngẫu nhiên. Nhóm 500 người tập trung quanh 40%.</a:t>
             </a:r>
           </a:p>
           <a:p>
             <a:r>
               <a:rPr lang="en-US" sz="1400" b="0" dirty="0"/>
-              <a:t>Bình chọn (có / không / chưa biết được): 'Một khoa có 0/5 người bệnh tử vong sau quy trình mới. Quy trình có hiệu quả không?' Đáp án: chưa biết được, vì 0/5 xảy ra thường xuyên do ngẫu nhiên.</a:t>
+              <a:t>Bình chọn: 'Một khoa có 0/5 tử vong sau quy trình mới. Quy trình có hiệu quả không?' Đáp án: chưa biết được.</a:t>
             </a:r>
           </a:p>
           <a:p>
             <a:r>
               <a:rPr lang="en-US" sz="1400" b="0" dirty="0"/>
-              <a:t>Thời gian: 4 phút. Cỡ mẫu học ở Buổi 6.</a:t>
+              <a:t>Thời gian: 4 phút.</a:t>
             </a:r>
           </a:p>
         </p:txBody>
@@ -1429,25 +1369,19 @@
           <a:p>
             <a:r>
               <a:rPr lang="en-US" sz="1400" b="0" dirty="0"/>
-              <a:t>Đi từ dưới lên: ý kiến chuyên gia, loạt ca, bệnh-chứng, thuần tập, thử nghiệm ngẫu nhiên, và tổng quan hệ thống gộp nhiều nghiên cứu.</a:t>
+              <a:t>Đi từ dưới lên. Thiết kế càng cao càng chống sai lệch tốt hơn với câu hỏi điều trị, nhưng thử nghiệm làm kém vẫn có thể sai.</a:t>
             </a:r>
           </a:p>
           <a:p>
             <a:r>
               <a:rPr lang="en-US" sz="1400" b="0" dirty="0"/>
-              <a:t>Thiết kế càng cao càng chống sai lệch tốt hơn với câu hỏi 'điều trị X có hiệu quả không?'. Thử nghiệm nhỏ hoặc làm kém vẫn có thể sai.</a:t>
+              <a:t>Không dạy thiết kế ở đây (Buổi 3).</a:t>
             </a:r>
           </a:p>
           <a:p>
             <a:r>
               <a:rPr lang="en-US" sz="1400" b="0" dirty="0"/>
-              <a:t>Với câu hỏi về tần suất, tác hại và tiên lượng, thiết kế quan sát thường là lựa chọn đúng.</a:t>
-            </a:r>
-          </a:p>
-          <a:p>
-            <a:r>
-              <a:rPr lang="en-US" sz="1400" b="0" dirty="0"/>
-              <a:t>Thời gian: 4 phút. Buổi 3 học kỹ từng thiết kế: đừng dạy thiết kế ở đây.</a:t>
+              <a:t>Thời gian: 4 phút.</a:t>
             </a:r>
           </a:p>
         </p:txBody>
@@ -1528,13 +1462,7 @@
           <a:p>
             <a:r>
               <a:rPr lang="en-US" sz="1400" b="0" dirty="0"/>
-              <a:t>Cho 1 phút rồi chia sẻ kết quả. Đáp án: A, B, C, D.</a:t>
-            </a:r>
-          </a:p>
-          <a:p>
-            <a:r>
-              <a:rPr lang="en-US" sz="1400" b="0" dirty="0"/>
-              <a:t>C chính là thử nghiệm CLASSIC, không thấy khác biệt tử vong 90 ngày.</a:t>
+              <a:t>Đáp án: A, B, C, D. C chính là thử nghiệm CLASSIC.</a:t>
             </a:r>
           </a:p>
           <a:p>
@@ -1627,37 +1555,25 @@
           <a:p>
             <a:r>
               <a:rPr lang="en-US" sz="1400" b="0" dirty="0"/>
-              <a:t>Hai bài báo này được nhắc đến ở mọi buổi.</a:t>
+              <a:t>Bài báo 1: thử nghiệm thí điểm (thử nghiệm nhỏ để xem có làm được thử nghiệm lớn không). Bài báo 2: thuần tập ghép cặp, giống lựa chọn B trong câu hỏi nhanh.</a:t>
             </a:r>
           </a:p>
           <a:p>
             <a:r>
               <a:rPr lang="en-US" sz="1400" b="0" dirty="0"/>
-              <a:t>Bài báo 1: thử nghiệm thí điểm tại ba ICU ở Pháp. Thử nghiệm thí điểm là một thử nghiệm nhỏ để xem có làm được thử nghiệm lớn hay không. Nghiên cứu hạn chế dịch 'không nhằm hồi sức' (dịch duy trì và dịch pha thuốc).</a:t>
+              <a:t>Chưa đọc bây giờ. Buổi 2 đọc phần tóm tắt của Bài báo 1.</a:t>
             </a:r>
           </a:p>
           <a:p>
             <a:r>
               <a:rPr lang="en-US" sz="1400" b="0" dirty="0"/>
-              <a:t>Bài báo 2: thuần tập ghép cặp từ sổ đăng ký của Liên minh Nhiễm khuẩn huyết Hàn Quốc, giống lựa chọn B trong câu hỏi nhanh.</a:t>
-            </a:r>
-          </a:p>
-          <a:p>
-            <a:r>
-              <a:rPr lang="en-US" sz="1400" b="0" dirty="0"/>
-              <a:t>Chưa cần đọc bây giờ. Ở Buổi 2, cả lớp cùng đọc phần tóm tắt của Bài báo 1.</a:t>
+              <a:t>Trước Buổi 1, gửi email hai tệp PDF gốc kèm phiếu bài tập Buổi 1.</a:t>
             </a:r>
           </a:p>
           <a:p>
             <a:r>
               <a:rPr lang="en-US" sz="1400" b="0" dirty="0"/>
               <a:t>Thời gian: 2 phút.</a:t>
-            </a:r>
-          </a:p>
-          <a:p>
-            <a:r>
-              <a:rPr lang="en-US" sz="1400" b="0" dirty="0"/>
-              <a:t>Trước Buổi 1, gửi email hai tệp PDF gốc (Course/Papers, tệp có chữ 'original') kèm phiếu bài tập Buổi 1.</a:t>
             </a:r>
           </a:p>
         </p:txBody>
@@ -1738,13 +1654,13 @@
           <a:p>
             <a:r>
               <a:rPr lang="en-US" sz="1400" b="0" dirty="0"/>
-              <a:t>Mỗi ô một câu. Tuần 1-2 học ba ô màu xanh đậm: vấn đề, câu hỏi, tìm y văn.</a:t>
+              <a:t>Mỗi ô một câu. Tuần 1-2 học ba ô màu xanh đậm.</a:t>
             </a:r>
           </a:p>
           <a:p>
             <a:r>
               <a:rPr lang="en-US" sz="1400" b="0" dirty="0"/>
-              <a:t>Quan niệm sai: 'nghiên cứu là thu thập số liệu'. Thu thập số liệu đến sau câu hỏi, thiết kế và phê duyệt đạo đức.</a:t>
+              <a:t>Ý chính: thu thập số liệu đến sau câu hỏi, thiết kế và phê duyệt đạo đức.</a:t>
             </a:r>
           </a:p>
           <a:p>
@@ -1831,13 +1747,13 @@
           <a:p>
             <a:r>
               <a:rPr lang="en-US" sz="1400" b="0" dirty="0"/>
-              <a:t>Hỏi: 'Hãy nghĩ tới một việc trong khoa mà mỗi người làm một kiểu và chưa ai biết cách nào tốt nhất. Gõ vào khung chat.' Đọc to hai ba câu trả lời.</a:t>
+              <a:t>Hỏi: 'Việc gì trong khoa mỗi người làm một kiểu mà chưa ai biết cách nào tốt nhất? Gõ vào chat.' Đọc to hai ba câu trả lời.</a:t>
             </a:r>
           </a:p>
           <a:p>
             <a:r>
               <a:rPr lang="en-US" sz="1400" b="0" dirty="0"/>
-              <a:t>Ý chính: nghiên cứu bắt đầu từ điều còn chưa chắc chắn trong lâm sàng, không phải từ thống kê.</a:t>
+              <a:t>Ý chính: nghiên cứu bắt đầu từ điều chưa chắc chắn trong lâm sàng, không phải từ thống kê.</a:t>
             </a:r>
           </a:p>
           <a:p>
@@ -1924,19 +1840,13 @@
           <a:p>
             <a:r>
               <a:rPr lang="en-US" sz="1400" b="0" dirty="0"/>
-              <a:t>Ba hàng đầu: loại dữ liệu. Hai hàng cuối: nguồn dữ liệu.</a:t>
+              <a:t>Ý chính: nghiên cứu định tính có phương pháp chặt chẽ riêng.</a:t>
             </a:r>
           </a:p>
           <a:p>
             <a:r>
               <a:rPr lang="en-US" sz="1400" b="0" dirty="0"/>
-              <a:t>Quan niệm sai: 'nghiên cứu định tính chỉ là ý kiến'. Nó có phương pháp chặt chẽ riêng.</a:t>
-            </a:r>
-          </a:p>
-          <a:p>
-            <a:r>
-              <a:rPr lang="en-US" sz="1400" b="0" dirty="0"/>
-              <a:t>Thời gian: 3 phút. Thiết kế định tính học lại ở Buổi 3.</a:t>
+              <a:t>Thời gian: 3 phút.</a:t>
             </a:r>
           </a:p>
         </p:txBody>
@@ -2017,13 +1927,13 @@
           <a:p>
             <a:r>
               <a:rPr lang="en-US" sz="1400" b="0" dirty="0"/>
-              <a:t>Mời hai ba người trả lời ngắn. Đáp án ở slide sau.</a:t>
+              <a:t>Mời hai ba người trả lời. Đáp án ở slide sau.</a:t>
             </a:r>
           </a:p>
           <a:p>
             <a:r>
               <a:rPr lang="en-US" sz="1400" b="0" dirty="0"/>
-              <a:t>Nếu lớp lưỡng lự ở câu C: hồ sơ được ghi để chăm sóc người bệnh, không phải cho nghiên cứu này, nên dùng lại là nghiên cứu thứ cấp.</a:t>
+              <a:t>Nếu lớp lưỡng lự ở câu C: hồ sơ được ghi để chăm sóc người bệnh, nên dùng lại là nghiên cứu thứ cấp.</a:t>
             </a:r>
           </a:p>
           <a:p>
@@ -2110,13 +2020,7 @@
           <a:p>
             <a:r>
               <a:rPr lang="en-US" sz="1400" b="0" dirty="0"/>
-              <a:t>Hai câu hỏi phân loại được gần như mọi nghiên cứu: loại dữ liệu và nguồn dữ liệu.</a:t>
-            </a:r>
-          </a:p>
-          <a:p>
-            <a:r>
-              <a:rPr lang="en-US" sz="1400" b="0" dirty="0"/>
-              <a:t>Nghiên cứu thứ cấp thường khả thi nhất với một khoa bận rộn, nếu hồ sơ được ghi tốt (Buổi 5).</a:t>
+              <a:t>Nghiên cứu thứ cấp thường khả thi nhất với một khoa bận rộn, nếu hồ sơ được ghi tốt.</a:t>
             </a:r>
           </a:p>
           <a:p>
@@ -2203,13 +2107,7 @@
           <a:p>
             <a:r>
               <a:rPr lang="en-US" sz="1400" b="0" dirty="0"/>
-              <a:t>Mười một trạm. Màu cho biết tuần nào của khóa học dạy trạm đó.</a:t>
-            </a:r>
-          </a:p>
-          <a:p>
-            <a:r>
-              <a:rPr lang="en-US" sz="1400" b="0" dirty="0"/>
-              <a:t>Trạm 1-6 là lên kế hoạch và thực hiện nghiên cứu. Trạm 7-11 là công bố. Thử nghiệm phải đăng ký trước khi nhận người bệnh đầu tiên. Con đường thường mất một đến ba năm, và nhiều nghiên cứu dừng lại ở trạm 7.</a:t>
+              <a:t>Trạm 1-6 là lên kế hoạch và thực hiện nghiên cứu. Trạm 7-11 là công bố.</a:t>
             </a:r>
           </a:p>
           <a:p>
@@ -2221,7 +2119,7 @@
           <a:p>
             <a:r>
               <a:rPr lang="en-US" sz="1400" b="0" dirty="0"/>
-              <a:t>Thời gian: 3 phút, rồi 3 phút hỏi đáp. Phần 1.1 kết thúc lúc 1:10 (20:40).</a:t>
+              <a:t>Thời gian: 3 phút + 3 phút hỏi đáp. Phần 1.1 kết thúc lúc 20:40.</a:t>
             </a:r>
           </a:p>
         </p:txBody>
@@ -2302,7 +2200,7 @@
           <a:p>
             <a:r>
               <a:rPr lang="en-US" sz="1400" b="0" dirty="0"/>
-              <a:t>Giải lao (1:10-1:25, 20:40-20:55). Gửi giờ bắt đầu lại vào chat, kèm đường link phiếu bài tập Buổi 1: Bài tập 1 dùng sau giải lao. Bắt đầu lại đúng giờ.</a:t>
+              <a:t>Giải lao 20:40-20:55. Gửi giờ bắt đầu lại và đường link phiếu bài tập Buổi 1 vào chat.</a:t>
             </a:r>
           </a:p>
         </p:txBody>
@@ -2383,19 +2281,7 @@
           <a:p>
             <a:r>
               <a:rPr lang="en-US" sz="1400" b="0" dirty="0"/>
-              <a:t>Phần 1.2 (1:25-2:05, 20:55-21:35).</a:t>
-            </a:r>
-          </a:p>
-          <a:p>
-            <a:r>
-              <a:rPr lang="en-US" sz="1400" b="0" dirty="0"/>
-              <a:t>Một băn khoăn mơ hồ ('dịch truyền có hại không?') phải thành một câu hỏi chính xác trước khi làm bất cứ việc gì khác.</a:t>
-            </a:r>
-          </a:p>
-          <a:p>
-            <a:r>
-              <a:rPr lang="en-US" sz="1400" b="0" dirty="0"/>
-              <a:t>Thời gian: 30 giây.</a:t>
+              <a:t>Phần 1.2: 20:55-21:35. Thời gian: 30 giây.</a:t>
             </a:r>
           </a:p>
         </p:txBody>
@@ -2476,18 +2362,6 @@
           <a:p>
             <a:r>
               <a:rPr lang="en-US" sz="1400" b="0" dirty="0"/>
-              <a:t>Sáu nguồn câu hỏi thường gặp, đều từ công việc hằng ngày.</a:t>
-            </a:r>
-          </a:p>
-          <a:p>
-            <a:r>
-              <a:rPr lang="en-US" sz="1400" b="0" dirty="0"/>
-              <a:t>Trước khi gọi một việc là nghiên cứu, hãy kiểm tra câu trả lời đã có chưa. Nếu có rồi, việc cần làm là áp dụng.</a:t>
-            </a:r>
-          </a:p>
-          <a:p>
-            <a:r>
-              <a:rPr lang="en-US" sz="1400" b="0" dirty="0"/>
               <a:t>Nhắc lại các câu hỏi cả lớp đã gõ vào chat lúc đầu buổi.</a:t>
             </a:r>
           </a:p>
@@ -2575,13 +2449,7 @@
           <a:p>
             <a:r>
               <a:rPr lang="en-US" sz="1400" b="0" dirty="0"/>
-              <a:t>PICO = Population (đối tượng), Intervention (can thiệp), Comparison (so sánh), Outcome (kết cục). T (Time, thời gian) cho biết khi nào đo kết cục.</a:t>
-            </a:r>
-          </a:p>
-          <a:p>
-            <a:r>
-              <a:rPr lang="en-US" sz="1400" b="0" dirty="0"/>
-              <a:t>Mỗi chữ cái buộc mình quyết định: người bệnh nào, hạn chế thế nào, so với gì, kết cục nào và đo lúc nào?</a:t>
+              <a:t>Mỗi chữ cái buộc mình phải quyết định.</a:t>
             </a:r>
           </a:p>
           <a:p>
@@ -2674,19 +2542,13 @@
           <a:p>
             <a:r>
               <a:rPr lang="en-US" sz="1400" b="0" dirty="0"/>
-              <a:t>Ba ví dụ ở các khoa khác. PECO là PICO với E (Exposure, phơi nhiễm) thay cho I: một yếu tố người bệnh có sẵn, nhà nghiên cứu không chỉ định, như béo phì hay cân bằng dịch dương.</a:t>
+              <a:t>Hàng 3 hỏi một điều phổ biến đến mức nào, nên chỉ cần P và O (và T).</a:t>
             </a:r>
           </a:p>
           <a:p>
             <a:r>
               <a:rPr lang="en-US" sz="1400" b="0" dirty="0"/>
-              <a:t>Hàng 3 chỉ cần P và O (và T): hỏi một điều phổ biến đến mức nào.</a:t>
-            </a:r>
-          </a:p>
-          <a:p>
-            <a:r>
-              <a:rPr lang="en-US" sz="1400" b="0" dirty="0"/>
-              <a:t>Hỏi: 'Hãy đặt một câu hỏi PECO về dịch truyền.' Gợi ý: ở người lớn bị nhiễm khuẩn huyết, cân bằng dịch dương đến ngày 3, so với cân bằng trung tính hoặc âm, có liên quan với tử vong đến ngày 28 không? Đây là câu hỏi của Bài báo 2.</a:t>
+              <a:t>Hỏi: 'Hãy đặt một câu hỏi PECO về dịch truyền.' Gợi ý: ở người lớn bị nhiễm khuẩn huyết, cân bằng dịch dương đến ngày 3, so với cân bằng trung tính hoặc âm, có liên quan với tử vong đến ngày 28 không? (Câu hỏi của Bài báo 2.)</a:t>
             </a:r>
           </a:p>
           <a:p>
@@ -2773,13 +2635,13 @@
           <a:p>
             <a:r>
               <a:rPr lang="en-US" sz="1400" b="0" dirty="0"/>
-              <a:t>Đọc chậm câu hỏi. Cho 1 phút bình chọn. Đáp án: C. D là thời gian (T), A thuộc P, B là I.</a:t>
+              <a:t>Đọc chậm câu hỏi. Cho 1 phút bình chọn. Đáp án: C. D là T, A thuộc P, B là I.</a:t>
             </a:r>
           </a:p>
           <a:p>
             <a:r>
               <a:rPr lang="en-US" sz="1400" b="0" dirty="0"/>
-              <a:t>Chú ý nếu có người chọn 'sốc nhiễm khuẩn' là kết cục: nó đã xảy ra rồi, nên nó xác định ai đủ tiêu chuẩn.</a:t>
+              <a:t>Chú ý nếu có người chọn 'sốc nhiễm khuẩn' là O: nó xác định ai đủ tiêu chuẩn.</a:t>
             </a:r>
           </a:p>
           <a:p>
@@ -2866,13 +2728,19 @@
           <a:p>
             <a:r>
               <a:rPr lang="en-US" sz="1400" b="0" dirty="0"/>
-              <a:t>Tuần 1-2: câu hỏi và bằng chứng. Tuần 3-4: thiết kế và sai lệch. Tuần 5-6: dữ liệu và phân tích. Tuần 7-8: đạo đức, viết và công bố. Mỗi thứ Bảy một buổi, giữa hai buổi có một tuần để làm bài về nhà.</a:t>
+              <a:t>Mỗi khối hai buổi, giữa hai buổi cách nhau một tuần.</a:t>
             </a:r>
           </a:p>
           <a:p>
             <a:r>
               <a:rPr lang="en-US" sz="1400" b="0" dirty="0"/>
-              <a:t>Một ví dụ xuyên suốt cả khóa: dịch truyền trong sốc nhiễm khuẩn và tử vong 28 ngày. Từ Buổi 5, ví dụ này tiếp tục trong nghiên cứu của khóa học, FLUID-ICU.</a:t>
+              <a:t>Một ví dụ xuyên suốt: dịch truyền trong sốc nhiễm khuẩn và tử vong 28 ngày. Từ Buổi 5, ví dụ này tiếp tục trong nghiên cứu của khóa học, FLUID-ICU.</a:t>
+            </a:r>
+          </a:p>
+          <a:p>
+            <a:r>
+              <a:rPr lang="en-US" sz="1400" b="0" dirty="0"/>
+              <a:t>Yêu cầu nằm ở Proposal_Brief, gửi trước Buổi 1 cùng Presentation_Guide và Proposal_Rubric. Hướng dẫn viết bản thảo được chia sẻ ở Buổi 6.</a:t>
             </a:r>
           </a:p>
           <a:p>
@@ -2959,13 +2827,7 @@
           <a:p>
             <a:r>
               <a:rPr lang="en-US" sz="1400" b="0" dirty="0"/>
-              <a:t>Kết cục phải là điều có thể xảy ra sau khi bắt đầu can thiệp.</a:t>
-            </a:r>
-          </a:p>
-          <a:p>
-            <a:r>
-              <a:rPr lang="en-US" sz="1400" b="0" dirty="0"/>
-              <a:t>Kết cục của Bài báo 1 là cân bằng dịch, không phải tử vong, nên bài này không trả lời được câu hỏi tử vong 28 ngày.</a:t>
+              <a:t>Kết cục của Bài báo 1 là cân bằng dịch, nên bài này không trả lời được câu hỏi tử vong.</a:t>
             </a:r>
           </a:p>
           <a:p>
@@ -3052,7 +2914,7 @@
           <a:p>
             <a:r>
               <a:rPr lang="en-US" sz="1400" b="0" dirty="0"/>
-              <a:t>Động từ cho biết loại câu hỏi: 'bao nhiêu' là mô tả, 'có liên quan với' là quan sát, 'có làm giảm' gợi ý thử nghiệm.</a:t>
+              <a:t>Động từ cho biết loại câu hỏi: 'bao nhiêu', 'có liên quan với', 'có làm giảm'.</a:t>
             </a:r>
           </a:p>
           <a:p>
@@ -3145,12 +3007,6 @@
           <a:p>
             <a:r>
               <a:rPr lang="en-US" sz="1400" b="0" dirty="0"/>
-              <a:t>Bên trái: câu hỏi ngoài hành lang, từ nào cũng chưa rõ. Bên phải: cùng băn khoăn đó, viết theo PICO(T).</a:t>
-            </a:r>
-          </a:p>
-          <a:p>
-            <a:r>
-              <a:rPr lang="en-US" sz="1400" b="0" dirty="0"/>
               <a:t>Hỏi: 'Hãy làm câu này trả lời được: Albumin có tốt hơn không?' Gợi ý: ở người lớn bị sốc nhiễm khuẩn, albumin kèm dịch tinh thể, so với chỉ dịch tinh thể, có làm giảm tử vong 28 ngày không?</a:t>
             </a:r>
           </a:p>
@@ -3238,19 +3094,7 @@
           <a:p>
             <a:r>
               <a:rPr lang="en-US" sz="1400" b="0" dirty="0"/>
-              <a:t>FINER = Feasible (khả thi), Interesting (thú vị), Novel (mới), Ethical (đạo đức), Relevant (phù hợp), theo Hulley, sách Designing Clinical Research.</a:t>
-            </a:r>
-          </a:p>
-          <a:p>
-            <a:r>
-              <a:rPr lang="en-US" sz="1400" b="0" dirty="0"/>
-              <a:t>Khả thi là tiêu chí hay trượt nhất trong nghiên cứu tại bệnh viện: không đủ người bệnh, hoặc kết cục quá hiếm.</a:t>
-            </a:r>
-          </a:p>
-          <a:p>
-            <a:r>
-              <a:rPr lang="en-US" sz="1400" b="0" dirty="0"/>
-              <a:t>Mới không có nghĩa là 'chưa ai nghiên cứu': làm ở bối cảnh mới hoặc với thiết kế tốt hơn vẫn có thể là mới.</a:t>
+              <a:t>Khả thi là tiêu chí hay trượt nhất trong nghiên cứu tại bệnh viện. Mới có thể là bối cảnh mới hoặc thiết kế tốt hơn.</a:t>
             </a:r>
           </a:p>
           <a:p>
@@ -3343,19 +3187,13 @@
           <a:p>
             <a:r>
               <a:rPr lang="en-US" sz="1400" b="0" dirty="0"/>
-              <a:t>F màu đỏ: muốn thấy khác biệt vài điểm phần trăm về tử vong cần hơn một nghìn người bệnh. Hai thử nghiệm CLASSIC (2022) và CLOVERS (2023) mỗi thử nghiệm có hơn 1500 người.</a:t>
+              <a:t>F màu đỏ: CLASSIC (2022) và CLOVERS (2023) mỗi thử nghiệm cần hơn 1500 người bệnh.</a:t>
             </a:r>
           </a:p>
           <a:p>
             <a:r>
               <a:rPr lang="en-US" sz="1400" b="0" dirty="0"/>
-              <a:t>N màu vàng: các thử nghiệm lớn đó không thấy khác biệt về tử vong. E màu vàng: xin đồng ý trong sốc nhiễm khuẩn rất khó (Buổi 7).</a:t>
-            </a:r>
-          </a:p>
-          <a:p>
-            <a:r>
-              <a:rPr lang="en-US" sz="1400" b="0" dirty="0"/>
-              <a:t>Cách thu nhỏ: đổi kết cục, làm thử nghiệm thí điểm như Bài báo 1, hoặc đặt câu hỏi mô tả. Slide sau làm đúng việc này.</a:t>
+              <a:t>Cách thu nhỏ: đổi kết cục, làm thử nghiệm thí điểm, hoặc đặt câu hỏi mô tả.</a:t>
             </a:r>
           </a:p>
           <a:p>
@@ -3442,37 +3280,31 @@
           <a:p>
             <a:r>
               <a:rPr lang="en-US" sz="1400" b="0" dirty="0"/>
-              <a:t>Chia sẻ Bài tập 1 còn trống và gõ câu trả lời khi mọi người nói, mỗi chữ cái mời một người.</a:t>
+              <a:t>Gõ câu trả lời vào Bài tập 1 còn trống khi mọi người nói, mỗi chữ cái mời một người.</a:t>
             </a:r>
           </a:p>
           <a:p>
             <a:r>
               <a:rPr lang="en-US" sz="1400" b="0" dirty="0"/>
-              <a:t>Đa số lớp chọn A hoặc C. Nếu chia đều, chọn A: đó là thử nghiệm thí điểm Bài báo 1 đã làm, và bài tập nhanh ở phần 1.3 dùng lại nó.</a:t>
+              <a:t>Nếu chia đều, chọn A (thử nghiệm thí điểm Bài báo 1 đã làm, dùng lại ở phần 1.3). B là câu hỏi PECO và là câu hỏi chính của FLUID-ICU.</a:t>
             </a:r>
           </a:p>
           <a:p>
             <a:r>
               <a:rPr lang="en-US" sz="1400" b="0" dirty="0"/>
-              <a:t>Phiên bản B là câu hỏi PECO (cân bằng dịch là phơi nhiễm). Đó là câu hỏi chính của nghiên cứu FLUID-ICU của khóa học.</a:t>
+              <a:t>Chú ý: thiếu nhóm so sánh, thiếu mốc thời gian, hai kết cục.</a:t>
             </a:r>
           </a:p>
           <a:p>
             <a:r>
               <a:rPr lang="en-US" sz="1400" b="0" dirty="0"/>
-              <a:t>Lỗi hay gặp: thiếu nhóm so sánh, kết cục không có mốc thời gian, hai kết cục trong một câu hỏi.</a:t>
+              <a:t>Đáp án: s1_solutions_VN, Bài tập 1.</a:t>
             </a:r>
           </a:p>
           <a:p>
             <a:r>
               <a:rPr lang="en-US" sz="1400" b="0" dirty="0"/>
-              <a:t>Đáp án mẫu: Course/Solutions/s1_solutions.md, Bài tập 1.</a:t>
-            </a:r>
-          </a:p>
-          <a:p>
-            <a:r>
-              <a:rPr lang="en-US" sz="1400" b="0" dirty="0"/>
-              <a:t>Thời gian: 8 phút làm + 3 phút tổng kết. Phần 1.3 bắt đầu lúc 2:05 (21:35).</a:t>
+              <a:t>Thời gian: 8 phút + 3 phút tổng kết. Phần 1.3 bắt đầu lúc 21:35.</a:t>
             </a:r>
           </a:p>
         </p:txBody>
@@ -3553,19 +3385,7 @@
           <a:p>
             <a:r>
               <a:rPr lang="en-US" sz="1400" b="0" dirty="0"/>
-              <a:t>Phần 1.3 (2:05-2:25, 21:35-21:55).</a:t>
-            </a:r>
-          </a:p>
-          <a:p>
-            <a:r>
-              <a:rPr lang="en-US" sz="1400" b="0" dirty="0"/>
-              <a:t>Mục tiêu tổng quát (aim), mục tiêu cụ thể (objectives) và giả thuyết là câu hỏi viết thành kế hoạch. Hội đồng đạo đức đọc phần này đầu tiên.</a:t>
-            </a:r>
-          </a:p>
-          <a:p>
-            <a:r>
-              <a:rPr lang="en-US" sz="1400" b="0" dirty="0"/>
-              <a:t>Thời gian: 30 giây.</a:t>
+              <a:t>Phần 1.3: 21:35-21:55. Thời gian: 30 giây.</a:t>
             </a:r>
           </a:p>
         </p:txBody>
@@ -3646,13 +3466,7 @@
           <a:p>
             <a:r>
               <a:rPr lang="en-US" sz="1400" b="0" dirty="0"/>
-              <a:t>Mục tiêu tổng quát là mục đích chung ('So sánh...', 'Mô tả...'). Mục tiêu cụ thể là các bước cụ thể, đo được.</a:t>
-            </a:r>
-          </a:p>
-          <a:p>
-            <a:r>
-              <a:rPr lang="en-US" sz="1400" b="0" dirty="0"/>
-              <a:t>Đánh dấu mục tiêu chính: nó quyết định cỡ mẫu (Buổi 6).</a:t>
+              <a:t>Mục tiêu chính quyết định cỡ mẫu (Buổi 6).</a:t>
             </a:r>
           </a:p>
           <a:p>
@@ -3739,12 +3553,6 @@
           <a:p>
             <a:r>
               <a:rPr lang="en-US" sz="1400" b="0" dirty="0"/>
-              <a:t>'Tìm hiểu' thì không bao giờ xong và không kiểm tra được. 'So sánh cân bằng dịch ngày 5' nêu rõ kết cục, thời điểm và phép so sánh.</a:t>
-            </a:r>
-          </a:p>
-          <a:p>
-            <a:r>
-              <a:rPr lang="en-US" sz="1400" b="0" dirty="0"/>
               <a:t>Hỏi: 'Viết lại: nghiên cứu về cân bằng dịch tại ICU của mình.' Gợi ý: ước tính tỷ lệ người lớn bị sốc nhiễm khuẩn tại ICU của mình có cân bằng dịch dương ở ngày 3.</a:t>
             </a:r>
           </a:p>
@@ -3832,19 +3640,13 @@
           <a:p>
             <a:r>
               <a:rPr lang="en-US" sz="1400" b="0" dirty="0"/>
-              <a:t>H0, giả thuyết không (null hypothesis): không có khác biệt. H1, giả thuyết đối (alternative hypothesis): có khác biệt, theo chiều nào cũng được.</a:t>
+              <a:t>So sánh: tòa án coi bị cáo 'không có tội' (H0) cho đến khi bằng chứng đủ mạnh. 'Không đủ bằng chứng buộc tội' không có nghĩa là 'vô tội'.</a:t>
             </a:r>
           </a:p>
           <a:p>
             <a:r>
               <a:rPr lang="en-US" sz="1400" b="0" dirty="0"/>
-              <a:t>So sánh: tòa án coi bị cáo 'không có tội' (H0) cho đến khi bằng chứng đủ mạnh. 'Không đủ bằng chứng buộc tội' không có nghĩa là 'vô tội'.</a:t>
-            </a:r>
-          </a:p>
-          <a:p>
-            <a:r>
-              <a:rPr lang="en-US" sz="1400" b="0" dirty="0"/>
-              <a:t>Câu hỏi thuần mô tả (phiên bản C) chỉ ước tính một con số, không cần giả thuyết.</a:t>
+              <a:t>Câu hỏi mô tả (phiên bản C) không cần giả thuyết.</a:t>
             </a:r>
           </a:p>
           <a:p>
@@ -3931,7 +3733,7 @@
           <a:p>
             <a:r>
               <a:rPr lang="en-US" sz="1400" b="0" dirty="0"/>
-              <a:t>Cấp độ 1 đưa bạn từ câu hỏi lâm sàng đến bài báo. Ở cấp độ này giảng viên chạy phần mềm, các bạn đọc và diễn giải kết quả. Cấp độ 2 dạy mô hình thống kê bằng R. Cấp độ 3 gồm các phương pháp nâng cao, theo yêu cầu.</a:t>
+              <a:t>Ở Cấp độ 1, giảng viên chạy phần mềm. Các bạn đọc và diễn giải kết quả.</a:t>
             </a:r>
           </a:p>
           <a:p>
@@ -4018,7 +3820,7 @@
           <a:p>
             <a:r>
               <a:rPr lang="en-US" sz="1400" b="0" dirty="0"/>
-              <a:t>5 phút tự viết, rồi 2 phút để hai ba người đọc mục tiêu chính của mình.</a:t>
+              <a:t>5 phút tự viết, rồi hai ba người đọc mục tiêu chính.</a:t>
             </a:r>
           </a:p>
           <a:p>
@@ -4111,19 +3913,19 @@
           <a:p>
             <a:r>
               <a:rPr lang="en-US" sz="1400" b="0" dirty="0"/>
-              <a:t>Kiểm tra chuỗi: O của câu hỏi = mục tiêu chính = kết cục trong H0 và H1. Người phản biện thấy ngay nếu chuỗi này bị đứt.</a:t>
+              <a:t>Kiểm tra chuỗi: O của câu hỏi = mục tiêu chính = kết cục trong H0 và H1.</a:t>
             </a:r>
           </a:p>
           <a:p>
             <a:r>
               <a:rPr lang="en-US" sz="1400" b="0" dirty="0"/>
-              <a:t>Đáp án mẫu: Course/Solutions/s1_solutions.md (Bài tập 2).</a:t>
+              <a:t>Đáp án: s1_solutions_VN, Bài tập 2.</a:t>
             </a:r>
           </a:p>
           <a:p>
             <a:r>
               <a:rPr lang="en-US" sz="1400" b="0" dirty="0"/>
-              <a:t>Thời gian: 3 phút. Phần 1.3 kết thúc lúc 2:25 (21:55).</a:t>
+              <a:t>Thời gian: 3 phút. Phần 1.3 kết thúc lúc 21:55.</a:t>
             </a:r>
           </a:p>
         </p:txBody>
@@ -4204,13 +4006,7 @@
           <a:p>
             <a:r>
               <a:rPr lang="en-US" sz="1400" b="0" dirty="0"/>
-              <a:t>Xây dựng đề cương 1 (2:25-2:55, 21:55-22:25). Mỗi người viết đề cương của riêng mình.</a:t>
-            </a:r>
-          </a:p>
-          <a:p>
-            <a:r>
-              <a:rPr lang="en-US" sz="1400" b="0" dirty="0"/>
-              <a:t>Chuyển ngay sang slide sau.</a:t>
+              <a:t>Xây dựng đề cương 1: 21:55-22:25. Chuyển ngay sang slide sau.</a:t>
             </a:r>
           </a:p>
         </p:txBody>
@@ -4291,31 +4087,25 @@
           <a:p>
             <a:r>
               <a:rPr lang="en-US" sz="1400" b="0" dirty="0"/>
-              <a:t>Phút 0-8: chia sẻ Course/Templates/Research_Proposal_Template.docx và điền Phần 1 cho phiên bản A, vừa làm vừa nói lý do.</a:t>
+              <a:t>Phút 0-8: chia sẻ Research_Proposal_Template_VN.docx và điền Phần 1 cho phiên bản A, vừa làm vừa nói lý do.</a:t>
             </a:r>
           </a:p>
           <a:p>
             <a:r>
               <a:rPr lang="en-US" sz="1400" b="0" dirty="0"/>
-              <a:t>Phút 8-25: mỗi người tự viết. Có thể tắt camera. Giảng viên trả lời câu hỏi trong chat.</a:t>
+              <a:t>Phút 8-25: mỗi người tự viết. Trả lời câu hỏi trong chat. Chưa có chủ đề? Xem lại chat lúc chào mừng, hoặc tạm dùng phiên bản A hay C.</a:t>
             </a:r>
           </a:p>
           <a:p>
             <a:r>
               <a:rPr lang="en-US" sz="1400" b="0" dirty="0"/>
-              <a:t>Chưa có chủ đề? Xem lại các câu hỏi trong chat lúc chào mừng, hoặc tạm dùng phiên bản A hay C.</a:t>
+              <a:t>Phút 25-30: hai bạn tình nguyện đọc câu hỏi và mục tiêu.</a:t>
             </a:r>
           </a:p>
           <a:p>
             <a:r>
               <a:rPr lang="en-US" sz="1400" b="0" dirty="0"/>
-              <a:t>Phút 25-30: hai bạn tình nguyện đọc câu hỏi và mục tiêu. Mỗi người khác góp một ý cải thiện.</a:t>
-            </a:r>
-          </a:p>
-          <a:p>
-            <a:r>
-              <a:rPr lang="en-US" sz="1400" b="0" dirty="0"/>
-              <a:t>Thời gian: 30 phút. Tổng kết bắt đầu lúc 2:55 (22:25).</a:t>
+              <a:t>Thời gian: 30 phút. Tổng kết lúc 22:25.</a:t>
             </a:r>
           </a:p>
         </p:txBody>
@@ -4396,13 +4186,7 @@
           <a:p>
             <a:r>
               <a:rPr lang="en-US" sz="1400" b="0" dirty="0"/>
-              <a:t>Tổng kết (2:55-3:00, 22:25-22:30). Đọc nhanh sáu từ khóa. Chúng có trong bảng thuật ngữ Anh-Việt của khóa học.</a:t>
-            </a:r>
-          </a:p>
-          <a:p>
-            <a:r>
-              <a:rPr lang="en-US" sz="1400" b="0" dirty="0"/>
-              <a:t>Thời gian: 1 phút.</a:t>
+              <a:t>Đọc nhanh các từ khóa. Thời gian: 1 phút.</a:t>
             </a:r>
           </a:p>
         </p:txBody>
@@ -4483,12 +4267,6 @@
           <a:p>
             <a:r>
               <a:rPr lang="en-US" sz="1400" b="0" dirty="0"/>
-              <a:t>Thứ Bảy tuần sau (Buổi 2): tìm trực tiếp trên PubMed, quản lý tài liệu bằng Zotero và đọc một bài báo trong 15 phút.</a:t>
-            </a:r>
-          </a:p>
-          <a:p>
-            <a:r>
-              <a:rPr lang="en-US" sz="1400" b="0" dirty="0"/>
               <a:t>Thời gian: 1 phút.</a:t>
             </a:r>
           </a:p>
@@ -4570,13 +4348,13 @@
           <a:p>
             <a:r>
               <a:rPr lang="en-US" sz="1400" b="0" dirty="0"/>
-              <a:t>Không chấm điểm. Đáp án: Câu 1 Khả thi: tử vong cần hơn một nghìn người bệnh. Câu 2 ví dụ: 'Ước tính tỷ lệ người lớn bị sốc nhiễm khuẩn tại ICU của mình có cân bằng dịch dương ở ngày 3'.</a:t>
+              <a:t>Đáp án: Câu 1 Khả thi, tử vong cần hơn một nghìn người bệnh. Câu 2 ví dụ: 'Ước tính tỷ lệ người lớn bị sốc nhiễm khuẩn tại ICU của mình có cân bằng dịch dương ở ngày 3'.</a:t>
             </a:r>
           </a:p>
           <a:p>
             <a:r>
               <a:rPr lang="en-US" sz="1400" b="0" dirty="0"/>
-              <a:t>Lưu khung chat và đọc câu trả lời trong tuần. Nếu nhiều người vẫn dùng động từ mơ hồ, mở đầu Buổi 2 bằng một phút về mục tiêu.</a:t>
+              <a:t>Lưu khung chat. Nếu nhiều người vẫn dùng động từ mơ hồ, mở đầu Buổi 2 bằng một phút về mục tiêu.</a:t>
             </a:r>
           </a:p>
           <a:p>
@@ -4663,19 +4441,19 @@
           <a:p>
             <a:r>
               <a:rPr lang="en-US" sz="1400" b="0" dirty="0"/>
-              <a:t>Khoảng 45 phút trong tuần. Từ đồng nghĩa giúp tìm kiếm nhanh hơn, vì PubMed tìm bằng tiếng Anh.</a:t>
+              <a:t>Khoảng 45 phút. PubMed tìm bằng tiếng Anh, nên danh sách từ đồng nghĩa giúp tìm nhanh hơn.</a:t>
             </a:r>
           </a:p>
           <a:p>
             <a:r>
               <a:rPr lang="en-US" sz="1400" b="0" dirty="0"/>
-              <a:t>Buổi 2 cần Zotero: bản desktop, Zotero Connector cho trình duyệt và plug-in Word (zotero.org/download). Ai gặp khó khăn hãy email giảng viên trước thứ Sáu.</a:t>
+              <a:t>Ai gặp khó khăn với Zotero hãy email giảng viên trước thứ Sáu.</a:t>
             </a:r>
           </a:p>
           <a:p>
             <a:r>
               <a:rPr lang="en-US" sz="1400" b="0" dirty="0"/>
-              <a:t>Kết thúc đúng giờ. Thời gian: 1 phút.</a:t>
+              <a:t>Thời gian: 1 phút. Kết thúc đúng giờ.</a:t>
             </a:r>
           </a:p>
         </p:txBody>
@@ -4756,7 +4534,7 @@
           <a:p>
             <a:r>
               <a:rPr lang="en-US" sz="1400" b="0" dirty="0"/>
-              <a:t>Slide bổ sung (Buổi 1). Tùy chọn: dùng nếu lớp đi nhanh, hoặc giới thiệu để học viên tự học.</a:t>
+              <a:t>Tùy chọn. Dùng nếu còn thời gian, hoặc để tự học.</a:t>
             </a:r>
           </a:p>
         </p:txBody>
@@ -4837,19 +4615,7 @@
           <a:p>
             <a:r>
               <a:rPr lang="en-US" sz="1400" b="0" dirty="0"/>
-              <a:t>Slide bổ sung, dùng khi học viên hỏi dự án của mình có cần phê duyệt đạo đức không.</a:t>
-            </a:r>
-          </a:p>
-          <a:p>
-            <a:r>
-              <a:rPr lang="en-US" sz="1400" b="0" dirty="0"/>
-              <a:t>Audit so sánh thực hành với một tiêu chuẩn đã thống nhất. Cải tiến chất lượng (QI) thay đổi quy trình của khoa qua từng vòng nhỏ Lập kế hoạch, Thực hiện, Kiểm tra, Hành động (PDSA). Nếu dự án phân bổ ngẫu nhiên, thêm rủi ro mới hoặc thu thập dữ liệu ngoài chăm sóc thường quy, đó là nghiên cứu.</a:t>
-            </a:r>
-          </a:p>
-          <a:p>
-            <a:r>
-              <a:rPr lang="en-US" sz="1400" b="0" dirty="0"/>
-              <a:t>Quy định mỗi nơi một khác: xem quy định của cơ sở. Phê duyệt đạo đức học ở Buổi 7.</a:t>
+              <a:t>Dùng khi có người hỏi dự án có cần phê duyệt đạo đức không. Nếu phân bổ ngẫu nhiên, thêm rủi ro hoặc thu thập dữ liệu ngoài chăm sóc thường quy, đó là nghiên cứu. Xem quy định của cơ sở.</a:t>
             </a:r>
           </a:p>
           <a:p>
@@ -4936,25 +4702,19 @@
           <a:p>
             <a:r>
               <a:rPr lang="en-US" sz="1400" b="0" dirty="0"/>
-              <a:t>Đề cương: viết từng phần trên lớp, nộp ở Buổi 8. Vài bạn tình nguyện trình bày (mỗi người 6 phút).</a:t>
+              <a:t>Đề cương: khoảng 5 bạn tình nguyện trình bày ở Buổi 8 (mỗi người 6 phút). Mọi người đều nộp đề cương và 6 slide qua email. Chi tiết: Proposal_Brief, gửi qua email trước Buổi 1.</a:t>
             </a:r>
           </a:p>
           <a:p>
             <a:r>
               <a:rPr lang="en-US" sz="1400" b="0" dirty="0"/>
-              <a:t>Bản thảo: FLUID-ICU là nghiên cứu của khóa học trên 620 người bệnh ICU bị nhiễm khuẩn huyết, có năm câu hỏi (Q1 đến Q5). Mỗi người chọn một câu, nhận bảng và hình kết quả, rồi viết bài. Sau Buổi 8, mỗi người phản biện bản thảo của một đồng nghiệp.</a:t>
+              <a:t>Phần Kết quả: cuối Buổi 6, mỗi người chọn một câu hỏi FLUID-ICU (Q1 đến Q5) và viết phần Kết quả từ gói kết quả của câu đó. Sau Buổi 8, mỗi người phản biện bản thảo của một đồng nghiệp.</a:t>
             </a:r>
           </a:p>
           <a:p>
             <a:r>
               <a:rPr lang="en-US" sz="1400" b="0" dirty="0"/>
-              <a:t>Cả hai viết bằng tiếng Anh. Có thể viết bằng tiếng Việt nếu thật sự không viết được tiếng Anh.</a:t>
-            </a:r>
-          </a:p>
-          <a:p>
-            <a:r>
-              <a:rPr lang="en-US" sz="1400" b="0" dirty="0"/>
-              <a:t>Hướng dẫn: Course/Assignment/proposal_brief và manuscript_brief.</a:t>
+              <a:t>Viết bằng tiếng Anh. Có thể viết tiếng Việt nếu thật sự không viết được tiếng Anh.</a:t>
             </a:r>
           </a:p>
           <a:p>
@@ -5041,19 +4801,13 @@
           <a:p>
             <a:r>
               <a:rPr lang="en-US" sz="1400" b="0" dirty="0"/>
-              <a:t>Slide dự phòng cho 'Ba ví dụ khác: PICO, PECO và P + O' (theo đề nghị của người phản biện).</a:t>
+              <a:t>Dự phòng cho 'Ba ví dụ khác'. Học viên viết mỗi dòng một câu hỏi vào chat, rồi chiếu slide này.</a:t>
             </a:r>
           </a:p>
           <a:p>
             <a:r>
               <a:rPr lang="en-US" sz="1400" b="0" dirty="0"/>
-              <a:t>Dùng như một bài tập ngắn: học viên viết mỗi dòng một câu hỏi vào chat, hoặc giảng viên gọi hai hoặc ba người (bật micro). Sau đó chiếu slide này.</a:t>
-            </a:r>
-          </a:p>
-          <a:p>
-            <a:r>
-              <a:rPr lang="en-US" sz="1400" b="0" dirty="0"/>
-              <a:t>Nhấn mạnh: câu hỏi điều trị dùng 'làm giảm' vì bảng kiểm được chủ động áp dụng. Câu hỏi PECO dùng 'có liên quan' vì béo phì không được chỉ định. Câu hỏi 'bao nhiêu' không có phép so sánh.</a:t>
+              <a:t>Ý chính: 'làm giảm' vì bảng kiểm được chủ động áp dụng, 'có liên quan' vì béo phì không được chỉ định, câu 'bao nhiêu' không có so sánh.</a:t>
             </a:r>
           </a:p>
           <a:p>
@@ -5140,13 +4894,7 @@
           <a:p>
             <a:r>
               <a:rPr lang="en-US" sz="1400" b="0" dirty="0"/>
-              <a:t>Slide bổ sung. Chẩn đoán: xét nghiệm mới là I, tiêu chuẩn tham chiếu là C, kết cục là độ chính xác (Buổi 4).</a:t>
-            </a:r>
-          </a:p>
-          <a:p>
-            <a:r>
-              <a:rPr lang="en-US" sz="1400" b="0" dirty="0"/>
-              <a:t>Tiên lượng: PECO cộng mốc thời gian. Câu hỏi định tính thường dùng SPIDER (Cooke và cộng sự, 2012).</a:t>
+              <a:t>Chẩn đoán: xét nghiệm mới = I, tiêu chuẩn tham chiếu = C, kết cục = độ chính xác. Câu hỏi định tính thường dùng SPIDER (Cooke 2012).</a:t>
             </a:r>
           </a:p>
           <a:p>
@@ -5233,7 +4981,7 @@
           <a:p>
             <a:r>
               <a:rPr lang="en-US" sz="1400" b="0" dirty="0"/>
-              <a:t>Slide bổ sung. Đáp án: 1 Khả thi (quá lớn, quá dài). 2 Đạo đức (hoãn kháng sinh gây hại). 3 Mới (tháng nào cũng đã đo). 4 Phù hợp (không có tác động hợp lý tới thực hành).</a:t>
+              <a:t>Đáp án: 1 Khả thi. 2 Đạo đức. 3 Mới. 4 Phù hợp.</a:t>
             </a:r>
           </a:p>
           <a:p>
@@ -5320,7 +5068,7 @@
           <a:p>
             <a:r>
               <a:rPr lang="en-US" sz="1400" b="0" dirty="0"/>
-              <a:t>Slide bổ sung. Đây là câu hỏi PECO (quan sát): khó phân bổ ngẫu nhiên điều dưỡng vào ca đêm.</a:t>
+              <a:t>Câu hỏi PECO: khó phân bổ ngẫu nhiên điều dưỡng vào ca đêm.</a:t>
             </a:r>
           </a:p>
           <a:p>
@@ -5407,7 +5155,7 @@
           <a:p>
             <a:r>
               <a:rPr lang="en-US" sz="1400" b="0" dirty="0"/>
-              <a:t>Slide bản quyền. Để trên màn hình khi học viên rời phòng họp.</a:t>
+              <a:t>Để trên màn hình khi học viên rời phòng họp.</a:t>
             </a:r>
           </a:p>
         </p:txBody>
@@ -5488,13 +5236,7 @@
           <a:p>
             <a:r>
               <a:rPr lang="en-US" sz="1400" b="0" dirty="0"/>
-              <a:t>Mỗi thẻ ứng với hai tuần. Mục tiêu là hiểu và diễn giải, không phải tính toán.</a:t>
-            </a:r>
-          </a:p>
-          <a:p>
-            <a:r>
-              <a:rPr lang="en-US" sz="1400" b="0" dirty="0"/>
-              <a:t>Hỏi: 'Thẻ nào làm bạn lo nhất? Trả lời trong chat.' Thường là phân tích. Trấn an: lớp đi chậm và kiểm tra mức hiểu thường xuyên.</a:t>
+              <a:t>Hỏi: 'Thẻ nào làm bạn lo nhất? Trả lời trong chat.' Thường là phân tích. Trấn an: lớp đi chậm và kiểm tra thường xuyên.</a:t>
             </a:r>
           </a:p>
           <a:p>
@@ -5581,13 +5323,7 @@
           <a:p>
             <a:r>
               <a:rPr lang="en-US" sz="1400" b="0" dirty="0"/>
-              <a:t>Mỗi thứ Bảy cùng một nhịp: ôn tập, hai phần học có kiểm tra và bài tập ngắn, 15 phút giải lao, rồi thời gian viết đề cương hoặc bài báo.</a:t>
-            </a:r>
-          </a:p>
-          <a:p>
-            <a:r>
-              <a:rPr lang="en-US" sz="1400" b="0" dirty="0"/>
-              <a:t>Cuối mỗi buổi có slide bổ sung, chỉ dùng khi còn thời gian. Các bạn có thể tự đọc ở nhà.</a:t>
+              <a:t>Thứ Bảy nào cũng cùng một nhịp. Slide bổ sung ở cuối chỉ dùng khi còn thời gian.</a:t>
             </a:r>
           </a:p>
           <a:p>
@@ -5674,13 +5410,13 @@
           <a:p>
             <a:r>
               <a:rPr lang="en-US" sz="1400" b="0" dirty="0"/>
-              <a:t>Trong mỗi phần xây dựng đề cương, giảng viên điền trước phần đó cho ví dụ xuyên suốt trên màn hình chia sẻ. Sau đó bạn viết cùng phần đó cho câu hỏi của mình.</a:t>
+              <a:t>Trong mỗi phần xây dựng đề cương, giảng viên điền trước phần đó cho ví dụ xuyên suốt trên màn hình. Sau đó mọi người viết cùng phần đó cho câu hỏi của mình.</a:t>
             </a:r>
           </a:p>
           <a:p>
             <a:r>
               <a:rPr lang="en-US" sz="1400" b="0" dirty="0"/>
-              <a:t>Mẫu: Course/Templates/Research_Proposal_Template.docx (gửi qua email trước Buổi 1).</a:t>
+              <a:t>Mẫu: Research_Proposal_Template_VN.docx (tiếng Việt) hoặc Research_Proposal_Template.docx (tiếng Anh), gửi qua email cùng hướng dẫn viết đề cương trước Buổi 1.</a:t>
             </a:r>
           </a:p>
           <a:p>
@@ -5767,19 +5503,13 @@
           <a:p>
             <a:r>
               <a:rPr lang="en-US" sz="1400" b="0" dirty="0"/>
-              <a:t>Khoảng 30 bác sĩ và điều dưỡng học từ nhà. Cả lớp làm việc như một nhóm, không chia nhóm.</a:t>
+              <a:t>Cho 3 phút để gõ. Sau đó mời 4-5 người nói và chỉ ra các chủ đề chung (dịch truyền, an thần, nhiễm khuẩn, vận động sớm, an toàn dùng thuốc).</a:t>
             </a:r>
           </a:p>
           <a:p>
             <a:r>
               <a:rPr lang="en-US" sz="1400" b="0" dirty="0"/>
-              <a:t>Cho 3 phút để gõ. Sau đó mời 4-5 người nói câu hỏi của mình và chỉ ra các chủ đề chung (dịch truyền, an thần, nhiễm khuẩn, vận động sớm, an toàn dùng thuốc).</a:t>
-            </a:r>
-          </a:p>
-          <a:p>
-            <a:r>
-              <a:rPr lang="en-US" sz="1400" b="0" dirty="0"/>
-              <a:t>Các câu hỏi nằm sẵn trong chat. Ở phần Xây dựng đề cương 1, mọi người có thể kéo lên xem lại.</a:t>
+              <a:t>Các câu hỏi nằm sẵn trong chat để dùng ở phần Xây dựng đề cương 1.</a:t>
             </a:r>
           </a:p>
           <a:p>
@@ -29893,7 +29623,7 @@
                 <a:latin typeface="Arial"/>
                 <a:cs typeface="Arial"/>
               </a:rPr>
-              <a:t>bản thảo</a:t>
+              <a:t>Kết quả</a:t>
             </a:r>
           </a:p>
         </p:txBody>
@@ -38049,7 +37779,7 @@
         </p:nvSpPr>
         <p:spPr>
           <a:xfrm>
-            <a:off x="457200" y="1742152"/>
+            <a:off x="457200" y="1649548"/>
             <a:ext cx="3625866" cy="640000"/>
           </a:xfrm>
           <a:prstGeom prst="rect">
@@ -38092,8 +37822,8 @@
         </p:nvSpPr>
         <p:spPr>
           <a:xfrm>
-            <a:off x="457200" y="2382152"/>
-            <a:ext cx="3625866" cy="1823542"/>
+            <a:off x="457200" y="2289548"/>
+            <a:ext cx="3625866" cy="2101354"/>
           </a:xfrm>
           <a:prstGeom prst="rect">
             <a:avLst/>
@@ -38141,7 +37871,7 @@
         </p:nvSpPr>
         <p:spPr>
           <a:xfrm>
-            <a:off x="4283066" y="1742152"/>
+            <a:off x="4283066" y="1649548"/>
             <a:ext cx="3625866" cy="640000"/>
           </a:xfrm>
           <a:prstGeom prst="rect">
@@ -38184,8 +37914,8 @@
         </p:nvSpPr>
         <p:spPr>
           <a:xfrm>
-            <a:off x="4283066" y="2382152"/>
-            <a:ext cx="3625866" cy="1823542"/>
+            <a:off x="4283066" y="2289548"/>
+            <a:ext cx="3625866" cy="2101354"/>
           </a:xfrm>
           <a:prstGeom prst="rect">
             <a:avLst/>
@@ -38220,7 +37950,7 @@
                 <a:latin typeface="Arial"/>
                 <a:cs typeface="Arial"/>
               </a:rPr>
-              <a:t>Chính: so sánh cân bằng dịch tích lũy ngày 5 giữa hai nhóm</a:t>
+              <a:t>Chính: so sánh cân bằng dịch tích lũy (ml/kg) ở ngày 5 giữa hai nhóm</a:t>
             </a:r>
           </a:p>
           <a:p>
@@ -38241,7 +37971,7 @@
                 <a:latin typeface="Arial"/>
                 <a:cs typeface="Arial"/>
               </a:rPr>
-              <a:t>Phụ: ước tính tốc độ tuyển người bệnh và mức tuân thủ quy trình</a:t>
+              <a:t>Phụ: ước tính tốc độ tuyển chọn và mức tuân thủ quy trình (tính khả thi)</a:t>
             </a:r>
           </a:p>
         </p:txBody>
@@ -38254,7 +37984,7 @@
         </p:nvSpPr>
         <p:spPr>
           <a:xfrm>
-            <a:off x="8108932" y="1742152"/>
+            <a:off x="8108932" y="1649548"/>
             <a:ext cx="3625866" cy="640000"/>
           </a:xfrm>
           <a:prstGeom prst="rect">
@@ -38297,8 +38027,8 @@
         </p:nvSpPr>
         <p:spPr>
           <a:xfrm>
-            <a:off x="8108932" y="2382152"/>
-            <a:ext cx="3625866" cy="1823542"/>
+            <a:off x="8108932" y="2289548"/>
+            <a:ext cx="3625866" cy="2101354"/>
           </a:xfrm>
           <a:prstGeom prst="rect">
             <a:avLst/>
@@ -38333,7 +38063,7 @@
                 <a:latin typeface="Arial"/>
                 <a:cs typeface="Arial"/>
               </a:rPr>
-              <a:t>H0: cân bằng dịch ngày 5 như nhau ở hai nhóm</a:t>
+              <a:t>H0: cân bằng dịch tích lũy ở ngày 5 như nhau ở hai nhóm</a:t>
             </a:r>
           </a:p>
           <a:p>
@@ -38354,7 +38084,7 @@
                 <a:latin typeface="Arial"/>
                 <a:cs typeface="Arial"/>
               </a:rPr>
-              <a:t>H1: cân bằng dịch ngày 5 khác nhau giữa hai nhóm</a:t>
+              <a:t>H1: có khác nhau</a:t>
             </a:r>
           </a:p>
         </p:txBody>
@@ -42573,7 +42303,7 @@
                 <a:latin typeface="Arial"/>
                 <a:cs typeface="Arial"/>
               </a:rPr>
-              <a:t>Cả hai đều là bài cá nhân. Giảng viên hướng dẫn từng bước trên lớp.</a:t>
+              <a:t>Cả hai đều là bài cá nhân. Mỗi bản hướng dẫn nêu rõ yêu cầu và cách đánh giá.</a:t>
             </a:r>
           </a:p>
         </p:txBody>
@@ -42586,7 +42316,7 @@
         </p:nvSpPr>
         <p:spPr>
           <a:xfrm>
-            <a:off x="457200" y="2111157"/>
+            <a:off x="457200" y="2001619"/>
             <a:ext cx="5538800" cy="640000"/>
           </a:xfrm>
           <a:prstGeom prst="rect">
@@ -42629,8 +42359,8 @@
         </p:nvSpPr>
         <p:spPr>
           <a:xfrm>
-            <a:off x="457200" y="2751157"/>
-            <a:ext cx="5538800" cy="1596529"/>
+            <a:off x="457200" y="2641619"/>
+            <a:ext cx="5538800" cy="1925141"/>
           </a:xfrm>
           <a:prstGeom prst="rect">
             <a:avLst/>
@@ -42707,80 +42437,9 @@
                 <a:latin typeface="Arial"/>
                 <a:cs typeface="Arial"/>
               </a:rPr>
-              <a:t>Nộp ở Buổi 8</a:t>
-            </a:r>
-          </a:p>
-        </p:txBody>
-      </p:sp>
-      <p:sp>
-        <p:nvSpPr>
-          <p:cNvPr id="72" name="CardHead"/>
-          <p:cNvSpPr/>
-          <p:nvPr/>
-        </p:nvSpPr>
-        <p:spPr>
-          <a:xfrm>
-            <a:off x="6196000" y="2111157"/>
-            <a:ext cx="5538800" cy="640000"/>
-          </a:xfrm>
-          <a:prstGeom prst="rect">
-            <a:avLst/>
-          </a:prstGeom>
-          <a:solidFill>
-            <a:srgbClr val="0B376C"/>
-          </a:solidFill>
-          <a:ln>
-            <a:noFill/>
-          </a:ln>
-        </p:spPr>
-        <p:txBody>
-          <a:bodyPr wrap="square" lIns="91440" tIns="45720" rIns="91440" bIns="45720" rtlCol="0" anchor="ctr">
-            <a:normAutofit/>
-          </a:bodyPr>
-          <a:lstStyle/>
-          <a:p>
-            <a:pPr marL="0" indent="0" algn="ctr">
-              <a:buNone/>
-            </a:pPr>
-            <a:r>
-              <a:rPr lang="en-US" sz="1900" b="1" dirty="0">
-                <a:solidFill>
-                  <a:srgbClr val="FFFFFF"/>
-                </a:solidFill>
-                <a:latin typeface="Arial"/>
-                <a:cs typeface="Arial"/>
-              </a:rPr>
-              <a:t>Bản thảo bài báo</a:t>
-            </a:r>
-          </a:p>
-        </p:txBody>
-      </p:sp>
-      <p:sp>
-        <p:nvSpPr>
-          <p:cNvPr id="73" name="CardBody"/>
-          <p:cNvSpPr/>
-          <p:nvPr/>
-        </p:nvSpPr>
-        <p:spPr>
-          <a:xfrm>
-            <a:off x="6196000" y="2751157"/>
-            <a:ext cx="5538800" cy="1596529"/>
-          </a:xfrm>
-          <a:prstGeom prst="rect">
-            <a:avLst/>
-          </a:prstGeom>
-          <a:solidFill>
-            <a:srgbClr val="EAF2F5"/>
-          </a:solidFill>
-          <a:ln>
-            <a:noFill/>
-          </a:ln>
-        </p:spPr>
-        <p:txBody>
-          <a:bodyPr wrap="square" lIns="137160" tIns="91440" rIns="137160" bIns="91440" rtlCol="0" anchor="ctr">
-            <a:normAutofit/>
-          </a:bodyPr>
-          <a:lstStyle/>
+              <a:t>Nộp ở Buổi 8 (khoảng 5 bạn tình nguyện trình bày)</a:t>
+            </a:r>
+          </a:p>
           <a:p>
             <a:pPr marL="0" indent="0" algn="ctr">
               <a:lnSpc>
@@ -42799,9 +42458,80 @@
                 <a:latin typeface="Arial"/>
                 <a:cs typeface="Arial"/>
               </a:rPr>
-              <a:t>Dựa trên nghiên cứu của khóa học, FLUID-ICU</a:t>
-            </a:r>
-          </a:p>
+              <a:t>Hướng dẫn viết đề cương: gửi trước Buổi 1</a:t>
+            </a:r>
+          </a:p>
+        </p:txBody>
+      </p:sp>
+      <p:sp>
+        <p:nvSpPr>
+          <p:cNvPr id="72" name="CardHead"/>
+          <p:cNvSpPr/>
+          <p:nvPr/>
+        </p:nvSpPr>
+        <p:spPr>
+          <a:xfrm>
+            <a:off x="6196000" y="2001619"/>
+            <a:ext cx="5538800" cy="640000"/>
+          </a:xfrm>
+          <a:prstGeom prst="rect">
+            <a:avLst/>
+          </a:prstGeom>
+          <a:solidFill>
+            <a:srgbClr val="0B376C"/>
+          </a:solidFill>
+          <a:ln>
+            <a:noFill/>
+          </a:ln>
+        </p:spPr>
+        <p:txBody>
+          <a:bodyPr wrap="square" lIns="91440" tIns="45720" rIns="91440" bIns="45720" rtlCol="0" anchor="ctr">
+            <a:normAutofit/>
+          </a:bodyPr>
+          <a:lstStyle/>
+          <a:p>
+            <a:pPr marL="0" indent="0" algn="ctr">
+              <a:buNone/>
+            </a:pPr>
+            <a:r>
+              <a:rPr lang="en-US" sz="1900" b="1" dirty="0">
+                <a:solidFill>
+                  <a:srgbClr val="FFFFFF"/>
+                </a:solidFill>
+                <a:latin typeface="Arial"/>
+                <a:cs typeface="Arial"/>
+              </a:rPr>
+              <a:t>Phần Kết quả, sẵn sàng để nộp</a:t>
+            </a:r>
+          </a:p>
+        </p:txBody>
+      </p:sp>
+      <p:sp>
+        <p:nvSpPr>
+          <p:cNvPr id="73" name="CardBody"/>
+          <p:cNvSpPr/>
+          <p:nvPr/>
+        </p:nvSpPr>
+        <p:spPr>
+          <a:xfrm>
+            <a:off x="6196000" y="2641619"/>
+            <a:ext cx="5538800" cy="1925141"/>
+          </a:xfrm>
+          <a:prstGeom prst="rect">
+            <a:avLst/>
+          </a:prstGeom>
+          <a:solidFill>
+            <a:srgbClr val="EAF2F5"/>
+          </a:solidFill>
+          <a:ln>
+            <a:noFill/>
+          </a:ln>
+        </p:spPr>
+        <p:txBody>
+          <a:bodyPr wrap="square" lIns="137160" tIns="91440" rIns="137160" bIns="91440" rtlCol="0" anchor="ctr">
+            <a:normAutofit/>
+          </a:bodyPr>
+          <a:lstStyle/>
           <a:p>
             <a:pPr marL="0" indent="0" algn="ctr">
               <a:lnSpc>
@@ -42820,7 +42550,7 @@
                 <a:latin typeface="Arial"/>
                 <a:cs typeface="Arial"/>
               </a:rPr>
-              <a:t>Giảng viên đưa kết quả, bạn viết bài báo</a:t>
+              <a:t>Cho một câu hỏi của FLUID-ICU</a:t>
             </a:r>
           </a:p>
           <a:p>
@@ -42841,7 +42571,28 @@
                 <a:latin typeface="Arial"/>
                 <a:cs typeface="Arial"/>
               </a:rPr>
-              <a:t>Sau đó bạn phản biện bản thảo của một đồng nghiệp</a:t>
+              <a:t>Phương pháp, Đặt vấn đề, Bàn luận và Tóm tắt: không bắt buộc</a:t>
+            </a:r>
+          </a:p>
+          <a:p>
+            <a:pPr marL="0" indent="0" algn="ctr">
+              <a:lnSpc>
+                <a:spcPct val="104000"/>
+              </a:lnSpc>
+              <a:spcBef>
+                <a:spcPts val="400"/>
+              </a:spcBef>
+              <a:buNone/>
+            </a:pPr>
+            <a:r>
+              <a:rPr lang="en-US" sz="1750" dirty="0">
+                <a:solidFill>
+                  <a:srgbClr val="000000"/>
+                </a:solidFill>
+                <a:latin typeface="Arial"/>
+                <a:cs typeface="Arial"/>
+              </a:rPr>
+              <a:t>Hướng dẫn viết bản thảo: chia sẻ ở Buổi 6</a:t>
             </a:r>
           </a:p>
         </p:txBody>
@@ -46929,7 +46680,7 @@
                 <a:latin typeface="Arial"/>
                 <a:cs typeface="Arial"/>
               </a:rPr>
-              <a:t>Xây dựng đề cương hoặc bài báo</a:t>
+              <a:t>Xây dựng đề cương hoặc phần Kết quả</a:t>
             </a:r>
           </a:p>
         </p:txBody>

--- a/vi/files/slides/Session_1_VN.pptx
+++ b/vi/files/slides/Session_1_VN.pptx
@@ -42571,7 +42571,7 @@
                 <a:latin typeface="Arial"/>
                 <a:cs typeface="Arial"/>
               </a:rPr>
-              <a:t>Phương pháp, Đặt vấn đề, Bàn luận và Tóm tắt: không bắt buộc</a:t>
+              <a:t>Học viết mọi phần. Chỉ bắt buộc nộp phần Kết quả</a:t>
             </a:r>
           </a:p>
           <a:p>

--- a/vi/files/slides/Session_1_VN.pptx
+++ b/vi/files/slides/Session_1_VN.pptx
@@ -1747,19 +1747,7 @@
           <a:p>
             <a:r>
               <a:rPr lang="en-US" sz="1400" b="0" dirty="0"/>
-              <a:t>Hỏi: 'Việc gì trong khoa mỗi người làm một kiểu mà chưa ai biết cách nào tốt nhất? Gõ vào chat.' Đọc to hai ba câu trả lời.</a:t>
-            </a:r>
-          </a:p>
-          <a:p>
-            <a:r>
-              <a:rPr lang="en-US" sz="1400" b="0" dirty="0"/>
-              <a:t>Ý chính: nghiên cứu bắt đầu từ điều chưa chắc chắn trong lâm sàng, không phải từ thống kê.</a:t>
-            </a:r>
-          </a:p>
-          <a:p>
-            <a:r>
-              <a:rPr lang="en-US" sz="1400" b="0" dirty="0"/>
-              <a:t>Thời gian: 2 phút.</a:t>
+              <a:t>Tại sao cần nghiên cứu? Anh chị là bác sĩ hang ngày điều trị bệnh nhân. Mỗi quyết định của anh chị đều có thể ảnh hưởng đến người bệnh. Nhưng không phải lúc nào bằng chứng cũng có sẵn hoặc đủ mạnh để hỗ trợ các quyết định đấy. Và đó là những lúc những câu hỏi cần được giải quyết được đặt ra và đó là lúc chúng ta cần đến nghiên cứu. Và hi vọng sau khi nghiên cứu thì những quyết định mà anh chị đưa ra sẽ tốt hơn cho người bệnh. Và khóa học này sẽ giúp anh chị đạt được 3 mục tiêu chính, đó là ...</a:t>
             </a:r>
           </a:p>
         </p:txBody>
@@ -2554,6 +2542,12 @@
           <a:p>
             <a:r>
               <a:rPr lang="en-US" sz="1400" b="0" dirty="0"/>
+              <a:t>Muốn học viên viết ba câu hỏi nghiên cứu: dùng slide dự phòng 'Bổ sung: ba ví dụ viết thành câu hỏi nghiên cứu' (phần slide bổ sung).</a:t>
+            </a:r>
+          </a:p>
+          <a:p>
+            <a:r>
+              <a:rPr lang="en-US" sz="1400" b="0" dirty="0"/>
               <a:t>Thời gian: 4 phút.</a:t>
             </a:r>
           </a:p>
@@ -2728,25 +2722,19 @@
           <a:p>
             <a:r>
               <a:rPr lang="en-US" sz="1400" b="0" dirty="0"/>
-              <a:t>Mỗi khối hai buổi, giữa hai buổi cách nhau một tuần.</a:t>
+              <a:t>Cho 3 phút để gõ. Sau đó mời 4-5 người nói và chỉ ra các chủ đề chung (dịch truyền, an thần, nhiễm khuẩn, vận động sớm, an toàn dùng thuốc).</a:t>
             </a:r>
           </a:p>
           <a:p>
             <a:r>
               <a:rPr lang="en-US" sz="1400" b="0" dirty="0"/>
-              <a:t>Một ví dụ xuyên suốt: dịch truyền trong sốc nhiễm khuẩn và tử vong 28 ngày. Từ Buổi 5, ví dụ này tiếp tục trong nghiên cứu của khóa học, FLUID-ICU.</a:t>
+              <a:t>Các câu hỏi nằm sẵn trong chat để dùng ở phần Xây dựng đề cương 1.</a:t>
             </a:r>
           </a:p>
           <a:p>
             <a:r>
               <a:rPr lang="en-US" sz="1400" b="0" dirty="0"/>
-              <a:t>Yêu cầu nằm ở Proposal_Brief, gửi trước Buổi 1 cùng Presentation_Guide và Proposal_Rubric. Hướng dẫn viết bản thảo được chia sẻ ở Buổi 6.</a:t>
-            </a:r>
-          </a:p>
-          <a:p>
-            <a:r>
-              <a:rPr lang="en-US" sz="1400" b="0" dirty="0"/>
-              <a:t>Thời gian: 2 phút.</a:t>
+              <a:t>Thời gian: 6 phút.</a:t>
             </a:r>
           </a:p>
         </p:txBody>
@@ -3733,13 +3721,25 @@
           <a:p>
             <a:r>
               <a:rPr lang="en-US" sz="1400" b="0" dirty="0"/>
-              <a:t>Ở Cấp độ 1, giảng viên chạy phần mềm. Các bạn đọc và diễn giải kết quả.</a:t>
+              <a:t>Mỗi khối hai buổi, giữa hai buổi cách nhau một tuần.</a:t>
             </a:r>
           </a:p>
           <a:p>
             <a:r>
               <a:rPr lang="en-US" sz="1400" b="0" dirty="0"/>
-              <a:t>Thời gian: 1 phút.</a:t>
+              <a:t>Một ví dụ xuyên suốt: dịch truyền trong sốc nhiễm khuẩn và tử vong 28 ngày. Từ Buổi 5, ví dụ này tiếp tục trong nghiên cứu của khóa học, FLUID-ICU.</a:t>
+            </a:r>
+          </a:p>
+          <a:p>
+            <a:r>
+              <a:rPr lang="en-US" sz="1400" b="0" dirty="0"/>
+              <a:t>Yêu cầu nằm ở Proposal_Brief, gửi trước Buổi 1 cùng Presentation_Guide và Proposal_Rubric. Hướng dẫn viết bản thảo được chia sẻ ở Buổi 6.</a:t>
+            </a:r>
+          </a:p>
+          <a:p>
+            <a:r>
+              <a:rPr lang="en-US" sz="1400" b="0" dirty="0"/>
+              <a:t>Thời gian: 2 phút.</a:t>
             </a:r>
           </a:p>
         </p:txBody>
@@ -4702,25 +4702,13 @@
           <a:p>
             <a:r>
               <a:rPr lang="en-US" sz="1400" b="0" dirty="0"/>
-              <a:t>Đề cương: khoảng 5 bạn tình nguyện trình bày ở Buổi 8 (mỗi người 6 phút). Mọi người đều nộp đề cương và 6 slide qua email. Chi tiết: Proposal_Brief, gửi qua email trước Buổi 1.</a:t>
+              <a:t>Ở Cấp độ 1, giảng viên chạy phần mềm. Các bạn đọc và diễn giải kết quả.</a:t>
             </a:r>
           </a:p>
           <a:p>
             <a:r>
               <a:rPr lang="en-US" sz="1400" b="0" dirty="0"/>
-              <a:t>Phần Kết quả: cuối Buổi 6, mỗi người chọn một câu hỏi FLUID-ICU (Q1 đến Q5) và viết phần Kết quả từ gói kết quả của câu đó. Sau Buổi 8, mỗi người phản biện bản thảo của một đồng nghiệp.</a:t>
-            </a:r>
-          </a:p>
-          <a:p>
-            <a:r>
-              <a:rPr lang="en-US" sz="1400" b="0" dirty="0"/>
-              <a:t>Viết bằng tiếng Anh. Có thể viết tiếng Việt nếu thật sự không viết được tiếng Anh.</a:t>
-            </a:r>
-          </a:p>
-          <a:p>
-            <a:r>
-              <a:rPr lang="en-US" sz="1400" b="0" dirty="0"/>
-              <a:t>Thời gian: 2 phút.</a:t>
+              <a:t>Thời gian: 1 phút.</a:t>
             </a:r>
           </a:p>
         </p:txBody>
@@ -5236,13 +5224,34 @@
           <a:p>
             <a:r>
               <a:rPr lang="en-US" sz="1400" b="0" dirty="0"/>
-              <a:t>Hỏi: 'Thẻ nào làm bạn lo nhất? Trả lời trong chat.' Thường là phân tích. Trấn an: lớp đi chậm và kiểm tra thường xuyên.</a:t>
+              <a:t>Đề cương: khoảng 5 bạn tình nguyện trình bày ở Buổi 8 (mỗi người 6 phút). Mọi người đều nộp đề cương và 6 slide qua email. Chi tiết: Proposal_Brief, gửi qua email trước Buổi 1.</a:t>
             </a:r>
           </a:p>
           <a:p>
             <a:r>
               <a:rPr lang="en-US" sz="1400" b="0" dirty="0"/>
-              <a:t>Thời gian: 1 phút.</a:t>
+              <a:t>Phần Kết quả: cuối Buổi 6, mỗi người chọn một câu hỏi FLUID-ICU (Q1 đến Q5) và viết phần Kết quả từ gói kết quả của câu đó. Sau Buổi 8, mỗi người phản biện bản thảo của một đồng nghiệp.</a:t>
+            </a:r>
+          </a:p>
+          <a:p>
+            <a:r>
+              <a:rPr lang="en-US" sz="1400" b="0" dirty="0"/>
+              <a:t>Viết bằng tiếng Anh. Có thể viết tiếng Việt nếu thật sự không viết được tiếng Anh.</a:t>
+            </a:r>
+          </a:p>
+          <a:p>
+            <a:r>
+              <a:rPr lang="en-US" sz="1400" b="0" dirty="0"/>
+              <a:t>Thời gian: 2 phút.</a:t>
+            </a:r>
+          </a:p>
+          <a:p>
+            <a:endParaRPr lang="en-US" sz="1400"/>
+          </a:p>
+          <a:p>
+            <a:r>
+              <a:rPr lang="en-US" sz="1400" b="0" dirty="0"/>
+              <a:t>Show proposal brief that we sent them</a:t>
             </a:r>
           </a:p>
         </p:txBody>
@@ -5323,13 +5332,22 @@
           <a:p>
             <a:r>
               <a:rPr lang="en-US" sz="1400" b="0" dirty="0"/>
-              <a:t>Thứ Bảy nào cũng cùng một nhịp. Slide bổ sung ở cuối chỉ dùng khi còn thời gian.</a:t>
+              <a:t>Hỏi: 'Thẻ nào làm bạn lo nhất? Trả lời trong chat.' Thường là phân tích. Trấn an: lớp đi chậm và kiểm tra thường xuyên.</a:t>
             </a:r>
           </a:p>
           <a:p>
             <a:r>
               <a:rPr lang="en-US" sz="1400" b="0" dirty="0"/>
               <a:t>Thời gian: 1 phút.</a:t>
+            </a:r>
+          </a:p>
+          <a:p>
+            <a:endParaRPr lang="en-US" sz="1400"/>
+          </a:p>
+          <a:p>
+            <a:r>
+              <a:rPr lang="en-US" sz="1400" b="0" dirty="0"/>
+              <a:t>Registration statistics: almost 50% have master’s degree so they more or less did research before. This course really goes to the basics, equip you with fundamental knowledge of doing research. Some concepts you might have known or heard, but still I think it’s valuable to re-visit them so that it helps you really master them. 30.4% of students want to write a scientific paper, and 26.1% wants to enhance their understanding of statistics (p-values, confidence interval)</a:t>
             </a:r>
           </a:p>
         </p:txBody>
@@ -5410,13 +5428,7 @@
           <a:p>
             <a:r>
               <a:rPr lang="en-US" sz="1400" b="0" dirty="0"/>
-              <a:t>Trong mỗi phần xây dựng đề cương, giảng viên điền trước phần đó cho ví dụ xuyên suốt trên màn hình. Sau đó mọi người viết cùng phần đó cho câu hỏi của mình.</a:t>
-            </a:r>
-          </a:p>
-          <a:p>
-            <a:r>
-              <a:rPr lang="en-US" sz="1400" b="0" dirty="0"/>
-              <a:t>Mẫu: Research_Proposal_Template_VN.docx (tiếng Việt) hoặc Research_Proposal_Template.docx (tiếng Anh), gửi qua email cùng hướng dẫn viết đề cương trước Buổi 1.</a:t>
+              <a:t>Buổi nào cũng cùng một nhịp. Slide bổ sung ở cuối chỉ dùng khi còn thời gian.</a:t>
             </a:r>
           </a:p>
           <a:p>
@@ -5503,19 +5515,34 @@
           <a:p>
             <a:r>
               <a:rPr lang="en-US" sz="1400" b="0" dirty="0"/>
-              <a:t>Cho 3 phút để gõ. Sau đó mời 4-5 người nói và chỉ ra các chủ đề chung (dịch truyền, an thần, nhiễm khuẩn, vận động sớm, an toàn dùng thuốc).</a:t>
+              <a:t>Trong mỗi phần xây dựng đề cương, giảng viên điền trước phần đó cho ví dụ xuyên suốt trên màn hình. Sau đó mọi người viết cùng phần đó cho câu hỏi của mình.</a:t>
             </a:r>
           </a:p>
           <a:p>
             <a:r>
               <a:rPr lang="en-US" sz="1400" b="0" dirty="0"/>
-              <a:t>Các câu hỏi nằm sẵn trong chat để dùng ở phần Xây dựng đề cương 1.</a:t>
+              <a:t>Mẫu: Research_Proposal_Template_VN.docx (tiếng Việt) hoặc Research_Proposal_Template.docx (tiếng Anh), gửi qua email cùng hướng dẫn viết đề cương trước Buổi 1.</a:t>
             </a:r>
           </a:p>
           <a:p>
             <a:r>
               <a:rPr lang="en-US" sz="1400" b="0" dirty="0"/>
-              <a:t>Thời gian: 6 phút.</a:t>
+              <a:t>Thời gian: 1 phút.</a:t>
+            </a:r>
+          </a:p>
+          <a:p>
+            <a:endParaRPr lang="en-US" sz="1400"/>
+          </a:p>
+          <a:p>
+            <a:r>
+              <a:rPr lang="en-US" sz="1400" b="0" dirty="0"/>
+              <a:t>Show them the research proposal template.</a:t>
+            </a:r>
+          </a:p>
+          <a:p>
+            <a:r>
+              <a:rPr lang="en-US" sz="1400" b="0" dirty="0"/>
+              <a:t>“Đây là 1 bản đề cương nghiên cứu được thiết kế rất hoành chỉnh. Nếu trước mỗi nghiên cứu anh chị đều làm 1 cái đề cương như thế này thì sẽ giúp đảm bảo chất lượng nghiên cứu của mình rất tốt”</a:t>
             </a:r>
           </a:p>
         </p:txBody>
@@ -8680,7 +8707,7 @@
                 <a:latin typeface="Arial"/>
                 <a:cs typeface="Arial"/>
               </a:rPr>
-              <a:t>8 tối thứ Bảy trực tuyến, 19:30 đến 22:30, 24 giờ học</a:t>
+              <a:t>8 buổi tối trực tuyến, 19:30 đến 22:30, 24 giờ học</a:t>
             </a:r>
           </a:p>
           <a:p>
@@ -8737,7 +8764,7 @@
                 <a:latin typeface="Arial"/>
                 <a:cs typeface="Arial"/>
               </a:rPr>
-              <a:t>Ngày: 31/10/2026</a:t>
+              <a:t>Ngày: 01/11/2026</a:t>
             </a:r>
           </a:p>
         </p:txBody>
@@ -9658,7 +9685,7 @@
                 <a:latin typeface="Arial"/>
                 <a:cs typeface="Arial"/>
               </a:rPr>
-              <a:t>Nhập họ và tên của bạn</a:t>
+              <a:t>Nhập họ và tên của bạn (giống mã đăng nhập Teams)</a:t>
             </a:r>
           </a:p>
           <a:p>
@@ -10113,7 +10140,7 @@
                 <a:latin typeface="Arial"/>
                 <a:cs typeface="Arial"/>
               </a:rPr>
-              <a:t>Tuần 1 · Thứ Bảy</a:t>
+              <a:t>Tuần 1 · Chủ nhật</a:t>
             </a:r>
           </a:p>
           <a:p>
@@ -28355,7 +28382,7 @@
                 <a:latin typeface="Arial"/>
                 <a:cs typeface="Arial"/>
               </a:rPr>
-              <a:t>Tám thứ Bảy, tám buổi học</a:t>
+              <a:t>Chào mừng: giới thiệu bản thân</a:t>
             </a:r>
           </a:p>
         </p:txBody>
@@ -28388,74 +28415,220 @@
           </a:p>
         </p:txBody>
       </p:sp>
-      <p:cxnSp>
-        <p:nvCxnSpPr>
-          <p:cNvPr id="100" name="Line"/>
-          <p:cNvCxnSpPr/>
-          <p:nvPr/>
-        </p:nvCxnSpPr>
-        <p:spPr>
-          <a:xfrm>
-            <a:off x="1203960" y="3509280"/>
-            <a:ext cx="9144000" cy="0"/>
-          </a:xfrm>
-          <a:prstGeom prst="straightConnector1">
-            <a:avLst/>
-          </a:prstGeom>
-          <a:ln w="127000" cap="rnd">
-            <a:solidFill>
-              <a:srgbClr val="D5DDE1"/>
-            </a:solidFill>
-            <a:round/>
-          </a:ln>
-        </p:spPr>
-      </p:cxnSp>
-      <p:sp>
-        <p:nvSpPr>
-          <p:cNvPr id="101" name="Text"/>
-          <p:cNvSpPr/>
-          <p:nvPr/>
-        </p:nvSpPr>
-        <p:spPr>
-          <a:xfrm>
-            <a:off x="655320" y="1909080"/>
-            <a:ext cx="2286000" cy="731520"/>
+      <p:sp>
+        <p:nvSpPr>
+          <p:cNvPr id="50" name="Banner"/>
+          <p:cNvSpPr/>
+          <p:nvPr/>
+        </p:nvSpPr>
+        <p:spPr>
+          <a:xfrm>
+            <a:off x="457200" y="1120000"/>
+            <a:ext cx="11277600" cy="470000"/>
           </a:xfrm>
           <a:prstGeom prst="rect">
             <a:avLst/>
           </a:prstGeom>
+          <a:solidFill>
+            <a:srgbClr val="0D7377"/>
+          </a:solidFill>
+          <a:ln>
+            <a:noFill/>
+          </a:ln>
+        </p:spPr>
+        <p:txBody>
+          <a:bodyPr wrap="square" lIns="182880" tIns="45720" rIns="182880" bIns="45720" rtlCol="0" anchor="ctr">
+            <a:normAutofit/>
+          </a:bodyPr>
+          <a:lstStyle/>
+          <a:p>
+            <a:pPr marL="0" indent="0" algn="l">
+              <a:buNone/>
+            </a:pPr>
+            <a:r>
+              <a:rPr lang="en-US" sz="1500" b="1" dirty="0">
+                <a:solidFill>
+                  <a:srgbClr val="FFFFFF"/>
+                </a:solidFill>
+                <a:latin typeface="Arial"/>
+                <a:cs typeface="Arial"/>
+              </a:rPr>
+              <a:t>CẢ LỚP CÙNG LÀM   |   6 phút</a:t>
+            </a:r>
+          </a:p>
+        </p:txBody>
+      </p:sp>
+      <p:sp>
+        <p:nvSpPr>
+          <p:cNvPr id="51" name="Steps"/>
+          <p:cNvSpPr txBox="1"/>
+          <p:nvPr/>
+        </p:nvSpPr>
+        <p:spPr>
+          <a:xfrm>
+            <a:off x="457200" y="1720000"/>
+            <a:ext cx="6766560" cy="3510000"/>
+          </a:xfrm>
+          <a:prstGeom prst="rect">
+            <a:avLst/>
+          </a:prstGeom>
           <a:noFill/>
           <a:ln>
             <a:noFill/>
           </a:ln>
         </p:spPr>
         <p:txBody>
-          <a:bodyPr wrap="square" lIns="54864" tIns="54864" rIns="54864" bIns="54864" rtlCol="0" anchor="ctr">
-            <a:noAutofit/>
-          </a:bodyPr>
-          <a:lstStyle/>
+          <a:bodyPr wrap="square" lIns="91440" tIns="45720" rIns="91440" bIns="45720" rtlCol="0" anchor="t"/>
+          <a:lstStyle/>
+          <a:p>
+            <a:pPr marL="380000" indent="-380000" algn="l">
+              <a:lnSpc>
+                <a:spcPct val="104000"/>
+              </a:lnSpc>
+              <a:spcBef>
+                <a:spcPts val="450"/>
+              </a:spcBef>
+              <a:buClr>
+                <a:srgbClr val="0D7377"/>
+              </a:buClr>
+              <a:buFont typeface="Arial"/>
+              <a:buChar char="•"/>
+            </a:pPr>
+            <a:r>
+              <a:rPr lang="en-US" sz="1650" dirty="0">
+                <a:solidFill>
+                  <a:srgbClr val="000000"/>
+                </a:solidFill>
+                <a:latin typeface="Arial"/>
+                <a:cs typeface="Arial"/>
+              </a:rPr>
+              <a:t>Gõ vào chat: tên, khoa và nghề nghiệp của bạn</a:t>
+            </a:r>
+          </a:p>
+          <a:p>
+            <a:pPr marL="380000" indent="-380000" algn="l">
+              <a:lnSpc>
+                <a:spcPct val="104000"/>
+              </a:lnSpc>
+              <a:spcBef>
+                <a:spcPts val="450"/>
+              </a:spcBef>
+              <a:buClr>
+                <a:srgbClr val="0D7377"/>
+              </a:buClr>
+              <a:buFont typeface="Arial"/>
+              <a:buChar char="•"/>
+            </a:pPr>
+            <a:r>
+              <a:rPr lang="en-US" sz="1650" dirty="0">
+                <a:solidFill>
+                  <a:srgbClr val="000000"/>
+                </a:solidFill>
+                <a:latin typeface="Arial"/>
+                <a:cs typeface="Arial"/>
+              </a:rPr>
+              <a:t>Thêm một câu hỏi bạn mong nghiên cứu trả lời được cho khoa mình</a:t>
+            </a:r>
+          </a:p>
+          <a:p>
+            <a:pPr marL="380000" indent="-380000" algn="l">
+              <a:lnSpc>
+                <a:spcPct val="104000"/>
+              </a:lnSpc>
+              <a:spcBef>
+                <a:spcPts val="450"/>
+              </a:spcBef>
+              <a:buClr>
+                <a:srgbClr val="0D7377"/>
+              </a:buClr>
+              <a:buFont typeface="Arial"/>
+              <a:buChar char="•"/>
+            </a:pPr>
+            <a:r>
+              <a:rPr lang="en-US" sz="1650" dirty="0">
+                <a:solidFill>
+                  <a:srgbClr val="000000"/>
+                </a:solidFill>
+                <a:latin typeface="Arial"/>
+                <a:cs typeface="Arial"/>
+              </a:rPr>
+              <a:t>Đọc tin nhắn của mọi người: nhiều câu là chủ đề nghiên cứu tiềm năng</a:t>
+            </a:r>
+          </a:p>
+          <a:p>
+            <a:pPr marL="380000" indent="-380000" algn="l">
+              <a:lnSpc>
+                <a:spcPct val="104000"/>
+              </a:lnSpc>
+              <a:spcBef>
+                <a:spcPts val="450"/>
+              </a:spcBef>
+              <a:buClr>
+                <a:srgbClr val="0D7377"/>
+              </a:buClr>
+              <a:buFont typeface="Arial"/>
+              <a:buChar char="•"/>
+            </a:pPr>
+            <a:r>
+              <a:rPr lang="en-US" sz="1650" dirty="0">
+                <a:solidFill>
+                  <a:srgbClr val="000000"/>
+                </a:solidFill>
+                <a:latin typeface="Arial"/>
+                <a:cs typeface="Arial"/>
+              </a:rPr>
+              <a:t>Sau đó vài bạn bật micro nói câu hỏi của mình</a:t>
+            </a:r>
+          </a:p>
+        </p:txBody>
+      </p:sp>
+      <p:sp>
+        <p:nvSpPr>
+          <p:cNvPr id="52" name="Side"/>
+          <p:cNvSpPr/>
+          <p:nvPr/>
+        </p:nvSpPr>
+        <p:spPr>
+          <a:xfrm>
+            <a:off x="7423760" y="1720000"/>
+            <a:ext cx="4311040" cy="1415555"/>
+          </a:xfrm>
+          <a:prstGeom prst="roundRect">
+            <a:avLst>
+              <a:gd name="adj" fmla="val 5000"/>
+            </a:avLst>
+          </a:prstGeom>
+          <a:solidFill>
+            <a:srgbClr val="EAF2F5"/>
+          </a:solidFill>
+          <a:ln>
+            <a:noFill/>
+          </a:ln>
+        </p:spPr>
+        <p:txBody>
+          <a:bodyPr wrap="square" lIns="137160" tIns="91440" rIns="137160" bIns="91440" rtlCol="0" anchor="ctr">
+            <a:normAutofit/>
+          </a:bodyPr>
+          <a:lstStyle/>
+          <a:p>
+            <a:pPr marL="0" indent="0" algn="ctr">
+              <a:buNone/>
+            </a:pPr>
+            <a:r>
+              <a:rPr lang="en-US" sz="1600" b="1" dirty="0">
+                <a:solidFill>
+                  <a:srgbClr val="0D7377"/>
+                </a:solidFill>
+                <a:latin typeface="Arial"/>
+                <a:cs typeface="Arial"/>
+              </a:rPr>
+              <a:t>Tin nhắn mẫu</a:t>
+            </a:r>
+          </a:p>
           <a:p>
             <a:pPr marL="0" indent="0" algn="ctr">
               <a:lnSpc>
-                <a:spcPct val="100000"/>
-              </a:lnSpc>
-              <a:buNone/>
-            </a:pPr>
-            <a:r>
-              <a:rPr lang="en-US" sz="1700" b="1" dirty="0">
-                <a:solidFill>
-                  <a:srgbClr val="0D7377"/>
-                </a:solidFill>
-                <a:latin typeface="Arial"/>
-                <a:cs typeface="Arial"/>
-              </a:rPr>
-              <a:t>Tuần 1-2</a:t>
-            </a:r>
-          </a:p>
-          <a:p>
-            <a:pPr marL="0" indent="0" algn="ctr">
-              <a:lnSpc>
-                <a:spcPct val="100000"/>
+                <a:spcPct val="104000"/>
               </a:lnSpc>
               <a:spcBef>
                 <a:spcPts val="300"/>
@@ -28463,97 +28636,20 @@
               <a:buNone/>
             </a:pPr>
             <a:r>
-              <a:rPr lang="en-US" sz="1400" dirty="0">
-                <a:solidFill>
-                  <a:srgbClr val="595959"/>
-                </a:solidFill>
-                <a:latin typeface="Arial"/>
-                <a:cs typeface="Arial"/>
-              </a:rPr>
-              <a:t>Câu hỏi và bằng chứng</a:t>
-            </a:r>
-          </a:p>
-        </p:txBody>
-      </p:sp>
-      <p:sp>
-        <p:nvSpPr>
-          <p:cNvPr id="102" name="Box"/>
-          <p:cNvSpPr/>
-          <p:nvPr/>
-        </p:nvSpPr>
-        <p:spPr>
-          <a:xfrm>
-            <a:off x="701040" y="2695464"/>
-            <a:ext cx="2194560" cy="64008"/>
-          </a:xfrm>
-          <a:prstGeom prst="roundRect">
-            <a:avLst>
-              <a:gd name="adj" fmla="val 50000"/>
-            </a:avLst>
-          </a:prstGeom>
-          <a:solidFill>
-            <a:srgbClr val="0D7377"/>
-          </a:solidFill>
-          <a:ln>
-            <a:noFill/>
-          </a:ln>
-        </p:spPr>
-        <p:txBody>
-          <a:bodyPr wrap="square" lIns="54864" tIns="54864" rIns="54864" bIns="54864" rtlCol="0" anchor="ctr">
-            <a:noAutofit/>
-          </a:bodyPr>
-          <a:lstStyle/>
-          <a:p>
-            <a:endParaRPr lang="en-US"/>
-          </a:p>
-        </p:txBody>
-      </p:sp>
-      <p:sp>
-        <p:nvSpPr>
-          <p:cNvPr id="103" name="Text"/>
-          <p:cNvSpPr/>
-          <p:nvPr/>
-        </p:nvSpPr>
-        <p:spPr>
-          <a:xfrm>
-            <a:off x="3032760" y="1909080"/>
-            <a:ext cx="2286000" cy="731520"/>
-          </a:xfrm>
-          <a:prstGeom prst="rect">
-            <a:avLst/>
-          </a:prstGeom>
-          <a:noFill/>
-          <a:ln>
-            <a:noFill/>
-          </a:ln>
-        </p:spPr>
-        <p:txBody>
-          <a:bodyPr wrap="square" lIns="54864" tIns="54864" rIns="54864" bIns="54864" rtlCol="0" anchor="ctr">
-            <a:noAutofit/>
-          </a:bodyPr>
-          <a:lstStyle/>
+              <a:rPr lang="en-US" sz="1500" dirty="0">
+                <a:solidFill>
+                  <a:srgbClr val="000000"/>
+                </a:solidFill>
+                <a:latin typeface="Arial"/>
+                <a:cs typeface="Arial"/>
+              </a:rPr>
+              <a:t>Lan, ICU, điều dưỡng</a:t>
+            </a:r>
+          </a:p>
           <a:p>
             <a:pPr marL="0" indent="0" algn="ctr">
               <a:lnSpc>
-                <a:spcPct val="100000"/>
-              </a:lnSpc>
-              <a:buNone/>
-            </a:pPr>
-            <a:r>
-              <a:rPr lang="en-US" sz="1700" b="1" dirty="0">
-                <a:solidFill>
-                  <a:srgbClr val="0B376C"/>
-                </a:solidFill>
-                <a:latin typeface="Arial"/>
-                <a:cs typeface="Arial"/>
-              </a:rPr>
-              <a:t>Tuần 3-4</a:t>
-            </a:r>
-          </a:p>
-          <a:p>
-            <a:pPr marL="0" indent="0" algn="ctr">
-              <a:lnSpc>
-                <a:spcPct val="100000"/>
+                <a:spcPct val="104000"/>
               </a:lnSpc>
               <a:spcBef>
                 <a:spcPts val="300"/>
@@ -28561,993 +28657,28 @@
               <a:buNone/>
             </a:pPr>
             <a:r>
-              <a:rPr lang="en-US" sz="1400" dirty="0">
-                <a:solidFill>
-                  <a:srgbClr val="595959"/>
-                </a:solidFill>
-                <a:latin typeface="Arial"/>
-                <a:cs typeface="Arial"/>
-              </a:rPr>
-              <a:t>Thiết kế và sai lệch</a:t>
-            </a:r>
-          </a:p>
-        </p:txBody>
-      </p:sp>
-      <p:sp>
-        <p:nvSpPr>
-          <p:cNvPr id="104" name="Box"/>
-          <p:cNvSpPr/>
-          <p:nvPr/>
-        </p:nvSpPr>
-        <p:spPr>
-          <a:xfrm>
-            <a:off x="3078480" y="2695464"/>
-            <a:ext cx="2194560" cy="64008"/>
-          </a:xfrm>
-          <a:prstGeom prst="roundRect">
-            <a:avLst>
-              <a:gd name="adj" fmla="val 50000"/>
-            </a:avLst>
-          </a:prstGeom>
-          <a:solidFill>
-            <a:srgbClr val="0B376C"/>
-          </a:solidFill>
-          <a:ln>
-            <a:noFill/>
-          </a:ln>
-        </p:spPr>
-        <p:txBody>
-          <a:bodyPr wrap="square" lIns="54864" tIns="54864" rIns="54864" bIns="54864" rtlCol="0" anchor="ctr">
-            <a:noAutofit/>
-          </a:bodyPr>
-          <a:lstStyle/>
-          <a:p>
-            <a:endParaRPr lang="en-US"/>
-          </a:p>
-        </p:txBody>
-      </p:sp>
-      <p:sp>
-        <p:nvSpPr>
-          <p:cNvPr id="105" name="Text"/>
-          <p:cNvSpPr/>
-          <p:nvPr/>
-        </p:nvSpPr>
-        <p:spPr>
-          <a:xfrm>
-            <a:off x="5410200" y="1909080"/>
-            <a:ext cx="2286000" cy="731520"/>
-          </a:xfrm>
-          <a:prstGeom prst="rect">
-            <a:avLst/>
-          </a:prstGeom>
-          <a:noFill/>
-          <a:ln>
-            <a:noFill/>
-          </a:ln>
-        </p:spPr>
-        <p:txBody>
-          <a:bodyPr wrap="square" lIns="54864" tIns="54864" rIns="54864" bIns="54864" rtlCol="0" anchor="ctr">
-            <a:noAutofit/>
-          </a:bodyPr>
-          <a:lstStyle/>
-          <a:p>
-            <a:pPr marL="0" indent="0" algn="ctr">
-              <a:lnSpc>
-                <a:spcPct val="100000"/>
-              </a:lnSpc>
-              <a:buNone/>
-            </a:pPr>
-            <a:r>
-              <a:rPr lang="en-US" sz="1700" b="1" dirty="0">
-                <a:solidFill>
-                  <a:srgbClr val="5FA39B"/>
-                </a:solidFill>
-                <a:latin typeface="Arial"/>
-                <a:cs typeface="Arial"/>
-              </a:rPr>
-              <a:t>Tuần 5-6</a:t>
-            </a:r>
-          </a:p>
-          <a:p>
-            <a:pPr marL="0" indent="0" algn="ctr">
-              <a:lnSpc>
-                <a:spcPct val="100000"/>
-              </a:lnSpc>
-              <a:spcBef>
-                <a:spcPts val="300"/>
-              </a:spcBef>
-              <a:buNone/>
-            </a:pPr>
-            <a:r>
-              <a:rPr lang="en-US" sz="1400" dirty="0">
-                <a:solidFill>
-                  <a:srgbClr val="595959"/>
-                </a:solidFill>
-                <a:latin typeface="Arial"/>
-                <a:cs typeface="Arial"/>
-              </a:rPr>
-              <a:t>Dữ liệu và phân tích</a:t>
-            </a:r>
-          </a:p>
-        </p:txBody>
-      </p:sp>
-      <p:sp>
-        <p:nvSpPr>
-          <p:cNvPr id="106" name="Box"/>
-          <p:cNvSpPr/>
-          <p:nvPr/>
-        </p:nvSpPr>
-        <p:spPr>
-          <a:xfrm>
-            <a:off x="5455920" y="2695464"/>
-            <a:ext cx="2194560" cy="64008"/>
-          </a:xfrm>
-          <a:prstGeom prst="roundRect">
-            <a:avLst>
-              <a:gd name="adj" fmla="val 50000"/>
-            </a:avLst>
-          </a:prstGeom>
-          <a:solidFill>
-            <a:srgbClr val="5FA39B"/>
-          </a:solidFill>
-          <a:ln>
-            <a:noFill/>
-          </a:ln>
-        </p:spPr>
-        <p:txBody>
-          <a:bodyPr wrap="square" lIns="54864" tIns="54864" rIns="54864" bIns="54864" rtlCol="0" anchor="ctr">
-            <a:noAutofit/>
-          </a:bodyPr>
-          <a:lstStyle/>
-          <a:p>
-            <a:endParaRPr lang="en-US"/>
-          </a:p>
-        </p:txBody>
-      </p:sp>
-      <p:sp>
-        <p:nvSpPr>
-          <p:cNvPr id="107" name="Text"/>
-          <p:cNvSpPr/>
-          <p:nvPr/>
-        </p:nvSpPr>
-        <p:spPr>
-          <a:xfrm>
-            <a:off x="7787640" y="1909080"/>
-            <a:ext cx="2286000" cy="731520"/>
-          </a:xfrm>
-          <a:prstGeom prst="rect">
-            <a:avLst/>
-          </a:prstGeom>
-          <a:noFill/>
-          <a:ln>
-            <a:noFill/>
-          </a:ln>
-        </p:spPr>
-        <p:txBody>
-          <a:bodyPr wrap="square" lIns="54864" tIns="54864" rIns="54864" bIns="54864" rtlCol="0" anchor="ctr">
-            <a:noAutofit/>
-          </a:bodyPr>
-          <a:lstStyle/>
-          <a:p>
-            <a:pPr marL="0" indent="0" algn="ctr">
-              <a:lnSpc>
-                <a:spcPct val="100000"/>
-              </a:lnSpc>
-              <a:buNone/>
-            </a:pPr>
-            <a:r>
-              <a:rPr lang="en-US" sz="1700" b="1" dirty="0">
-                <a:solidFill>
-                  <a:srgbClr val="0070C0"/>
-                </a:solidFill>
-                <a:latin typeface="Arial"/>
-                <a:cs typeface="Arial"/>
-              </a:rPr>
-              <a:t>Tuần 7-8</a:t>
-            </a:r>
-          </a:p>
-          <a:p>
-            <a:pPr marL="0" indent="0" algn="ctr">
-              <a:lnSpc>
-                <a:spcPct val="100000"/>
-              </a:lnSpc>
-              <a:spcBef>
-                <a:spcPts val="300"/>
-              </a:spcBef>
-              <a:buNone/>
-            </a:pPr>
-            <a:r>
-              <a:rPr lang="en-US" sz="1400" dirty="0">
-                <a:solidFill>
-                  <a:srgbClr val="595959"/>
-                </a:solidFill>
-                <a:latin typeface="Arial"/>
-                <a:cs typeface="Arial"/>
-              </a:rPr>
-              <a:t>Đạo đức, viết, công bố</a:t>
-            </a:r>
-          </a:p>
-        </p:txBody>
-      </p:sp>
-      <p:sp>
-        <p:nvSpPr>
-          <p:cNvPr id="108" name="Box"/>
-          <p:cNvSpPr/>
-          <p:nvPr/>
-        </p:nvSpPr>
-        <p:spPr>
-          <a:xfrm>
-            <a:off x="7833360" y="2695464"/>
-            <a:ext cx="2194560" cy="64008"/>
-          </a:xfrm>
-          <a:prstGeom prst="roundRect">
-            <a:avLst>
-              <a:gd name="adj" fmla="val 50000"/>
-            </a:avLst>
-          </a:prstGeom>
-          <a:solidFill>
-            <a:srgbClr val="0070C0"/>
-          </a:solidFill>
-          <a:ln>
-            <a:noFill/>
-          </a:ln>
-        </p:spPr>
-        <p:txBody>
-          <a:bodyPr wrap="square" lIns="54864" tIns="54864" rIns="54864" bIns="54864" rtlCol="0" anchor="ctr">
-            <a:noAutofit/>
-          </a:bodyPr>
-          <a:lstStyle/>
-          <a:p>
-            <a:endParaRPr lang="en-US"/>
-          </a:p>
-        </p:txBody>
-      </p:sp>
-      <p:sp>
-        <p:nvSpPr>
-          <p:cNvPr id="109" name="Ellipse"/>
-          <p:cNvSpPr/>
-          <p:nvPr/>
-        </p:nvSpPr>
-        <p:spPr>
-          <a:xfrm>
-            <a:off x="746760" y="3052080"/>
-            <a:ext cx="914400" cy="914400"/>
-          </a:xfrm>
-          <a:prstGeom prst="ellipse">
-            <a:avLst/>
-          </a:prstGeom>
-          <a:solidFill>
-            <a:srgbClr val="0D7377"/>
-          </a:solidFill>
-          <a:ln w="31750">
-            <a:solidFill>
-              <a:srgbClr val="FFFFFF"/>
-            </a:solidFill>
-          </a:ln>
-        </p:spPr>
-        <p:txBody>
-          <a:bodyPr wrap="square" lIns="54864" tIns="54864" rIns="54864" bIns="54864" rtlCol="0" anchor="ctr">
-            <a:noAutofit/>
-          </a:bodyPr>
-          <a:lstStyle/>
-          <a:p>
-            <a:pPr marL="0" indent="0" algn="ctr">
-              <a:lnSpc>
-                <a:spcPct val="100000"/>
-              </a:lnSpc>
-              <a:buNone/>
-            </a:pPr>
-            <a:r>
-              <a:rPr lang="en-US" sz="2600" b="1" dirty="0">
-                <a:solidFill>
-                  <a:srgbClr val="FFFFFF"/>
-                </a:solidFill>
-                <a:latin typeface="Arial"/>
-                <a:cs typeface="Arial"/>
-              </a:rPr>
-              <a:t>1</a:t>
-            </a:r>
-          </a:p>
-        </p:txBody>
-      </p:sp>
-      <p:sp>
-        <p:nvSpPr>
-          <p:cNvPr id="110" name="Text"/>
-          <p:cNvSpPr/>
-          <p:nvPr/>
-        </p:nvSpPr>
-        <p:spPr>
-          <a:xfrm>
-            <a:off x="609600" y="4057920"/>
-            <a:ext cx="1188720" cy="731520"/>
-          </a:xfrm>
-          <a:prstGeom prst="rect">
-            <a:avLst/>
-          </a:prstGeom>
-          <a:noFill/>
-          <a:ln>
-            <a:noFill/>
-          </a:ln>
-        </p:spPr>
-        <p:txBody>
-          <a:bodyPr wrap="square" lIns="54864" tIns="54864" rIns="54864" bIns="54864" rtlCol="0" anchor="t">
-            <a:noAutofit/>
-          </a:bodyPr>
-          <a:lstStyle/>
-          <a:p>
-            <a:pPr marL="0" indent="0" algn="ctr">
-              <a:lnSpc>
-                <a:spcPct val="100000"/>
-              </a:lnSpc>
-              <a:buNone/>
-            </a:pPr>
-            <a:r>
-              <a:rPr lang="en-US" sz="1500" b="1" dirty="0">
-                <a:solidFill>
-                  <a:srgbClr val="0D7377"/>
-                </a:solidFill>
-                <a:latin typeface="Arial"/>
-                <a:cs typeface="Arial"/>
-              </a:rPr>
-              <a:t>Hỏi</a:t>
-            </a:r>
-          </a:p>
-        </p:txBody>
-      </p:sp>
-      <p:sp>
-        <p:nvSpPr>
-          <p:cNvPr id="111" name="Ellipse"/>
-          <p:cNvSpPr/>
-          <p:nvPr/>
-        </p:nvSpPr>
-        <p:spPr>
-          <a:xfrm>
-            <a:off x="1935480" y="3052080"/>
-            <a:ext cx="914400" cy="914400"/>
-          </a:xfrm>
-          <a:prstGeom prst="ellipse">
-            <a:avLst/>
-          </a:prstGeom>
-          <a:solidFill>
-            <a:srgbClr val="0D7377"/>
-          </a:solidFill>
-          <a:ln w="31750">
-            <a:solidFill>
-              <a:srgbClr val="FFFFFF"/>
-            </a:solidFill>
-          </a:ln>
-        </p:spPr>
-        <p:txBody>
-          <a:bodyPr wrap="square" lIns="54864" tIns="54864" rIns="54864" bIns="54864" rtlCol="0" anchor="ctr">
-            <a:noAutofit/>
-          </a:bodyPr>
-          <a:lstStyle/>
-          <a:p>
-            <a:pPr marL="0" indent="0" algn="ctr">
-              <a:lnSpc>
-                <a:spcPct val="100000"/>
-              </a:lnSpc>
-              <a:buNone/>
-            </a:pPr>
-            <a:r>
-              <a:rPr lang="en-US" sz="2600" b="1" dirty="0">
-                <a:solidFill>
-                  <a:srgbClr val="FFFFFF"/>
-                </a:solidFill>
-                <a:latin typeface="Arial"/>
-                <a:cs typeface="Arial"/>
-              </a:rPr>
-              <a:t>2</a:t>
-            </a:r>
-          </a:p>
-        </p:txBody>
-      </p:sp>
-      <p:sp>
-        <p:nvSpPr>
-          <p:cNvPr id="112" name="Text"/>
-          <p:cNvSpPr/>
-          <p:nvPr/>
-        </p:nvSpPr>
-        <p:spPr>
-          <a:xfrm>
-            <a:off x="1798320" y="4057920"/>
-            <a:ext cx="1188720" cy="731520"/>
-          </a:xfrm>
-          <a:prstGeom prst="rect">
-            <a:avLst/>
-          </a:prstGeom>
-          <a:noFill/>
-          <a:ln>
-            <a:noFill/>
-          </a:ln>
-        </p:spPr>
-        <p:txBody>
-          <a:bodyPr wrap="square" lIns="54864" tIns="54864" rIns="54864" bIns="54864" rtlCol="0" anchor="t">
-            <a:noAutofit/>
-          </a:bodyPr>
-          <a:lstStyle/>
-          <a:p>
-            <a:pPr marL="0" indent="0" algn="ctr">
-              <a:lnSpc>
-                <a:spcPct val="100000"/>
-              </a:lnSpc>
-              <a:buNone/>
-            </a:pPr>
-            <a:r>
-              <a:rPr lang="en-US" sz="1500" b="1" dirty="0">
-                <a:solidFill>
-                  <a:srgbClr val="0D7377"/>
-                </a:solidFill>
-                <a:latin typeface="Arial"/>
-                <a:cs typeface="Arial"/>
-              </a:rPr>
-              <a:t>Tìm và đọc</a:t>
-            </a:r>
-          </a:p>
-        </p:txBody>
-      </p:sp>
-      <p:sp>
-        <p:nvSpPr>
-          <p:cNvPr id="113" name="Ellipse"/>
-          <p:cNvSpPr/>
-          <p:nvPr/>
-        </p:nvSpPr>
-        <p:spPr>
-          <a:xfrm>
-            <a:off x="3124200" y="3052080"/>
-            <a:ext cx="914400" cy="914400"/>
-          </a:xfrm>
-          <a:prstGeom prst="ellipse">
-            <a:avLst/>
-          </a:prstGeom>
-          <a:solidFill>
-            <a:srgbClr val="0B376C"/>
-          </a:solidFill>
-          <a:ln w="31750">
-            <a:solidFill>
-              <a:srgbClr val="FFFFFF"/>
-            </a:solidFill>
-          </a:ln>
-        </p:spPr>
-        <p:txBody>
-          <a:bodyPr wrap="square" lIns="54864" tIns="54864" rIns="54864" bIns="54864" rtlCol="0" anchor="ctr">
-            <a:noAutofit/>
-          </a:bodyPr>
-          <a:lstStyle/>
-          <a:p>
-            <a:pPr marL="0" indent="0" algn="ctr">
-              <a:lnSpc>
-                <a:spcPct val="100000"/>
-              </a:lnSpc>
-              <a:buNone/>
-            </a:pPr>
-            <a:r>
-              <a:rPr lang="en-US" sz="2600" b="1" dirty="0">
-                <a:solidFill>
-                  <a:srgbClr val="FFFFFF"/>
-                </a:solidFill>
-                <a:latin typeface="Arial"/>
-                <a:cs typeface="Arial"/>
-              </a:rPr>
-              <a:t>3</a:t>
-            </a:r>
-          </a:p>
-        </p:txBody>
-      </p:sp>
-      <p:sp>
-        <p:nvSpPr>
-          <p:cNvPr id="114" name="Text"/>
-          <p:cNvSpPr/>
-          <p:nvPr/>
-        </p:nvSpPr>
-        <p:spPr>
-          <a:xfrm>
-            <a:off x="2987040" y="4057920"/>
-            <a:ext cx="1188720" cy="731520"/>
-          </a:xfrm>
-          <a:prstGeom prst="rect">
-            <a:avLst/>
-          </a:prstGeom>
-          <a:noFill/>
-          <a:ln>
-            <a:noFill/>
-          </a:ln>
-        </p:spPr>
-        <p:txBody>
-          <a:bodyPr wrap="square" lIns="54864" tIns="54864" rIns="54864" bIns="54864" rtlCol="0" anchor="t">
-            <a:noAutofit/>
-          </a:bodyPr>
-          <a:lstStyle/>
-          <a:p>
-            <a:pPr marL="0" indent="0" algn="ctr">
-              <a:lnSpc>
-                <a:spcPct val="100000"/>
-              </a:lnSpc>
-              <a:buNone/>
-            </a:pPr>
-            <a:r>
-              <a:rPr lang="en-US" sz="1500" b="1" dirty="0">
-                <a:solidFill>
-                  <a:srgbClr val="0B376C"/>
-                </a:solidFill>
-                <a:latin typeface="Arial"/>
-                <a:cs typeface="Arial"/>
-              </a:rPr>
-              <a:t>Thiết kế</a:t>
-            </a:r>
-          </a:p>
-        </p:txBody>
-      </p:sp>
-      <p:sp>
-        <p:nvSpPr>
-          <p:cNvPr id="115" name="Ellipse"/>
-          <p:cNvSpPr/>
-          <p:nvPr/>
-        </p:nvSpPr>
-        <p:spPr>
-          <a:xfrm>
-            <a:off x="4312920" y="3052080"/>
-            <a:ext cx="914400" cy="914400"/>
-          </a:xfrm>
-          <a:prstGeom prst="ellipse">
-            <a:avLst/>
-          </a:prstGeom>
-          <a:solidFill>
-            <a:srgbClr val="0B376C"/>
-          </a:solidFill>
-          <a:ln w="31750">
-            <a:solidFill>
-              <a:srgbClr val="FFFFFF"/>
-            </a:solidFill>
-          </a:ln>
-        </p:spPr>
-        <p:txBody>
-          <a:bodyPr wrap="square" lIns="54864" tIns="54864" rIns="54864" bIns="54864" rtlCol="0" anchor="ctr">
-            <a:noAutofit/>
-          </a:bodyPr>
-          <a:lstStyle/>
-          <a:p>
-            <a:pPr marL="0" indent="0" algn="ctr">
-              <a:lnSpc>
-                <a:spcPct val="100000"/>
-              </a:lnSpc>
-              <a:buNone/>
-            </a:pPr>
-            <a:r>
-              <a:rPr lang="en-US" sz="2600" b="1" dirty="0">
-                <a:solidFill>
-                  <a:srgbClr val="FFFFFF"/>
-                </a:solidFill>
-                <a:latin typeface="Arial"/>
-                <a:cs typeface="Arial"/>
-              </a:rPr>
-              <a:t>4</a:t>
-            </a:r>
-          </a:p>
-        </p:txBody>
-      </p:sp>
-      <p:sp>
-        <p:nvSpPr>
-          <p:cNvPr id="116" name="Text"/>
-          <p:cNvSpPr/>
-          <p:nvPr/>
-        </p:nvSpPr>
-        <p:spPr>
-          <a:xfrm>
-            <a:off x="4175760" y="4057920"/>
-            <a:ext cx="1188720" cy="731520"/>
-          </a:xfrm>
-          <a:prstGeom prst="rect">
-            <a:avLst/>
-          </a:prstGeom>
-          <a:noFill/>
-          <a:ln>
-            <a:noFill/>
-          </a:ln>
-        </p:spPr>
-        <p:txBody>
-          <a:bodyPr wrap="square" lIns="54864" tIns="54864" rIns="54864" bIns="54864" rtlCol="0" anchor="t">
-            <a:noAutofit/>
-          </a:bodyPr>
-          <a:lstStyle/>
-          <a:p>
-            <a:pPr marL="0" indent="0" algn="ctr">
-              <a:lnSpc>
-                <a:spcPct val="100000"/>
-              </a:lnSpc>
-              <a:buNone/>
-            </a:pPr>
-            <a:r>
-              <a:rPr lang="en-US" sz="1500" b="1" dirty="0">
-                <a:solidFill>
-                  <a:srgbClr val="0B376C"/>
-                </a:solidFill>
-                <a:latin typeface="Arial"/>
-                <a:cs typeface="Arial"/>
-              </a:rPr>
-              <a:t>Sai lệch và tác động</a:t>
-            </a:r>
-          </a:p>
-        </p:txBody>
-      </p:sp>
-      <p:sp>
-        <p:nvSpPr>
-          <p:cNvPr id="117" name="Ellipse"/>
-          <p:cNvSpPr/>
-          <p:nvPr/>
-        </p:nvSpPr>
-        <p:spPr>
-          <a:xfrm>
-            <a:off x="5501640" y="3052080"/>
-            <a:ext cx="914400" cy="914400"/>
-          </a:xfrm>
-          <a:prstGeom prst="ellipse">
-            <a:avLst/>
-          </a:prstGeom>
-          <a:solidFill>
-            <a:srgbClr val="5FA39B"/>
-          </a:solidFill>
-          <a:ln w="31750">
-            <a:solidFill>
-              <a:srgbClr val="FFFFFF"/>
-            </a:solidFill>
-          </a:ln>
-        </p:spPr>
-        <p:txBody>
-          <a:bodyPr wrap="square" lIns="54864" tIns="54864" rIns="54864" bIns="54864" rtlCol="0" anchor="ctr">
-            <a:noAutofit/>
-          </a:bodyPr>
-          <a:lstStyle/>
-          <a:p>
-            <a:pPr marL="0" indent="0" algn="ctr">
-              <a:lnSpc>
-                <a:spcPct val="100000"/>
-              </a:lnSpc>
-              <a:buNone/>
-            </a:pPr>
-            <a:r>
-              <a:rPr lang="en-US" sz="2600" b="1" dirty="0">
-                <a:solidFill>
-                  <a:srgbClr val="FFFFFF"/>
-                </a:solidFill>
-                <a:latin typeface="Arial"/>
-                <a:cs typeface="Arial"/>
-              </a:rPr>
-              <a:t>5</a:t>
-            </a:r>
-          </a:p>
-        </p:txBody>
-      </p:sp>
-      <p:sp>
-        <p:nvSpPr>
-          <p:cNvPr id="118" name="Text"/>
-          <p:cNvSpPr/>
-          <p:nvPr/>
-        </p:nvSpPr>
-        <p:spPr>
-          <a:xfrm>
-            <a:off x="5364480" y="4057920"/>
-            <a:ext cx="1188720" cy="731520"/>
-          </a:xfrm>
-          <a:prstGeom prst="rect">
-            <a:avLst/>
-          </a:prstGeom>
-          <a:noFill/>
-          <a:ln>
-            <a:noFill/>
-          </a:ln>
-        </p:spPr>
-        <p:txBody>
-          <a:bodyPr wrap="square" lIns="54864" tIns="54864" rIns="54864" bIns="54864" rtlCol="0" anchor="t">
-            <a:noAutofit/>
-          </a:bodyPr>
-          <a:lstStyle/>
-          <a:p>
-            <a:pPr marL="0" indent="0" algn="ctr">
-              <a:lnSpc>
-                <a:spcPct val="100000"/>
-              </a:lnSpc>
-              <a:buNone/>
-            </a:pPr>
-            <a:r>
-              <a:rPr lang="en-US" sz="1500" b="1" dirty="0">
-                <a:solidFill>
-                  <a:srgbClr val="5FA39B"/>
-                </a:solidFill>
-                <a:latin typeface="Arial"/>
-                <a:cs typeface="Arial"/>
-              </a:rPr>
-              <a:t>Dữ liệu</a:t>
-            </a:r>
-          </a:p>
-        </p:txBody>
-      </p:sp>
-      <p:sp>
-        <p:nvSpPr>
-          <p:cNvPr id="119" name="Ellipse"/>
-          <p:cNvSpPr/>
-          <p:nvPr/>
-        </p:nvSpPr>
-        <p:spPr>
-          <a:xfrm>
-            <a:off x="6690360" y="3052080"/>
-            <a:ext cx="914400" cy="914400"/>
-          </a:xfrm>
-          <a:prstGeom prst="ellipse">
-            <a:avLst/>
-          </a:prstGeom>
-          <a:solidFill>
-            <a:srgbClr val="5FA39B"/>
-          </a:solidFill>
-          <a:ln w="31750">
-            <a:solidFill>
-              <a:srgbClr val="FFFFFF"/>
-            </a:solidFill>
-          </a:ln>
-        </p:spPr>
-        <p:txBody>
-          <a:bodyPr wrap="square" lIns="54864" tIns="54864" rIns="54864" bIns="54864" rtlCol="0" anchor="ctr">
-            <a:noAutofit/>
-          </a:bodyPr>
-          <a:lstStyle/>
-          <a:p>
-            <a:pPr marL="0" indent="0" algn="ctr">
-              <a:lnSpc>
-                <a:spcPct val="100000"/>
-              </a:lnSpc>
-              <a:buNone/>
-            </a:pPr>
-            <a:r>
-              <a:rPr lang="en-US" sz="2600" b="1" dirty="0">
-                <a:solidFill>
-                  <a:srgbClr val="FFFFFF"/>
-                </a:solidFill>
-                <a:latin typeface="Arial"/>
-                <a:cs typeface="Arial"/>
-              </a:rPr>
-              <a:t>6</a:t>
-            </a:r>
-          </a:p>
-        </p:txBody>
-      </p:sp>
-      <p:sp>
-        <p:nvSpPr>
-          <p:cNvPr id="120" name="Text"/>
-          <p:cNvSpPr/>
-          <p:nvPr/>
-        </p:nvSpPr>
-        <p:spPr>
-          <a:xfrm>
-            <a:off x="6553200" y="4057920"/>
-            <a:ext cx="1188720" cy="731520"/>
-          </a:xfrm>
-          <a:prstGeom prst="rect">
-            <a:avLst/>
-          </a:prstGeom>
-          <a:noFill/>
-          <a:ln>
-            <a:noFill/>
-          </a:ln>
-        </p:spPr>
-        <p:txBody>
-          <a:bodyPr wrap="square" lIns="54864" tIns="54864" rIns="54864" bIns="54864" rtlCol="0" anchor="t">
-            <a:noAutofit/>
-          </a:bodyPr>
-          <a:lstStyle/>
-          <a:p>
-            <a:pPr marL="0" indent="0" algn="ctr">
-              <a:lnSpc>
-                <a:spcPct val="100000"/>
-              </a:lnSpc>
-              <a:buNone/>
-            </a:pPr>
-            <a:r>
-              <a:rPr lang="en-US" sz="1500" b="1" dirty="0">
-                <a:solidFill>
-                  <a:srgbClr val="5FA39B"/>
-                </a:solidFill>
-                <a:latin typeface="Arial"/>
-                <a:cs typeface="Arial"/>
-              </a:rPr>
-              <a:t>Phân tích</a:t>
-            </a:r>
-          </a:p>
-        </p:txBody>
-      </p:sp>
-      <p:sp>
-        <p:nvSpPr>
-          <p:cNvPr id="121" name="Ellipse"/>
-          <p:cNvSpPr/>
-          <p:nvPr/>
-        </p:nvSpPr>
-        <p:spPr>
-          <a:xfrm>
-            <a:off x="7879080" y="3052080"/>
-            <a:ext cx="914400" cy="914400"/>
-          </a:xfrm>
-          <a:prstGeom prst="ellipse">
-            <a:avLst/>
-          </a:prstGeom>
-          <a:solidFill>
-            <a:srgbClr val="0070C0"/>
-          </a:solidFill>
-          <a:ln w="31750">
-            <a:solidFill>
-              <a:srgbClr val="FFFFFF"/>
-            </a:solidFill>
-          </a:ln>
-        </p:spPr>
-        <p:txBody>
-          <a:bodyPr wrap="square" lIns="54864" tIns="54864" rIns="54864" bIns="54864" rtlCol="0" anchor="ctr">
-            <a:noAutofit/>
-          </a:bodyPr>
-          <a:lstStyle/>
-          <a:p>
-            <a:pPr marL="0" indent="0" algn="ctr">
-              <a:lnSpc>
-                <a:spcPct val="100000"/>
-              </a:lnSpc>
-              <a:buNone/>
-            </a:pPr>
-            <a:r>
-              <a:rPr lang="en-US" sz="2600" b="1" dirty="0">
-                <a:solidFill>
-                  <a:srgbClr val="FFFFFF"/>
-                </a:solidFill>
-                <a:latin typeface="Arial"/>
-                <a:cs typeface="Arial"/>
-              </a:rPr>
-              <a:t>7</a:t>
-            </a:r>
-          </a:p>
-        </p:txBody>
-      </p:sp>
-      <p:sp>
-        <p:nvSpPr>
-          <p:cNvPr id="122" name="Text"/>
-          <p:cNvSpPr/>
-          <p:nvPr/>
-        </p:nvSpPr>
-        <p:spPr>
-          <a:xfrm>
-            <a:off x="7741920" y="4057920"/>
-            <a:ext cx="1188720" cy="731520"/>
-          </a:xfrm>
-          <a:prstGeom prst="rect">
-            <a:avLst/>
-          </a:prstGeom>
-          <a:noFill/>
-          <a:ln>
-            <a:noFill/>
-          </a:ln>
-        </p:spPr>
-        <p:txBody>
-          <a:bodyPr wrap="square" lIns="54864" tIns="54864" rIns="54864" bIns="54864" rtlCol="0" anchor="t">
-            <a:noAutofit/>
-          </a:bodyPr>
-          <a:lstStyle/>
-          <a:p>
-            <a:pPr marL="0" indent="0" algn="ctr">
-              <a:lnSpc>
-                <a:spcPct val="100000"/>
-              </a:lnSpc>
-              <a:buNone/>
-            </a:pPr>
-            <a:r>
-              <a:rPr lang="en-US" sz="1500" b="1" dirty="0">
-                <a:solidFill>
-                  <a:srgbClr val="0070C0"/>
-                </a:solidFill>
-                <a:latin typeface="Arial"/>
-                <a:cs typeface="Arial"/>
-              </a:rPr>
-              <a:t>Bảo vệ và viết</a:t>
-            </a:r>
-          </a:p>
-        </p:txBody>
-      </p:sp>
-      <p:sp>
-        <p:nvSpPr>
-          <p:cNvPr id="123" name="Ellipse"/>
-          <p:cNvSpPr/>
-          <p:nvPr/>
-        </p:nvSpPr>
-        <p:spPr>
-          <a:xfrm>
-            <a:off x="9067800" y="3052080"/>
-            <a:ext cx="914400" cy="914400"/>
-          </a:xfrm>
-          <a:prstGeom prst="ellipse">
-            <a:avLst/>
-          </a:prstGeom>
-          <a:solidFill>
-            <a:srgbClr val="0070C0"/>
-          </a:solidFill>
-          <a:ln w="31750">
-            <a:solidFill>
-              <a:srgbClr val="FFFFFF"/>
-            </a:solidFill>
-          </a:ln>
-        </p:spPr>
-        <p:txBody>
-          <a:bodyPr wrap="square" lIns="54864" tIns="54864" rIns="54864" bIns="54864" rtlCol="0" anchor="ctr">
-            <a:noAutofit/>
-          </a:bodyPr>
-          <a:lstStyle/>
-          <a:p>
-            <a:pPr marL="0" indent="0" algn="ctr">
-              <a:lnSpc>
-                <a:spcPct val="100000"/>
-              </a:lnSpc>
-              <a:buNone/>
-            </a:pPr>
-            <a:r>
-              <a:rPr lang="en-US" sz="2600" b="1" dirty="0">
-                <a:solidFill>
-                  <a:srgbClr val="FFFFFF"/>
-                </a:solidFill>
-                <a:latin typeface="Arial"/>
-                <a:cs typeface="Arial"/>
-              </a:rPr>
-              <a:t>8</a:t>
-            </a:r>
-          </a:p>
-        </p:txBody>
-      </p:sp>
-      <p:sp>
-        <p:nvSpPr>
-          <p:cNvPr id="124" name="Text"/>
-          <p:cNvSpPr/>
-          <p:nvPr/>
-        </p:nvSpPr>
-        <p:spPr>
-          <a:xfrm>
-            <a:off x="8930640" y="4057920"/>
-            <a:ext cx="1188720" cy="731520"/>
-          </a:xfrm>
-          <a:prstGeom prst="rect">
-            <a:avLst/>
-          </a:prstGeom>
-          <a:noFill/>
-          <a:ln>
-            <a:noFill/>
-          </a:ln>
-        </p:spPr>
-        <p:txBody>
-          <a:bodyPr wrap="square" lIns="54864" tIns="54864" rIns="54864" bIns="54864" rtlCol="0" anchor="t">
-            <a:noAutofit/>
-          </a:bodyPr>
-          <a:lstStyle/>
-          <a:p>
-            <a:pPr marL="0" indent="0" algn="ctr">
-              <a:lnSpc>
-                <a:spcPct val="100000"/>
-              </a:lnSpc>
-              <a:buNone/>
-            </a:pPr>
-            <a:r>
-              <a:rPr lang="en-US" sz="1500" b="1" dirty="0">
-                <a:solidFill>
-                  <a:srgbClr val="0070C0"/>
-                </a:solidFill>
-                <a:latin typeface="Arial"/>
-                <a:cs typeface="Arial"/>
-              </a:rPr>
-              <a:t>Công bố</a:t>
-            </a:r>
-          </a:p>
-        </p:txBody>
-      </p:sp>
-      <p:sp>
-        <p:nvSpPr>
-          <p:cNvPr id="125" name="Box"/>
-          <p:cNvSpPr/>
-          <p:nvPr/>
-        </p:nvSpPr>
-        <p:spPr>
-          <a:xfrm>
-            <a:off x="10302240" y="2777760"/>
-            <a:ext cx="1371600" cy="1463040"/>
+              <a:rPr lang="en-US" sz="1500" dirty="0">
+                <a:solidFill>
+                  <a:srgbClr val="000000"/>
+                </a:solidFill>
+                <a:latin typeface="Arial"/>
+                <a:cs typeface="Arial"/>
+              </a:rPr>
+              <a:t>'Người bệnh sốc nhiễm khuẩn có cần ít dịch hơn lượng mình đang truyền không?'</a:t>
+            </a:r>
+          </a:p>
+        </p:txBody>
+      </p:sp>
+      <p:sp>
+        <p:nvSpPr>
+          <p:cNvPr id="53" name="Deliverable"/>
+          <p:cNvSpPr/>
+          <p:nvPr/>
+        </p:nvSpPr>
+        <p:spPr>
+          <a:xfrm>
+            <a:off x="457200" y="5350000"/>
+            <a:ext cx="11277600" cy="600000"/>
           </a:xfrm>
           <a:prstGeom prst="roundRect">
             <a:avLst>
@@ -29555,75 +28686,42 @@
             </a:avLst>
           </a:prstGeom>
           <a:solidFill>
-            <a:srgbClr val="055F56"/>
+            <a:srgbClr val="FFFFFF"/>
           </a:solidFill>
-          <a:ln>
-            <a:noFill/>
-          </a:ln>
-        </p:spPr>
-        <p:txBody>
-          <a:bodyPr wrap="square" lIns="54864" tIns="54864" rIns="54864" bIns="54864" rtlCol="0" anchor="ctr">
-            <a:noAutofit/>
+          <a:ln w="15875">
+            <a:solidFill>
+              <a:srgbClr val="0D7377"/>
+            </a:solidFill>
+          </a:ln>
+        </p:spPr>
+        <p:txBody>
+          <a:bodyPr wrap="square" lIns="182880" tIns="45720" rIns="182880" bIns="45720" rtlCol="0" anchor="ctr">
+            <a:normAutofit/>
           </a:bodyPr>
           <a:lstStyle/>
           <a:p>
             <a:pPr marL="0" indent="0" algn="ctr">
-              <a:lnSpc>
-                <a:spcPct val="100000"/>
-              </a:lnSpc>
-              <a:buNone/>
-            </a:pPr>
-            <a:r>
-              <a:rPr lang="en-US" sz="1500" b="1" dirty="0">
-                <a:solidFill>
-                  <a:srgbClr val="FFFFFF"/>
-                </a:solidFill>
-                <a:latin typeface="Arial"/>
-                <a:cs typeface="Arial"/>
-              </a:rPr>
-              <a:t>Đề cương</a:t>
-            </a:r>
-          </a:p>
-          <a:p>
-            <a:pPr marL="0" indent="0" algn="ctr">
-              <a:lnSpc>
-                <a:spcPct val="100000"/>
-              </a:lnSpc>
-              <a:spcBef>
-                <a:spcPts val="100"/>
-              </a:spcBef>
-              <a:buNone/>
-            </a:pPr>
-            <a:r>
-              <a:rPr lang="en-US" sz="1500" b="1" dirty="0">
-                <a:solidFill>
-                  <a:srgbClr val="FFFFFF"/>
-                </a:solidFill>
-                <a:latin typeface="Arial"/>
-                <a:cs typeface="Arial"/>
-              </a:rPr>
-              <a:t>+</a:t>
-            </a:r>
-          </a:p>
-          <a:p>
-            <a:pPr marL="0" indent="0" algn="ctr">
-              <a:lnSpc>
-                <a:spcPct val="100000"/>
-              </a:lnSpc>
-              <a:spcBef>
-                <a:spcPts val="100"/>
-              </a:spcBef>
-              <a:buNone/>
-            </a:pPr>
-            <a:r>
-              <a:rPr lang="en-US" sz="1500" b="1" dirty="0">
-                <a:solidFill>
-                  <a:srgbClr val="FFFFFF"/>
-                </a:solidFill>
-                <a:latin typeface="Arial"/>
-                <a:cs typeface="Arial"/>
-              </a:rPr>
-              <a:t>Kết quả</a:t>
+              <a:buNone/>
+            </a:pPr>
+            <a:r>
+              <a:rPr lang="en-US" sz="1300" b="1" dirty="0">
+                <a:solidFill>
+                  <a:srgbClr val="0D7377"/>
+                </a:solidFill>
+                <a:latin typeface="Arial"/>
+                <a:cs typeface="Arial"/>
+              </a:rPr>
+              <a:t>SẢN PHẨM   </a:t>
+            </a:r>
+            <a:r>
+              <a:rPr lang="en-US" sz="1500" dirty="0">
+                <a:solidFill>
+                  <a:srgbClr val="000000"/>
+                </a:solidFill>
+                <a:latin typeface="Arial"/>
+                <a:cs typeface="Arial"/>
+              </a:rPr>
+              <a:t>Mỗi người một lời giới thiệu trong chat</a:t>
             </a:r>
           </a:p>
         </p:txBody>
@@ -36578,7 +35676,7 @@
                 <a:latin typeface="Arial"/>
                 <a:cs typeface="Arial"/>
               </a:rPr>
-              <a:t>Khóa học này là Cấp độ 1 trong ba cấp độ</a:t>
+              <a:t>Tám tuần, tám buổi học</a:t>
             </a:r>
           </a:p>
         </p:txBody>
@@ -36611,19 +35709,108 @@
           </a:p>
         </p:txBody>
       </p:sp>
-      <p:sp>
-        <p:nvSpPr>
-          <p:cNvPr id="70" name="CardHead"/>
-          <p:cNvSpPr/>
-          <p:nvPr/>
-        </p:nvSpPr>
-        <p:spPr>
-          <a:xfrm>
-            <a:off x="457200" y="1916666"/>
-            <a:ext cx="3625866" cy="640000"/>
+      <p:cxnSp>
+        <p:nvCxnSpPr>
+          <p:cNvPr id="100" name="Line"/>
+          <p:cNvCxnSpPr/>
+          <p:nvPr/>
+        </p:nvCxnSpPr>
+        <p:spPr>
+          <a:xfrm>
+            <a:off x="1203960" y="3509280"/>
+            <a:ext cx="9144000" cy="0"/>
+          </a:xfrm>
+          <a:prstGeom prst="straightConnector1">
+            <a:avLst/>
+          </a:prstGeom>
+          <a:ln w="127000" cap="rnd">
+            <a:solidFill>
+              <a:srgbClr val="D5DDE1"/>
+            </a:solidFill>
+            <a:round/>
+          </a:ln>
+        </p:spPr>
+      </p:cxnSp>
+      <p:sp>
+        <p:nvSpPr>
+          <p:cNvPr id="101" name="Text"/>
+          <p:cNvSpPr/>
+          <p:nvPr/>
+        </p:nvSpPr>
+        <p:spPr>
+          <a:xfrm>
+            <a:off x="655320" y="1909080"/>
+            <a:ext cx="2286000" cy="731520"/>
           </a:xfrm>
           <a:prstGeom prst="rect">
             <a:avLst/>
+          </a:prstGeom>
+          <a:noFill/>
+          <a:ln>
+            <a:noFill/>
+          </a:ln>
+        </p:spPr>
+        <p:txBody>
+          <a:bodyPr wrap="square" lIns="54864" tIns="54864" rIns="54864" bIns="54864" rtlCol="0" anchor="ctr">
+            <a:noAutofit/>
+          </a:bodyPr>
+          <a:lstStyle/>
+          <a:p>
+            <a:pPr marL="0" indent="0" algn="ctr">
+              <a:lnSpc>
+                <a:spcPct val="100000"/>
+              </a:lnSpc>
+              <a:buNone/>
+            </a:pPr>
+            <a:r>
+              <a:rPr lang="en-US" sz="1700" b="1" dirty="0">
+                <a:solidFill>
+                  <a:srgbClr val="0D7377"/>
+                </a:solidFill>
+                <a:latin typeface="Arial"/>
+                <a:cs typeface="Arial"/>
+              </a:rPr>
+              <a:t>Tuần 1-2</a:t>
+            </a:r>
+          </a:p>
+          <a:p>
+            <a:pPr marL="0" indent="0" algn="ctr">
+              <a:lnSpc>
+                <a:spcPct val="100000"/>
+              </a:lnSpc>
+              <a:spcBef>
+                <a:spcPts val="300"/>
+              </a:spcBef>
+              <a:buNone/>
+            </a:pPr>
+            <a:r>
+              <a:rPr lang="en-US" sz="1400" dirty="0">
+                <a:solidFill>
+                  <a:srgbClr val="595959"/>
+                </a:solidFill>
+                <a:latin typeface="Arial"/>
+                <a:cs typeface="Arial"/>
+              </a:rPr>
+              <a:t>Câu hỏi và bằng chứng</a:t>
+            </a:r>
+          </a:p>
+        </p:txBody>
+      </p:sp>
+      <p:sp>
+        <p:nvSpPr>
+          <p:cNvPr id="102" name="Box"/>
+          <p:cNvSpPr/>
+          <p:nvPr/>
+        </p:nvSpPr>
+        <p:spPr>
+          <a:xfrm>
+            <a:off x="701040" y="2695464"/>
+            <a:ext cx="2194560" cy="64008"/>
+          </a:xfrm>
+          <a:prstGeom prst="roundRect">
+            <a:avLst>
+              <a:gd name="adj" fmla="val 50000"/>
+            </a:avLst>
           </a:prstGeom>
           <a:solidFill>
             <a:srgbClr val="0D7377"/>
@@ -36633,110 +35820,95 @@
           </a:ln>
         </p:spPr>
         <p:txBody>
-          <a:bodyPr wrap="square" lIns="91440" tIns="45720" rIns="91440" bIns="45720" rtlCol="0" anchor="ctr">
-            <a:normAutofit/>
-          </a:bodyPr>
-          <a:lstStyle/>
-          <a:p>
-            <a:pPr marL="0" indent="0" algn="ctr">
-              <a:buNone/>
-            </a:pPr>
-            <a:r>
-              <a:rPr lang="en-US" sz="1900" b="1" dirty="0">
-                <a:solidFill>
-                  <a:srgbClr val="FFFFFF"/>
-                </a:solidFill>
-                <a:latin typeface="Arial"/>
-                <a:cs typeface="Arial"/>
-              </a:rPr>
-              <a:t>Cấp độ 1  (khóa học này)</a:t>
-            </a:r>
-          </a:p>
-        </p:txBody>
-      </p:sp>
-      <p:sp>
-        <p:nvSpPr>
-          <p:cNvPr id="71" name="CardBody"/>
-          <p:cNvSpPr/>
-          <p:nvPr/>
-        </p:nvSpPr>
-        <p:spPr>
-          <a:xfrm>
-            <a:off x="457200" y="2556666"/>
-            <a:ext cx="3625866" cy="1300000"/>
+          <a:bodyPr wrap="square" lIns="54864" tIns="54864" rIns="54864" bIns="54864" rtlCol="0" anchor="ctr">
+            <a:noAutofit/>
+          </a:bodyPr>
+          <a:lstStyle/>
+          <a:p>
+            <a:endParaRPr lang="en-US"/>
+          </a:p>
+        </p:txBody>
+      </p:sp>
+      <p:sp>
+        <p:nvSpPr>
+          <p:cNvPr id="103" name="Text"/>
+          <p:cNvSpPr/>
+          <p:nvPr/>
+        </p:nvSpPr>
+        <p:spPr>
+          <a:xfrm>
+            <a:off x="3032760" y="1909080"/>
+            <a:ext cx="2286000" cy="731520"/>
           </a:xfrm>
           <a:prstGeom prst="rect">
             <a:avLst/>
           </a:prstGeom>
-          <a:solidFill>
-            <a:srgbClr val="EAF2F5"/>
-          </a:solidFill>
-          <a:ln>
-            <a:noFill/>
-          </a:ln>
-        </p:spPr>
-        <p:txBody>
-          <a:bodyPr wrap="square" lIns="137160" tIns="91440" rIns="137160" bIns="91440" rtlCol="0" anchor="ctr">
-            <a:normAutofit/>
+          <a:noFill/>
+          <a:ln>
+            <a:noFill/>
+          </a:ln>
+        </p:spPr>
+        <p:txBody>
+          <a:bodyPr wrap="square" lIns="54864" tIns="54864" rIns="54864" bIns="54864" rtlCol="0" anchor="ctr">
+            <a:noAutofit/>
           </a:bodyPr>
           <a:lstStyle/>
           <a:p>
             <a:pPr marL="0" indent="0" algn="ctr">
               <a:lnSpc>
-                <a:spcPct val="104000"/>
+                <a:spcPct val="100000"/>
+              </a:lnSpc>
+              <a:buNone/>
+            </a:pPr>
+            <a:r>
+              <a:rPr lang="en-US" sz="1700" b="1" dirty="0">
+                <a:solidFill>
+                  <a:srgbClr val="0B376C"/>
+                </a:solidFill>
+                <a:latin typeface="Arial"/>
+                <a:cs typeface="Arial"/>
+              </a:rPr>
+              <a:t>Tuần 3-4</a:t>
+            </a:r>
+          </a:p>
+          <a:p>
+            <a:pPr marL="0" indent="0" algn="ctr">
+              <a:lnSpc>
+                <a:spcPct val="100000"/>
               </a:lnSpc>
               <a:spcBef>
-                <a:spcPts val="400"/>
+                <a:spcPts val="300"/>
               </a:spcBef>
               <a:buNone/>
             </a:pPr>
             <a:r>
-              <a:rPr lang="en-US" sz="1750" b="1" dirty="0">
-                <a:solidFill>
-                  <a:srgbClr val="000000"/>
-                </a:solidFill>
-                <a:latin typeface="Arial"/>
-                <a:cs typeface="Arial"/>
-              </a:rPr>
-              <a:t>Từ câu hỏi đến công bố</a:t>
-            </a:r>
-          </a:p>
-          <a:p>
-            <a:pPr marL="0" indent="0" algn="ctr">
-              <a:lnSpc>
-                <a:spcPct val="104000"/>
-              </a:lnSpc>
-              <a:spcBef>
-                <a:spcPts val="400"/>
-              </a:spcBef>
-              <a:buNone/>
-            </a:pPr>
-            <a:r>
-              <a:rPr lang="en-US" sz="1750" dirty="0">
-                <a:solidFill>
-                  <a:srgbClr val="000000"/>
-                </a:solidFill>
-                <a:latin typeface="Arial"/>
-                <a:cs typeface="Arial"/>
-              </a:rPr>
-              <a:t>Hỏi, thiết kế, phân tích, viết và công bố</a:t>
-            </a:r>
-          </a:p>
-        </p:txBody>
-      </p:sp>
-      <p:sp>
-        <p:nvSpPr>
-          <p:cNvPr id="72" name="CardHead"/>
-          <p:cNvSpPr/>
-          <p:nvPr/>
-        </p:nvSpPr>
-        <p:spPr>
-          <a:xfrm>
-            <a:off x="4283066" y="1916666"/>
-            <a:ext cx="3625866" cy="640000"/>
-          </a:xfrm>
-          <a:prstGeom prst="rect">
-            <a:avLst/>
+              <a:rPr lang="en-US" sz="1400" dirty="0">
+                <a:solidFill>
+                  <a:srgbClr val="595959"/>
+                </a:solidFill>
+                <a:latin typeface="Arial"/>
+                <a:cs typeface="Arial"/>
+              </a:rPr>
+              <a:t>Thiết kế và sai lệch</a:t>
+            </a:r>
+          </a:p>
+        </p:txBody>
+      </p:sp>
+      <p:sp>
+        <p:nvSpPr>
+          <p:cNvPr id="104" name="Box"/>
+          <p:cNvSpPr/>
+          <p:nvPr/>
+        </p:nvSpPr>
+        <p:spPr>
+          <a:xfrm>
+            <a:off x="3078480" y="2695464"/>
+            <a:ext cx="2194560" cy="64008"/>
+          </a:xfrm>
+          <a:prstGeom prst="roundRect">
+            <a:avLst>
+              <a:gd name="adj" fmla="val 50000"/>
+            </a:avLst>
           </a:prstGeom>
           <a:solidFill>
             <a:srgbClr val="0B376C"/>
@@ -36746,220 +35918,957 @@
           </a:ln>
         </p:spPr>
         <p:txBody>
-          <a:bodyPr wrap="square" lIns="91440" tIns="45720" rIns="91440" bIns="45720" rtlCol="0" anchor="ctr">
-            <a:normAutofit/>
-          </a:bodyPr>
-          <a:lstStyle/>
-          <a:p>
-            <a:pPr marL="0" indent="0" algn="ctr">
-              <a:buNone/>
-            </a:pPr>
-            <a:r>
-              <a:rPr lang="en-US" sz="1900" b="1" dirty="0">
-                <a:solidFill>
-                  <a:srgbClr val="FFFFFF"/>
-                </a:solidFill>
-                <a:latin typeface="Arial"/>
-                <a:cs typeface="Arial"/>
-              </a:rPr>
-              <a:t>Cấp độ 2  (thực hành)</a:t>
-            </a:r>
-          </a:p>
-        </p:txBody>
-      </p:sp>
-      <p:sp>
-        <p:nvSpPr>
-          <p:cNvPr id="73" name="CardBody"/>
-          <p:cNvSpPr/>
-          <p:nvPr/>
-        </p:nvSpPr>
-        <p:spPr>
-          <a:xfrm>
-            <a:off x="4283066" y="2556666"/>
-            <a:ext cx="3625866" cy="1300000"/>
+          <a:bodyPr wrap="square" lIns="54864" tIns="54864" rIns="54864" bIns="54864" rtlCol="0" anchor="ctr">
+            <a:noAutofit/>
+          </a:bodyPr>
+          <a:lstStyle/>
+          <a:p>
+            <a:endParaRPr lang="en-US"/>
+          </a:p>
+        </p:txBody>
+      </p:sp>
+      <p:sp>
+        <p:nvSpPr>
+          <p:cNvPr id="105" name="Text"/>
+          <p:cNvSpPr/>
+          <p:nvPr/>
+        </p:nvSpPr>
+        <p:spPr>
+          <a:xfrm>
+            <a:off x="5410200" y="1909080"/>
+            <a:ext cx="2286000" cy="731520"/>
           </a:xfrm>
           <a:prstGeom prst="rect">
             <a:avLst/>
           </a:prstGeom>
-          <a:solidFill>
-            <a:srgbClr val="EAF2F5"/>
-          </a:solidFill>
-          <a:ln>
-            <a:noFill/>
-          </a:ln>
-        </p:spPr>
-        <p:txBody>
-          <a:bodyPr wrap="square" lIns="137160" tIns="91440" rIns="137160" bIns="91440" rtlCol="0" anchor="ctr">
-            <a:normAutofit/>
+          <a:noFill/>
+          <a:ln>
+            <a:noFill/>
+          </a:ln>
+        </p:spPr>
+        <p:txBody>
+          <a:bodyPr wrap="square" lIns="54864" tIns="54864" rIns="54864" bIns="54864" rtlCol="0" anchor="ctr">
+            <a:noAutofit/>
           </a:bodyPr>
           <a:lstStyle/>
           <a:p>
             <a:pPr marL="0" indent="0" algn="ctr">
               <a:lnSpc>
-                <a:spcPct val="104000"/>
+                <a:spcPct val="100000"/>
+              </a:lnSpc>
+              <a:buNone/>
+            </a:pPr>
+            <a:r>
+              <a:rPr lang="en-US" sz="1700" b="1" dirty="0">
+                <a:solidFill>
+                  <a:srgbClr val="5FA39B"/>
+                </a:solidFill>
+                <a:latin typeface="Arial"/>
+                <a:cs typeface="Arial"/>
+              </a:rPr>
+              <a:t>Tuần 5-6</a:t>
+            </a:r>
+          </a:p>
+          <a:p>
+            <a:pPr marL="0" indent="0" algn="ctr">
+              <a:lnSpc>
+                <a:spcPct val="100000"/>
               </a:lnSpc>
               <a:spcBef>
-                <a:spcPts val="400"/>
+                <a:spcPts val="300"/>
               </a:spcBef>
               <a:buNone/>
             </a:pPr>
             <a:r>
-              <a:rPr lang="en-US" sz="1750" b="1" dirty="0">
-                <a:solidFill>
-                  <a:srgbClr val="000000"/>
-                </a:solidFill>
-                <a:latin typeface="Arial"/>
-                <a:cs typeface="Arial"/>
-              </a:rPr>
-              <a:t>Mô hình thống kê bằng R</a:t>
-            </a:r>
-          </a:p>
+              <a:rPr lang="en-US" sz="1400" dirty="0">
+                <a:solidFill>
+                  <a:srgbClr val="595959"/>
+                </a:solidFill>
+                <a:latin typeface="Arial"/>
+                <a:cs typeface="Arial"/>
+              </a:rPr>
+              <a:t>Dữ liệu và phân tích</a:t>
+            </a:r>
+          </a:p>
+        </p:txBody>
+      </p:sp>
+      <p:sp>
+        <p:nvSpPr>
+          <p:cNvPr id="106" name="Box"/>
+          <p:cNvSpPr/>
+          <p:nvPr/>
+        </p:nvSpPr>
+        <p:spPr>
+          <a:xfrm>
+            <a:off x="5455920" y="2695464"/>
+            <a:ext cx="2194560" cy="64008"/>
+          </a:xfrm>
+          <a:prstGeom prst="roundRect">
+            <a:avLst>
+              <a:gd name="adj" fmla="val 50000"/>
+            </a:avLst>
+          </a:prstGeom>
+          <a:solidFill>
+            <a:srgbClr val="5FA39B"/>
+          </a:solidFill>
+          <a:ln>
+            <a:noFill/>
+          </a:ln>
+        </p:spPr>
+        <p:txBody>
+          <a:bodyPr wrap="square" lIns="54864" tIns="54864" rIns="54864" bIns="54864" rtlCol="0" anchor="ctr">
+            <a:noAutofit/>
+          </a:bodyPr>
+          <a:lstStyle/>
+          <a:p>
+            <a:endParaRPr lang="en-US"/>
+          </a:p>
+        </p:txBody>
+      </p:sp>
+      <p:sp>
+        <p:nvSpPr>
+          <p:cNvPr id="107" name="Text"/>
+          <p:cNvSpPr/>
+          <p:nvPr/>
+        </p:nvSpPr>
+        <p:spPr>
+          <a:xfrm>
+            <a:off x="7787640" y="1909080"/>
+            <a:ext cx="2286000" cy="731520"/>
+          </a:xfrm>
+          <a:prstGeom prst="rect">
+            <a:avLst/>
+          </a:prstGeom>
+          <a:noFill/>
+          <a:ln>
+            <a:noFill/>
+          </a:ln>
+        </p:spPr>
+        <p:txBody>
+          <a:bodyPr wrap="square" lIns="54864" tIns="54864" rIns="54864" bIns="54864" rtlCol="0" anchor="ctr">
+            <a:noAutofit/>
+          </a:bodyPr>
+          <a:lstStyle/>
           <a:p>
             <a:pPr marL="0" indent="0" algn="ctr">
               <a:lnSpc>
-                <a:spcPct val="104000"/>
+                <a:spcPct val="100000"/>
+              </a:lnSpc>
+              <a:buNone/>
+            </a:pPr>
+            <a:r>
+              <a:rPr lang="en-US" sz="1700" b="1" dirty="0">
+                <a:solidFill>
+                  <a:srgbClr val="0070C0"/>
+                </a:solidFill>
+                <a:latin typeface="Arial"/>
+                <a:cs typeface="Arial"/>
+              </a:rPr>
+              <a:t>Tuần 7-8</a:t>
+            </a:r>
+          </a:p>
+          <a:p>
+            <a:pPr marL="0" indent="0" algn="ctr">
+              <a:lnSpc>
+                <a:spcPct val="100000"/>
               </a:lnSpc>
               <a:spcBef>
-                <a:spcPts val="400"/>
+                <a:spcPts val="300"/>
               </a:spcBef>
               <a:buNone/>
             </a:pPr>
             <a:r>
-              <a:rPr lang="en-US" sz="1750" dirty="0">
-                <a:solidFill>
-                  <a:srgbClr val="000000"/>
-                </a:solidFill>
-                <a:latin typeface="Arial"/>
-                <a:cs typeface="Arial"/>
-              </a:rPr>
-              <a:t>Bạn tự chạy phân tích</a:t>
-            </a:r>
-          </a:p>
-        </p:txBody>
-      </p:sp>
-      <p:sp>
-        <p:nvSpPr>
-          <p:cNvPr id="74" name="CardHead"/>
-          <p:cNvSpPr/>
-          <p:nvPr/>
-        </p:nvSpPr>
-        <p:spPr>
-          <a:xfrm>
-            <a:off x="8108932" y="1916666"/>
-            <a:ext cx="3625866" cy="640000"/>
-          </a:xfrm>
-          <a:prstGeom prst="rect">
-            <a:avLst/>
+              <a:rPr lang="en-US" sz="1400" dirty="0">
+                <a:solidFill>
+                  <a:srgbClr val="595959"/>
+                </a:solidFill>
+                <a:latin typeface="Arial"/>
+                <a:cs typeface="Arial"/>
+              </a:rPr>
+              <a:t>Đạo đức, viết, công bố</a:t>
+            </a:r>
+          </a:p>
+        </p:txBody>
+      </p:sp>
+      <p:sp>
+        <p:nvSpPr>
+          <p:cNvPr id="108" name="Box"/>
+          <p:cNvSpPr/>
+          <p:nvPr/>
+        </p:nvSpPr>
+        <p:spPr>
+          <a:xfrm>
+            <a:off x="7833360" y="2695464"/>
+            <a:ext cx="2194560" cy="64008"/>
+          </a:xfrm>
+          <a:prstGeom prst="roundRect">
+            <a:avLst>
+              <a:gd name="adj" fmla="val 50000"/>
+            </a:avLst>
           </a:prstGeom>
           <a:solidFill>
-            <a:srgbClr val="04242F"/>
+            <a:srgbClr val="0070C0"/>
           </a:solidFill>
           <a:ln>
             <a:noFill/>
           </a:ln>
         </p:spPr>
         <p:txBody>
-          <a:bodyPr wrap="square" lIns="91440" tIns="45720" rIns="91440" bIns="45720" rtlCol="0" anchor="ctr">
-            <a:normAutofit/>
-          </a:bodyPr>
-          <a:lstStyle/>
-          <a:p>
-            <a:pPr marL="0" indent="0" algn="ctr">
-              <a:buNone/>
-            </a:pPr>
-            <a:r>
-              <a:rPr lang="en-US" sz="1900" b="1" dirty="0">
-                <a:solidFill>
-                  <a:srgbClr val="FFFFFF"/>
-                </a:solidFill>
-                <a:latin typeface="Arial"/>
-                <a:cs typeface="Arial"/>
-              </a:rPr>
-              <a:t>Cấp độ 3  (nâng cao)</a:t>
-            </a:r>
-          </a:p>
-        </p:txBody>
-      </p:sp>
-      <p:sp>
-        <p:nvSpPr>
-          <p:cNvPr id="75" name="CardBody"/>
-          <p:cNvSpPr/>
-          <p:nvPr/>
-        </p:nvSpPr>
-        <p:spPr>
-          <a:xfrm>
-            <a:off x="8108932" y="2556666"/>
-            <a:ext cx="3625866" cy="1300000"/>
-          </a:xfrm>
-          <a:prstGeom prst="rect">
+          <a:bodyPr wrap="square" lIns="54864" tIns="54864" rIns="54864" bIns="54864" rtlCol="0" anchor="ctr">
+            <a:noAutofit/>
+          </a:bodyPr>
+          <a:lstStyle/>
+          <a:p>
+            <a:endParaRPr lang="en-US"/>
+          </a:p>
+        </p:txBody>
+      </p:sp>
+      <p:sp>
+        <p:nvSpPr>
+          <p:cNvPr id="109" name="Ellipse"/>
+          <p:cNvSpPr/>
+          <p:nvPr/>
+        </p:nvSpPr>
+        <p:spPr>
+          <a:xfrm>
+            <a:off x="746760" y="3052080"/>
+            <a:ext cx="914400" cy="914400"/>
+          </a:xfrm>
+          <a:prstGeom prst="ellipse">
             <a:avLst/>
           </a:prstGeom>
           <a:solidFill>
-            <a:srgbClr val="EAF2F5"/>
+            <a:srgbClr val="0D7377"/>
           </a:solidFill>
-          <a:ln>
-            <a:noFill/>
-          </a:ln>
-        </p:spPr>
-        <p:txBody>
-          <a:bodyPr wrap="square" lIns="137160" tIns="91440" rIns="137160" bIns="91440" rtlCol="0" anchor="ctr">
-            <a:normAutofit/>
+          <a:ln w="31750">
+            <a:solidFill>
+              <a:srgbClr val="FFFFFF"/>
+            </a:solidFill>
+          </a:ln>
+        </p:spPr>
+        <p:txBody>
+          <a:bodyPr wrap="square" lIns="54864" tIns="54864" rIns="54864" bIns="54864" rtlCol="0" anchor="ctr">
+            <a:noAutofit/>
           </a:bodyPr>
           <a:lstStyle/>
           <a:p>
             <a:pPr marL="0" indent="0" algn="ctr">
               <a:lnSpc>
-                <a:spcPct val="104000"/>
+                <a:spcPct val="100000"/>
               </a:lnSpc>
-              <a:spcBef>
-                <a:spcPts val="400"/>
-              </a:spcBef>
-              <a:buNone/>
-            </a:pPr>
-            <a:r>
-              <a:rPr lang="en-US" sz="1750" b="1" dirty="0">
-                <a:solidFill>
-                  <a:srgbClr val="000000"/>
-                </a:solidFill>
-                <a:latin typeface="Arial"/>
-                <a:cs typeface="Arial"/>
-              </a:rPr>
-              <a:t>Phương pháp nâng cao</a:t>
-            </a:r>
-          </a:p>
+              <a:buNone/>
+            </a:pPr>
+            <a:r>
+              <a:rPr lang="en-US" sz="2600" b="1" dirty="0">
+                <a:solidFill>
+                  <a:srgbClr val="FFFFFF"/>
+                </a:solidFill>
+                <a:latin typeface="Arial"/>
+                <a:cs typeface="Arial"/>
+              </a:rPr>
+              <a:t>1</a:t>
+            </a:r>
+          </a:p>
+        </p:txBody>
+      </p:sp>
+      <p:sp>
+        <p:nvSpPr>
+          <p:cNvPr id="110" name="Text"/>
+          <p:cNvSpPr/>
+          <p:nvPr/>
+        </p:nvSpPr>
+        <p:spPr>
+          <a:xfrm>
+            <a:off x="609600" y="4057920"/>
+            <a:ext cx="1188720" cy="731520"/>
+          </a:xfrm>
+          <a:prstGeom prst="rect">
+            <a:avLst/>
+          </a:prstGeom>
+          <a:noFill/>
+          <a:ln>
+            <a:noFill/>
+          </a:ln>
+        </p:spPr>
+        <p:txBody>
+          <a:bodyPr wrap="square" lIns="54864" tIns="54864" rIns="54864" bIns="54864" rtlCol="0" anchor="t">
+            <a:noAutofit/>
+          </a:bodyPr>
+          <a:lstStyle/>
           <a:p>
             <a:pPr marL="0" indent="0" algn="ctr">
               <a:lnSpc>
-                <a:spcPct val="104000"/>
+                <a:spcPct val="100000"/>
               </a:lnSpc>
-              <a:spcBef>
-                <a:spcPts val="400"/>
-              </a:spcBef>
-              <a:buNone/>
-            </a:pPr>
-            <a:r>
-              <a:rPr lang="en-US" sz="1750" dirty="0">
-                <a:solidFill>
-                  <a:srgbClr val="000000"/>
-                </a:solidFill>
-                <a:latin typeface="Arial"/>
-                <a:cs typeface="Arial"/>
-              </a:rPr>
-              <a:t>Hội thảo chuyên đề theo yêu cầu</a:t>
-            </a:r>
-          </a:p>
-        </p:txBody>
-      </p:sp>
-      <p:sp>
-        <p:nvSpPr>
-          <p:cNvPr id="60" name="Takeaway"/>
-          <p:cNvSpPr/>
-          <p:nvPr/>
-        </p:nvSpPr>
-        <p:spPr>
-          <a:xfrm>
-            <a:off x="457200" y="5390000"/>
-            <a:ext cx="11277600" cy="560000"/>
+              <a:buNone/>
+            </a:pPr>
+            <a:r>
+              <a:rPr lang="en-US" sz="1500" b="1" dirty="0">
+                <a:solidFill>
+                  <a:srgbClr val="0D7377"/>
+                </a:solidFill>
+                <a:latin typeface="Arial"/>
+                <a:cs typeface="Arial"/>
+              </a:rPr>
+              <a:t>Hỏi</a:t>
+            </a:r>
+          </a:p>
+        </p:txBody>
+      </p:sp>
+      <p:sp>
+        <p:nvSpPr>
+          <p:cNvPr id="111" name="Ellipse"/>
+          <p:cNvSpPr/>
+          <p:nvPr/>
+        </p:nvSpPr>
+        <p:spPr>
+          <a:xfrm>
+            <a:off x="1935480" y="3052080"/>
+            <a:ext cx="914400" cy="914400"/>
+          </a:xfrm>
+          <a:prstGeom prst="ellipse">
+            <a:avLst/>
+          </a:prstGeom>
+          <a:solidFill>
+            <a:srgbClr val="0D7377"/>
+          </a:solidFill>
+          <a:ln w="31750">
+            <a:solidFill>
+              <a:srgbClr val="FFFFFF"/>
+            </a:solidFill>
+          </a:ln>
+        </p:spPr>
+        <p:txBody>
+          <a:bodyPr wrap="square" lIns="54864" tIns="54864" rIns="54864" bIns="54864" rtlCol="0" anchor="ctr">
+            <a:noAutofit/>
+          </a:bodyPr>
+          <a:lstStyle/>
+          <a:p>
+            <a:pPr marL="0" indent="0" algn="ctr">
+              <a:lnSpc>
+                <a:spcPct val="100000"/>
+              </a:lnSpc>
+              <a:buNone/>
+            </a:pPr>
+            <a:r>
+              <a:rPr lang="en-US" sz="2600" b="1" dirty="0">
+                <a:solidFill>
+                  <a:srgbClr val="FFFFFF"/>
+                </a:solidFill>
+                <a:latin typeface="Arial"/>
+                <a:cs typeface="Arial"/>
+              </a:rPr>
+              <a:t>2</a:t>
+            </a:r>
+          </a:p>
+        </p:txBody>
+      </p:sp>
+      <p:sp>
+        <p:nvSpPr>
+          <p:cNvPr id="112" name="Text"/>
+          <p:cNvSpPr/>
+          <p:nvPr/>
+        </p:nvSpPr>
+        <p:spPr>
+          <a:xfrm>
+            <a:off x="1798320" y="4057920"/>
+            <a:ext cx="1188720" cy="731520"/>
+          </a:xfrm>
+          <a:prstGeom prst="rect">
+            <a:avLst/>
+          </a:prstGeom>
+          <a:noFill/>
+          <a:ln>
+            <a:noFill/>
+          </a:ln>
+        </p:spPr>
+        <p:txBody>
+          <a:bodyPr wrap="square" lIns="54864" tIns="54864" rIns="54864" bIns="54864" rtlCol="0" anchor="t">
+            <a:noAutofit/>
+          </a:bodyPr>
+          <a:lstStyle/>
+          <a:p>
+            <a:pPr marL="0" indent="0" algn="ctr">
+              <a:lnSpc>
+                <a:spcPct val="100000"/>
+              </a:lnSpc>
+              <a:buNone/>
+            </a:pPr>
+            <a:r>
+              <a:rPr lang="en-US" sz="1500" b="1" dirty="0">
+                <a:solidFill>
+                  <a:srgbClr val="0D7377"/>
+                </a:solidFill>
+                <a:latin typeface="Arial"/>
+                <a:cs typeface="Arial"/>
+              </a:rPr>
+              <a:t>Tìm và đọc</a:t>
+            </a:r>
+          </a:p>
+        </p:txBody>
+      </p:sp>
+      <p:sp>
+        <p:nvSpPr>
+          <p:cNvPr id="113" name="Ellipse"/>
+          <p:cNvSpPr/>
+          <p:nvPr/>
+        </p:nvSpPr>
+        <p:spPr>
+          <a:xfrm>
+            <a:off x="3124200" y="3052080"/>
+            <a:ext cx="914400" cy="914400"/>
+          </a:xfrm>
+          <a:prstGeom prst="ellipse">
+            <a:avLst/>
+          </a:prstGeom>
+          <a:solidFill>
+            <a:srgbClr val="0B376C"/>
+          </a:solidFill>
+          <a:ln w="31750">
+            <a:solidFill>
+              <a:srgbClr val="FFFFFF"/>
+            </a:solidFill>
+          </a:ln>
+        </p:spPr>
+        <p:txBody>
+          <a:bodyPr wrap="square" lIns="54864" tIns="54864" rIns="54864" bIns="54864" rtlCol="0" anchor="ctr">
+            <a:noAutofit/>
+          </a:bodyPr>
+          <a:lstStyle/>
+          <a:p>
+            <a:pPr marL="0" indent="0" algn="ctr">
+              <a:lnSpc>
+                <a:spcPct val="100000"/>
+              </a:lnSpc>
+              <a:buNone/>
+            </a:pPr>
+            <a:r>
+              <a:rPr lang="en-US" sz="2600" b="1" dirty="0">
+                <a:solidFill>
+                  <a:srgbClr val="FFFFFF"/>
+                </a:solidFill>
+                <a:latin typeface="Arial"/>
+                <a:cs typeface="Arial"/>
+              </a:rPr>
+              <a:t>3</a:t>
+            </a:r>
+          </a:p>
+        </p:txBody>
+      </p:sp>
+      <p:sp>
+        <p:nvSpPr>
+          <p:cNvPr id="114" name="Text"/>
+          <p:cNvSpPr/>
+          <p:nvPr/>
+        </p:nvSpPr>
+        <p:spPr>
+          <a:xfrm>
+            <a:off x="2987040" y="4057920"/>
+            <a:ext cx="1188720" cy="731520"/>
+          </a:xfrm>
+          <a:prstGeom prst="rect">
+            <a:avLst/>
+          </a:prstGeom>
+          <a:noFill/>
+          <a:ln>
+            <a:noFill/>
+          </a:ln>
+        </p:spPr>
+        <p:txBody>
+          <a:bodyPr wrap="square" lIns="54864" tIns="54864" rIns="54864" bIns="54864" rtlCol="0" anchor="t">
+            <a:noAutofit/>
+          </a:bodyPr>
+          <a:lstStyle/>
+          <a:p>
+            <a:pPr marL="0" indent="0" algn="ctr">
+              <a:lnSpc>
+                <a:spcPct val="100000"/>
+              </a:lnSpc>
+              <a:buNone/>
+            </a:pPr>
+            <a:r>
+              <a:rPr lang="en-US" sz="1500" b="1" dirty="0">
+                <a:solidFill>
+                  <a:srgbClr val="0B376C"/>
+                </a:solidFill>
+                <a:latin typeface="Arial"/>
+                <a:cs typeface="Arial"/>
+              </a:rPr>
+              <a:t>Thiết kế</a:t>
+            </a:r>
+          </a:p>
+        </p:txBody>
+      </p:sp>
+      <p:sp>
+        <p:nvSpPr>
+          <p:cNvPr id="115" name="Ellipse"/>
+          <p:cNvSpPr/>
+          <p:nvPr/>
+        </p:nvSpPr>
+        <p:spPr>
+          <a:xfrm>
+            <a:off x="4312920" y="3052080"/>
+            <a:ext cx="914400" cy="914400"/>
+          </a:xfrm>
+          <a:prstGeom prst="ellipse">
+            <a:avLst/>
+          </a:prstGeom>
+          <a:solidFill>
+            <a:srgbClr val="0B376C"/>
+          </a:solidFill>
+          <a:ln w="31750">
+            <a:solidFill>
+              <a:srgbClr val="FFFFFF"/>
+            </a:solidFill>
+          </a:ln>
+        </p:spPr>
+        <p:txBody>
+          <a:bodyPr wrap="square" lIns="54864" tIns="54864" rIns="54864" bIns="54864" rtlCol="0" anchor="ctr">
+            <a:noAutofit/>
+          </a:bodyPr>
+          <a:lstStyle/>
+          <a:p>
+            <a:pPr marL="0" indent="0" algn="ctr">
+              <a:lnSpc>
+                <a:spcPct val="100000"/>
+              </a:lnSpc>
+              <a:buNone/>
+            </a:pPr>
+            <a:r>
+              <a:rPr lang="en-US" sz="2600" b="1" dirty="0">
+                <a:solidFill>
+                  <a:srgbClr val="FFFFFF"/>
+                </a:solidFill>
+                <a:latin typeface="Arial"/>
+                <a:cs typeface="Arial"/>
+              </a:rPr>
+              <a:t>4</a:t>
+            </a:r>
+          </a:p>
+        </p:txBody>
+      </p:sp>
+      <p:sp>
+        <p:nvSpPr>
+          <p:cNvPr id="116" name="Text"/>
+          <p:cNvSpPr/>
+          <p:nvPr/>
+        </p:nvSpPr>
+        <p:spPr>
+          <a:xfrm>
+            <a:off x="4175760" y="4057920"/>
+            <a:ext cx="1188720" cy="731520"/>
+          </a:xfrm>
+          <a:prstGeom prst="rect">
+            <a:avLst/>
+          </a:prstGeom>
+          <a:noFill/>
+          <a:ln>
+            <a:noFill/>
+          </a:ln>
+        </p:spPr>
+        <p:txBody>
+          <a:bodyPr wrap="square" lIns="54864" tIns="54864" rIns="54864" bIns="54864" rtlCol="0" anchor="t">
+            <a:noAutofit/>
+          </a:bodyPr>
+          <a:lstStyle/>
+          <a:p>
+            <a:pPr marL="0" indent="0" algn="ctr">
+              <a:lnSpc>
+                <a:spcPct val="100000"/>
+              </a:lnSpc>
+              <a:buNone/>
+            </a:pPr>
+            <a:r>
+              <a:rPr lang="en-US" sz="1500" b="1" dirty="0">
+                <a:solidFill>
+                  <a:srgbClr val="0B376C"/>
+                </a:solidFill>
+                <a:latin typeface="Arial"/>
+                <a:cs typeface="Arial"/>
+              </a:rPr>
+              <a:t>Sai lệch và tác động</a:t>
+            </a:r>
+          </a:p>
+        </p:txBody>
+      </p:sp>
+      <p:sp>
+        <p:nvSpPr>
+          <p:cNvPr id="117" name="Ellipse"/>
+          <p:cNvSpPr/>
+          <p:nvPr/>
+        </p:nvSpPr>
+        <p:spPr>
+          <a:xfrm>
+            <a:off x="5501640" y="3052080"/>
+            <a:ext cx="914400" cy="914400"/>
+          </a:xfrm>
+          <a:prstGeom prst="ellipse">
+            <a:avLst/>
+          </a:prstGeom>
+          <a:solidFill>
+            <a:srgbClr val="5FA39B"/>
+          </a:solidFill>
+          <a:ln w="31750">
+            <a:solidFill>
+              <a:srgbClr val="FFFFFF"/>
+            </a:solidFill>
+          </a:ln>
+        </p:spPr>
+        <p:txBody>
+          <a:bodyPr wrap="square" lIns="54864" tIns="54864" rIns="54864" bIns="54864" rtlCol="0" anchor="ctr">
+            <a:noAutofit/>
+          </a:bodyPr>
+          <a:lstStyle/>
+          <a:p>
+            <a:pPr marL="0" indent="0" algn="ctr">
+              <a:lnSpc>
+                <a:spcPct val="100000"/>
+              </a:lnSpc>
+              <a:buNone/>
+            </a:pPr>
+            <a:r>
+              <a:rPr lang="en-US" sz="2600" b="1" dirty="0">
+                <a:solidFill>
+                  <a:srgbClr val="FFFFFF"/>
+                </a:solidFill>
+                <a:latin typeface="Arial"/>
+                <a:cs typeface="Arial"/>
+              </a:rPr>
+              <a:t>5</a:t>
+            </a:r>
+          </a:p>
+        </p:txBody>
+      </p:sp>
+      <p:sp>
+        <p:nvSpPr>
+          <p:cNvPr id="118" name="Text"/>
+          <p:cNvSpPr/>
+          <p:nvPr/>
+        </p:nvSpPr>
+        <p:spPr>
+          <a:xfrm>
+            <a:off x="5364480" y="4057920"/>
+            <a:ext cx="1188720" cy="731520"/>
+          </a:xfrm>
+          <a:prstGeom prst="rect">
+            <a:avLst/>
+          </a:prstGeom>
+          <a:noFill/>
+          <a:ln>
+            <a:noFill/>
+          </a:ln>
+        </p:spPr>
+        <p:txBody>
+          <a:bodyPr wrap="square" lIns="54864" tIns="54864" rIns="54864" bIns="54864" rtlCol="0" anchor="t">
+            <a:noAutofit/>
+          </a:bodyPr>
+          <a:lstStyle/>
+          <a:p>
+            <a:pPr marL="0" indent="0" algn="ctr">
+              <a:lnSpc>
+                <a:spcPct val="100000"/>
+              </a:lnSpc>
+              <a:buNone/>
+            </a:pPr>
+            <a:r>
+              <a:rPr lang="en-US" sz="1500" b="1" dirty="0">
+                <a:solidFill>
+                  <a:srgbClr val="5FA39B"/>
+                </a:solidFill>
+                <a:latin typeface="Arial"/>
+                <a:cs typeface="Arial"/>
+              </a:rPr>
+              <a:t>Dữ liệu</a:t>
+            </a:r>
+          </a:p>
+        </p:txBody>
+      </p:sp>
+      <p:sp>
+        <p:nvSpPr>
+          <p:cNvPr id="119" name="Ellipse"/>
+          <p:cNvSpPr/>
+          <p:nvPr/>
+        </p:nvSpPr>
+        <p:spPr>
+          <a:xfrm>
+            <a:off x="6690360" y="3052080"/>
+            <a:ext cx="914400" cy="914400"/>
+          </a:xfrm>
+          <a:prstGeom prst="ellipse">
+            <a:avLst/>
+          </a:prstGeom>
+          <a:solidFill>
+            <a:srgbClr val="5FA39B"/>
+          </a:solidFill>
+          <a:ln w="31750">
+            <a:solidFill>
+              <a:srgbClr val="FFFFFF"/>
+            </a:solidFill>
+          </a:ln>
+        </p:spPr>
+        <p:txBody>
+          <a:bodyPr wrap="square" lIns="54864" tIns="54864" rIns="54864" bIns="54864" rtlCol="0" anchor="ctr">
+            <a:noAutofit/>
+          </a:bodyPr>
+          <a:lstStyle/>
+          <a:p>
+            <a:pPr marL="0" indent="0" algn="ctr">
+              <a:lnSpc>
+                <a:spcPct val="100000"/>
+              </a:lnSpc>
+              <a:buNone/>
+            </a:pPr>
+            <a:r>
+              <a:rPr lang="en-US" sz="2600" b="1" dirty="0">
+                <a:solidFill>
+                  <a:srgbClr val="FFFFFF"/>
+                </a:solidFill>
+                <a:latin typeface="Arial"/>
+                <a:cs typeface="Arial"/>
+              </a:rPr>
+              <a:t>6</a:t>
+            </a:r>
+          </a:p>
+        </p:txBody>
+      </p:sp>
+      <p:sp>
+        <p:nvSpPr>
+          <p:cNvPr id="120" name="Text"/>
+          <p:cNvSpPr/>
+          <p:nvPr/>
+        </p:nvSpPr>
+        <p:spPr>
+          <a:xfrm>
+            <a:off x="6553200" y="4057920"/>
+            <a:ext cx="1188720" cy="731520"/>
+          </a:xfrm>
+          <a:prstGeom prst="rect">
+            <a:avLst/>
+          </a:prstGeom>
+          <a:noFill/>
+          <a:ln>
+            <a:noFill/>
+          </a:ln>
+        </p:spPr>
+        <p:txBody>
+          <a:bodyPr wrap="square" lIns="54864" tIns="54864" rIns="54864" bIns="54864" rtlCol="0" anchor="t">
+            <a:noAutofit/>
+          </a:bodyPr>
+          <a:lstStyle/>
+          <a:p>
+            <a:pPr marL="0" indent="0" algn="ctr">
+              <a:lnSpc>
+                <a:spcPct val="100000"/>
+              </a:lnSpc>
+              <a:buNone/>
+            </a:pPr>
+            <a:r>
+              <a:rPr lang="en-US" sz="1500" b="1" dirty="0">
+                <a:solidFill>
+                  <a:srgbClr val="5FA39B"/>
+                </a:solidFill>
+                <a:latin typeface="Arial"/>
+                <a:cs typeface="Arial"/>
+              </a:rPr>
+              <a:t>Phân tích</a:t>
+            </a:r>
+          </a:p>
+        </p:txBody>
+      </p:sp>
+      <p:sp>
+        <p:nvSpPr>
+          <p:cNvPr id="121" name="Ellipse"/>
+          <p:cNvSpPr/>
+          <p:nvPr/>
+        </p:nvSpPr>
+        <p:spPr>
+          <a:xfrm>
+            <a:off x="7879080" y="3052080"/>
+            <a:ext cx="914400" cy="914400"/>
+          </a:xfrm>
+          <a:prstGeom prst="ellipse">
+            <a:avLst/>
+          </a:prstGeom>
+          <a:solidFill>
+            <a:srgbClr val="0070C0"/>
+          </a:solidFill>
+          <a:ln w="31750">
+            <a:solidFill>
+              <a:srgbClr val="FFFFFF"/>
+            </a:solidFill>
+          </a:ln>
+        </p:spPr>
+        <p:txBody>
+          <a:bodyPr wrap="square" lIns="54864" tIns="54864" rIns="54864" bIns="54864" rtlCol="0" anchor="ctr">
+            <a:noAutofit/>
+          </a:bodyPr>
+          <a:lstStyle/>
+          <a:p>
+            <a:pPr marL="0" indent="0" algn="ctr">
+              <a:lnSpc>
+                <a:spcPct val="100000"/>
+              </a:lnSpc>
+              <a:buNone/>
+            </a:pPr>
+            <a:r>
+              <a:rPr lang="en-US" sz="2600" b="1" dirty="0">
+                <a:solidFill>
+                  <a:srgbClr val="FFFFFF"/>
+                </a:solidFill>
+                <a:latin typeface="Arial"/>
+                <a:cs typeface="Arial"/>
+              </a:rPr>
+              <a:t>7</a:t>
+            </a:r>
+          </a:p>
+        </p:txBody>
+      </p:sp>
+      <p:sp>
+        <p:nvSpPr>
+          <p:cNvPr id="122" name="Text"/>
+          <p:cNvSpPr/>
+          <p:nvPr/>
+        </p:nvSpPr>
+        <p:spPr>
+          <a:xfrm>
+            <a:off x="7741920" y="4057920"/>
+            <a:ext cx="1188720" cy="731520"/>
+          </a:xfrm>
+          <a:prstGeom prst="rect">
+            <a:avLst/>
+          </a:prstGeom>
+          <a:noFill/>
+          <a:ln>
+            <a:noFill/>
+          </a:ln>
+        </p:spPr>
+        <p:txBody>
+          <a:bodyPr wrap="square" lIns="54864" tIns="54864" rIns="54864" bIns="54864" rtlCol="0" anchor="t">
+            <a:noAutofit/>
+          </a:bodyPr>
+          <a:lstStyle/>
+          <a:p>
+            <a:pPr marL="0" indent="0" algn="ctr">
+              <a:lnSpc>
+                <a:spcPct val="100000"/>
+              </a:lnSpc>
+              <a:buNone/>
+            </a:pPr>
+            <a:r>
+              <a:rPr lang="en-US" sz="1500" b="1" dirty="0">
+                <a:solidFill>
+                  <a:srgbClr val="0070C0"/>
+                </a:solidFill>
+                <a:latin typeface="Arial"/>
+                <a:cs typeface="Arial"/>
+              </a:rPr>
+              <a:t>Bảo vệ và viết</a:t>
+            </a:r>
+          </a:p>
+        </p:txBody>
+      </p:sp>
+      <p:sp>
+        <p:nvSpPr>
+          <p:cNvPr id="123" name="Ellipse"/>
+          <p:cNvSpPr/>
+          <p:nvPr/>
+        </p:nvSpPr>
+        <p:spPr>
+          <a:xfrm>
+            <a:off x="9067800" y="3052080"/>
+            <a:ext cx="914400" cy="914400"/>
+          </a:xfrm>
+          <a:prstGeom prst="ellipse">
+            <a:avLst/>
+          </a:prstGeom>
+          <a:solidFill>
+            <a:srgbClr val="0070C0"/>
+          </a:solidFill>
+          <a:ln w="31750">
+            <a:solidFill>
+              <a:srgbClr val="FFFFFF"/>
+            </a:solidFill>
+          </a:ln>
+        </p:spPr>
+        <p:txBody>
+          <a:bodyPr wrap="square" lIns="54864" tIns="54864" rIns="54864" bIns="54864" rtlCol="0" anchor="ctr">
+            <a:noAutofit/>
+          </a:bodyPr>
+          <a:lstStyle/>
+          <a:p>
+            <a:pPr marL="0" indent="0" algn="ctr">
+              <a:lnSpc>
+                <a:spcPct val="100000"/>
+              </a:lnSpc>
+              <a:buNone/>
+            </a:pPr>
+            <a:r>
+              <a:rPr lang="en-US" sz="2600" b="1" dirty="0">
+                <a:solidFill>
+                  <a:srgbClr val="FFFFFF"/>
+                </a:solidFill>
+                <a:latin typeface="Arial"/>
+                <a:cs typeface="Arial"/>
+              </a:rPr>
+              <a:t>8</a:t>
+            </a:r>
+          </a:p>
+        </p:txBody>
+      </p:sp>
+      <p:sp>
+        <p:nvSpPr>
+          <p:cNvPr id="124" name="Text"/>
+          <p:cNvSpPr/>
+          <p:nvPr/>
+        </p:nvSpPr>
+        <p:spPr>
+          <a:xfrm>
+            <a:off x="8930640" y="4057920"/>
+            <a:ext cx="1188720" cy="731520"/>
+          </a:xfrm>
+          <a:prstGeom prst="rect">
+            <a:avLst/>
+          </a:prstGeom>
+          <a:noFill/>
+          <a:ln>
+            <a:noFill/>
+          </a:ln>
+        </p:spPr>
+        <p:txBody>
+          <a:bodyPr wrap="square" lIns="54864" tIns="54864" rIns="54864" bIns="54864" rtlCol="0" anchor="t">
+            <a:noAutofit/>
+          </a:bodyPr>
+          <a:lstStyle/>
+          <a:p>
+            <a:pPr marL="0" indent="0" algn="ctr">
+              <a:lnSpc>
+                <a:spcPct val="100000"/>
+              </a:lnSpc>
+              <a:buNone/>
+            </a:pPr>
+            <a:r>
+              <a:rPr lang="en-US" sz="1500" b="1" dirty="0">
+                <a:solidFill>
+                  <a:srgbClr val="0070C0"/>
+                </a:solidFill>
+                <a:latin typeface="Arial"/>
+                <a:cs typeface="Arial"/>
+              </a:rPr>
+              <a:t>Công bố</a:t>
+            </a:r>
+          </a:p>
+        </p:txBody>
+      </p:sp>
+      <p:sp>
+        <p:nvSpPr>
+          <p:cNvPr id="125" name="Box"/>
+          <p:cNvSpPr/>
+          <p:nvPr/>
+        </p:nvSpPr>
+        <p:spPr>
+          <a:xfrm>
+            <a:off x="10302240" y="2777760"/>
+            <a:ext cx="1371600" cy="1463040"/>
           </a:xfrm>
           <a:prstGeom prst="roundRect">
             <a:avLst>
@@ -36967,40 +36876,75 @@
             </a:avLst>
           </a:prstGeom>
           <a:solidFill>
-            <a:srgbClr val="0D7377"/>
+            <a:srgbClr val="055F56"/>
           </a:solidFill>
           <a:ln>
             <a:noFill/>
           </a:ln>
         </p:spPr>
         <p:txBody>
-          <a:bodyPr wrap="square" lIns="182880" tIns="45720" rIns="182880" bIns="45720" rtlCol="0" anchor="ctr">
-            <a:normAutofit/>
+          <a:bodyPr wrap="square" lIns="54864" tIns="54864" rIns="54864" bIns="54864" rtlCol="0" anchor="ctr">
+            <a:noAutofit/>
           </a:bodyPr>
           <a:lstStyle/>
           <a:p>
             <a:pPr marL="0" indent="0" algn="ctr">
-              <a:buNone/>
-            </a:pPr>
-            <a:r>
-              <a:rPr lang="en-US" sz="1300" b="1" dirty="0">
+              <a:lnSpc>
+                <a:spcPct val="100000"/>
+              </a:lnSpc>
+              <a:buNone/>
+            </a:pPr>
+            <a:r>
+              <a:rPr lang="en-US" sz="1500" b="1" dirty="0">
                 <a:solidFill>
                   <a:srgbClr val="FFFFFF"/>
                 </a:solidFill>
                 <a:latin typeface="Arial"/>
                 <a:cs typeface="Arial"/>
               </a:rPr>
-              <a:t>THÔNG ĐIỆP CHÍNH   </a:t>
-            </a:r>
-            <a:r>
-              <a:rPr lang="en-US" sz="1550" dirty="0">
+              <a:t>Đề cương</a:t>
+            </a:r>
+          </a:p>
+          <a:p>
+            <a:pPr marL="0" indent="0" algn="ctr">
+              <a:lnSpc>
+                <a:spcPct val="100000"/>
+              </a:lnSpc>
+              <a:spcBef>
+                <a:spcPts val="100"/>
+              </a:spcBef>
+              <a:buNone/>
+            </a:pPr>
+            <a:r>
+              <a:rPr lang="en-US" sz="1500" b="1" dirty="0">
                 <a:solidFill>
                   <a:srgbClr val="FFFFFF"/>
                 </a:solidFill>
                 <a:latin typeface="Arial"/>
                 <a:cs typeface="Arial"/>
               </a:rPr>
-              <a:t>Cấp độ 1 là khóa học này. Cấp độ 2 và 3 dành cho ai muốn học sâu hơn.</a:t>
+              <a:t>+</a:t>
+            </a:r>
+          </a:p>
+          <a:p>
+            <a:pPr marL="0" indent="0" algn="ctr">
+              <a:lnSpc>
+                <a:spcPct val="100000"/>
+              </a:lnSpc>
+              <a:spcBef>
+                <a:spcPts val="100"/>
+              </a:spcBef>
+              <a:buNone/>
+            </a:pPr>
+            <a:r>
+              <a:rPr lang="en-US" sz="1500" b="1" dirty="0">
+                <a:solidFill>
+                  <a:srgbClr val="FFFFFF"/>
+                </a:solidFill>
+                <a:latin typeface="Arial"/>
+                <a:cs typeface="Arial"/>
+              </a:rPr>
+              <a:t>Kết quả</a:t>
             </a:r>
           </a:p>
         </p:txBody>
@@ -42236,7 +42180,7 @@
                 <a:latin typeface="Arial"/>
                 <a:cs typeface="Arial"/>
               </a:rPr>
-              <a:t>Hai sản phẩm, mỗi người tự làm</a:t>
+              <a:t>Khóa học này là Cấp độ 1 trong ba cấp độ</a:t>
             </a:r>
           </a:p>
         </p:txBody>
@@ -42271,53 +42215,14 @@
       </p:sp>
       <p:sp>
         <p:nvSpPr>
-          <p:cNvPr id="19" name="Intro"/>
-          <p:cNvSpPr txBox="1"/>
-          <p:nvPr/>
-        </p:nvSpPr>
-        <p:spPr>
-          <a:xfrm>
-            <a:off x="457200" y="1100000"/>
-            <a:ext cx="11277600" cy="480000"/>
-          </a:xfrm>
-          <a:prstGeom prst="rect">
-            <a:avLst/>
-          </a:prstGeom>
-          <a:noFill/>
-          <a:ln>
-            <a:noFill/>
-          </a:ln>
-        </p:spPr>
-        <p:txBody>
-          <a:bodyPr wrap="square" lIns="91440" tIns="45720" rIns="91440" bIns="45720" rtlCol="0" anchor="t"/>
-          <a:lstStyle/>
-          <a:p>
-            <a:pPr marL="0" indent="0" algn="l">
-              <a:buNone/>
-            </a:pPr>
-            <a:r>
-              <a:rPr lang="en-US" sz="1700" i="1" dirty="0">
-                <a:solidFill>
-                  <a:srgbClr val="595959"/>
-                </a:solidFill>
-                <a:latin typeface="Arial"/>
-                <a:cs typeface="Arial"/>
-              </a:rPr>
-              <a:t>Cả hai đều là bài cá nhân. Mỗi bản hướng dẫn nêu rõ yêu cầu và cách đánh giá.</a:t>
-            </a:r>
-          </a:p>
-        </p:txBody>
-      </p:sp>
-      <p:sp>
-        <p:nvSpPr>
           <p:cNvPr id="70" name="CardHead"/>
           <p:cNvSpPr/>
           <p:nvPr/>
         </p:nvSpPr>
         <p:spPr>
           <a:xfrm>
-            <a:off x="457200" y="2001619"/>
-            <a:ext cx="5538800" cy="640000"/>
+            <a:off x="457200" y="1916666"/>
+            <a:ext cx="3625866" cy="640000"/>
           </a:xfrm>
           <a:prstGeom prst="rect">
             <a:avLst/>
@@ -42346,7 +42251,7 @@
                 <a:latin typeface="Arial"/>
                 <a:cs typeface="Arial"/>
               </a:rPr>
-              <a:t>Đề cương nghiên cứu của bạn</a:t>
+              <a:t>Cấp độ 1  (khóa học này)</a:t>
             </a:r>
           </a:p>
         </p:txBody>
@@ -42359,8 +42264,8 @@
         </p:nvSpPr>
         <p:spPr>
           <a:xfrm>
-            <a:off x="457200" y="2641619"/>
-            <a:ext cx="5538800" cy="1925141"/>
+            <a:off x="457200" y="2556666"/>
+            <a:ext cx="3625866" cy="1300000"/>
           </a:xfrm>
           <a:prstGeom prst="rect">
             <a:avLst/>
@@ -42388,14 +42293,14 @@
               <a:buNone/>
             </a:pPr>
             <a:r>
-              <a:rPr lang="en-US" sz="1750" dirty="0">
+              <a:rPr lang="en-US" sz="1750" b="1" dirty="0">
                 <a:solidFill>
                   <a:srgbClr val="000000"/>
                 </a:solidFill>
                 <a:latin typeface="Arial"/>
                 <a:cs typeface="Arial"/>
               </a:rPr>
-              <a:t>Về một câu hỏi từ chính khoa của bạn</a:t>
+              <a:t>Từ câu hỏi đến công bố</a:t>
             </a:r>
           </a:p>
           <a:p>
@@ -42416,9 +42321,80 @@
                 <a:latin typeface="Arial"/>
                 <a:cs typeface="Arial"/>
               </a:rPr>
-              <a:t>Viết từng phần, từ Buổi 1 đến Buổi 7</a:t>
-            </a:r>
-          </a:p>
+              <a:t>Hỏi, thiết kế, phân tích, viết và công bố</a:t>
+            </a:r>
+          </a:p>
+        </p:txBody>
+      </p:sp>
+      <p:sp>
+        <p:nvSpPr>
+          <p:cNvPr id="72" name="CardHead"/>
+          <p:cNvSpPr/>
+          <p:nvPr/>
+        </p:nvSpPr>
+        <p:spPr>
+          <a:xfrm>
+            <a:off x="4283066" y="1916666"/>
+            <a:ext cx="3625866" cy="640000"/>
+          </a:xfrm>
+          <a:prstGeom prst="rect">
+            <a:avLst/>
+          </a:prstGeom>
+          <a:solidFill>
+            <a:srgbClr val="0B376C"/>
+          </a:solidFill>
+          <a:ln>
+            <a:noFill/>
+          </a:ln>
+        </p:spPr>
+        <p:txBody>
+          <a:bodyPr wrap="square" lIns="91440" tIns="45720" rIns="91440" bIns="45720" rtlCol="0" anchor="ctr">
+            <a:normAutofit/>
+          </a:bodyPr>
+          <a:lstStyle/>
+          <a:p>
+            <a:pPr marL="0" indent="0" algn="ctr">
+              <a:buNone/>
+            </a:pPr>
+            <a:r>
+              <a:rPr lang="en-US" sz="1900" b="1" dirty="0">
+                <a:solidFill>
+                  <a:srgbClr val="FFFFFF"/>
+                </a:solidFill>
+                <a:latin typeface="Arial"/>
+                <a:cs typeface="Arial"/>
+              </a:rPr>
+              <a:t>Cấp độ 2  (thực hành)</a:t>
+            </a:r>
+          </a:p>
+        </p:txBody>
+      </p:sp>
+      <p:sp>
+        <p:nvSpPr>
+          <p:cNvPr id="73" name="CardBody"/>
+          <p:cNvSpPr/>
+          <p:nvPr/>
+        </p:nvSpPr>
+        <p:spPr>
+          <a:xfrm>
+            <a:off x="4283066" y="2556666"/>
+            <a:ext cx="3625866" cy="1300000"/>
+          </a:xfrm>
+          <a:prstGeom prst="rect">
+            <a:avLst/>
+          </a:prstGeom>
+          <a:solidFill>
+            <a:srgbClr val="EAF2F5"/>
+          </a:solidFill>
+          <a:ln>
+            <a:noFill/>
+          </a:ln>
+        </p:spPr>
+        <p:txBody>
+          <a:bodyPr wrap="square" lIns="137160" tIns="91440" rIns="137160" bIns="91440" rtlCol="0" anchor="ctr">
+            <a:normAutofit/>
+          </a:bodyPr>
+          <a:lstStyle/>
           <a:p>
             <a:pPr marL="0" indent="0" algn="ctr">
               <a:lnSpc>
@@ -42430,14 +42406,14 @@
               <a:buNone/>
             </a:pPr>
             <a:r>
-              <a:rPr lang="en-US" sz="1750" dirty="0">
+              <a:rPr lang="en-US" sz="1750" b="1" dirty="0">
                 <a:solidFill>
                   <a:srgbClr val="000000"/>
                 </a:solidFill>
                 <a:latin typeface="Arial"/>
                 <a:cs typeface="Arial"/>
               </a:rPr>
-              <a:t>Nộp ở Buổi 8 (khoảng 5 bạn tình nguyện trình bày)</a:t>
+              <a:t>Mô hình thống kê bằng R</a:t>
             </a:r>
           </a:p>
           <a:p>
@@ -42458,27 +42434,27 @@
                 <a:latin typeface="Arial"/>
                 <a:cs typeface="Arial"/>
               </a:rPr>
-              <a:t>Hướng dẫn viết đề cương: gửi trước Buổi 1</a:t>
-            </a:r>
-          </a:p>
-        </p:txBody>
-      </p:sp>
-      <p:sp>
-        <p:nvSpPr>
-          <p:cNvPr id="72" name="CardHead"/>
-          <p:cNvSpPr/>
-          <p:nvPr/>
-        </p:nvSpPr>
-        <p:spPr>
-          <a:xfrm>
-            <a:off x="6196000" y="2001619"/>
-            <a:ext cx="5538800" cy="640000"/>
+              <a:t>Bạn tự chạy phân tích</a:t>
+            </a:r>
+          </a:p>
+        </p:txBody>
+      </p:sp>
+      <p:sp>
+        <p:nvSpPr>
+          <p:cNvPr id="74" name="CardHead"/>
+          <p:cNvSpPr/>
+          <p:nvPr/>
+        </p:nvSpPr>
+        <p:spPr>
+          <a:xfrm>
+            <a:off x="8108932" y="1916666"/>
+            <a:ext cx="3625866" cy="640000"/>
           </a:xfrm>
           <a:prstGeom prst="rect">
             <a:avLst/>
           </a:prstGeom>
           <a:solidFill>
-            <a:srgbClr val="0B376C"/>
+            <a:srgbClr val="04242F"/>
           </a:solidFill>
           <a:ln>
             <a:noFill/>
@@ -42501,21 +42477,21 @@
                 <a:latin typeface="Arial"/>
                 <a:cs typeface="Arial"/>
               </a:rPr>
-              <a:t>Phần Kết quả, sẵn sàng để nộp</a:t>
-            </a:r>
-          </a:p>
-        </p:txBody>
-      </p:sp>
-      <p:sp>
-        <p:nvSpPr>
-          <p:cNvPr id="73" name="CardBody"/>
-          <p:cNvSpPr/>
-          <p:nvPr/>
-        </p:nvSpPr>
-        <p:spPr>
-          <a:xfrm>
-            <a:off x="6196000" y="2641619"/>
-            <a:ext cx="5538800" cy="1925141"/>
+              <a:t>Cấp độ 3  (nâng cao)</a:t>
+            </a:r>
+          </a:p>
+        </p:txBody>
+      </p:sp>
+      <p:sp>
+        <p:nvSpPr>
+          <p:cNvPr id="75" name="CardBody"/>
+          <p:cNvSpPr/>
+          <p:nvPr/>
+        </p:nvSpPr>
+        <p:spPr>
+          <a:xfrm>
+            <a:off x="8108932" y="2556666"/>
+            <a:ext cx="3625866" cy="1300000"/>
           </a:xfrm>
           <a:prstGeom prst="rect">
             <a:avLst/>
@@ -42543,14 +42519,14 @@
               <a:buNone/>
             </a:pPr>
             <a:r>
-              <a:rPr lang="en-US" sz="1750" dirty="0">
+              <a:rPr lang="en-US" sz="1750" b="1" dirty="0">
                 <a:solidFill>
                   <a:srgbClr val="000000"/>
                 </a:solidFill>
                 <a:latin typeface="Arial"/>
                 <a:cs typeface="Arial"/>
               </a:rPr>
-              <a:t>Cho một câu hỏi của FLUID-ICU</a:t>
+              <a:t>Phương pháp nâng cao</a:t>
             </a:r>
           </a:p>
           <a:p>
@@ -42571,28 +42547,7 @@
                 <a:latin typeface="Arial"/>
                 <a:cs typeface="Arial"/>
               </a:rPr>
-              <a:t>Học viết mọi phần. Chỉ bắt buộc nộp phần Kết quả</a:t>
-            </a:r>
-          </a:p>
-          <a:p>
-            <a:pPr marL="0" indent="0" algn="ctr">
-              <a:lnSpc>
-                <a:spcPct val="104000"/>
-              </a:lnSpc>
-              <a:spcBef>
-                <a:spcPts val="400"/>
-              </a:spcBef>
-              <a:buNone/>
-            </a:pPr>
-            <a:r>
-              <a:rPr lang="en-US" sz="1750" dirty="0">
-                <a:solidFill>
-                  <a:srgbClr val="000000"/>
-                </a:solidFill>
-                <a:latin typeface="Arial"/>
-                <a:cs typeface="Arial"/>
-              </a:rPr>
-              <a:t>Hướng dẫn viết bản thảo: chia sẻ ở Buổi 6</a:t>
+              <a:t>Hội thảo chuyên đề theo yêu cầu</a:t>
             </a:r>
           </a:p>
         </p:txBody>
@@ -42647,7 +42602,7 @@
                 <a:latin typeface="Arial"/>
                 <a:cs typeface="Arial"/>
               </a:rPr>
-              <a:t/>
+              <a:t>Cấp độ 1 là khóa học này. Cấp độ 2 và 3 dành cho ai muốn học sâu hơn.</a:t>
             </a:r>
           </a:p>
         </p:txBody>
@@ -45459,7 +45414,7 @@
                 <a:latin typeface="Arial"/>
                 <a:cs typeface="Arial"/>
               </a:rPr>
-              <a:t>Sau khóa học, bạn sẽ có thể</a:t>
+              <a:t>Hai sản phẩm, mỗi người tự làm</a:t>
             </a:r>
           </a:p>
         </p:txBody>
@@ -45494,14 +45449,53 @@
       </p:sp>
       <p:sp>
         <p:nvSpPr>
+          <p:cNvPr id="19" name="Intro"/>
+          <p:cNvSpPr txBox="1"/>
+          <p:nvPr/>
+        </p:nvSpPr>
+        <p:spPr>
+          <a:xfrm>
+            <a:off x="457200" y="1100000"/>
+            <a:ext cx="11277600" cy="480000"/>
+          </a:xfrm>
+          <a:prstGeom prst="rect">
+            <a:avLst/>
+          </a:prstGeom>
+          <a:noFill/>
+          <a:ln>
+            <a:noFill/>
+          </a:ln>
+        </p:spPr>
+        <p:txBody>
+          <a:bodyPr wrap="square" lIns="91440" tIns="45720" rIns="91440" bIns="45720" rtlCol="0" anchor="t"/>
+          <a:lstStyle/>
+          <a:p>
+            <a:pPr marL="0" indent="0" algn="l">
+              <a:buNone/>
+            </a:pPr>
+            <a:r>
+              <a:rPr lang="en-US" sz="1700" i="1" dirty="0">
+                <a:solidFill>
+                  <a:srgbClr val="595959"/>
+                </a:solidFill>
+                <a:latin typeface="Arial"/>
+                <a:cs typeface="Arial"/>
+              </a:rPr>
+              <a:t>Cả hai đều là bài cá nhân. Mỗi bản hướng dẫn nêu rõ yêu cầu và cách đánh giá.</a:t>
+            </a:r>
+          </a:p>
+        </p:txBody>
+      </p:sp>
+      <p:sp>
+        <p:nvSpPr>
           <p:cNvPr id="70" name="CardHead"/>
           <p:cNvSpPr/>
           <p:nvPr/>
         </p:nvSpPr>
         <p:spPr>
           <a:xfrm>
-            <a:off x="457200" y="1680240"/>
-            <a:ext cx="2669400" cy="640000"/>
+            <a:off x="457200" y="2001619"/>
+            <a:ext cx="5538800" cy="640000"/>
           </a:xfrm>
           <a:prstGeom prst="rect">
             <a:avLst/>
@@ -45523,14 +45517,14 @@
               <a:buNone/>
             </a:pPr>
             <a:r>
-              <a:rPr lang="en-US" sz="1700" b="1" dirty="0">
+              <a:rPr lang="en-US" sz="1900" b="1" dirty="0">
                 <a:solidFill>
                   <a:srgbClr val="FFFFFF"/>
                 </a:solidFill>
                 <a:latin typeface="Arial"/>
                 <a:cs typeface="Arial"/>
               </a:rPr>
-              <a:t>Hỏi và tìm</a:t>
+              <a:t>Đề cương nghiên cứu của bạn</a:t>
             </a:r>
           </a:p>
         </p:txBody>
@@ -45543,8 +45537,8 @@
         </p:nvSpPr>
         <p:spPr>
           <a:xfrm>
-            <a:off x="457200" y="2320240"/>
-            <a:ext cx="2669400" cy="2009280"/>
+            <a:off x="457200" y="2641619"/>
+            <a:ext cx="5538800" cy="1925141"/>
           </a:xfrm>
           <a:prstGeom prst="rect">
             <a:avLst/>
@@ -45572,14 +45566,14 @@
               <a:buNone/>
             </a:pPr>
             <a:r>
-              <a:rPr lang="en-US" sz="1600" dirty="0">
+              <a:rPr lang="en-US" sz="1750" dirty="0">
                 <a:solidFill>
                   <a:srgbClr val="000000"/>
                 </a:solidFill>
                 <a:latin typeface="Arial"/>
                 <a:cs typeface="Arial"/>
               </a:rPr>
-              <a:t>Biến một vấn đề thành câu hỏi rõ ràng</a:t>
+              <a:t>Về một câu hỏi từ chính khoa của bạn</a:t>
             </a:r>
           </a:p>
           <a:p>
@@ -45593,14 +45587,14 @@
               <a:buNone/>
             </a:pPr>
             <a:r>
-              <a:rPr lang="en-US" sz="1600" dirty="0">
+              <a:rPr lang="en-US" sz="1750" dirty="0">
                 <a:solidFill>
                   <a:srgbClr val="000000"/>
                 </a:solidFill>
                 <a:latin typeface="Arial"/>
                 <a:cs typeface="Arial"/>
               </a:rPr>
-              <a:t>Tìm trên PubMed và quản lý tài liệu</a:t>
+              <a:t>Viết từng phần, từ Buổi 1 đến Buổi 7</a:t>
             </a:r>
           </a:p>
           <a:p>
@@ -45614,87 +45608,16 @@
               <a:buNone/>
             </a:pPr>
             <a:r>
-              <a:rPr lang="en-US" sz="1600" dirty="0">
+              <a:rPr lang="en-US" sz="1750" dirty="0">
                 <a:solidFill>
                   <a:srgbClr val="000000"/>
                 </a:solidFill>
                 <a:latin typeface="Arial"/>
                 <a:cs typeface="Arial"/>
               </a:rPr>
-              <a:t>Đọc một bài báo trong 15 phút</a:t>
-            </a:r>
-          </a:p>
-        </p:txBody>
-      </p:sp>
-      <p:sp>
-        <p:nvSpPr>
-          <p:cNvPr id="72" name="CardHead"/>
-          <p:cNvSpPr/>
-          <p:nvPr/>
-        </p:nvSpPr>
-        <p:spPr>
-          <a:xfrm>
-            <a:off x="3326600" y="1680240"/>
-            <a:ext cx="2669400" cy="640000"/>
-          </a:xfrm>
-          <a:prstGeom prst="rect">
-            <a:avLst/>
-          </a:prstGeom>
-          <a:solidFill>
-            <a:srgbClr val="0B376C"/>
-          </a:solidFill>
-          <a:ln>
-            <a:noFill/>
-          </a:ln>
-        </p:spPr>
-        <p:txBody>
-          <a:bodyPr wrap="square" lIns="91440" tIns="45720" rIns="91440" bIns="45720" rtlCol="0" anchor="ctr">
-            <a:normAutofit/>
-          </a:bodyPr>
-          <a:lstStyle/>
-          <a:p>
-            <a:pPr marL="0" indent="0" algn="ctr">
-              <a:buNone/>
-            </a:pPr>
-            <a:r>
-              <a:rPr lang="en-US" sz="1700" b="1" dirty="0">
-                <a:solidFill>
-                  <a:srgbClr val="FFFFFF"/>
-                </a:solidFill>
-                <a:latin typeface="Arial"/>
-                <a:cs typeface="Arial"/>
-              </a:rPr>
-              <a:t>Thiết kế</a:t>
-            </a:r>
-          </a:p>
-        </p:txBody>
-      </p:sp>
-      <p:sp>
-        <p:nvSpPr>
-          <p:cNvPr id="73" name="CardBody"/>
-          <p:cNvSpPr/>
-          <p:nvPr/>
-        </p:nvSpPr>
-        <p:spPr>
-          <a:xfrm>
-            <a:off x="3326600" y="2320240"/>
-            <a:ext cx="2669400" cy="2009280"/>
-          </a:xfrm>
-          <a:prstGeom prst="rect">
-            <a:avLst/>
-          </a:prstGeom>
-          <a:solidFill>
-            <a:srgbClr val="EAF2F5"/>
-          </a:solidFill>
-          <a:ln>
-            <a:noFill/>
-          </a:ln>
-        </p:spPr>
-        <p:txBody>
-          <a:bodyPr wrap="square" lIns="137160" tIns="91440" rIns="137160" bIns="91440" rtlCol="0" anchor="ctr">
-            <a:normAutofit/>
-          </a:bodyPr>
-          <a:lstStyle/>
+              <a:t>Nộp ở Buổi 8 (khoảng 5 bạn tình nguyện trình bày)</a:t>
+            </a:r>
+          </a:p>
           <a:p>
             <a:pPr marL="0" indent="0" algn="ctr">
               <a:lnSpc>
@@ -45706,16 +45629,87 @@
               <a:buNone/>
             </a:pPr>
             <a:r>
-              <a:rPr lang="en-US" sz="1600" dirty="0">
+              <a:rPr lang="en-US" sz="1750" dirty="0">
                 <a:solidFill>
                   <a:srgbClr val="000000"/>
                 </a:solidFill>
                 <a:latin typeface="Arial"/>
                 <a:cs typeface="Arial"/>
               </a:rPr>
-              <a:t>Chọn thiết kế nghiên cứu</a:t>
-            </a:r>
-          </a:p>
+              <a:t>Hướng dẫn viết đề cương: gửi trước Buổi 1</a:t>
+            </a:r>
+          </a:p>
+        </p:txBody>
+      </p:sp>
+      <p:sp>
+        <p:nvSpPr>
+          <p:cNvPr id="72" name="CardHead"/>
+          <p:cNvSpPr/>
+          <p:nvPr/>
+        </p:nvSpPr>
+        <p:spPr>
+          <a:xfrm>
+            <a:off x="6196000" y="2001619"/>
+            <a:ext cx="5538800" cy="640000"/>
+          </a:xfrm>
+          <a:prstGeom prst="rect">
+            <a:avLst/>
+          </a:prstGeom>
+          <a:solidFill>
+            <a:srgbClr val="0B376C"/>
+          </a:solidFill>
+          <a:ln>
+            <a:noFill/>
+          </a:ln>
+        </p:spPr>
+        <p:txBody>
+          <a:bodyPr wrap="square" lIns="91440" tIns="45720" rIns="91440" bIns="45720" rtlCol="0" anchor="ctr">
+            <a:normAutofit/>
+          </a:bodyPr>
+          <a:lstStyle/>
+          <a:p>
+            <a:pPr marL="0" indent="0" algn="ctr">
+              <a:buNone/>
+            </a:pPr>
+            <a:r>
+              <a:rPr lang="en-US" sz="1900" b="1" dirty="0">
+                <a:solidFill>
+                  <a:srgbClr val="FFFFFF"/>
+                </a:solidFill>
+                <a:latin typeface="Arial"/>
+                <a:cs typeface="Arial"/>
+              </a:rPr>
+              <a:t>Phần Kết quả, sẵn sàng để nộp</a:t>
+            </a:r>
+          </a:p>
+        </p:txBody>
+      </p:sp>
+      <p:sp>
+        <p:nvSpPr>
+          <p:cNvPr id="73" name="CardBody"/>
+          <p:cNvSpPr/>
+          <p:nvPr/>
+        </p:nvSpPr>
+        <p:spPr>
+          <a:xfrm>
+            <a:off x="6196000" y="2641619"/>
+            <a:ext cx="5538800" cy="1925141"/>
+          </a:xfrm>
+          <a:prstGeom prst="rect">
+            <a:avLst/>
+          </a:prstGeom>
+          <a:solidFill>
+            <a:srgbClr val="EAF2F5"/>
+          </a:solidFill>
+          <a:ln>
+            <a:noFill/>
+          </a:ln>
+        </p:spPr>
+        <p:txBody>
+          <a:bodyPr wrap="square" lIns="137160" tIns="91440" rIns="137160" bIns="91440" rtlCol="0" anchor="ctr">
+            <a:normAutofit/>
+          </a:bodyPr>
+          <a:lstStyle/>
           <a:p>
             <a:pPr marL="0" indent="0" algn="ctr">
               <a:lnSpc>
@@ -45727,14 +45721,14 @@
               <a:buNone/>
             </a:pPr>
             <a:r>
-              <a:rPr lang="en-US" sz="1600" dirty="0">
+              <a:rPr lang="en-US" sz="1750" dirty="0">
                 <a:solidFill>
                   <a:srgbClr val="000000"/>
                 </a:solidFill>
                 <a:latin typeface="Arial"/>
                 <a:cs typeface="Arial"/>
               </a:rPr>
-              <a:t>Nhận ra sai lệch</a:t>
+              <a:t>Cho một câu hỏi của FLUID-ICU</a:t>
             </a:r>
           </a:p>
           <a:p>
@@ -45748,87 +45742,16 @@
               <a:buNone/>
             </a:pPr>
             <a:r>
-              <a:rPr lang="en-US" sz="1600" dirty="0">
+              <a:rPr lang="en-US" sz="1750" dirty="0">
                 <a:solidFill>
                   <a:srgbClr val="000000"/>
                 </a:solidFill>
                 <a:latin typeface="Arial"/>
                 <a:cs typeface="Arial"/>
               </a:rPr>
-              <a:t>Đọc các chỉ số đo lường tác động chính</a:t>
-            </a:r>
-          </a:p>
-        </p:txBody>
-      </p:sp>
-      <p:sp>
-        <p:nvSpPr>
-          <p:cNvPr id="74" name="CardHead"/>
-          <p:cNvSpPr/>
-          <p:nvPr/>
-        </p:nvSpPr>
-        <p:spPr>
-          <a:xfrm>
-            <a:off x="6196000" y="1680240"/>
-            <a:ext cx="2669400" cy="640000"/>
-          </a:xfrm>
-          <a:prstGeom prst="rect">
-            <a:avLst/>
-          </a:prstGeom>
-          <a:solidFill>
-            <a:srgbClr val="5FA39B"/>
-          </a:solidFill>
-          <a:ln>
-            <a:noFill/>
-          </a:ln>
-        </p:spPr>
-        <p:txBody>
-          <a:bodyPr wrap="square" lIns="91440" tIns="45720" rIns="91440" bIns="45720" rtlCol="0" anchor="ctr">
-            <a:normAutofit/>
-          </a:bodyPr>
-          <a:lstStyle/>
-          <a:p>
-            <a:pPr marL="0" indent="0" algn="ctr">
-              <a:buNone/>
-            </a:pPr>
-            <a:r>
-              <a:rPr lang="en-US" sz="1700" b="1" dirty="0">
-                <a:solidFill>
-                  <a:srgbClr val="FFFFFF"/>
-                </a:solidFill>
-                <a:latin typeface="Arial"/>
-                <a:cs typeface="Arial"/>
-              </a:rPr>
-              <a:t>Phân tích</a:t>
-            </a:r>
-          </a:p>
-        </p:txBody>
-      </p:sp>
-      <p:sp>
-        <p:nvSpPr>
-          <p:cNvPr id="75" name="CardBody"/>
-          <p:cNvSpPr/>
-          <p:nvPr/>
-        </p:nvSpPr>
-        <p:spPr>
-          <a:xfrm>
-            <a:off x="6196000" y="2320240"/>
-            <a:ext cx="2669400" cy="2009280"/>
-          </a:xfrm>
-          <a:prstGeom prst="rect">
-            <a:avLst/>
-          </a:prstGeom>
-          <a:solidFill>
-            <a:srgbClr val="EAF2F5"/>
-          </a:solidFill>
-          <a:ln>
-            <a:noFill/>
-          </a:ln>
-        </p:spPr>
-        <p:txBody>
-          <a:bodyPr wrap="square" lIns="137160" tIns="91440" rIns="137160" bIns="91440" rtlCol="0" anchor="ctr">
-            <a:normAutofit/>
-          </a:bodyPr>
-          <a:lstStyle/>
+              <a:t>Học viết mọi phần. Chỉ bắt buộc nộp phần Kết quả</a:t>
+            </a:r>
+          </a:p>
           <a:p>
             <a:pPr marL="0" indent="0" algn="ctr">
               <a:lnSpc>
@@ -45840,190 +45763,14 @@
               <a:buNone/>
             </a:pPr>
             <a:r>
-              <a:rPr lang="en-US" sz="1600" dirty="0">
+              <a:rPr lang="en-US" sz="1750" dirty="0">
                 <a:solidFill>
                   <a:srgbClr val="000000"/>
                 </a:solidFill>
                 <a:latin typeface="Arial"/>
                 <a:cs typeface="Arial"/>
               </a:rPr>
-              <a:t>Lên kế hoạch dữ liệu cần thu thập</a:t>
-            </a:r>
-          </a:p>
-          <a:p>
-            <a:pPr marL="0" indent="0" algn="ctr">
-              <a:lnSpc>
-                <a:spcPct val="104000"/>
-              </a:lnSpc>
-              <a:spcBef>
-                <a:spcPts val="400"/>
-              </a:spcBef>
-              <a:buNone/>
-            </a:pPr>
-            <a:r>
-              <a:rPr lang="en-US" sz="1600" dirty="0">
-                <a:solidFill>
-                  <a:srgbClr val="000000"/>
-                </a:solidFill>
-                <a:latin typeface="Arial"/>
-                <a:cs typeface="Arial"/>
-              </a:rPr>
-              <a:t>Đọc kết quả một phân tích</a:t>
-            </a:r>
-          </a:p>
-          <a:p>
-            <a:pPr marL="0" indent="0" algn="ctr">
-              <a:lnSpc>
-                <a:spcPct val="104000"/>
-              </a:lnSpc>
-              <a:spcBef>
-                <a:spcPts val="400"/>
-              </a:spcBef>
-              <a:buNone/>
-            </a:pPr>
-            <a:r>
-              <a:rPr lang="en-US" sz="1600" dirty="0">
-                <a:solidFill>
-                  <a:srgbClr val="000000"/>
-                </a:solidFill>
-                <a:latin typeface="Arial"/>
-                <a:cs typeface="Arial"/>
-              </a:rPr>
-              <a:t>Diễn giải một bộ dữ liệu thật</a:t>
-            </a:r>
-          </a:p>
-        </p:txBody>
-      </p:sp>
-      <p:sp>
-        <p:nvSpPr>
-          <p:cNvPr id="76" name="CardHead"/>
-          <p:cNvSpPr/>
-          <p:nvPr/>
-        </p:nvSpPr>
-        <p:spPr>
-          <a:xfrm>
-            <a:off x="9065400" y="1680240"/>
-            <a:ext cx="2669400" cy="640000"/>
-          </a:xfrm>
-          <a:prstGeom prst="rect">
-            <a:avLst/>
-          </a:prstGeom>
-          <a:solidFill>
-            <a:srgbClr val="0070C0"/>
-          </a:solidFill>
-          <a:ln>
-            <a:noFill/>
-          </a:ln>
-        </p:spPr>
-        <p:txBody>
-          <a:bodyPr wrap="square" lIns="91440" tIns="45720" rIns="91440" bIns="45720" rtlCol="0" anchor="ctr">
-            <a:normAutofit/>
-          </a:bodyPr>
-          <a:lstStyle/>
-          <a:p>
-            <a:pPr marL="0" indent="0" algn="ctr">
-              <a:buNone/>
-            </a:pPr>
-            <a:r>
-              <a:rPr lang="en-US" sz="1700" b="1" dirty="0">
-                <a:solidFill>
-                  <a:srgbClr val="FFFFFF"/>
-                </a:solidFill>
-                <a:latin typeface="Arial"/>
-                <a:cs typeface="Arial"/>
-              </a:rPr>
-              <a:t>Viết và công bố</a:t>
-            </a:r>
-          </a:p>
-        </p:txBody>
-      </p:sp>
-      <p:sp>
-        <p:nvSpPr>
-          <p:cNvPr id="77" name="CardBody"/>
-          <p:cNvSpPr/>
-          <p:nvPr/>
-        </p:nvSpPr>
-        <p:spPr>
-          <a:xfrm>
-            <a:off x="9065400" y="2320240"/>
-            <a:ext cx="2669400" cy="2009280"/>
-          </a:xfrm>
-          <a:prstGeom prst="rect">
-            <a:avLst/>
-          </a:prstGeom>
-          <a:solidFill>
-            <a:srgbClr val="EAF2F5"/>
-          </a:solidFill>
-          <a:ln>
-            <a:noFill/>
-          </a:ln>
-        </p:spPr>
-        <p:txBody>
-          <a:bodyPr wrap="square" lIns="137160" tIns="91440" rIns="137160" bIns="91440" rtlCol="0" anchor="ctr">
-            <a:normAutofit/>
-          </a:bodyPr>
-          <a:lstStyle/>
-          <a:p>
-            <a:pPr marL="0" indent="0" algn="ctr">
-              <a:lnSpc>
-                <a:spcPct val="104000"/>
-              </a:lnSpc>
-              <a:spcBef>
-                <a:spcPts val="400"/>
-              </a:spcBef>
-              <a:buNone/>
-            </a:pPr>
-            <a:r>
-              <a:rPr lang="en-US" sz="1600" dirty="0">
-                <a:solidFill>
-                  <a:srgbClr val="000000"/>
-                </a:solidFill>
-                <a:latin typeface="Arial"/>
-                <a:cs typeface="Arial"/>
-              </a:rPr>
-              <a:t>Lên kế hoạch xin phê duyệt đạo đức</a:t>
-            </a:r>
-          </a:p>
-          <a:p>
-            <a:pPr marL="0" indent="0" algn="ctr">
-              <a:lnSpc>
-                <a:spcPct val="104000"/>
-              </a:lnSpc>
-              <a:spcBef>
-                <a:spcPts val="400"/>
-              </a:spcBef>
-              <a:buNone/>
-            </a:pPr>
-            <a:r>
-              <a:rPr lang="en-US" sz="1600" dirty="0">
-                <a:solidFill>
-                  <a:srgbClr val="000000"/>
-                </a:solidFill>
-                <a:latin typeface="Arial"/>
-                <a:cs typeface="Arial"/>
-              </a:rPr>
-              <a:t>Viết từng phần của bài báo</a:t>
-            </a:r>
-          </a:p>
-          <a:p>
-            <a:pPr marL="0" indent="0" algn="ctr">
-              <a:lnSpc>
-                <a:spcPct val="104000"/>
-              </a:lnSpc>
-              <a:spcBef>
-                <a:spcPts val="400"/>
-              </a:spcBef>
-              <a:buNone/>
-            </a:pPr>
-            <a:r>
-              <a:rPr lang="en-US" sz="1600" dirty="0">
-                <a:solidFill>
-                  <a:srgbClr val="000000"/>
-                </a:solidFill>
-                <a:latin typeface="Arial"/>
-                <a:cs typeface="Arial"/>
-              </a:rPr>
-              <a:t>Nộp bài và trả lời phản biện</a:t>
+              <a:t>Hướng dẫn viết bản thảo: chia sẻ ở Buổi 6</a:t>
             </a:r>
           </a:p>
         </p:txBody>
@@ -46078,7 +45825,7 @@
                 <a:latin typeface="Arial"/>
                 <a:cs typeface="Arial"/>
               </a:rPr>
-              <a:t>Hiểu và diễn giải: bạn sẽ không phải tự tính toán.</a:t>
+              <a:t/>
             </a:r>
           </a:p>
         </p:txBody>
@@ -46246,7 +45993,7 @@
                 <a:latin typeface="Arial"/>
                 <a:cs typeface="Arial"/>
               </a:rPr>
-              <a:t>Mỗi buổi học diễn ra như thế nào</a:t>
+              <a:t>Sau khóa học, bạn sẽ có thể</a:t>
             </a:r>
           </a:p>
         </p:txBody>
@@ -46281,104 +46028,14 @@
       </p:sp>
       <p:sp>
         <p:nvSpPr>
-          <p:cNvPr id="100" name="Box"/>
-          <p:cNvSpPr/>
-          <p:nvPr/>
-        </p:nvSpPr>
-        <p:spPr>
-          <a:xfrm>
-            <a:off x="563880" y="2336320"/>
-            <a:ext cx="578104" cy="1554480"/>
-          </a:xfrm>
-          <a:prstGeom prst="rect">
-            <a:avLst/>
-          </a:prstGeom>
-          <a:solidFill>
-            <a:srgbClr val="8A99A3"/>
-          </a:solidFill>
-          <a:ln>
-            <a:noFill/>
-          </a:ln>
-        </p:spPr>
-        <p:txBody>
-          <a:bodyPr wrap="square" lIns="27432" tIns="27432" rIns="27432" bIns="27432" rtlCol="0" anchor="ctr">
-            <a:noAutofit/>
-          </a:bodyPr>
-          <a:lstStyle/>
-          <a:p>
-            <a:pPr marL="0" indent="0" algn="ctr">
-              <a:lnSpc>
-                <a:spcPct val="100000"/>
-              </a:lnSpc>
-              <a:buNone/>
-            </a:pPr>
-            <a:r>
-              <a:rPr lang="en-US" sz="1300" b="1" dirty="0">
-                <a:solidFill>
-                  <a:srgbClr val="FFFFFF"/>
-                </a:solidFill>
-                <a:latin typeface="Arial"/>
-                <a:cs typeface="Arial"/>
-              </a:rPr>
-              <a:t>Ôn tập</a:t>
-            </a:r>
-          </a:p>
-        </p:txBody>
-      </p:sp>
-      <p:sp>
-        <p:nvSpPr>
-          <p:cNvPr id="101" name="Text"/>
-          <p:cNvSpPr/>
-          <p:nvPr/>
-        </p:nvSpPr>
-        <p:spPr>
-          <a:xfrm>
-            <a:off x="198120" y="3982240"/>
-            <a:ext cx="731520" cy="365760"/>
-          </a:xfrm>
-          <a:prstGeom prst="rect">
-            <a:avLst/>
-          </a:prstGeom>
-          <a:noFill/>
-          <a:ln>
-            <a:noFill/>
-          </a:ln>
-        </p:spPr>
-        <p:txBody>
-          <a:bodyPr wrap="square" lIns="54864" tIns="54864" rIns="54864" bIns="54864" rtlCol="0" anchor="ctr">
-            <a:noAutofit/>
-          </a:bodyPr>
-          <a:lstStyle/>
-          <a:p>
-            <a:pPr marL="0" indent="0" algn="ctr">
-              <a:lnSpc>
-                <a:spcPct val="100000"/>
-              </a:lnSpc>
-              <a:buNone/>
-            </a:pPr>
-            <a:r>
-              <a:rPr lang="en-US" sz="1400" dirty="0">
-                <a:solidFill>
-                  <a:srgbClr val="8A99A3"/>
-                </a:solidFill>
-                <a:latin typeface="Arial"/>
-                <a:cs typeface="Arial"/>
-              </a:rPr>
-              <a:t>0:00</a:t>
-            </a:r>
-          </a:p>
-        </p:txBody>
-      </p:sp>
-      <p:sp>
-        <p:nvSpPr>
-          <p:cNvPr id="102" name="Box"/>
-          <p:cNvSpPr/>
-          <p:nvPr/>
-        </p:nvSpPr>
-        <p:spPr>
-          <a:xfrm>
-            <a:off x="1178560" y="2336320"/>
-            <a:ext cx="3651504" cy="1554480"/>
+          <p:cNvPr id="70" name="CardHead"/>
+          <p:cNvSpPr/>
+          <p:nvPr/>
+        </p:nvSpPr>
+        <p:spPr>
+          <a:xfrm>
+            <a:off x="457200" y="1680240"/>
+            <a:ext cx="2669400" cy="640000"/>
           </a:xfrm>
           <a:prstGeom prst="rect">
             <a:avLst/>
@@ -46391,174 +46048,128 @@
           </a:ln>
         </p:spPr>
         <p:txBody>
-          <a:bodyPr wrap="square" lIns="27432" tIns="27432" rIns="27432" bIns="27432" rtlCol="0" anchor="ctr">
-            <a:noAutofit/>
+          <a:bodyPr wrap="square" lIns="91440" tIns="45720" rIns="91440" bIns="45720" rtlCol="0" anchor="ctr">
+            <a:normAutofit/>
+          </a:bodyPr>
+          <a:lstStyle/>
+          <a:p>
+            <a:pPr marL="0" indent="0" algn="ctr">
+              <a:buNone/>
+            </a:pPr>
+            <a:r>
+              <a:rPr lang="en-US" sz="1700" b="1" dirty="0">
+                <a:solidFill>
+                  <a:srgbClr val="FFFFFF"/>
+                </a:solidFill>
+                <a:latin typeface="Arial"/>
+                <a:cs typeface="Arial"/>
+              </a:rPr>
+              <a:t>Hỏi và tìm</a:t>
+            </a:r>
+          </a:p>
+        </p:txBody>
+      </p:sp>
+      <p:sp>
+        <p:nvSpPr>
+          <p:cNvPr id="71" name="CardBody"/>
+          <p:cNvSpPr/>
+          <p:nvPr/>
+        </p:nvSpPr>
+        <p:spPr>
+          <a:xfrm>
+            <a:off x="457200" y="2320240"/>
+            <a:ext cx="2669400" cy="2009280"/>
+          </a:xfrm>
+          <a:prstGeom prst="rect">
+            <a:avLst/>
+          </a:prstGeom>
+          <a:solidFill>
+            <a:srgbClr val="EAF2F5"/>
+          </a:solidFill>
+          <a:ln>
+            <a:noFill/>
+          </a:ln>
+        </p:spPr>
+        <p:txBody>
+          <a:bodyPr wrap="square" lIns="137160" tIns="91440" rIns="137160" bIns="91440" rtlCol="0" anchor="ctr">
+            <a:normAutofit/>
           </a:bodyPr>
           <a:lstStyle/>
           <a:p>
             <a:pPr marL="0" indent="0" algn="ctr">
               <a:lnSpc>
-                <a:spcPct val="100000"/>
+                <a:spcPct val="104000"/>
               </a:lnSpc>
-              <a:buNone/>
-            </a:pPr>
-            <a:r>
-              <a:rPr lang="en-US" sz="1800" b="1" dirty="0">
-                <a:solidFill>
-                  <a:srgbClr val="FFFFFF"/>
-                </a:solidFill>
-                <a:latin typeface="Arial"/>
-                <a:cs typeface="Arial"/>
-              </a:rPr>
-              <a:t>Học, kiểm tra, thực hành (A)</a:t>
-            </a:r>
-          </a:p>
-        </p:txBody>
-      </p:sp>
-      <p:sp>
-        <p:nvSpPr>
-          <p:cNvPr id="103" name="Text"/>
-          <p:cNvSpPr/>
-          <p:nvPr/>
-        </p:nvSpPr>
-        <p:spPr>
-          <a:xfrm>
-            <a:off x="812800" y="3982240"/>
-            <a:ext cx="731520" cy="365760"/>
-          </a:xfrm>
-          <a:prstGeom prst="rect">
-            <a:avLst/>
-          </a:prstGeom>
-          <a:noFill/>
-          <a:ln>
-            <a:noFill/>
-          </a:ln>
-        </p:spPr>
-        <p:txBody>
-          <a:bodyPr wrap="square" lIns="54864" tIns="54864" rIns="54864" bIns="54864" rtlCol="0" anchor="ctr">
-            <a:noAutofit/>
-          </a:bodyPr>
-          <a:lstStyle/>
+              <a:spcBef>
+                <a:spcPts val="400"/>
+              </a:spcBef>
+              <a:buNone/>
+            </a:pPr>
+            <a:r>
+              <a:rPr lang="en-US" sz="1600" dirty="0">
+                <a:solidFill>
+                  <a:srgbClr val="000000"/>
+                </a:solidFill>
+                <a:latin typeface="Arial"/>
+                <a:cs typeface="Arial"/>
+              </a:rPr>
+              <a:t>Biến một vấn đề thành câu hỏi rõ ràng</a:t>
+            </a:r>
+          </a:p>
           <a:p>
             <a:pPr marL="0" indent="0" algn="ctr">
               <a:lnSpc>
-                <a:spcPct val="100000"/>
+                <a:spcPct val="104000"/>
               </a:lnSpc>
-              <a:buNone/>
-            </a:pPr>
-            <a:r>
-              <a:rPr lang="en-US" sz="1400" dirty="0">
-                <a:solidFill>
-                  <a:srgbClr val="8A99A3"/>
-                </a:solidFill>
-                <a:latin typeface="Arial"/>
-                <a:cs typeface="Arial"/>
-              </a:rPr>
-              <a:t>0:10</a:t>
-            </a:r>
-          </a:p>
-        </p:txBody>
-      </p:sp>
-      <p:sp>
-        <p:nvSpPr>
-          <p:cNvPr id="104" name="Box"/>
-          <p:cNvSpPr/>
-          <p:nvPr/>
-        </p:nvSpPr>
-        <p:spPr>
-          <a:xfrm>
-            <a:off x="4866640" y="2336320"/>
-            <a:ext cx="885444" cy="1554480"/>
-          </a:xfrm>
-          <a:prstGeom prst="rect">
-            <a:avLst/>
-          </a:prstGeom>
-          <a:solidFill>
-            <a:srgbClr val="D5DDE1"/>
-          </a:solidFill>
-          <a:ln>
-            <a:noFill/>
-          </a:ln>
-        </p:spPr>
-        <p:txBody>
-          <a:bodyPr wrap="square" lIns="27432" tIns="27432" rIns="27432" bIns="27432" rtlCol="0" anchor="ctr">
-            <a:noAutofit/>
-          </a:bodyPr>
-          <a:lstStyle/>
+              <a:spcBef>
+                <a:spcPts val="400"/>
+              </a:spcBef>
+              <a:buNone/>
+            </a:pPr>
+            <a:r>
+              <a:rPr lang="en-US" sz="1600" dirty="0">
+                <a:solidFill>
+                  <a:srgbClr val="000000"/>
+                </a:solidFill>
+                <a:latin typeface="Arial"/>
+                <a:cs typeface="Arial"/>
+              </a:rPr>
+              <a:t>Tìm trên PubMed và quản lý tài liệu</a:t>
+            </a:r>
+          </a:p>
           <a:p>
             <a:pPr marL="0" indent="0" algn="ctr">
               <a:lnSpc>
-                <a:spcPct val="100000"/>
+                <a:spcPct val="104000"/>
               </a:lnSpc>
-              <a:buNone/>
-            </a:pPr>
-            <a:r>
-              <a:rPr lang="en-US" sz="1300" b="1" dirty="0">
+              <a:spcBef>
+                <a:spcPts val="400"/>
+              </a:spcBef>
+              <a:buNone/>
+            </a:pPr>
+            <a:r>
+              <a:rPr lang="en-US" sz="1600" dirty="0">
                 <a:solidFill>
                   <a:srgbClr val="000000"/>
                 </a:solidFill>
                 <a:latin typeface="Arial"/>
                 <a:cs typeface="Arial"/>
               </a:rPr>
-              <a:t>Giải lao</a:t>
-            </a:r>
-          </a:p>
-        </p:txBody>
-      </p:sp>
-      <p:sp>
-        <p:nvSpPr>
-          <p:cNvPr id="105" name="Text"/>
-          <p:cNvSpPr/>
-          <p:nvPr/>
-        </p:nvSpPr>
-        <p:spPr>
-          <a:xfrm>
-            <a:off x="4500880" y="3982240"/>
-            <a:ext cx="731520" cy="365760"/>
-          </a:xfrm>
-          <a:prstGeom prst="rect">
-            <a:avLst/>
-          </a:prstGeom>
-          <a:noFill/>
-          <a:ln>
-            <a:noFill/>
-          </a:ln>
-        </p:spPr>
-        <p:txBody>
-          <a:bodyPr wrap="square" lIns="54864" tIns="54864" rIns="54864" bIns="54864" rtlCol="0" anchor="ctr">
-            <a:noAutofit/>
-          </a:bodyPr>
-          <a:lstStyle/>
-          <a:p>
-            <a:pPr marL="0" indent="0" algn="ctr">
-              <a:lnSpc>
-                <a:spcPct val="100000"/>
-              </a:lnSpc>
-              <a:buNone/>
-            </a:pPr>
-            <a:r>
-              <a:rPr lang="en-US" sz="1400" dirty="0">
-                <a:solidFill>
-                  <a:srgbClr val="8A99A3"/>
-                </a:solidFill>
-                <a:latin typeface="Arial"/>
-                <a:cs typeface="Arial"/>
-              </a:rPr>
-              <a:t>1:10</a:t>
-            </a:r>
-          </a:p>
-        </p:txBody>
-      </p:sp>
-      <p:sp>
-        <p:nvSpPr>
-          <p:cNvPr id="106" name="Box"/>
-          <p:cNvSpPr/>
-          <p:nvPr/>
-        </p:nvSpPr>
-        <p:spPr>
-          <a:xfrm>
-            <a:off x="5788660" y="2336320"/>
-            <a:ext cx="3651504" cy="1554480"/>
+              <a:t>Đọc một bài báo trong 15 phút</a:t>
+            </a:r>
+          </a:p>
+        </p:txBody>
+      </p:sp>
+      <p:sp>
+        <p:nvSpPr>
+          <p:cNvPr id="72" name="CardHead"/>
+          <p:cNvSpPr/>
+          <p:nvPr/>
+        </p:nvSpPr>
+        <p:spPr>
+          <a:xfrm>
+            <a:off x="3326600" y="1680240"/>
+            <a:ext cx="2669400" cy="640000"/>
           </a:xfrm>
           <a:prstGeom prst="rect">
             <a:avLst/>
@@ -46571,279 +46182,382 @@
           </a:ln>
         </p:spPr>
         <p:txBody>
-          <a:bodyPr wrap="square" lIns="27432" tIns="27432" rIns="27432" bIns="27432" rtlCol="0" anchor="ctr">
-            <a:noAutofit/>
+          <a:bodyPr wrap="square" lIns="91440" tIns="45720" rIns="91440" bIns="45720" rtlCol="0" anchor="ctr">
+            <a:normAutofit/>
+          </a:bodyPr>
+          <a:lstStyle/>
+          <a:p>
+            <a:pPr marL="0" indent="0" algn="ctr">
+              <a:buNone/>
+            </a:pPr>
+            <a:r>
+              <a:rPr lang="en-US" sz="1700" b="1" dirty="0">
+                <a:solidFill>
+                  <a:srgbClr val="FFFFFF"/>
+                </a:solidFill>
+                <a:latin typeface="Arial"/>
+                <a:cs typeface="Arial"/>
+              </a:rPr>
+              <a:t>Thiết kế</a:t>
+            </a:r>
+          </a:p>
+        </p:txBody>
+      </p:sp>
+      <p:sp>
+        <p:nvSpPr>
+          <p:cNvPr id="73" name="CardBody"/>
+          <p:cNvSpPr/>
+          <p:nvPr/>
+        </p:nvSpPr>
+        <p:spPr>
+          <a:xfrm>
+            <a:off x="3326600" y="2320240"/>
+            <a:ext cx="2669400" cy="2009280"/>
+          </a:xfrm>
+          <a:prstGeom prst="rect">
+            <a:avLst/>
+          </a:prstGeom>
+          <a:solidFill>
+            <a:srgbClr val="EAF2F5"/>
+          </a:solidFill>
+          <a:ln>
+            <a:noFill/>
+          </a:ln>
+        </p:spPr>
+        <p:txBody>
+          <a:bodyPr wrap="square" lIns="137160" tIns="91440" rIns="137160" bIns="91440" rtlCol="0" anchor="ctr">
+            <a:normAutofit/>
           </a:bodyPr>
           <a:lstStyle/>
           <a:p>
             <a:pPr marL="0" indent="0" algn="ctr">
               <a:lnSpc>
-                <a:spcPct val="100000"/>
+                <a:spcPct val="104000"/>
               </a:lnSpc>
-              <a:buNone/>
-            </a:pPr>
-            <a:r>
-              <a:rPr lang="en-US" sz="1800" b="1" dirty="0">
-                <a:solidFill>
-                  <a:srgbClr val="FFFFFF"/>
-                </a:solidFill>
-                <a:latin typeface="Arial"/>
-                <a:cs typeface="Arial"/>
-              </a:rPr>
-              <a:t>Học, kiểm tra, thực hành (B)</a:t>
-            </a:r>
-          </a:p>
-        </p:txBody>
-      </p:sp>
-      <p:sp>
-        <p:nvSpPr>
-          <p:cNvPr id="107" name="Text"/>
-          <p:cNvSpPr/>
-          <p:nvPr/>
-        </p:nvSpPr>
-        <p:spPr>
-          <a:xfrm>
-            <a:off x="5422900" y="3982240"/>
-            <a:ext cx="731520" cy="365760"/>
-          </a:xfrm>
-          <a:prstGeom prst="rect">
-            <a:avLst/>
-          </a:prstGeom>
-          <a:noFill/>
-          <a:ln>
-            <a:noFill/>
-          </a:ln>
-        </p:spPr>
-        <p:txBody>
-          <a:bodyPr wrap="square" lIns="54864" tIns="54864" rIns="54864" bIns="54864" rtlCol="0" anchor="ctr">
-            <a:noAutofit/>
-          </a:bodyPr>
-          <a:lstStyle/>
+              <a:spcBef>
+                <a:spcPts val="400"/>
+              </a:spcBef>
+              <a:buNone/>
+            </a:pPr>
+            <a:r>
+              <a:rPr lang="en-US" sz="1600" dirty="0">
+                <a:solidFill>
+                  <a:srgbClr val="000000"/>
+                </a:solidFill>
+                <a:latin typeface="Arial"/>
+                <a:cs typeface="Arial"/>
+              </a:rPr>
+              <a:t>Chọn thiết kế nghiên cứu</a:t>
+            </a:r>
+          </a:p>
           <a:p>
             <a:pPr marL="0" indent="0" algn="ctr">
               <a:lnSpc>
-                <a:spcPct val="100000"/>
+                <a:spcPct val="104000"/>
               </a:lnSpc>
-              <a:buNone/>
-            </a:pPr>
-            <a:r>
-              <a:rPr lang="en-US" sz="1400" dirty="0">
-                <a:solidFill>
-                  <a:srgbClr val="8A99A3"/>
-                </a:solidFill>
-                <a:latin typeface="Arial"/>
-                <a:cs typeface="Arial"/>
-              </a:rPr>
-              <a:t>1:25</a:t>
-            </a:r>
-          </a:p>
-        </p:txBody>
-      </p:sp>
-      <p:sp>
-        <p:nvSpPr>
-          <p:cNvPr id="108" name="Box"/>
-          <p:cNvSpPr/>
-          <p:nvPr/>
-        </p:nvSpPr>
-        <p:spPr>
-          <a:xfrm>
-            <a:off x="9476740" y="2336320"/>
-            <a:ext cx="1807464" cy="1554480"/>
-          </a:xfrm>
-          <a:prstGeom prst="rect">
-            <a:avLst/>
-          </a:prstGeom>
-          <a:solidFill>
-            <a:srgbClr val="055F56"/>
-          </a:solidFill>
-          <a:ln>
-            <a:noFill/>
-          </a:ln>
-        </p:spPr>
-        <p:txBody>
-          <a:bodyPr wrap="square" lIns="27432" tIns="27432" rIns="27432" bIns="27432" rtlCol="0" anchor="ctr">
-            <a:noAutofit/>
-          </a:bodyPr>
-          <a:lstStyle/>
+              <a:spcBef>
+                <a:spcPts val="400"/>
+              </a:spcBef>
+              <a:buNone/>
+            </a:pPr>
+            <a:r>
+              <a:rPr lang="en-US" sz="1600" dirty="0">
+                <a:solidFill>
+                  <a:srgbClr val="000000"/>
+                </a:solidFill>
+                <a:latin typeface="Arial"/>
+                <a:cs typeface="Arial"/>
+              </a:rPr>
+              <a:t>Nhận ra sai lệch</a:t>
+            </a:r>
+          </a:p>
           <a:p>
             <a:pPr marL="0" indent="0" algn="ctr">
               <a:lnSpc>
-                <a:spcPct val="100000"/>
+                <a:spcPct val="104000"/>
               </a:lnSpc>
-              <a:buNone/>
-            </a:pPr>
-            <a:r>
-              <a:rPr lang="en-US" sz="1800" b="1" dirty="0">
+              <a:spcBef>
+                <a:spcPts val="400"/>
+              </a:spcBef>
+              <a:buNone/>
+            </a:pPr>
+            <a:r>
+              <a:rPr lang="en-US" sz="1600" dirty="0">
+                <a:solidFill>
+                  <a:srgbClr val="000000"/>
+                </a:solidFill>
+                <a:latin typeface="Arial"/>
+                <a:cs typeface="Arial"/>
+              </a:rPr>
+              <a:t>Đọc các chỉ số đo lường tác động chính</a:t>
+            </a:r>
+          </a:p>
+        </p:txBody>
+      </p:sp>
+      <p:sp>
+        <p:nvSpPr>
+          <p:cNvPr id="74" name="CardHead"/>
+          <p:cNvSpPr/>
+          <p:nvPr/>
+        </p:nvSpPr>
+        <p:spPr>
+          <a:xfrm>
+            <a:off x="6196000" y="1680240"/>
+            <a:ext cx="2669400" cy="640000"/>
+          </a:xfrm>
+          <a:prstGeom prst="rect">
+            <a:avLst/>
+          </a:prstGeom>
+          <a:solidFill>
+            <a:srgbClr val="5FA39B"/>
+          </a:solidFill>
+          <a:ln>
+            <a:noFill/>
+          </a:ln>
+        </p:spPr>
+        <p:txBody>
+          <a:bodyPr wrap="square" lIns="91440" tIns="45720" rIns="91440" bIns="45720" rtlCol="0" anchor="ctr">
+            <a:normAutofit/>
+          </a:bodyPr>
+          <a:lstStyle/>
+          <a:p>
+            <a:pPr marL="0" indent="0" algn="ctr">
+              <a:buNone/>
+            </a:pPr>
+            <a:r>
+              <a:rPr lang="en-US" sz="1700" b="1" dirty="0">
                 <a:solidFill>
                   <a:srgbClr val="FFFFFF"/>
                 </a:solidFill>
                 <a:latin typeface="Arial"/>
                 <a:cs typeface="Arial"/>
               </a:rPr>
-              <a:t>Xây dựng đề cương hoặc phần Kết quả</a:t>
-            </a:r>
-          </a:p>
-        </p:txBody>
-      </p:sp>
-      <p:sp>
-        <p:nvSpPr>
-          <p:cNvPr id="109" name="Text"/>
-          <p:cNvSpPr/>
-          <p:nvPr/>
-        </p:nvSpPr>
-        <p:spPr>
-          <a:xfrm>
-            <a:off x="9110980" y="3982240"/>
-            <a:ext cx="731520" cy="365760"/>
+              <a:t>Phân tích</a:t>
+            </a:r>
+          </a:p>
+        </p:txBody>
+      </p:sp>
+      <p:sp>
+        <p:nvSpPr>
+          <p:cNvPr id="75" name="CardBody"/>
+          <p:cNvSpPr/>
+          <p:nvPr/>
+        </p:nvSpPr>
+        <p:spPr>
+          <a:xfrm>
+            <a:off x="6196000" y="2320240"/>
+            <a:ext cx="2669400" cy="2009280"/>
           </a:xfrm>
           <a:prstGeom prst="rect">
             <a:avLst/>
           </a:prstGeom>
-          <a:noFill/>
-          <a:ln>
-            <a:noFill/>
-          </a:ln>
-        </p:spPr>
-        <p:txBody>
-          <a:bodyPr wrap="square" lIns="54864" tIns="54864" rIns="54864" bIns="54864" rtlCol="0" anchor="ctr">
-            <a:noAutofit/>
+          <a:solidFill>
+            <a:srgbClr val="EAF2F5"/>
+          </a:solidFill>
+          <a:ln>
+            <a:noFill/>
+          </a:ln>
+        </p:spPr>
+        <p:txBody>
+          <a:bodyPr wrap="square" lIns="137160" tIns="91440" rIns="137160" bIns="91440" rtlCol="0" anchor="ctr">
+            <a:normAutofit/>
           </a:bodyPr>
           <a:lstStyle/>
           <a:p>
             <a:pPr marL="0" indent="0" algn="ctr">
               <a:lnSpc>
-                <a:spcPct val="100000"/>
+                <a:spcPct val="104000"/>
               </a:lnSpc>
-              <a:buNone/>
-            </a:pPr>
-            <a:r>
-              <a:rPr lang="en-US" sz="1400" dirty="0">
-                <a:solidFill>
-                  <a:srgbClr val="8A99A3"/>
-                </a:solidFill>
-                <a:latin typeface="Arial"/>
-                <a:cs typeface="Arial"/>
-              </a:rPr>
-              <a:t>2:25</a:t>
-            </a:r>
-          </a:p>
-        </p:txBody>
-      </p:sp>
-      <p:sp>
-        <p:nvSpPr>
-          <p:cNvPr id="110" name="Box"/>
-          <p:cNvSpPr/>
-          <p:nvPr/>
-        </p:nvSpPr>
-        <p:spPr>
-          <a:xfrm>
-            <a:off x="11320780" y="2336320"/>
-            <a:ext cx="270764" cy="1554480"/>
-          </a:xfrm>
-          <a:prstGeom prst="rect">
-            <a:avLst/>
-          </a:prstGeom>
-          <a:solidFill>
-            <a:srgbClr val="8A99A3"/>
-          </a:solidFill>
-          <a:ln>
-            <a:noFill/>
-          </a:ln>
-        </p:spPr>
-        <p:txBody>
-          <a:bodyPr wrap="square" lIns="27432" tIns="27432" rIns="27432" bIns="27432" rtlCol="0" anchor="ctr">
-            <a:noAutofit/>
-          </a:bodyPr>
-          <a:lstStyle/>
-          <a:p>
-            <a:endParaRPr lang="en-US"/>
-          </a:p>
-        </p:txBody>
-      </p:sp>
-      <p:sp>
-        <p:nvSpPr>
-          <p:cNvPr id="111" name="Text"/>
-          <p:cNvSpPr/>
-          <p:nvPr/>
-        </p:nvSpPr>
-        <p:spPr>
-          <a:xfrm>
-            <a:off x="11216640" y="3982240"/>
-            <a:ext cx="731520" cy="365760"/>
-          </a:xfrm>
-          <a:prstGeom prst="rect">
-            <a:avLst/>
-          </a:prstGeom>
-          <a:noFill/>
-          <a:ln>
-            <a:noFill/>
-          </a:ln>
-        </p:spPr>
-        <p:txBody>
-          <a:bodyPr wrap="square" lIns="54864" tIns="54864" rIns="54864" bIns="54864" rtlCol="0" anchor="ctr">
-            <a:noAutofit/>
-          </a:bodyPr>
-          <a:lstStyle/>
+              <a:spcBef>
+                <a:spcPts val="400"/>
+              </a:spcBef>
+              <a:buNone/>
+            </a:pPr>
+            <a:r>
+              <a:rPr lang="en-US" sz="1600" dirty="0">
+                <a:solidFill>
+                  <a:srgbClr val="000000"/>
+                </a:solidFill>
+                <a:latin typeface="Arial"/>
+                <a:cs typeface="Arial"/>
+              </a:rPr>
+              <a:t>Lên kế hoạch dữ liệu cần thu thập</a:t>
+            </a:r>
+          </a:p>
           <a:p>
             <a:pPr marL="0" indent="0" algn="ctr">
               <a:lnSpc>
-                <a:spcPct val="100000"/>
+                <a:spcPct val="104000"/>
               </a:lnSpc>
-              <a:buNone/>
-            </a:pPr>
-            <a:r>
-              <a:rPr lang="en-US" sz="1400" dirty="0">
-                <a:solidFill>
-                  <a:srgbClr val="8A99A3"/>
-                </a:solidFill>
-                <a:latin typeface="Arial"/>
-                <a:cs typeface="Arial"/>
-              </a:rPr>
-              <a:t>3:00</a:t>
-            </a:r>
-          </a:p>
-        </p:txBody>
-      </p:sp>
-      <p:sp>
-        <p:nvSpPr>
-          <p:cNvPr id="112" name="Text"/>
-          <p:cNvSpPr/>
-          <p:nvPr/>
-        </p:nvSpPr>
-        <p:spPr>
-          <a:xfrm>
-            <a:off x="10165080" y="1879120"/>
-            <a:ext cx="1463040" cy="365760"/>
+              <a:spcBef>
+                <a:spcPts val="400"/>
+              </a:spcBef>
+              <a:buNone/>
+            </a:pPr>
+            <a:r>
+              <a:rPr lang="en-US" sz="1600" dirty="0">
+                <a:solidFill>
+                  <a:srgbClr val="000000"/>
+                </a:solidFill>
+                <a:latin typeface="Arial"/>
+                <a:cs typeface="Arial"/>
+              </a:rPr>
+              <a:t>Đọc kết quả một phân tích</a:t>
+            </a:r>
+          </a:p>
+          <a:p>
+            <a:pPr marL="0" indent="0" algn="ctr">
+              <a:lnSpc>
+                <a:spcPct val="104000"/>
+              </a:lnSpc>
+              <a:spcBef>
+                <a:spcPts val="400"/>
+              </a:spcBef>
+              <a:buNone/>
+            </a:pPr>
+            <a:r>
+              <a:rPr lang="en-US" sz="1600" dirty="0">
+                <a:solidFill>
+                  <a:srgbClr val="000000"/>
+                </a:solidFill>
+                <a:latin typeface="Arial"/>
+                <a:cs typeface="Arial"/>
+              </a:rPr>
+              <a:t>Diễn giải một bộ dữ liệu thật</a:t>
+            </a:r>
+          </a:p>
+        </p:txBody>
+      </p:sp>
+      <p:sp>
+        <p:nvSpPr>
+          <p:cNvPr id="76" name="CardHead"/>
+          <p:cNvSpPr/>
+          <p:nvPr/>
+        </p:nvSpPr>
+        <p:spPr>
+          <a:xfrm>
+            <a:off x="9065400" y="1680240"/>
+            <a:ext cx="2669400" cy="640000"/>
           </a:xfrm>
           <a:prstGeom prst="rect">
             <a:avLst/>
           </a:prstGeom>
-          <a:noFill/>
-          <a:ln>
-            <a:noFill/>
-          </a:ln>
-        </p:spPr>
-        <p:txBody>
-          <a:bodyPr wrap="square" lIns="54864" tIns="54864" rIns="54864" bIns="54864" rtlCol="0" anchor="ctr">
-            <a:noAutofit/>
-          </a:bodyPr>
-          <a:lstStyle/>
-          <a:p>
-            <a:pPr marL="0" indent="0" algn="r">
+          <a:solidFill>
+            <a:srgbClr val="0070C0"/>
+          </a:solidFill>
+          <a:ln>
+            <a:noFill/>
+          </a:ln>
+        </p:spPr>
+        <p:txBody>
+          <a:bodyPr wrap="square" lIns="91440" tIns="45720" rIns="91440" bIns="45720" rtlCol="0" anchor="ctr">
+            <a:normAutofit/>
+          </a:bodyPr>
+          <a:lstStyle/>
+          <a:p>
+            <a:pPr marL="0" indent="0" algn="ctr">
+              <a:buNone/>
+            </a:pPr>
+            <a:r>
+              <a:rPr lang="en-US" sz="1700" b="1" dirty="0">
+                <a:solidFill>
+                  <a:srgbClr val="FFFFFF"/>
+                </a:solidFill>
+                <a:latin typeface="Arial"/>
+                <a:cs typeface="Arial"/>
+              </a:rPr>
+              <a:t>Viết và công bố</a:t>
+            </a:r>
+          </a:p>
+        </p:txBody>
+      </p:sp>
+      <p:sp>
+        <p:nvSpPr>
+          <p:cNvPr id="77" name="CardBody"/>
+          <p:cNvSpPr/>
+          <p:nvPr/>
+        </p:nvSpPr>
+        <p:spPr>
+          <a:xfrm>
+            <a:off x="9065400" y="2320240"/>
+            <a:ext cx="2669400" cy="2009280"/>
+          </a:xfrm>
+          <a:prstGeom prst="rect">
+            <a:avLst/>
+          </a:prstGeom>
+          <a:solidFill>
+            <a:srgbClr val="EAF2F5"/>
+          </a:solidFill>
+          <a:ln>
+            <a:noFill/>
+          </a:ln>
+        </p:spPr>
+        <p:txBody>
+          <a:bodyPr wrap="square" lIns="137160" tIns="91440" rIns="137160" bIns="91440" rtlCol="0" anchor="ctr">
+            <a:normAutofit/>
+          </a:bodyPr>
+          <a:lstStyle/>
+          <a:p>
+            <a:pPr marL="0" indent="0" algn="ctr">
               <a:lnSpc>
-                <a:spcPct val="100000"/>
+                <a:spcPct val="104000"/>
               </a:lnSpc>
-              <a:buNone/>
-            </a:pPr>
-            <a:r>
-              <a:rPr lang="en-US" sz="1400" dirty="0">
-                <a:solidFill>
-                  <a:srgbClr val="8A99A3"/>
-                </a:solidFill>
-                <a:latin typeface="Arial"/>
-                <a:cs typeface="Arial"/>
-              </a:rPr>
-              <a:t>Tổng kết</a:t>
+              <a:spcBef>
+                <a:spcPts val="400"/>
+              </a:spcBef>
+              <a:buNone/>
+            </a:pPr>
+            <a:r>
+              <a:rPr lang="en-US" sz="1600" dirty="0">
+                <a:solidFill>
+                  <a:srgbClr val="000000"/>
+                </a:solidFill>
+                <a:latin typeface="Arial"/>
+                <a:cs typeface="Arial"/>
+              </a:rPr>
+              <a:t>Lên kế hoạch xin phê duyệt đạo đức</a:t>
+            </a:r>
+          </a:p>
+          <a:p>
+            <a:pPr marL="0" indent="0" algn="ctr">
+              <a:lnSpc>
+                <a:spcPct val="104000"/>
+              </a:lnSpc>
+              <a:spcBef>
+                <a:spcPts val="400"/>
+              </a:spcBef>
+              <a:buNone/>
+            </a:pPr>
+            <a:r>
+              <a:rPr lang="en-US" sz="1600" dirty="0">
+                <a:solidFill>
+                  <a:srgbClr val="000000"/>
+                </a:solidFill>
+                <a:latin typeface="Arial"/>
+                <a:cs typeface="Arial"/>
+              </a:rPr>
+              <a:t>Viết từng phần của bài báo</a:t>
+            </a:r>
+          </a:p>
+          <a:p>
+            <a:pPr marL="0" indent="0" algn="ctr">
+              <a:lnSpc>
+                <a:spcPct val="104000"/>
+              </a:lnSpc>
+              <a:spcBef>
+                <a:spcPts val="400"/>
+              </a:spcBef>
+              <a:buNone/>
+            </a:pPr>
+            <a:r>
+              <a:rPr lang="en-US" sz="1600" dirty="0">
+                <a:solidFill>
+                  <a:srgbClr val="000000"/>
+                </a:solidFill>
+                <a:latin typeface="Arial"/>
+                <a:cs typeface="Arial"/>
+              </a:rPr>
+              <a:t>Nộp bài và trả lời phản biện</a:t>
             </a:r>
           </a:p>
         </p:txBody>
@@ -46898,7 +46612,7 @@
                 <a:latin typeface="Arial"/>
                 <a:cs typeface="Arial"/>
               </a:rPr>
-              <a:t>Cứ 20 phút kiểm tra mức hiểu một lần. Slide bổ sung chỉ dùng khi còn thời gian.</a:t>
+              <a:t>Hiểu và diễn giải: bạn sẽ không phải tự tính toán.</a:t>
             </a:r>
           </a:p>
         </p:txBody>
@@ -47066,7 +46780,7 @@
                 <a:latin typeface="Arial"/>
                 <a:cs typeface="Arial"/>
               </a:rPr>
-              <a:t>Viết đề cương của bạn từng phần một</a:t>
+              <a:t>Mỗi buổi học diễn ra như thế nào</a:t>
             </a:r>
           </a:p>
         </p:txBody>
@@ -47101,19 +46815,107 @@
       </p:sp>
       <p:sp>
         <p:nvSpPr>
-          <p:cNvPr id="80" name="Step"/>
-          <p:cNvSpPr/>
-          <p:nvPr/>
-        </p:nvSpPr>
-        <p:spPr>
-          <a:xfrm>
-            <a:off x="457200" y="1220000"/>
-            <a:ext cx="2303520" cy="760000"/>
-          </a:xfrm>
-          <a:prstGeom prst="homePlate">
-            <a:avLst>
-              <a:gd name="adj" fmla="val 28000"/>
-            </a:avLst>
+          <p:cNvPr id="100" name="Box"/>
+          <p:cNvSpPr/>
+          <p:nvPr/>
+        </p:nvSpPr>
+        <p:spPr>
+          <a:xfrm>
+            <a:off x="563880" y="2336320"/>
+            <a:ext cx="578104" cy="1554480"/>
+          </a:xfrm>
+          <a:prstGeom prst="rect">
+            <a:avLst/>
+          </a:prstGeom>
+          <a:solidFill>
+            <a:srgbClr val="8A99A3"/>
+          </a:solidFill>
+          <a:ln>
+            <a:noFill/>
+          </a:ln>
+        </p:spPr>
+        <p:txBody>
+          <a:bodyPr wrap="square" lIns="27432" tIns="27432" rIns="27432" bIns="27432" rtlCol="0" anchor="ctr">
+            <a:noAutofit/>
+          </a:bodyPr>
+          <a:lstStyle/>
+          <a:p>
+            <a:pPr marL="0" indent="0" algn="ctr">
+              <a:lnSpc>
+                <a:spcPct val="100000"/>
+              </a:lnSpc>
+              <a:buNone/>
+            </a:pPr>
+            <a:r>
+              <a:rPr lang="en-US" sz="1300" b="1" dirty="0">
+                <a:solidFill>
+                  <a:srgbClr val="FFFFFF"/>
+                </a:solidFill>
+                <a:latin typeface="Arial"/>
+                <a:cs typeface="Arial"/>
+              </a:rPr>
+              <a:t>Ôn tập</a:t>
+            </a:r>
+          </a:p>
+        </p:txBody>
+      </p:sp>
+      <p:sp>
+        <p:nvSpPr>
+          <p:cNvPr id="101" name="Text"/>
+          <p:cNvSpPr/>
+          <p:nvPr/>
+        </p:nvSpPr>
+        <p:spPr>
+          <a:xfrm>
+            <a:off x="198120" y="3982240"/>
+            <a:ext cx="731520" cy="365760"/>
+          </a:xfrm>
+          <a:prstGeom prst="rect">
+            <a:avLst/>
+          </a:prstGeom>
+          <a:noFill/>
+          <a:ln>
+            <a:noFill/>
+          </a:ln>
+        </p:spPr>
+        <p:txBody>
+          <a:bodyPr wrap="square" lIns="54864" tIns="54864" rIns="54864" bIns="54864" rtlCol="0" anchor="ctr">
+            <a:noAutofit/>
+          </a:bodyPr>
+          <a:lstStyle/>
+          <a:p>
+            <a:pPr marL="0" indent="0" algn="ctr">
+              <a:lnSpc>
+                <a:spcPct val="100000"/>
+              </a:lnSpc>
+              <a:buNone/>
+            </a:pPr>
+            <a:r>
+              <a:rPr lang="en-US" sz="1400" dirty="0">
+                <a:solidFill>
+                  <a:srgbClr val="8A99A3"/>
+                </a:solidFill>
+                <a:latin typeface="Arial"/>
+                <a:cs typeface="Arial"/>
+              </a:rPr>
+              <a:t>0:00</a:t>
+            </a:r>
+          </a:p>
+        </p:txBody>
+      </p:sp>
+      <p:sp>
+        <p:nvSpPr>
+          <p:cNvPr id="102" name="Box"/>
+          <p:cNvSpPr/>
+          <p:nvPr/>
+        </p:nvSpPr>
+        <p:spPr>
+          <a:xfrm>
+            <a:off x="1178560" y="2336320"/>
+            <a:ext cx="3651504" cy="1554480"/>
+          </a:xfrm>
+          <a:prstGeom prst="rect">
+            <a:avLst/>
           </a:prstGeom>
           <a:solidFill>
             <a:srgbClr val="0D7377"/>
@@ -47123,112 +46925,177 @@
           </a:ln>
         </p:spPr>
         <p:txBody>
-          <a:bodyPr wrap="square" lIns="200000" tIns="45720" rIns="200000" bIns="45720" rtlCol="0" anchor="ctr">
-            <a:normAutofit/>
-          </a:bodyPr>
-          <a:lstStyle/>
-          <a:p>
-            <a:pPr marL="0" indent="0" algn="ctr">
-              <a:buNone/>
-            </a:pPr>
-            <a:r>
-              <a:rPr lang="en-US" sz="1400" b="1" dirty="0">
-                <a:solidFill>
-                  <a:srgbClr val="FFFFFF"/>
-                </a:solidFill>
-                <a:latin typeface="Arial"/>
-                <a:cs typeface="Arial"/>
-              </a:rPr>
-              <a:t>Phần 1</a:t>
-            </a:r>
-          </a:p>
-        </p:txBody>
-      </p:sp>
-      <p:sp>
-        <p:nvSpPr>
-          <p:cNvPr id="81" name="StepText"/>
-          <p:cNvSpPr/>
-          <p:nvPr/>
-        </p:nvSpPr>
-        <p:spPr>
-          <a:xfrm>
-            <a:off x="497200" y="2140000"/>
-            <a:ext cx="2163520" cy="1463180"/>
-          </a:xfrm>
-          <a:prstGeom prst="rect">
-            <a:avLst/>
-          </a:prstGeom>
-          <a:solidFill>
-            <a:srgbClr val="EAF2F5"/>
-          </a:solidFill>
-          <a:ln>
-            <a:noFill/>
-          </a:ln>
-        </p:spPr>
-        <p:txBody>
-          <a:bodyPr wrap="square" lIns="110000" tIns="91440" rIns="110000" bIns="91440" rtlCol="0" anchor="ctr">
-            <a:normAutofit/>
+          <a:bodyPr wrap="square" lIns="27432" tIns="27432" rIns="27432" bIns="27432" rtlCol="0" anchor="ctr">
+            <a:noAutofit/>
           </a:bodyPr>
           <a:lstStyle/>
           <a:p>
             <a:pPr marL="0" indent="0" algn="ctr">
               <a:lnSpc>
-                <a:spcPct val="104000"/>
+                <a:spcPct val="100000"/>
               </a:lnSpc>
-              <a:spcBef>
-                <a:spcPts val="200"/>
-              </a:spcBef>
-              <a:buNone/>
-            </a:pPr>
-            <a:r>
-              <a:rPr lang="en-US" sz="1700" b="1" dirty="0">
-                <a:solidFill>
-                  <a:srgbClr val="000000"/>
-                </a:solidFill>
-                <a:latin typeface="Arial"/>
-                <a:cs typeface="Arial"/>
-              </a:rPr>
-              <a:t>Buổi 1-2</a:t>
-            </a:r>
-          </a:p>
+              <a:buNone/>
+            </a:pPr>
+            <a:r>
+              <a:rPr lang="en-US" sz="1800" b="1" dirty="0">
+                <a:solidFill>
+                  <a:srgbClr val="FFFFFF"/>
+                </a:solidFill>
+                <a:latin typeface="Arial"/>
+                <a:cs typeface="Arial"/>
+              </a:rPr>
+              <a:t>Học, kiểm tra, thực hành (A)</a:t>
+            </a:r>
+          </a:p>
+        </p:txBody>
+      </p:sp>
+      <p:sp>
+        <p:nvSpPr>
+          <p:cNvPr id="103" name="Text"/>
+          <p:cNvSpPr/>
+          <p:nvPr/>
+        </p:nvSpPr>
+        <p:spPr>
+          <a:xfrm>
+            <a:off x="812800" y="3982240"/>
+            <a:ext cx="731520" cy="365760"/>
+          </a:xfrm>
+          <a:prstGeom prst="rect">
+            <a:avLst/>
+          </a:prstGeom>
+          <a:noFill/>
+          <a:ln>
+            <a:noFill/>
+          </a:ln>
+        </p:spPr>
+        <p:txBody>
+          <a:bodyPr wrap="square" lIns="54864" tIns="54864" rIns="54864" bIns="54864" rtlCol="0" anchor="ctr">
+            <a:noAutofit/>
+          </a:bodyPr>
+          <a:lstStyle/>
           <a:p>
             <a:pPr marL="0" indent="0" algn="ctr">
               <a:lnSpc>
-                <a:spcPct val="104000"/>
+                <a:spcPct val="100000"/>
               </a:lnSpc>
-              <a:spcBef>
-                <a:spcPts val="200"/>
-              </a:spcBef>
-              <a:buNone/>
-            </a:pPr>
-            <a:r>
-              <a:rPr lang="en-US" sz="1700" dirty="0">
+              <a:buNone/>
+            </a:pPr>
+            <a:r>
+              <a:rPr lang="en-US" sz="1400" dirty="0">
+                <a:solidFill>
+                  <a:srgbClr val="8A99A3"/>
+                </a:solidFill>
+                <a:latin typeface="Arial"/>
+                <a:cs typeface="Arial"/>
+              </a:rPr>
+              <a:t>0:10</a:t>
+            </a:r>
+          </a:p>
+        </p:txBody>
+      </p:sp>
+      <p:sp>
+        <p:nvSpPr>
+          <p:cNvPr id="104" name="Box"/>
+          <p:cNvSpPr/>
+          <p:nvPr/>
+        </p:nvSpPr>
+        <p:spPr>
+          <a:xfrm>
+            <a:off x="4866640" y="2336320"/>
+            <a:ext cx="885444" cy="1554480"/>
+          </a:xfrm>
+          <a:prstGeom prst="rect">
+            <a:avLst/>
+          </a:prstGeom>
+          <a:solidFill>
+            <a:srgbClr val="D5DDE1"/>
+          </a:solidFill>
+          <a:ln>
+            <a:noFill/>
+          </a:ln>
+        </p:spPr>
+        <p:txBody>
+          <a:bodyPr wrap="square" lIns="27432" tIns="27432" rIns="27432" bIns="27432" rtlCol="0" anchor="ctr">
+            <a:noAutofit/>
+          </a:bodyPr>
+          <a:lstStyle/>
+          <a:p>
+            <a:pPr marL="0" indent="0" algn="ctr">
+              <a:lnSpc>
+                <a:spcPct val="100000"/>
+              </a:lnSpc>
+              <a:buNone/>
+            </a:pPr>
+            <a:r>
+              <a:rPr lang="en-US" sz="1300" b="1" dirty="0">
                 <a:solidFill>
                   <a:srgbClr val="000000"/>
                 </a:solidFill>
                 <a:latin typeface="Arial"/>
                 <a:cs typeface="Arial"/>
               </a:rPr>
-              <a:t>Câu hỏi, tổng quan, mục tiêu</a:t>
-            </a:r>
-          </a:p>
-        </p:txBody>
-      </p:sp>
-      <p:sp>
-        <p:nvSpPr>
-          <p:cNvPr id="82" name="Step"/>
-          <p:cNvSpPr/>
-          <p:nvPr/>
-        </p:nvSpPr>
-        <p:spPr>
-          <a:xfrm>
-            <a:off x="2700720" y="1220000"/>
-            <a:ext cx="2303520" cy="760000"/>
-          </a:xfrm>
-          <a:prstGeom prst="chevron">
-            <a:avLst>
-              <a:gd name="adj" fmla="val 28000"/>
-            </a:avLst>
+              <a:t>Giải lao</a:t>
+            </a:r>
+          </a:p>
+        </p:txBody>
+      </p:sp>
+      <p:sp>
+        <p:nvSpPr>
+          <p:cNvPr id="105" name="Text"/>
+          <p:cNvSpPr/>
+          <p:nvPr/>
+        </p:nvSpPr>
+        <p:spPr>
+          <a:xfrm>
+            <a:off x="4500880" y="3982240"/>
+            <a:ext cx="731520" cy="365760"/>
+          </a:xfrm>
+          <a:prstGeom prst="rect">
+            <a:avLst/>
+          </a:prstGeom>
+          <a:noFill/>
+          <a:ln>
+            <a:noFill/>
+          </a:ln>
+        </p:spPr>
+        <p:txBody>
+          <a:bodyPr wrap="square" lIns="54864" tIns="54864" rIns="54864" bIns="54864" rtlCol="0" anchor="ctr">
+            <a:noAutofit/>
+          </a:bodyPr>
+          <a:lstStyle/>
+          <a:p>
+            <a:pPr marL="0" indent="0" algn="ctr">
+              <a:lnSpc>
+                <a:spcPct val="100000"/>
+              </a:lnSpc>
+              <a:buNone/>
+            </a:pPr>
+            <a:r>
+              <a:rPr lang="en-US" sz="1400" dirty="0">
+                <a:solidFill>
+                  <a:srgbClr val="8A99A3"/>
+                </a:solidFill>
+                <a:latin typeface="Arial"/>
+                <a:cs typeface="Arial"/>
+              </a:rPr>
+              <a:t>1:10</a:t>
+            </a:r>
+          </a:p>
+        </p:txBody>
+      </p:sp>
+      <p:sp>
+        <p:nvSpPr>
+          <p:cNvPr id="106" name="Box"/>
+          <p:cNvSpPr/>
+          <p:nvPr/>
+        </p:nvSpPr>
+        <p:spPr>
+          <a:xfrm>
+            <a:off x="5788660" y="2336320"/>
+            <a:ext cx="3651504" cy="1554480"/>
+          </a:xfrm>
+          <a:prstGeom prst="rect">
+            <a:avLst/>
           </a:prstGeom>
           <a:solidFill>
             <a:srgbClr val="0B376C"/>
@@ -47238,342 +47105,87 @@
           </a:ln>
         </p:spPr>
         <p:txBody>
-          <a:bodyPr wrap="square" lIns="200000" tIns="45720" rIns="200000" bIns="45720" rtlCol="0" anchor="ctr">
-            <a:normAutofit/>
-          </a:bodyPr>
-          <a:lstStyle/>
-          <a:p>
-            <a:pPr marL="0" indent="0" algn="ctr">
-              <a:buNone/>
-            </a:pPr>
-            <a:r>
-              <a:rPr lang="en-US" sz="1400" b="1" dirty="0">
-                <a:solidFill>
-                  <a:srgbClr val="FFFFFF"/>
-                </a:solidFill>
-                <a:latin typeface="Arial"/>
-                <a:cs typeface="Arial"/>
-              </a:rPr>
-              <a:t>Phần 2</a:t>
-            </a:r>
-          </a:p>
-        </p:txBody>
-      </p:sp>
-      <p:sp>
-        <p:nvSpPr>
-          <p:cNvPr id="83" name="StepText"/>
-          <p:cNvSpPr/>
-          <p:nvPr/>
-        </p:nvSpPr>
-        <p:spPr>
-          <a:xfrm>
-            <a:off x="2740720" y="2140000"/>
-            <a:ext cx="2163520" cy="1463180"/>
-          </a:xfrm>
-          <a:prstGeom prst="rect">
-            <a:avLst/>
-          </a:prstGeom>
-          <a:solidFill>
-            <a:srgbClr val="EAF2F5"/>
-          </a:solidFill>
-          <a:ln>
-            <a:noFill/>
-          </a:ln>
-        </p:spPr>
-        <p:txBody>
-          <a:bodyPr wrap="square" lIns="110000" tIns="91440" rIns="110000" bIns="91440" rtlCol="0" anchor="ctr">
-            <a:normAutofit/>
+          <a:bodyPr wrap="square" lIns="27432" tIns="27432" rIns="27432" bIns="27432" rtlCol="0" anchor="ctr">
+            <a:noAutofit/>
           </a:bodyPr>
           <a:lstStyle/>
           <a:p>
             <a:pPr marL="0" indent="0" algn="ctr">
               <a:lnSpc>
-                <a:spcPct val="104000"/>
+                <a:spcPct val="100000"/>
               </a:lnSpc>
-              <a:spcBef>
-                <a:spcPts val="200"/>
-              </a:spcBef>
-              <a:buNone/>
-            </a:pPr>
-            <a:r>
-              <a:rPr lang="en-US" sz="1700" b="1" dirty="0">
-                <a:solidFill>
-                  <a:srgbClr val="000000"/>
-                </a:solidFill>
-                <a:latin typeface="Arial"/>
-                <a:cs typeface="Arial"/>
-              </a:rPr>
-              <a:t>Buổi 3-4</a:t>
-            </a:r>
-          </a:p>
+              <a:buNone/>
+            </a:pPr>
+            <a:r>
+              <a:rPr lang="en-US" sz="1800" b="1" dirty="0">
+                <a:solidFill>
+                  <a:srgbClr val="FFFFFF"/>
+                </a:solidFill>
+                <a:latin typeface="Arial"/>
+                <a:cs typeface="Arial"/>
+              </a:rPr>
+              <a:t>Học, kiểm tra, thực hành (B)</a:t>
+            </a:r>
+          </a:p>
+        </p:txBody>
+      </p:sp>
+      <p:sp>
+        <p:nvSpPr>
+          <p:cNvPr id="107" name="Text"/>
+          <p:cNvSpPr/>
+          <p:nvPr/>
+        </p:nvSpPr>
+        <p:spPr>
+          <a:xfrm>
+            <a:off x="5422900" y="3982240"/>
+            <a:ext cx="731520" cy="365760"/>
+          </a:xfrm>
+          <a:prstGeom prst="rect">
+            <a:avLst/>
+          </a:prstGeom>
+          <a:noFill/>
+          <a:ln>
+            <a:noFill/>
+          </a:ln>
+        </p:spPr>
+        <p:txBody>
+          <a:bodyPr wrap="square" lIns="54864" tIns="54864" rIns="54864" bIns="54864" rtlCol="0" anchor="ctr">
+            <a:noAutofit/>
+          </a:bodyPr>
+          <a:lstStyle/>
           <a:p>
             <a:pPr marL="0" indent="0" algn="ctr">
               <a:lnSpc>
-                <a:spcPct val="104000"/>
+                <a:spcPct val="100000"/>
               </a:lnSpc>
-              <a:spcBef>
-                <a:spcPts val="200"/>
-              </a:spcBef>
-              <a:buNone/>
-            </a:pPr>
-            <a:r>
-              <a:rPr lang="en-US" sz="1700" dirty="0">
-                <a:solidFill>
-                  <a:srgbClr val="000000"/>
-                </a:solidFill>
-                <a:latin typeface="Arial"/>
-                <a:cs typeface="Arial"/>
-              </a:rPr>
-              <a:t>Thiết kế và đối tượng</a:t>
-            </a:r>
-          </a:p>
-        </p:txBody>
-      </p:sp>
-      <p:sp>
-        <p:nvSpPr>
-          <p:cNvPr id="84" name="Step"/>
-          <p:cNvSpPr/>
-          <p:nvPr/>
-        </p:nvSpPr>
-        <p:spPr>
-          <a:xfrm>
-            <a:off x="4944240" y="1220000"/>
-            <a:ext cx="2303520" cy="760000"/>
-          </a:xfrm>
-          <a:prstGeom prst="chevron">
-            <a:avLst>
-              <a:gd name="adj" fmla="val 28000"/>
-            </a:avLst>
-          </a:prstGeom>
-          <a:solidFill>
-            <a:srgbClr val="5FA39B"/>
-          </a:solidFill>
-          <a:ln>
-            <a:noFill/>
-          </a:ln>
-        </p:spPr>
-        <p:txBody>
-          <a:bodyPr wrap="square" lIns="200000" tIns="45720" rIns="200000" bIns="45720" rtlCol="0" anchor="ctr">
-            <a:normAutofit/>
-          </a:bodyPr>
-          <a:lstStyle/>
-          <a:p>
-            <a:pPr marL="0" indent="0" algn="ctr">
-              <a:buNone/>
-            </a:pPr>
-            <a:r>
-              <a:rPr lang="en-US" sz="1400" b="1" dirty="0">
-                <a:solidFill>
-                  <a:srgbClr val="FFFFFF"/>
-                </a:solidFill>
-                <a:latin typeface="Arial"/>
-                <a:cs typeface="Arial"/>
-              </a:rPr>
-              <a:t>Phần 3</a:t>
-            </a:r>
-          </a:p>
-        </p:txBody>
-      </p:sp>
-      <p:sp>
-        <p:nvSpPr>
-          <p:cNvPr id="85" name="StepText"/>
-          <p:cNvSpPr/>
-          <p:nvPr/>
-        </p:nvSpPr>
-        <p:spPr>
-          <a:xfrm>
-            <a:off x="4984240" y="2140000"/>
-            <a:ext cx="2163520" cy="1463180"/>
+              <a:buNone/>
+            </a:pPr>
+            <a:r>
+              <a:rPr lang="en-US" sz="1400" dirty="0">
+                <a:solidFill>
+                  <a:srgbClr val="8A99A3"/>
+                </a:solidFill>
+                <a:latin typeface="Arial"/>
+                <a:cs typeface="Arial"/>
+              </a:rPr>
+              <a:t>1:25</a:t>
+            </a:r>
+          </a:p>
+        </p:txBody>
+      </p:sp>
+      <p:sp>
+        <p:nvSpPr>
+          <p:cNvPr id="108" name="Box"/>
+          <p:cNvSpPr/>
+          <p:nvPr/>
+        </p:nvSpPr>
+        <p:spPr>
+          <a:xfrm>
+            <a:off x="9476740" y="2336320"/>
+            <a:ext cx="1807464" cy="1554480"/>
           </a:xfrm>
           <a:prstGeom prst="rect">
             <a:avLst/>
-          </a:prstGeom>
-          <a:solidFill>
-            <a:srgbClr val="EAF2F5"/>
-          </a:solidFill>
-          <a:ln>
-            <a:noFill/>
-          </a:ln>
-        </p:spPr>
-        <p:txBody>
-          <a:bodyPr wrap="square" lIns="110000" tIns="91440" rIns="110000" bIns="91440" rtlCol="0" anchor="ctr">
-            <a:normAutofit/>
-          </a:bodyPr>
-          <a:lstStyle/>
-          <a:p>
-            <a:pPr marL="0" indent="0" algn="ctr">
-              <a:lnSpc>
-                <a:spcPct val="104000"/>
-              </a:lnSpc>
-              <a:spcBef>
-                <a:spcPts val="200"/>
-              </a:spcBef>
-              <a:buNone/>
-            </a:pPr>
-            <a:r>
-              <a:rPr lang="en-US" sz="1700" b="1" dirty="0">
-                <a:solidFill>
-                  <a:srgbClr val="000000"/>
-                </a:solidFill>
-                <a:latin typeface="Arial"/>
-                <a:cs typeface="Arial"/>
-              </a:rPr>
-              <a:t>Buổi 5-6</a:t>
-            </a:r>
-          </a:p>
-          <a:p>
-            <a:pPr marL="0" indent="0" algn="ctr">
-              <a:lnSpc>
-                <a:spcPct val="104000"/>
-              </a:lnSpc>
-              <a:spcBef>
-                <a:spcPts val="200"/>
-              </a:spcBef>
-              <a:buNone/>
-            </a:pPr>
-            <a:r>
-              <a:rPr lang="en-US" sz="1700" dirty="0">
-                <a:solidFill>
-                  <a:srgbClr val="000000"/>
-                </a:solidFill>
-                <a:latin typeface="Arial"/>
-                <a:cs typeface="Arial"/>
-              </a:rPr>
-              <a:t>Dữ liệu, cỡ mẫu, kế hoạch phân tích</a:t>
-            </a:r>
-          </a:p>
-        </p:txBody>
-      </p:sp>
-      <p:sp>
-        <p:nvSpPr>
-          <p:cNvPr id="86" name="Step"/>
-          <p:cNvSpPr/>
-          <p:nvPr/>
-        </p:nvSpPr>
-        <p:spPr>
-          <a:xfrm>
-            <a:off x="7187760" y="1220000"/>
-            <a:ext cx="2303520" cy="760000"/>
-          </a:xfrm>
-          <a:prstGeom prst="chevron">
-            <a:avLst>
-              <a:gd name="adj" fmla="val 28000"/>
-            </a:avLst>
-          </a:prstGeom>
-          <a:solidFill>
-            <a:srgbClr val="0070C0"/>
-          </a:solidFill>
-          <a:ln>
-            <a:noFill/>
-          </a:ln>
-        </p:spPr>
-        <p:txBody>
-          <a:bodyPr wrap="square" lIns="200000" tIns="45720" rIns="200000" bIns="45720" rtlCol="0" anchor="ctr">
-            <a:normAutofit/>
-          </a:bodyPr>
-          <a:lstStyle/>
-          <a:p>
-            <a:pPr marL="0" indent="0" algn="ctr">
-              <a:buNone/>
-            </a:pPr>
-            <a:r>
-              <a:rPr lang="en-US" sz="1400" b="1" dirty="0">
-                <a:solidFill>
-                  <a:srgbClr val="FFFFFF"/>
-                </a:solidFill>
-                <a:latin typeface="Arial"/>
-                <a:cs typeface="Arial"/>
-              </a:rPr>
-              <a:t>Phần 4</a:t>
-            </a:r>
-          </a:p>
-        </p:txBody>
-      </p:sp>
-      <p:sp>
-        <p:nvSpPr>
-          <p:cNvPr id="87" name="StepText"/>
-          <p:cNvSpPr/>
-          <p:nvPr/>
-        </p:nvSpPr>
-        <p:spPr>
-          <a:xfrm>
-            <a:off x="7227760" y="2140000"/>
-            <a:ext cx="2163520" cy="1463180"/>
-          </a:xfrm>
-          <a:prstGeom prst="rect">
-            <a:avLst/>
-          </a:prstGeom>
-          <a:solidFill>
-            <a:srgbClr val="EAF2F5"/>
-          </a:solidFill>
-          <a:ln>
-            <a:noFill/>
-          </a:ln>
-        </p:spPr>
-        <p:txBody>
-          <a:bodyPr wrap="square" lIns="110000" tIns="91440" rIns="110000" bIns="91440" rtlCol="0" anchor="ctr">
-            <a:normAutofit/>
-          </a:bodyPr>
-          <a:lstStyle/>
-          <a:p>
-            <a:pPr marL="0" indent="0" algn="ctr">
-              <a:lnSpc>
-                <a:spcPct val="104000"/>
-              </a:lnSpc>
-              <a:spcBef>
-                <a:spcPts val="200"/>
-              </a:spcBef>
-              <a:buNone/>
-            </a:pPr>
-            <a:r>
-              <a:rPr lang="en-US" sz="1700" b="1" dirty="0">
-                <a:solidFill>
-                  <a:srgbClr val="000000"/>
-                </a:solidFill>
-                <a:latin typeface="Arial"/>
-                <a:cs typeface="Arial"/>
-              </a:rPr>
-              <a:t>Buổi 7</a:t>
-            </a:r>
-          </a:p>
-          <a:p>
-            <a:pPr marL="0" indent="0" algn="ctr">
-              <a:lnSpc>
-                <a:spcPct val="104000"/>
-              </a:lnSpc>
-              <a:spcBef>
-                <a:spcPts val="200"/>
-              </a:spcBef>
-              <a:buNone/>
-            </a:pPr>
-            <a:r>
-              <a:rPr lang="en-US" sz="1700" dirty="0">
-                <a:solidFill>
-                  <a:srgbClr val="000000"/>
-                </a:solidFill>
-                <a:latin typeface="Arial"/>
-                <a:cs typeface="Arial"/>
-              </a:rPr>
-              <a:t>Đạo đức, tính khả thi, kế hoạch công bố</a:t>
-            </a:r>
-          </a:p>
-        </p:txBody>
-      </p:sp>
-      <p:sp>
-        <p:nvSpPr>
-          <p:cNvPr id="88" name="Step"/>
-          <p:cNvSpPr/>
-          <p:nvPr/>
-        </p:nvSpPr>
-        <p:spPr>
-          <a:xfrm>
-            <a:off x="9431280" y="1220000"/>
-            <a:ext cx="2303520" cy="760000"/>
-          </a:xfrm>
-          <a:prstGeom prst="chevron">
-            <a:avLst>
-              <a:gd name="adj" fmla="val 28000"/>
-            </a:avLst>
           </a:prstGeom>
           <a:solidFill>
             <a:srgbClr val="055F56"/>
@@ -47583,93 +47195,189 @@
           </a:ln>
         </p:spPr>
         <p:txBody>
-          <a:bodyPr wrap="square" lIns="200000" tIns="45720" rIns="200000" bIns="45720" rtlCol="0" anchor="ctr">
-            <a:normAutofit/>
-          </a:bodyPr>
-          <a:lstStyle/>
-          <a:p>
-            <a:pPr marL="0" indent="0" algn="ctr">
-              <a:buNone/>
-            </a:pPr>
-            <a:r>
-              <a:rPr lang="en-US" sz="1400" b="1" dirty="0">
-                <a:solidFill>
-                  <a:srgbClr val="FFFFFF"/>
-                </a:solidFill>
-                <a:latin typeface="Arial"/>
-                <a:cs typeface="Arial"/>
-              </a:rPr>
-              <a:t>Nộp</a:t>
-            </a:r>
-          </a:p>
-        </p:txBody>
-      </p:sp>
-      <p:sp>
-        <p:nvSpPr>
-          <p:cNvPr id="89" name="StepText"/>
-          <p:cNvSpPr/>
-          <p:nvPr/>
-        </p:nvSpPr>
-        <p:spPr>
-          <a:xfrm>
-            <a:off x="9471280" y="2140000"/>
-            <a:ext cx="2163520" cy="1463180"/>
-          </a:xfrm>
-          <a:prstGeom prst="rect">
-            <a:avLst/>
-          </a:prstGeom>
-          <a:solidFill>
-            <a:srgbClr val="EAF2F5"/>
-          </a:solidFill>
-          <a:ln>
-            <a:noFill/>
-          </a:ln>
-        </p:spPr>
-        <p:txBody>
-          <a:bodyPr wrap="square" lIns="110000" tIns="91440" rIns="110000" bIns="91440" rtlCol="0" anchor="ctr">
-            <a:normAutofit/>
+          <a:bodyPr wrap="square" lIns="27432" tIns="27432" rIns="27432" bIns="27432" rtlCol="0" anchor="ctr">
+            <a:noAutofit/>
           </a:bodyPr>
           <a:lstStyle/>
           <a:p>
             <a:pPr marL="0" indent="0" algn="ctr">
               <a:lnSpc>
-                <a:spcPct val="104000"/>
+                <a:spcPct val="100000"/>
               </a:lnSpc>
-              <a:spcBef>
-                <a:spcPts val="200"/>
-              </a:spcBef>
-              <a:buNone/>
-            </a:pPr>
-            <a:r>
-              <a:rPr lang="en-US" sz="1700" b="1" dirty="0">
-                <a:solidFill>
-                  <a:srgbClr val="000000"/>
-                </a:solidFill>
-                <a:latin typeface="Arial"/>
-                <a:cs typeface="Arial"/>
-              </a:rPr>
-              <a:t>Buổi 8</a:t>
-            </a:r>
-          </a:p>
+              <a:buNone/>
+            </a:pPr>
+            <a:r>
+              <a:rPr lang="en-US" sz="1800" b="1" dirty="0">
+                <a:solidFill>
+                  <a:srgbClr val="FFFFFF"/>
+                </a:solidFill>
+                <a:latin typeface="Arial"/>
+                <a:cs typeface="Arial"/>
+              </a:rPr>
+              <a:t>Xây dựng đề cương hoặc phần Kết quả</a:t>
+            </a:r>
+          </a:p>
+        </p:txBody>
+      </p:sp>
+      <p:sp>
+        <p:nvSpPr>
+          <p:cNvPr id="109" name="Text"/>
+          <p:cNvSpPr/>
+          <p:nvPr/>
+        </p:nvSpPr>
+        <p:spPr>
+          <a:xfrm>
+            <a:off x="9110980" y="3982240"/>
+            <a:ext cx="731520" cy="365760"/>
+          </a:xfrm>
+          <a:prstGeom prst="rect">
+            <a:avLst/>
+          </a:prstGeom>
+          <a:noFill/>
+          <a:ln>
+            <a:noFill/>
+          </a:ln>
+        </p:spPr>
+        <p:txBody>
+          <a:bodyPr wrap="square" lIns="54864" tIns="54864" rIns="54864" bIns="54864" rtlCol="0" anchor="ctr">
+            <a:noAutofit/>
+          </a:bodyPr>
+          <a:lstStyle/>
           <a:p>
             <a:pPr marL="0" indent="0" algn="ctr">
               <a:lnSpc>
-                <a:spcPct val="104000"/>
+                <a:spcPct val="100000"/>
               </a:lnSpc>
-              <a:spcBef>
-                <a:spcPts val="200"/>
-              </a:spcBef>
-              <a:buNone/>
-            </a:pPr>
-            <a:r>
-              <a:rPr lang="en-US" sz="1700" dirty="0">
-                <a:solidFill>
-                  <a:srgbClr val="000000"/>
-                </a:solidFill>
-                <a:latin typeface="Arial"/>
-                <a:cs typeface="Arial"/>
-              </a:rPr>
-              <a:t>Đề cương hoàn chỉnh</a:t>
+              <a:buNone/>
+            </a:pPr>
+            <a:r>
+              <a:rPr lang="en-US" sz="1400" dirty="0">
+                <a:solidFill>
+                  <a:srgbClr val="8A99A3"/>
+                </a:solidFill>
+                <a:latin typeface="Arial"/>
+                <a:cs typeface="Arial"/>
+              </a:rPr>
+              <a:t>2:25</a:t>
+            </a:r>
+          </a:p>
+        </p:txBody>
+      </p:sp>
+      <p:sp>
+        <p:nvSpPr>
+          <p:cNvPr id="110" name="Box"/>
+          <p:cNvSpPr/>
+          <p:nvPr/>
+        </p:nvSpPr>
+        <p:spPr>
+          <a:xfrm>
+            <a:off x="11320780" y="2336320"/>
+            <a:ext cx="270764" cy="1554480"/>
+          </a:xfrm>
+          <a:prstGeom prst="rect">
+            <a:avLst/>
+          </a:prstGeom>
+          <a:solidFill>
+            <a:srgbClr val="8A99A3"/>
+          </a:solidFill>
+          <a:ln>
+            <a:noFill/>
+          </a:ln>
+        </p:spPr>
+        <p:txBody>
+          <a:bodyPr wrap="square" lIns="27432" tIns="27432" rIns="27432" bIns="27432" rtlCol="0" anchor="ctr">
+            <a:noAutofit/>
+          </a:bodyPr>
+          <a:lstStyle/>
+          <a:p>
+            <a:endParaRPr lang="en-US"/>
+          </a:p>
+        </p:txBody>
+      </p:sp>
+      <p:sp>
+        <p:nvSpPr>
+          <p:cNvPr id="111" name="Text"/>
+          <p:cNvSpPr/>
+          <p:nvPr/>
+        </p:nvSpPr>
+        <p:spPr>
+          <a:xfrm>
+            <a:off x="11216640" y="3982240"/>
+            <a:ext cx="731520" cy="365760"/>
+          </a:xfrm>
+          <a:prstGeom prst="rect">
+            <a:avLst/>
+          </a:prstGeom>
+          <a:noFill/>
+          <a:ln>
+            <a:noFill/>
+          </a:ln>
+        </p:spPr>
+        <p:txBody>
+          <a:bodyPr wrap="square" lIns="54864" tIns="54864" rIns="54864" bIns="54864" rtlCol="0" anchor="ctr">
+            <a:noAutofit/>
+          </a:bodyPr>
+          <a:lstStyle/>
+          <a:p>
+            <a:pPr marL="0" indent="0" algn="ctr">
+              <a:lnSpc>
+                <a:spcPct val="100000"/>
+              </a:lnSpc>
+              <a:buNone/>
+            </a:pPr>
+            <a:r>
+              <a:rPr lang="en-US" sz="1400" dirty="0">
+                <a:solidFill>
+                  <a:srgbClr val="8A99A3"/>
+                </a:solidFill>
+                <a:latin typeface="Arial"/>
+                <a:cs typeface="Arial"/>
+              </a:rPr>
+              <a:t>3:00</a:t>
+            </a:r>
+          </a:p>
+        </p:txBody>
+      </p:sp>
+      <p:sp>
+        <p:nvSpPr>
+          <p:cNvPr id="112" name="Text"/>
+          <p:cNvSpPr/>
+          <p:nvPr/>
+        </p:nvSpPr>
+        <p:spPr>
+          <a:xfrm>
+            <a:off x="10165080" y="1879120"/>
+            <a:ext cx="1463040" cy="365760"/>
+          </a:xfrm>
+          <a:prstGeom prst="rect">
+            <a:avLst/>
+          </a:prstGeom>
+          <a:noFill/>
+          <a:ln>
+            <a:noFill/>
+          </a:ln>
+        </p:spPr>
+        <p:txBody>
+          <a:bodyPr wrap="square" lIns="54864" tIns="54864" rIns="54864" bIns="54864" rtlCol="0" anchor="ctr">
+            <a:noAutofit/>
+          </a:bodyPr>
+          <a:lstStyle/>
+          <a:p>
+            <a:pPr marL="0" indent="0" algn="r">
+              <a:lnSpc>
+                <a:spcPct val="100000"/>
+              </a:lnSpc>
+              <a:buNone/>
+            </a:pPr>
+            <a:r>
+              <a:rPr lang="en-US" sz="1400" dirty="0">
+                <a:solidFill>
+                  <a:srgbClr val="8A99A3"/>
+                </a:solidFill>
+                <a:latin typeface="Arial"/>
+                <a:cs typeface="Arial"/>
+              </a:rPr>
+              <a:t>Tổng kết</a:t>
             </a:r>
           </a:p>
         </p:txBody>
@@ -47724,7 +47432,7 @@
                 <a:latin typeface="Arial"/>
                 <a:cs typeface="Arial"/>
               </a:rPr>
-              <a:t>Câu hỏi của riêng bạn, một mẫu đề cương, mỗi hai tuần một phần.</a:t>
+              <a:t>Cứ 20 phút kiểm tra mức hiểu một lần. Slide bổ sung chỉ dùng khi còn thời gian.</a:t>
             </a:r>
           </a:p>
         </p:txBody>
@@ -47892,7 +47600,7 @@
                 <a:latin typeface="Arial"/>
                 <a:cs typeface="Arial"/>
               </a:rPr>
-              <a:t>Chào mừng: giới thiệu bản thân</a:t>
+              <a:t>Viết đề cương của bạn từng phần một</a:t>
             </a:r>
           </a:p>
         </p:txBody>
@@ -47927,17 +47635,19 @@
       </p:sp>
       <p:sp>
         <p:nvSpPr>
-          <p:cNvPr id="50" name="Banner"/>
-          <p:cNvSpPr/>
-          <p:nvPr/>
-        </p:nvSpPr>
-        <p:spPr>
-          <a:xfrm>
-            <a:off x="457200" y="1120000"/>
-            <a:ext cx="11277600" cy="470000"/>
-          </a:xfrm>
-          <a:prstGeom prst="rect">
-            <a:avLst/>
+          <p:cNvPr id="80" name="Step"/>
+          <p:cNvSpPr/>
+          <p:nvPr/>
+        </p:nvSpPr>
+        <p:spPr>
+          <a:xfrm>
+            <a:off x="457200" y="1220000"/>
+            <a:ext cx="2303520" cy="760000"/>
+          </a:xfrm>
+          <a:prstGeom prst="homePlate">
+            <a:avLst>
+              <a:gd name="adj" fmla="val 28000"/>
+            </a:avLst>
           </a:prstGeom>
           <a:solidFill>
             <a:srgbClr val="0D7377"/>
@@ -47947,166 +47657,40 @@
           </a:ln>
         </p:spPr>
         <p:txBody>
-          <a:bodyPr wrap="square" lIns="182880" tIns="45720" rIns="182880" bIns="45720" rtlCol="0" anchor="ctr">
+          <a:bodyPr wrap="square" lIns="200000" tIns="45720" rIns="200000" bIns="45720" rtlCol="0" anchor="ctr">
             <a:normAutofit/>
           </a:bodyPr>
           <a:lstStyle/>
           <a:p>
-            <a:pPr marL="0" indent="0" algn="l">
-              <a:buNone/>
-            </a:pPr>
-            <a:r>
-              <a:rPr lang="en-US" sz="1500" b="1" dirty="0">
+            <a:pPr marL="0" indent="0" algn="ctr">
+              <a:buNone/>
+            </a:pPr>
+            <a:r>
+              <a:rPr lang="en-US" sz="1400" b="1" dirty="0">
                 <a:solidFill>
                   <a:srgbClr val="FFFFFF"/>
                 </a:solidFill>
                 <a:latin typeface="Arial"/>
                 <a:cs typeface="Arial"/>
               </a:rPr>
-              <a:t>CẢ LỚP CÙNG LÀM   |   6 phút</a:t>
-            </a:r>
-          </a:p>
-        </p:txBody>
-      </p:sp>
-      <p:sp>
-        <p:nvSpPr>
-          <p:cNvPr id="51" name="Steps"/>
-          <p:cNvSpPr txBox="1"/>
-          <p:nvPr/>
-        </p:nvSpPr>
-        <p:spPr>
-          <a:xfrm>
-            <a:off x="457200" y="1720000"/>
-            <a:ext cx="6766560" cy="3510000"/>
+              <a:t>Phần 1</a:t>
+            </a:r>
+          </a:p>
+        </p:txBody>
+      </p:sp>
+      <p:sp>
+        <p:nvSpPr>
+          <p:cNvPr id="81" name="StepText"/>
+          <p:cNvSpPr/>
+          <p:nvPr/>
+        </p:nvSpPr>
+        <p:spPr>
+          <a:xfrm>
+            <a:off x="497200" y="2140000"/>
+            <a:ext cx="2163520" cy="1463180"/>
           </a:xfrm>
           <a:prstGeom prst="rect">
             <a:avLst/>
-          </a:prstGeom>
-          <a:noFill/>
-          <a:ln>
-            <a:noFill/>
-          </a:ln>
-        </p:spPr>
-        <p:txBody>
-          <a:bodyPr wrap="square" lIns="91440" tIns="45720" rIns="91440" bIns="45720" rtlCol="0" anchor="t"/>
-          <a:lstStyle/>
-          <a:p>
-            <a:pPr marL="380000" indent="-380000" algn="l">
-              <a:lnSpc>
-                <a:spcPct val="104000"/>
-              </a:lnSpc>
-              <a:spcBef>
-                <a:spcPts val="450"/>
-              </a:spcBef>
-              <a:buClr>
-                <a:srgbClr val="0D7377"/>
-              </a:buClr>
-              <a:buFont typeface="Arial"/>
-              <a:buChar char="•"/>
-            </a:pPr>
-            <a:r>
-              <a:rPr lang="en-US" sz="1650" dirty="0">
-                <a:solidFill>
-                  <a:srgbClr val="000000"/>
-                </a:solidFill>
-                <a:latin typeface="Arial"/>
-                <a:cs typeface="Arial"/>
-              </a:rPr>
-              <a:t>Gõ vào chat: tên, khoa và nghề nghiệp của bạn</a:t>
-            </a:r>
-          </a:p>
-          <a:p>
-            <a:pPr marL="380000" indent="-380000" algn="l">
-              <a:lnSpc>
-                <a:spcPct val="104000"/>
-              </a:lnSpc>
-              <a:spcBef>
-                <a:spcPts val="450"/>
-              </a:spcBef>
-              <a:buClr>
-                <a:srgbClr val="0D7377"/>
-              </a:buClr>
-              <a:buFont typeface="Arial"/>
-              <a:buChar char="•"/>
-            </a:pPr>
-            <a:r>
-              <a:rPr lang="en-US" sz="1650" dirty="0">
-                <a:solidFill>
-                  <a:srgbClr val="000000"/>
-                </a:solidFill>
-                <a:latin typeface="Arial"/>
-                <a:cs typeface="Arial"/>
-              </a:rPr>
-              <a:t>Thêm một câu hỏi bạn mong nghiên cứu trả lời được cho khoa mình</a:t>
-            </a:r>
-          </a:p>
-          <a:p>
-            <a:pPr marL="380000" indent="-380000" algn="l">
-              <a:lnSpc>
-                <a:spcPct val="104000"/>
-              </a:lnSpc>
-              <a:spcBef>
-                <a:spcPts val="450"/>
-              </a:spcBef>
-              <a:buClr>
-                <a:srgbClr val="0D7377"/>
-              </a:buClr>
-              <a:buFont typeface="Arial"/>
-              <a:buChar char="•"/>
-            </a:pPr>
-            <a:r>
-              <a:rPr lang="en-US" sz="1650" dirty="0">
-                <a:solidFill>
-                  <a:srgbClr val="000000"/>
-                </a:solidFill>
-                <a:latin typeface="Arial"/>
-                <a:cs typeface="Arial"/>
-              </a:rPr>
-              <a:t>Đọc tin nhắn của mọi người: nhiều câu là chủ đề nghiên cứu tiềm năng</a:t>
-            </a:r>
-          </a:p>
-          <a:p>
-            <a:pPr marL="380000" indent="-380000" algn="l">
-              <a:lnSpc>
-                <a:spcPct val="104000"/>
-              </a:lnSpc>
-              <a:spcBef>
-                <a:spcPts val="450"/>
-              </a:spcBef>
-              <a:buClr>
-                <a:srgbClr val="0D7377"/>
-              </a:buClr>
-              <a:buFont typeface="Arial"/>
-              <a:buChar char="•"/>
-            </a:pPr>
-            <a:r>
-              <a:rPr lang="en-US" sz="1650" dirty="0">
-                <a:solidFill>
-                  <a:srgbClr val="000000"/>
-                </a:solidFill>
-                <a:latin typeface="Arial"/>
-                <a:cs typeface="Arial"/>
-              </a:rPr>
-              <a:t>Sau đó vài bạn bật micro nói câu hỏi của mình</a:t>
-            </a:r>
-          </a:p>
-        </p:txBody>
-      </p:sp>
-      <p:sp>
-        <p:nvSpPr>
-          <p:cNvPr id="52" name="Side"/>
-          <p:cNvSpPr/>
-          <p:nvPr/>
-        </p:nvSpPr>
-        <p:spPr>
-          <a:xfrm>
-            <a:off x="7423760" y="1720000"/>
-            <a:ext cx="4311040" cy="1415555"/>
-          </a:xfrm>
-          <a:prstGeom prst="roundRect">
-            <a:avLst>
-              <a:gd name="adj" fmla="val 5000"/>
-            </a:avLst>
           </a:prstGeom>
           <a:solidFill>
             <a:srgbClr val="EAF2F5"/>
@@ -48116,44 +47700,29 @@
           </a:ln>
         </p:spPr>
         <p:txBody>
-          <a:bodyPr wrap="square" lIns="137160" tIns="91440" rIns="137160" bIns="91440" rtlCol="0" anchor="ctr">
+          <a:bodyPr wrap="square" lIns="110000" tIns="91440" rIns="110000" bIns="91440" rtlCol="0" anchor="ctr">
             <a:normAutofit/>
           </a:bodyPr>
           <a:lstStyle/>
-          <a:p>
-            <a:pPr marL="0" indent="0" algn="ctr">
-              <a:buNone/>
-            </a:pPr>
-            <a:r>
-              <a:rPr lang="en-US" sz="1600" b="1" dirty="0">
-                <a:solidFill>
-                  <a:srgbClr val="0D7377"/>
-                </a:solidFill>
-                <a:latin typeface="Arial"/>
-                <a:cs typeface="Arial"/>
-              </a:rPr>
-              <a:t>Tin nhắn mẫu</a:t>
-            </a:r>
-          </a:p>
           <a:p>
             <a:pPr marL="0" indent="0" algn="ctr">
               <a:lnSpc>
                 <a:spcPct val="104000"/>
               </a:lnSpc>
               <a:spcBef>
-                <a:spcPts val="300"/>
+                <a:spcPts val="200"/>
               </a:spcBef>
               <a:buNone/>
             </a:pPr>
             <a:r>
-              <a:rPr lang="en-US" sz="1500" dirty="0">
+              <a:rPr lang="en-US" sz="1700" b="1" dirty="0">
                 <a:solidFill>
                   <a:srgbClr val="000000"/>
                 </a:solidFill>
                 <a:latin typeface="Arial"/>
                 <a:cs typeface="Arial"/>
               </a:rPr>
-              <a:t>Lan, ICU, điều dưỡng</a:t>
+              <a:t>Buổi 1-2</a:t>
             </a:r>
           </a:p>
           <a:p>
@@ -48162,33 +47731,493 @@
                 <a:spcPct val="104000"/>
               </a:lnSpc>
               <a:spcBef>
-                <a:spcPts val="300"/>
+                <a:spcPts val="200"/>
               </a:spcBef>
               <a:buNone/>
             </a:pPr>
             <a:r>
-              <a:rPr lang="en-US" sz="1500" dirty="0">
+              <a:rPr lang="en-US" sz="1700" dirty="0">
                 <a:solidFill>
                   <a:srgbClr val="000000"/>
                 </a:solidFill>
                 <a:latin typeface="Arial"/>
                 <a:cs typeface="Arial"/>
               </a:rPr>
-              <a:t>'Người bệnh sốc nhiễm khuẩn có cần ít dịch hơn lượng mình đang truyền không?'</a:t>
-            </a:r>
-          </a:p>
-        </p:txBody>
-      </p:sp>
-      <p:sp>
-        <p:nvSpPr>
-          <p:cNvPr id="53" name="Deliverable"/>
-          <p:cNvSpPr/>
-          <p:nvPr/>
-        </p:nvSpPr>
-        <p:spPr>
-          <a:xfrm>
-            <a:off x="457200" y="5350000"/>
-            <a:ext cx="11277600" cy="600000"/>
+              <a:t>Câu hỏi, tổng quan, mục tiêu</a:t>
+            </a:r>
+          </a:p>
+        </p:txBody>
+      </p:sp>
+      <p:sp>
+        <p:nvSpPr>
+          <p:cNvPr id="82" name="Step"/>
+          <p:cNvSpPr/>
+          <p:nvPr/>
+        </p:nvSpPr>
+        <p:spPr>
+          <a:xfrm>
+            <a:off x="2700720" y="1220000"/>
+            <a:ext cx="2303520" cy="760000"/>
+          </a:xfrm>
+          <a:prstGeom prst="chevron">
+            <a:avLst>
+              <a:gd name="adj" fmla="val 28000"/>
+            </a:avLst>
+          </a:prstGeom>
+          <a:solidFill>
+            <a:srgbClr val="0B376C"/>
+          </a:solidFill>
+          <a:ln>
+            <a:noFill/>
+          </a:ln>
+        </p:spPr>
+        <p:txBody>
+          <a:bodyPr wrap="square" lIns="200000" tIns="45720" rIns="200000" bIns="45720" rtlCol="0" anchor="ctr">
+            <a:normAutofit/>
+          </a:bodyPr>
+          <a:lstStyle/>
+          <a:p>
+            <a:pPr marL="0" indent="0" algn="ctr">
+              <a:buNone/>
+            </a:pPr>
+            <a:r>
+              <a:rPr lang="en-US" sz="1400" b="1" dirty="0">
+                <a:solidFill>
+                  <a:srgbClr val="FFFFFF"/>
+                </a:solidFill>
+                <a:latin typeface="Arial"/>
+                <a:cs typeface="Arial"/>
+              </a:rPr>
+              <a:t>Phần 2</a:t>
+            </a:r>
+          </a:p>
+        </p:txBody>
+      </p:sp>
+      <p:sp>
+        <p:nvSpPr>
+          <p:cNvPr id="83" name="StepText"/>
+          <p:cNvSpPr/>
+          <p:nvPr/>
+        </p:nvSpPr>
+        <p:spPr>
+          <a:xfrm>
+            <a:off x="2740720" y="2140000"/>
+            <a:ext cx="2163520" cy="1463180"/>
+          </a:xfrm>
+          <a:prstGeom prst="rect">
+            <a:avLst/>
+          </a:prstGeom>
+          <a:solidFill>
+            <a:srgbClr val="EAF2F5"/>
+          </a:solidFill>
+          <a:ln>
+            <a:noFill/>
+          </a:ln>
+        </p:spPr>
+        <p:txBody>
+          <a:bodyPr wrap="square" lIns="110000" tIns="91440" rIns="110000" bIns="91440" rtlCol="0" anchor="ctr">
+            <a:normAutofit/>
+          </a:bodyPr>
+          <a:lstStyle/>
+          <a:p>
+            <a:pPr marL="0" indent="0" algn="ctr">
+              <a:lnSpc>
+                <a:spcPct val="104000"/>
+              </a:lnSpc>
+              <a:spcBef>
+                <a:spcPts val="200"/>
+              </a:spcBef>
+              <a:buNone/>
+            </a:pPr>
+            <a:r>
+              <a:rPr lang="en-US" sz="1700" b="1" dirty="0">
+                <a:solidFill>
+                  <a:srgbClr val="000000"/>
+                </a:solidFill>
+                <a:latin typeface="Arial"/>
+                <a:cs typeface="Arial"/>
+              </a:rPr>
+              <a:t>Buổi 3-4</a:t>
+            </a:r>
+          </a:p>
+          <a:p>
+            <a:pPr marL="0" indent="0" algn="ctr">
+              <a:lnSpc>
+                <a:spcPct val="104000"/>
+              </a:lnSpc>
+              <a:spcBef>
+                <a:spcPts val="200"/>
+              </a:spcBef>
+              <a:buNone/>
+            </a:pPr>
+            <a:r>
+              <a:rPr lang="en-US" sz="1700" dirty="0">
+                <a:solidFill>
+                  <a:srgbClr val="000000"/>
+                </a:solidFill>
+                <a:latin typeface="Arial"/>
+                <a:cs typeface="Arial"/>
+              </a:rPr>
+              <a:t>Thiết kế và đối tượng</a:t>
+            </a:r>
+          </a:p>
+        </p:txBody>
+      </p:sp>
+      <p:sp>
+        <p:nvSpPr>
+          <p:cNvPr id="84" name="Step"/>
+          <p:cNvSpPr/>
+          <p:nvPr/>
+        </p:nvSpPr>
+        <p:spPr>
+          <a:xfrm>
+            <a:off x="4944240" y="1220000"/>
+            <a:ext cx="2303520" cy="760000"/>
+          </a:xfrm>
+          <a:prstGeom prst="chevron">
+            <a:avLst>
+              <a:gd name="adj" fmla="val 28000"/>
+            </a:avLst>
+          </a:prstGeom>
+          <a:solidFill>
+            <a:srgbClr val="5FA39B"/>
+          </a:solidFill>
+          <a:ln>
+            <a:noFill/>
+          </a:ln>
+        </p:spPr>
+        <p:txBody>
+          <a:bodyPr wrap="square" lIns="200000" tIns="45720" rIns="200000" bIns="45720" rtlCol="0" anchor="ctr">
+            <a:normAutofit/>
+          </a:bodyPr>
+          <a:lstStyle/>
+          <a:p>
+            <a:pPr marL="0" indent="0" algn="ctr">
+              <a:buNone/>
+            </a:pPr>
+            <a:r>
+              <a:rPr lang="en-US" sz="1400" b="1" dirty="0">
+                <a:solidFill>
+                  <a:srgbClr val="FFFFFF"/>
+                </a:solidFill>
+                <a:latin typeface="Arial"/>
+                <a:cs typeface="Arial"/>
+              </a:rPr>
+              <a:t>Phần 3</a:t>
+            </a:r>
+          </a:p>
+        </p:txBody>
+      </p:sp>
+      <p:sp>
+        <p:nvSpPr>
+          <p:cNvPr id="85" name="StepText"/>
+          <p:cNvSpPr/>
+          <p:nvPr/>
+        </p:nvSpPr>
+        <p:spPr>
+          <a:xfrm>
+            <a:off x="4984240" y="2140000"/>
+            <a:ext cx="2163520" cy="1463180"/>
+          </a:xfrm>
+          <a:prstGeom prst="rect">
+            <a:avLst/>
+          </a:prstGeom>
+          <a:solidFill>
+            <a:srgbClr val="EAF2F5"/>
+          </a:solidFill>
+          <a:ln>
+            <a:noFill/>
+          </a:ln>
+        </p:spPr>
+        <p:txBody>
+          <a:bodyPr wrap="square" lIns="110000" tIns="91440" rIns="110000" bIns="91440" rtlCol="0" anchor="ctr">
+            <a:normAutofit/>
+          </a:bodyPr>
+          <a:lstStyle/>
+          <a:p>
+            <a:pPr marL="0" indent="0" algn="ctr">
+              <a:lnSpc>
+                <a:spcPct val="104000"/>
+              </a:lnSpc>
+              <a:spcBef>
+                <a:spcPts val="200"/>
+              </a:spcBef>
+              <a:buNone/>
+            </a:pPr>
+            <a:r>
+              <a:rPr lang="en-US" sz="1700" b="1" dirty="0">
+                <a:solidFill>
+                  <a:srgbClr val="000000"/>
+                </a:solidFill>
+                <a:latin typeface="Arial"/>
+                <a:cs typeface="Arial"/>
+              </a:rPr>
+              <a:t>Buổi 5-6</a:t>
+            </a:r>
+          </a:p>
+          <a:p>
+            <a:pPr marL="0" indent="0" algn="ctr">
+              <a:lnSpc>
+                <a:spcPct val="104000"/>
+              </a:lnSpc>
+              <a:spcBef>
+                <a:spcPts val="200"/>
+              </a:spcBef>
+              <a:buNone/>
+            </a:pPr>
+            <a:r>
+              <a:rPr lang="en-US" sz="1700" dirty="0">
+                <a:solidFill>
+                  <a:srgbClr val="000000"/>
+                </a:solidFill>
+                <a:latin typeface="Arial"/>
+                <a:cs typeface="Arial"/>
+              </a:rPr>
+              <a:t>Dữ liệu, cỡ mẫu, kế hoạch phân tích</a:t>
+            </a:r>
+          </a:p>
+        </p:txBody>
+      </p:sp>
+      <p:sp>
+        <p:nvSpPr>
+          <p:cNvPr id="86" name="Step"/>
+          <p:cNvSpPr/>
+          <p:nvPr/>
+        </p:nvSpPr>
+        <p:spPr>
+          <a:xfrm>
+            <a:off x="7187760" y="1220000"/>
+            <a:ext cx="2303520" cy="760000"/>
+          </a:xfrm>
+          <a:prstGeom prst="chevron">
+            <a:avLst>
+              <a:gd name="adj" fmla="val 28000"/>
+            </a:avLst>
+          </a:prstGeom>
+          <a:solidFill>
+            <a:srgbClr val="0070C0"/>
+          </a:solidFill>
+          <a:ln>
+            <a:noFill/>
+          </a:ln>
+        </p:spPr>
+        <p:txBody>
+          <a:bodyPr wrap="square" lIns="200000" tIns="45720" rIns="200000" bIns="45720" rtlCol="0" anchor="ctr">
+            <a:normAutofit/>
+          </a:bodyPr>
+          <a:lstStyle/>
+          <a:p>
+            <a:pPr marL="0" indent="0" algn="ctr">
+              <a:buNone/>
+            </a:pPr>
+            <a:r>
+              <a:rPr lang="en-US" sz="1400" b="1" dirty="0">
+                <a:solidFill>
+                  <a:srgbClr val="FFFFFF"/>
+                </a:solidFill>
+                <a:latin typeface="Arial"/>
+                <a:cs typeface="Arial"/>
+              </a:rPr>
+              <a:t>Phần 4</a:t>
+            </a:r>
+          </a:p>
+        </p:txBody>
+      </p:sp>
+      <p:sp>
+        <p:nvSpPr>
+          <p:cNvPr id="87" name="StepText"/>
+          <p:cNvSpPr/>
+          <p:nvPr/>
+        </p:nvSpPr>
+        <p:spPr>
+          <a:xfrm>
+            <a:off x="7227760" y="2140000"/>
+            <a:ext cx="2163520" cy="1463180"/>
+          </a:xfrm>
+          <a:prstGeom prst="rect">
+            <a:avLst/>
+          </a:prstGeom>
+          <a:solidFill>
+            <a:srgbClr val="EAF2F5"/>
+          </a:solidFill>
+          <a:ln>
+            <a:noFill/>
+          </a:ln>
+        </p:spPr>
+        <p:txBody>
+          <a:bodyPr wrap="square" lIns="110000" tIns="91440" rIns="110000" bIns="91440" rtlCol="0" anchor="ctr">
+            <a:normAutofit/>
+          </a:bodyPr>
+          <a:lstStyle/>
+          <a:p>
+            <a:pPr marL="0" indent="0" algn="ctr">
+              <a:lnSpc>
+                <a:spcPct val="104000"/>
+              </a:lnSpc>
+              <a:spcBef>
+                <a:spcPts val="200"/>
+              </a:spcBef>
+              <a:buNone/>
+            </a:pPr>
+            <a:r>
+              <a:rPr lang="en-US" sz="1700" b="1" dirty="0">
+                <a:solidFill>
+                  <a:srgbClr val="000000"/>
+                </a:solidFill>
+                <a:latin typeface="Arial"/>
+                <a:cs typeface="Arial"/>
+              </a:rPr>
+              <a:t>Buổi 7</a:t>
+            </a:r>
+          </a:p>
+          <a:p>
+            <a:pPr marL="0" indent="0" algn="ctr">
+              <a:lnSpc>
+                <a:spcPct val="104000"/>
+              </a:lnSpc>
+              <a:spcBef>
+                <a:spcPts val="200"/>
+              </a:spcBef>
+              <a:buNone/>
+            </a:pPr>
+            <a:r>
+              <a:rPr lang="en-US" sz="1700" dirty="0">
+                <a:solidFill>
+                  <a:srgbClr val="000000"/>
+                </a:solidFill>
+                <a:latin typeface="Arial"/>
+                <a:cs typeface="Arial"/>
+              </a:rPr>
+              <a:t>Đạo đức, tính khả thi, kế hoạch công bố</a:t>
+            </a:r>
+          </a:p>
+        </p:txBody>
+      </p:sp>
+      <p:sp>
+        <p:nvSpPr>
+          <p:cNvPr id="88" name="Step"/>
+          <p:cNvSpPr/>
+          <p:nvPr/>
+        </p:nvSpPr>
+        <p:spPr>
+          <a:xfrm>
+            <a:off x="9431280" y="1220000"/>
+            <a:ext cx="2303520" cy="760000"/>
+          </a:xfrm>
+          <a:prstGeom prst="chevron">
+            <a:avLst>
+              <a:gd name="adj" fmla="val 28000"/>
+            </a:avLst>
+          </a:prstGeom>
+          <a:solidFill>
+            <a:srgbClr val="055F56"/>
+          </a:solidFill>
+          <a:ln>
+            <a:noFill/>
+          </a:ln>
+        </p:spPr>
+        <p:txBody>
+          <a:bodyPr wrap="square" lIns="200000" tIns="45720" rIns="200000" bIns="45720" rtlCol="0" anchor="ctr">
+            <a:normAutofit/>
+          </a:bodyPr>
+          <a:lstStyle/>
+          <a:p>
+            <a:pPr marL="0" indent="0" algn="ctr">
+              <a:buNone/>
+            </a:pPr>
+            <a:r>
+              <a:rPr lang="en-US" sz="1400" b="1" dirty="0">
+                <a:solidFill>
+                  <a:srgbClr val="FFFFFF"/>
+                </a:solidFill>
+                <a:latin typeface="Arial"/>
+                <a:cs typeface="Arial"/>
+              </a:rPr>
+              <a:t>Nộp</a:t>
+            </a:r>
+          </a:p>
+        </p:txBody>
+      </p:sp>
+      <p:sp>
+        <p:nvSpPr>
+          <p:cNvPr id="89" name="StepText"/>
+          <p:cNvSpPr/>
+          <p:nvPr/>
+        </p:nvSpPr>
+        <p:spPr>
+          <a:xfrm>
+            <a:off x="9471280" y="2140000"/>
+            <a:ext cx="2163520" cy="1463180"/>
+          </a:xfrm>
+          <a:prstGeom prst="rect">
+            <a:avLst/>
+          </a:prstGeom>
+          <a:solidFill>
+            <a:srgbClr val="EAF2F5"/>
+          </a:solidFill>
+          <a:ln>
+            <a:noFill/>
+          </a:ln>
+        </p:spPr>
+        <p:txBody>
+          <a:bodyPr wrap="square" lIns="110000" tIns="91440" rIns="110000" bIns="91440" rtlCol="0" anchor="ctr">
+            <a:normAutofit/>
+          </a:bodyPr>
+          <a:lstStyle/>
+          <a:p>
+            <a:pPr marL="0" indent="0" algn="ctr">
+              <a:lnSpc>
+                <a:spcPct val="104000"/>
+              </a:lnSpc>
+              <a:spcBef>
+                <a:spcPts val="200"/>
+              </a:spcBef>
+              <a:buNone/>
+            </a:pPr>
+            <a:r>
+              <a:rPr lang="en-US" sz="1700" b="1" dirty="0">
+                <a:solidFill>
+                  <a:srgbClr val="000000"/>
+                </a:solidFill>
+                <a:latin typeface="Arial"/>
+                <a:cs typeface="Arial"/>
+              </a:rPr>
+              <a:t>Buổi 8</a:t>
+            </a:r>
+          </a:p>
+          <a:p>
+            <a:pPr marL="0" indent="0" algn="ctr">
+              <a:lnSpc>
+                <a:spcPct val="104000"/>
+              </a:lnSpc>
+              <a:spcBef>
+                <a:spcPts val="200"/>
+              </a:spcBef>
+              <a:buNone/>
+            </a:pPr>
+            <a:r>
+              <a:rPr lang="en-US" sz="1700" dirty="0">
+                <a:solidFill>
+                  <a:srgbClr val="000000"/>
+                </a:solidFill>
+                <a:latin typeface="Arial"/>
+                <a:cs typeface="Arial"/>
+              </a:rPr>
+              <a:t>Đề cương hoàn chỉnh</a:t>
+            </a:r>
+          </a:p>
+        </p:txBody>
+      </p:sp>
+      <p:sp>
+        <p:nvSpPr>
+          <p:cNvPr id="60" name="Takeaway"/>
+          <p:cNvSpPr/>
+          <p:nvPr/>
+        </p:nvSpPr>
+        <p:spPr>
+          <a:xfrm>
+            <a:off x="457200" y="5390000"/>
+            <a:ext cx="11277600" cy="560000"/>
           </a:xfrm>
           <a:prstGeom prst="roundRect">
             <a:avLst>
@@ -48196,12 +48225,10 @@
             </a:avLst>
           </a:prstGeom>
           <a:solidFill>
-            <a:srgbClr val="FFFFFF"/>
+            <a:srgbClr val="0D7377"/>
           </a:solidFill>
-          <a:ln w="15875">
-            <a:solidFill>
-              <a:srgbClr val="0D7377"/>
-            </a:solidFill>
+          <a:ln>
+            <a:noFill/>
           </a:ln>
         </p:spPr>
         <p:txBody>
@@ -48216,22 +48243,22 @@
             <a:r>
               <a:rPr lang="en-US" sz="1300" b="1" dirty="0">
                 <a:solidFill>
-                  <a:srgbClr val="0D7377"/>
-                </a:solidFill>
-                <a:latin typeface="Arial"/>
-                <a:cs typeface="Arial"/>
-              </a:rPr>
-              <a:t>SẢN PHẨM   </a:t>
-            </a:r>
-            <a:r>
-              <a:rPr lang="en-US" sz="1500" dirty="0">
-                <a:solidFill>
-                  <a:srgbClr val="000000"/>
-                </a:solidFill>
-                <a:latin typeface="Arial"/>
-                <a:cs typeface="Arial"/>
-              </a:rPr>
-              <a:t>Mỗi người một lời giới thiệu trong chat</a:t>
+                  <a:srgbClr val="FFFFFF"/>
+                </a:solidFill>
+                <a:latin typeface="Arial"/>
+                <a:cs typeface="Arial"/>
+              </a:rPr>
+              <a:t>THÔNG ĐIỆP CHÍNH   </a:t>
+            </a:r>
+            <a:r>
+              <a:rPr lang="en-US" sz="1550" dirty="0">
+                <a:solidFill>
+                  <a:srgbClr val="FFFFFF"/>
+                </a:solidFill>
+                <a:latin typeface="Arial"/>
+                <a:cs typeface="Arial"/>
+              </a:rPr>
+              <a:t>Câu hỏi của riêng bạn, một mẫu đề cương, mỗi hai tuần một phần.</a:t>
             </a:r>
           </a:p>
         </p:txBody>
